--- a/BeePackaging.pptx
+++ b/BeePackaging.pptx
@@ -7,6 +7,10 @@
   <p:sldIdLst>
     <p:sldId id="256" r:id="rId2"/>
     <p:sldId id="257" r:id="rId3"/>
+    <p:sldId id="259" r:id="rId4"/>
+    <p:sldId id="260" r:id="rId5"/>
+    <p:sldId id="258" r:id="rId6"/>
+    <p:sldId id="261" r:id="rId7"/>
   </p:sldIdLst>
   <p:sldSz cx="12192000" cy="6858000"/>
   <p:notesSz cx="6858000" cy="9144000"/>
@@ -116,8 +120,7 @@
 <file path=ppt/revisionInfo.xml><?xml version="1.0" encoding="utf-8"?>
 <p1510:revInfo xmlns:a="http://schemas.openxmlformats.org/drawingml/2006/main" xmlns:r="http://schemas.openxmlformats.org/officeDocument/2006/relationships" xmlns:p1510="http://schemas.microsoft.com/office/powerpoint/2015/10/main">
   <p1510:revLst>
-    <p1510:client id="{163298D9-606F-6416-F458-88F6BF1E14F8}" v="105" dt="2026-05-31T05:54:16.521"/>
-    <p1510:client id="{71C1FF9B-81EE-44BC-9E38-C74584397E38}" v="99" dt="2026-05-31T05:34:05.518"/>
+    <p1510:client id="{E38322EC-4B1C-1092-2443-98968540894A}" v="26" dt="2026-06-15T03:47:17.998"/>
   </p1510:revLst>
 </p1510:revInfo>
 </file>
@@ -126,35 +129,19 @@
 <pc:chgInfo xmlns:a="http://schemas.openxmlformats.org/drawingml/2006/main" xmlns:r="http://schemas.openxmlformats.org/officeDocument/2006/relationships" xmlns:ac="http://schemas.microsoft.com/office/drawing/2013/main/command" xmlns:pc="http://schemas.microsoft.com/office/powerpoint/2013/main/command">
   <pc:docChgLst>
     <pc:chgData name="gene uba" userId="a982167ce8c62198" providerId="Windows Live" clId="Web-{163298D9-606F-6416-F458-88F6BF1E14F8}"/>
-    <pc:docChg chg="modSld">
-      <pc:chgData name="gene uba" userId="a982167ce8c62198" providerId="Windows Live" clId="Web-{163298D9-606F-6416-F458-88F6BF1E14F8}" dt="2026-05-31T05:54:16.521" v="92" actId="1076"/>
+    <pc:docChg chg="addSld modSld">
+      <pc:chgData name="gene uba" userId="a982167ce8c62198" providerId="Windows Live" clId="Web-{163298D9-606F-6416-F458-88F6BF1E14F8}" dt="2026-06-03T03:44:54.447" v="576" actId="20577"/>
       <pc:docMkLst>
         <pc:docMk/>
       </pc:docMkLst>
       <pc:sldChg chg="addSp delSp modSp">
-        <pc:chgData name="gene uba" userId="a982167ce8c62198" providerId="Windows Live" clId="Web-{163298D9-606F-6416-F458-88F6BF1E14F8}" dt="2026-05-31T05:54:16.521" v="92" actId="1076"/>
+        <pc:chgData name="gene uba" userId="a982167ce8c62198" providerId="Windows Live" clId="Web-{163298D9-606F-6416-F458-88F6BF1E14F8}" dt="2026-05-31T16:13:13.975" v="355"/>
         <pc:sldMkLst>
           <pc:docMk/>
           <pc:sldMk cId="32981385" sldId="257"/>
         </pc:sldMkLst>
-        <pc:spChg chg="del">
-          <ac:chgData name="gene uba" userId="a982167ce8c62198" providerId="Windows Live" clId="Web-{163298D9-606F-6416-F458-88F6BF1E14F8}" dt="2026-05-31T05:44:05.362" v="49"/>
-          <ac:spMkLst>
-            <pc:docMk/>
-            <pc:sldMk cId="32981385" sldId="257"/>
-            <ac:spMk id="2" creationId="{BF9140A1-171D-EAF9-C149-B9EB416A7CE1}"/>
-          </ac:spMkLst>
-        </pc:spChg>
-        <pc:spChg chg="add del">
-          <ac:chgData name="gene uba" userId="a982167ce8c62198" providerId="Windows Live" clId="Web-{163298D9-606F-6416-F458-88F6BF1E14F8}" dt="2026-05-31T05:35:56.626" v="7"/>
-          <ac:spMkLst>
-            <pc:docMk/>
-            <pc:sldMk cId="32981385" sldId="257"/>
-            <ac:spMk id="3" creationId="{B19C72DB-D519-5674-4890-3293F1502A7C}"/>
-          </ac:spMkLst>
-        </pc:spChg>
         <pc:spChg chg="mod">
-          <ac:chgData name="gene uba" userId="a982167ce8c62198" providerId="Windows Live" clId="Web-{163298D9-606F-6416-F458-88F6BF1E14F8}" dt="2026-05-31T05:35:56.563" v="4" actId="1076"/>
+          <ac:chgData name="gene uba" userId="a982167ce8c62198" providerId="Windows Live" clId="Web-{163298D9-606F-6416-F458-88F6BF1E14F8}" dt="2026-05-31T16:13:13.959" v="346"/>
           <ac:spMkLst>
             <pc:docMk/>
             <pc:sldMk cId="32981385" sldId="257"/>
@@ -162,23 +149,39 @@
           </ac:spMkLst>
         </pc:spChg>
         <pc:spChg chg="mod">
-          <ac:chgData name="gene uba" userId="a982167ce8c62198" providerId="Windows Live" clId="Web-{163298D9-606F-6416-F458-88F6BF1E14F8}" dt="2026-05-31T05:39:56.611" v="16" actId="20577"/>
+          <ac:chgData name="gene uba" userId="a982167ce8c62198" providerId="Windows Live" clId="Web-{163298D9-606F-6416-F458-88F6BF1E14F8}" dt="2026-05-31T16:13:13.959" v="347"/>
           <ac:spMkLst>
             <pc:docMk/>
             <pc:sldMk cId="32981385" sldId="257"/>
             <ac:spMk id="6" creationId="{4A3D0A34-C71D-3A17-C7B9-5122209B2103}"/>
           </ac:spMkLst>
         </pc:spChg>
-        <pc:spChg chg="add del">
-          <ac:chgData name="gene uba" userId="a982167ce8c62198" providerId="Windows Live" clId="Web-{163298D9-606F-6416-F458-88F6BF1E14F8}" dt="2026-05-31T05:35:56.626" v="5"/>
+        <pc:spChg chg="mod">
+          <ac:chgData name="gene uba" userId="a982167ce8c62198" providerId="Windows Live" clId="Web-{163298D9-606F-6416-F458-88F6BF1E14F8}" dt="2026-05-31T16:13:13.959" v="344"/>
           <ac:spMkLst>
             <pc:docMk/>
             <pc:sldMk cId="32981385" sldId="257"/>
-            <ac:spMk id="8" creationId="{79795DDD-171A-A3D2-07F2-C64446ABEA1C}"/>
+            <ac:spMk id="11" creationId="{7CBC08F4-7179-1522-0142-FC2B79FD0FAE}"/>
           </ac:spMkLst>
         </pc:spChg>
         <pc:spChg chg="mod">
-          <ac:chgData name="gene uba" userId="a982167ce8c62198" providerId="Windows Live" clId="Web-{163298D9-606F-6416-F458-88F6BF1E14F8}" dt="2026-05-31T05:43:22.268" v="44" actId="1076"/>
+          <ac:chgData name="gene uba" userId="a982167ce8c62198" providerId="Windows Live" clId="Web-{163298D9-606F-6416-F458-88F6BF1E14F8}" dt="2026-05-31T16:13:13.959" v="345"/>
+          <ac:spMkLst>
+            <pc:docMk/>
+            <pc:sldMk cId="32981385" sldId="257"/>
+            <ac:spMk id="13" creationId="{6CC3EDB6-0A31-5785-B75C-71C3535EBC73}"/>
+          </ac:spMkLst>
+        </pc:spChg>
+        <pc:spChg chg="mod">
+          <ac:chgData name="gene uba" userId="a982167ce8c62198" providerId="Windows Live" clId="Web-{163298D9-606F-6416-F458-88F6BF1E14F8}" dt="2026-05-31T16:13:13.959" v="348"/>
+          <ac:spMkLst>
+            <pc:docMk/>
+            <pc:sldMk cId="32981385" sldId="257"/>
+            <ac:spMk id="19" creationId="{0D73B61B-D633-B8E9-4300-4AC7F89F52A0}"/>
+          </ac:spMkLst>
+        </pc:spChg>
+        <pc:spChg chg="mod">
+          <ac:chgData name="gene uba" userId="a982167ce8c62198" providerId="Windows Live" clId="Web-{163298D9-606F-6416-F458-88F6BF1E14F8}" dt="2026-05-31T16:13:13.975" v="349"/>
           <ac:spMkLst>
             <pc:docMk/>
             <pc:sldMk cId="32981385" sldId="257"/>
@@ -186,7 +189,15 @@
           </ac:spMkLst>
         </pc:spChg>
         <pc:spChg chg="mod">
-          <ac:chgData name="gene uba" userId="a982167ce8c62198" providerId="Windows Live" clId="Web-{163298D9-606F-6416-F458-88F6BF1E14F8}" dt="2026-05-31T05:53:54.350" v="84" actId="1076"/>
+          <ac:chgData name="gene uba" userId="a982167ce8c62198" providerId="Windows Live" clId="Web-{163298D9-606F-6416-F458-88F6BF1E14F8}" dt="2026-05-31T16:13:13.975" v="350"/>
+          <ac:spMkLst>
+            <pc:docMk/>
+            <pc:sldMk cId="32981385" sldId="257"/>
+            <ac:spMk id="24" creationId="{CE1F926C-6210-40A9-3277-F03B9FA6AF40}"/>
+          </ac:spMkLst>
+        </pc:spChg>
+        <pc:spChg chg="mod">
+          <ac:chgData name="gene uba" userId="a982167ce8c62198" providerId="Windows Live" clId="Web-{163298D9-606F-6416-F458-88F6BF1E14F8}" dt="2026-05-31T16:13:13.975" v="351"/>
           <ac:spMkLst>
             <pc:docMk/>
             <pc:sldMk cId="32981385" sldId="257"/>
@@ -194,11 +205,35 @@
           </ac:spMkLst>
         </pc:spChg>
         <pc:spChg chg="mod">
-          <ac:chgData name="gene uba" userId="a982167ce8c62198" providerId="Windows Live" clId="Web-{163298D9-606F-6416-F458-88F6BF1E14F8}" dt="2026-05-31T05:53:38.599" v="82" actId="20577"/>
+          <ac:chgData name="gene uba" userId="a982167ce8c62198" providerId="Windows Live" clId="Web-{163298D9-606F-6416-F458-88F6BF1E14F8}" dt="2026-05-31T16:13:13.975" v="352"/>
+          <ac:spMkLst>
+            <pc:docMk/>
+            <pc:sldMk cId="32981385" sldId="257"/>
+            <ac:spMk id="30" creationId="{AAB28018-A81A-676A-8308-7116B98237FA}"/>
+          </ac:spMkLst>
+        </pc:spChg>
+        <pc:spChg chg="mod">
+          <ac:chgData name="gene uba" userId="a982167ce8c62198" providerId="Windows Live" clId="Web-{163298D9-606F-6416-F458-88F6BF1E14F8}" dt="2026-05-31T16:13:13.975" v="353"/>
           <ac:spMkLst>
             <pc:docMk/>
             <pc:sldMk cId="32981385" sldId="257"/>
             <ac:spMk id="31" creationId="{9C7D0641-291E-034F-8E59-B046836E47E0}"/>
+          </ac:spMkLst>
+        </pc:spChg>
+        <pc:spChg chg="mod">
+          <ac:chgData name="gene uba" userId="a982167ce8c62198" providerId="Windows Live" clId="Web-{163298D9-606F-6416-F458-88F6BF1E14F8}" dt="2026-05-31T16:13:13.975" v="354"/>
+          <ac:spMkLst>
+            <pc:docMk/>
+            <pc:sldMk cId="32981385" sldId="257"/>
+            <ac:spMk id="34" creationId="{EF879839-5A4E-4E72-8A07-B65DB5726E52}"/>
+          </ac:spMkLst>
+        </pc:spChg>
+        <pc:spChg chg="mod">
+          <ac:chgData name="gene uba" userId="a982167ce8c62198" providerId="Windows Live" clId="Web-{163298D9-606F-6416-F458-88F6BF1E14F8}" dt="2026-05-31T16:13:13.975" v="355"/>
+          <ac:spMkLst>
+            <pc:docMk/>
+            <pc:sldMk cId="32981385" sldId="257"/>
+            <ac:spMk id="35" creationId="{5C19EC53-2F84-FEF7-F0C0-39CFCDE391E7}"/>
           </ac:spMkLst>
         </pc:spChg>
         <pc:grpChg chg="add del">
@@ -210,7 +245,7 @@
           </ac:grpSpMkLst>
         </pc:grpChg>
         <pc:grpChg chg="add mod">
-          <ac:chgData name="gene uba" userId="a982167ce8c62198" providerId="Windows Live" clId="Web-{163298D9-606F-6416-F458-88F6BF1E14F8}" dt="2026-05-31T05:54:16.428" v="87" actId="1076"/>
+          <ac:chgData name="gene uba" userId="a982167ce8c62198" providerId="Windows Live" clId="Web-{163298D9-606F-6416-F458-88F6BF1E14F8}" dt="2026-05-31T15:20:26.125" v="173" actId="1076"/>
           <ac:grpSpMkLst>
             <pc:docMk/>
             <pc:sldMk cId="32981385" sldId="257"/>
@@ -218,7 +253,7 @@
           </ac:grpSpMkLst>
         </pc:grpChg>
         <pc:grpChg chg="add mod">
-          <ac:chgData name="gene uba" userId="a982167ce8c62198" providerId="Windows Live" clId="Web-{163298D9-606F-6416-F458-88F6BF1E14F8}" dt="2026-05-31T05:54:16.459" v="88" actId="1076"/>
+          <ac:chgData name="gene uba" userId="a982167ce8c62198" providerId="Windows Live" clId="Web-{163298D9-606F-6416-F458-88F6BF1E14F8}" dt="2026-05-31T15:19:58.390" v="163" actId="1076"/>
           <ac:grpSpMkLst>
             <pc:docMk/>
             <pc:sldMk cId="32981385" sldId="257"/>
@@ -226,19 +261,11 @@
           </ac:grpSpMkLst>
         </pc:grpChg>
         <pc:grpChg chg="add mod">
-          <ac:chgData name="gene uba" userId="a982167ce8c62198" providerId="Windows Live" clId="Web-{163298D9-606F-6416-F458-88F6BF1E14F8}" dt="2026-05-31T05:54:16.475" v="89" actId="1076"/>
+          <ac:chgData name="gene uba" userId="a982167ce8c62198" providerId="Windows Live" clId="Web-{163298D9-606F-6416-F458-88F6BF1E14F8}" dt="2026-05-31T15:19:58.406" v="164" actId="1076"/>
           <ac:grpSpMkLst>
             <pc:docMk/>
             <pc:sldMk cId="32981385" sldId="257"/>
             <ac:grpSpMk id="16" creationId="{93C6226F-BF10-B1B1-DC01-26EC750ED358}"/>
-          </ac:grpSpMkLst>
-        </pc:grpChg>
-        <pc:grpChg chg="add del mod">
-          <ac:chgData name="gene uba" userId="a982167ce8c62198" providerId="Windows Live" clId="Web-{163298D9-606F-6416-F458-88F6BF1E14F8}" dt="2026-05-31T05:44:35.784" v="52"/>
-          <ac:grpSpMkLst>
-            <pc:docMk/>
-            <pc:sldMk cId="32981385" sldId="257"/>
-            <ac:grpSpMk id="21" creationId="{6AD928B7-7797-3003-E47A-93724DAD2202}"/>
           </ac:grpSpMkLst>
         </pc:grpChg>
         <pc:grpChg chg="mod topLvl">
@@ -249,16 +276,16 @@
             <ac:grpSpMk id="22" creationId="{E780C39B-DDB4-1889-D70C-1C235DBEE107}"/>
           </ac:grpSpMkLst>
         </pc:grpChg>
-        <pc:grpChg chg="add del mod">
-          <ac:chgData name="gene uba" userId="a982167ce8c62198" providerId="Windows Live" clId="Web-{163298D9-606F-6416-F458-88F6BF1E14F8}" dt="2026-05-31T05:47:22.270" v="71"/>
+        <pc:grpChg chg="mod topLvl">
+          <ac:chgData name="gene uba" userId="a982167ce8c62198" providerId="Windows Live" clId="Web-{163298D9-606F-6416-F458-88F6BF1E14F8}" dt="2026-05-31T15:19:58.453" v="168" actId="1076"/>
           <ac:grpSpMkLst>
             <pc:docMk/>
             <pc:sldMk cId="32981385" sldId="257"/>
-            <ac:grpSpMk id="27" creationId="{94CB1D49-3478-4455-92D8-8109936CBDA2}"/>
+            <ac:grpSpMk id="27" creationId="{C341DCA5-1690-1127-2A19-D65EEE902D56}"/>
           </ac:grpSpMkLst>
         </pc:grpChg>
         <pc:grpChg chg="mod topLvl">
-          <ac:chgData name="gene uba" userId="a982167ce8c62198" providerId="Windows Live" clId="Web-{163298D9-606F-6416-F458-88F6BF1E14F8}" dt="2026-05-31T05:54:16.521" v="91" actId="1076"/>
+          <ac:chgData name="gene uba" userId="a982167ce8c62198" providerId="Windows Live" clId="Web-{163298D9-606F-6416-F458-88F6BF1E14F8}" dt="2026-05-31T15:19:58.437" v="166" actId="1076"/>
           <ac:grpSpMkLst>
             <pc:docMk/>
             <pc:sldMk cId="32981385" sldId="257"/>
@@ -266,29 +293,29 @@
           </ac:grpSpMkLst>
         </pc:grpChg>
         <pc:grpChg chg="add mod">
-          <ac:chgData name="gene uba" userId="a982167ce8c62198" providerId="Windows Live" clId="Web-{163298D9-606F-6416-F458-88F6BF1E14F8}" dt="2026-05-31T05:54:16.506" v="90" actId="1076"/>
+          <ac:chgData name="gene uba" userId="a982167ce8c62198" providerId="Windows Live" clId="Web-{163298D9-606F-6416-F458-88F6BF1E14F8}" dt="2026-05-31T15:19:58.421" v="165" actId="1076"/>
           <ac:grpSpMkLst>
             <pc:docMk/>
             <pc:sldMk cId="32981385" sldId="257"/>
             <ac:grpSpMk id="32" creationId="{A6C02E42-44BC-5624-2D20-726B41949E93}"/>
           </ac:grpSpMkLst>
         </pc:grpChg>
-        <pc:picChg chg="del">
-          <ac:chgData name="gene uba" userId="a982167ce8c62198" providerId="Windows Live" clId="Web-{163298D9-606F-6416-F458-88F6BF1E14F8}" dt="2026-05-31T05:40:04.736" v="19"/>
-          <ac:picMkLst>
+        <pc:grpChg chg="add">
+          <ac:chgData name="gene uba" userId="a982167ce8c62198" providerId="Windows Live" clId="Web-{163298D9-606F-6416-F458-88F6BF1E14F8}" dt="2026-05-31T15:20:53.890" v="174"/>
+          <ac:grpSpMkLst>
             <pc:docMk/>
             <pc:sldMk cId="32981385" sldId="257"/>
-            <ac:picMk id="5" creationId="{325A67F7-B9EA-B9CB-4105-CB82C227584E}"/>
-          </ac:picMkLst>
-        </pc:picChg>
-        <pc:picChg chg="add del">
-          <ac:chgData name="gene uba" userId="a982167ce8c62198" providerId="Windows Live" clId="Web-{163298D9-606F-6416-F458-88F6BF1E14F8}" dt="2026-05-31T05:35:56.626" v="6"/>
-          <ac:picMkLst>
+            <ac:grpSpMk id="37" creationId="{20600F79-6ABB-2D18-D7E9-ED7D27B1DA66}"/>
+          </ac:grpSpMkLst>
+        </pc:grpChg>
+        <pc:grpChg chg="add mod">
+          <ac:chgData name="gene uba" userId="a982167ce8c62198" providerId="Windows Live" clId="Web-{163298D9-606F-6416-F458-88F6BF1E14F8}" dt="2026-05-31T16:13:12.100" v="343" actId="1076"/>
+          <ac:grpSpMkLst>
             <pc:docMk/>
             <pc:sldMk cId="32981385" sldId="257"/>
-            <ac:picMk id="7" creationId="{CA93AB5C-3823-5059-C5A6-A7441A506830}"/>
-          </ac:picMkLst>
-        </pc:picChg>
+            <ac:grpSpMk id="38" creationId="{DA760636-8FB3-A9FE-0A11-C5754EA504B8}"/>
+          </ac:grpSpMkLst>
+        </pc:grpChg>
         <pc:picChg chg="mod">
           <ac:chgData name="gene uba" userId="a982167ce8c62198" providerId="Windows Live" clId="Web-{163298D9-606F-6416-F458-88F6BF1E14F8}" dt="2026-05-31T05:38:15.736" v="11"/>
           <ac:picMkLst>
@@ -313,14 +340,6 @@
             <ac:picMk id="18" creationId="{904953DE-3FE2-08A3-09BD-84CAF261CBCE}"/>
           </ac:picMkLst>
         </pc:picChg>
-        <pc:picChg chg="del topLvl">
-          <ac:chgData name="gene uba" userId="a982167ce8c62198" providerId="Windows Live" clId="Web-{163298D9-606F-6416-F458-88F6BF1E14F8}" dt="2026-05-31T05:44:35.784" v="52"/>
-          <ac:picMkLst>
-            <pc:docMk/>
-            <pc:sldMk cId="32981385" sldId="257"/>
-            <ac:picMk id="23" creationId="{225C6E50-148F-A2FE-17D7-6A5220E75342}"/>
-          </ac:picMkLst>
-        </pc:picChg>
         <pc:picChg chg="add mod">
           <ac:chgData name="gene uba" userId="a982167ce8c62198" providerId="Windows Live" clId="Web-{163298D9-606F-6416-F458-88F6BF1E14F8}" dt="2026-05-31T05:54:00.412" v="86" actId="14100"/>
           <ac:picMkLst>
@@ -329,22 +348,754 @@
             <ac:picMk id="26" creationId="{4867DBA5-6E57-3D74-991D-FF8632FD0A51}"/>
           </ac:picMkLst>
         </pc:picChg>
-        <pc:picChg chg="del topLvl">
-          <ac:chgData name="gene uba" userId="a982167ce8c62198" providerId="Windows Live" clId="Web-{163298D9-606F-6416-F458-88F6BF1E14F8}" dt="2026-05-31T05:47:22.270" v="71"/>
-          <ac:picMkLst>
-            <pc:docMk/>
-            <pc:sldMk cId="32981385" sldId="257"/>
-            <ac:picMk id="29" creationId="{4FDF66AA-BE8F-D689-4A06-460D8A88C847}"/>
-          </ac:picMkLst>
-        </pc:picChg>
         <pc:picChg chg="add mod">
-          <ac:chgData name="gene uba" userId="a982167ce8c62198" providerId="Windows Live" clId="Web-{163298D9-606F-6416-F458-88F6BF1E14F8}" dt="2026-05-31T05:54:16.521" v="92" actId="1076"/>
+          <ac:chgData name="gene uba" userId="a982167ce8c62198" providerId="Windows Live" clId="Web-{163298D9-606F-6416-F458-88F6BF1E14F8}" dt="2026-05-31T15:19:58.453" v="167" actId="1076"/>
           <ac:picMkLst>
             <pc:docMk/>
             <pc:sldMk cId="32981385" sldId="257"/>
             <ac:picMk id="33" creationId="{61CA380C-59D9-F211-52AF-5306FDFE6BB7}"/>
           </ac:picMkLst>
         </pc:picChg>
+        <pc:picChg chg="add mod">
+          <ac:chgData name="gene uba" userId="a982167ce8c62198" providerId="Windows Live" clId="Web-{163298D9-606F-6416-F458-88F6BF1E14F8}" dt="2026-05-31T15:22:29.641" v="196" actId="1076"/>
+          <ac:picMkLst>
+            <pc:docMk/>
+            <pc:sldMk cId="32981385" sldId="257"/>
+            <ac:picMk id="36" creationId="{DA9E1118-9430-677F-768E-472EFBFEA1D2}"/>
+          </ac:picMkLst>
+        </pc:picChg>
+      </pc:sldChg>
+      <pc:sldChg chg="addSp delSp modSp add replId">
+        <pc:chgData name="gene uba" userId="a982167ce8c62198" providerId="Windows Live" clId="Web-{163298D9-606F-6416-F458-88F6BF1E14F8}" dt="2026-05-31T15:44:41.846" v="342" actId="1076"/>
+        <pc:sldMkLst>
+          <pc:docMk/>
+          <pc:sldMk cId="4271728726" sldId="258"/>
+        </pc:sldMkLst>
+        <pc:spChg chg="add mod">
+          <ac:chgData name="gene uba" userId="a982167ce8c62198" providerId="Windows Live" clId="Web-{163298D9-606F-6416-F458-88F6BF1E14F8}" dt="2026-05-31T15:26:56.658" v="266"/>
+          <ac:spMkLst>
+            <pc:docMk/>
+            <pc:sldMk cId="4271728726" sldId="258"/>
+            <ac:spMk id="2" creationId="{D8878446-1348-44C9-C0E8-630ABC7A2B03}"/>
+          </ac:spMkLst>
+        </pc:spChg>
+        <pc:spChg chg="add mod topLvl">
+          <ac:chgData name="gene uba" userId="a982167ce8c62198" providerId="Windows Live" clId="Web-{163298D9-606F-6416-F458-88F6BF1E14F8}" dt="2026-05-31T15:44:02.596" v="337" actId="1076"/>
+          <ac:spMkLst>
+            <pc:docMk/>
+            <pc:sldMk cId="4271728726" sldId="258"/>
+            <ac:spMk id="3" creationId="{2DF525E4-7924-3292-3833-8BC7E75927B2}"/>
+          </ac:spMkLst>
+        </pc:spChg>
+        <pc:spChg chg="topLvl">
+          <ac:chgData name="gene uba" userId="a982167ce8c62198" providerId="Windows Live" clId="Web-{163298D9-606F-6416-F458-88F6BF1E14F8}" dt="2026-05-31T15:43:45.721" v="334"/>
+          <ac:spMkLst>
+            <pc:docMk/>
+            <pc:sldMk cId="4271728726" sldId="258"/>
+            <ac:spMk id="4" creationId="{DCADFE39-734B-8C58-5CB7-2E18A5A57E28}"/>
+          </ac:spMkLst>
+        </pc:spChg>
+        <pc:spChg chg="add mod topLvl">
+          <ac:chgData name="gene uba" userId="a982167ce8c62198" providerId="Windows Live" clId="Web-{163298D9-606F-6416-F458-88F6BF1E14F8}" dt="2026-05-31T15:43:45.721" v="334"/>
+          <ac:spMkLst>
+            <pc:docMk/>
+            <pc:sldMk cId="4271728726" sldId="258"/>
+            <ac:spMk id="5" creationId="{1D44C4E4-139D-800D-C6B6-FB9C29EC6E43}"/>
+          </ac:spMkLst>
+        </pc:spChg>
+        <pc:spChg chg="add mod topLvl">
+          <ac:chgData name="gene uba" userId="a982167ce8c62198" providerId="Windows Live" clId="Web-{163298D9-606F-6416-F458-88F6BF1E14F8}" dt="2026-05-31T15:43:45.721" v="334"/>
+          <ac:spMkLst>
+            <pc:docMk/>
+            <pc:sldMk cId="4271728726" sldId="258"/>
+            <ac:spMk id="7" creationId="{6FFCE798-A5E5-1350-6487-32B95E7437B7}"/>
+          </ac:spMkLst>
+        </pc:spChg>
+        <pc:spChg chg="add mod topLvl">
+          <ac:chgData name="gene uba" userId="a982167ce8c62198" providerId="Windows Live" clId="Web-{163298D9-606F-6416-F458-88F6BF1E14F8}" dt="2026-05-31T15:43:45.721" v="334"/>
+          <ac:spMkLst>
+            <pc:docMk/>
+            <pc:sldMk cId="4271728726" sldId="258"/>
+            <ac:spMk id="8" creationId="{39B678F8-5C56-3ED0-8CE2-643972C5A679}"/>
+          </ac:spMkLst>
+        </pc:spChg>
+        <pc:spChg chg="topLvl">
+          <ac:chgData name="gene uba" userId="a982167ce8c62198" providerId="Windows Live" clId="Web-{163298D9-606F-6416-F458-88F6BF1E14F8}" dt="2026-05-31T15:30:19.581" v="305"/>
+          <ac:spMkLst>
+            <pc:docMk/>
+            <pc:sldMk cId="4271728726" sldId="258"/>
+            <ac:spMk id="11" creationId="{63F76FF4-52BE-3A27-54A8-5AD544B6379B}"/>
+          </ac:spMkLst>
+        </pc:spChg>
+        <pc:spChg chg="topLvl">
+          <ac:chgData name="gene uba" userId="a982167ce8c62198" providerId="Windows Live" clId="Web-{163298D9-606F-6416-F458-88F6BF1E14F8}" dt="2026-05-31T15:43:45.721" v="334"/>
+          <ac:spMkLst>
+            <pc:docMk/>
+            <pc:sldMk cId="4271728726" sldId="258"/>
+            <ac:spMk id="19" creationId="{562B2C87-BC7E-564C-6829-B4ABAE0ABB99}"/>
+          </ac:spMkLst>
+        </pc:spChg>
+        <pc:spChg chg="add mod topLvl">
+          <ac:chgData name="gene uba" userId="a982167ce8c62198" providerId="Windows Live" clId="Web-{163298D9-606F-6416-F458-88F6BF1E14F8}" dt="2026-05-31T15:43:45.721" v="334"/>
+          <ac:spMkLst>
+            <pc:docMk/>
+            <pc:sldMk cId="4271728726" sldId="258"/>
+            <ac:spMk id="21" creationId="{8429163A-A025-A018-CB48-434A1876C999}"/>
+          </ac:spMkLst>
+        </pc:spChg>
+        <pc:spChg chg="add mod">
+          <ac:chgData name="gene uba" userId="a982167ce8c62198" providerId="Windows Live" clId="Web-{163298D9-606F-6416-F458-88F6BF1E14F8}" dt="2026-05-31T15:31:02.768" v="318" actId="1076"/>
+          <ac:spMkLst>
+            <pc:docMk/>
+            <pc:sldMk cId="4271728726" sldId="258"/>
+            <ac:spMk id="23" creationId="{846FEA41-CB17-1B81-5561-FBE60012B509}"/>
+          </ac:spMkLst>
+        </pc:spChg>
+        <pc:spChg chg="topLvl">
+          <ac:chgData name="gene uba" userId="a982167ce8c62198" providerId="Windows Live" clId="Web-{163298D9-606F-6416-F458-88F6BF1E14F8}" dt="2026-05-31T15:30:26.659" v="308"/>
+          <ac:spMkLst>
+            <pc:docMk/>
+            <pc:sldMk cId="4271728726" sldId="258"/>
+            <ac:spMk id="24" creationId="{11CB6AD5-D022-6093-A338-009B1036FFBF}"/>
+          </ac:spMkLst>
+        </pc:spChg>
+        <pc:spChg chg="add mod topLvl">
+          <ac:chgData name="gene uba" userId="a982167ce8c62198" providerId="Windows Live" clId="Web-{163298D9-606F-6416-F458-88F6BF1E14F8}" dt="2026-05-31T15:43:45.721" v="334"/>
+          <ac:spMkLst>
+            <pc:docMk/>
+            <pc:sldMk cId="4271728726" sldId="258"/>
+            <ac:spMk id="29" creationId="{A801D334-2456-AA17-371B-01CBBD0CC624}"/>
+          </ac:spMkLst>
+        </pc:spChg>
+        <pc:spChg chg="mod">
+          <ac:chgData name="gene uba" userId="a982167ce8c62198" providerId="Windows Live" clId="Web-{163298D9-606F-6416-F458-88F6BF1E14F8}" dt="2026-05-31T15:29:47.580" v="294" actId="20577"/>
+          <ac:spMkLst>
+            <pc:docMk/>
+            <pc:sldMk cId="4271728726" sldId="258"/>
+            <ac:spMk id="31" creationId="{21E0F330-2447-ECEF-9C0E-5279EFFF6250}"/>
+          </ac:spMkLst>
+        </pc:spChg>
+        <pc:spChg chg="mod">
+          <ac:chgData name="gene uba" userId="a982167ce8c62198" providerId="Windows Live" clId="Web-{163298D9-606F-6416-F458-88F6BF1E14F8}" dt="2026-05-31T15:29:20.158" v="284" actId="20577"/>
+          <ac:spMkLst>
+            <pc:docMk/>
+            <pc:sldMk cId="4271728726" sldId="258"/>
+            <ac:spMk id="35" creationId="{C173C089-0C12-27A6-1915-769E5809A552}"/>
+          </ac:spMkLst>
+        </pc:spChg>
+        <pc:spChg chg="add mod topLvl">
+          <ac:chgData name="gene uba" userId="a982167ce8c62198" providerId="Windows Live" clId="Web-{163298D9-606F-6416-F458-88F6BF1E14F8}" dt="2026-05-31T15:43:45.721" v="334"/>
+          <ac:spMkLst>
+            <pc:docMk/>
+            <pc:sldMk cId="4271728726" sldId="258"/>
+            <ac:spMk id="38" creationId="{478A56C0-B4CD-BD61-1490-12318C2107E9}"/>
+          </ac:spMkLst>
+        </pc:spChg>
+        <pc:spChg chg="add mod topLvl">
+          <ac:chgData name="gene uba" userId="a982167ce8c62198" providerId="Windows Live" clId="Web-{163298D9-606F-6416-F458-88F6BF1E14F8}" dt="2026-05-31T15:43:45.721" v="334"/>
+          <ac:spMkLst>
+            <pc:docMk/>
+            <pc:sldMk cId="4271728726" sldId="258"/>
+            <ac:spMk id="39" creationId="{176EABB4-A9A1-8807-D446-7803E7C7282E}"/>
+          </ac:spMkLst>
+        </pc:spChg>
+        <pc:spChg chg="add mod">
+          <ac:chgData name="gene uba" userId="a982167ce8c62198" providerId="Windows Live" clId="Web-{163298D9-606F-6416-F458-88F6BF1E14F8}" dt="2026-05-31T15:31:19.659" v="326" actId="1076"/>
+          <ac:spMkLst>
+            <pc:docMk/>
+            <pc:sldMk cId="4271728726" sldId="258"/>
+            <ac:spMk id="40" creationId="{51C2A670-39EB-7399-17D3-CDE2EA1E44E0}"/>
+          </ac:spMkLst>
+        </pc:spChg>
+        <pc:grpChg chg="topLvl">
+          <ac:chgData name="gene uba" userId="a982167ce8c62198" providerId="Windows Live" clId="Web-{163298D9-606F-6416-F458-88F6BF1E14F8}" dt="2026-05-31T15:24:51.079" v="231"/>
+          <ac:grpSpMkLst>
+            <pc:docMk/>
+            <pc:sldMk cId="4271728726" sldId="258"/>
+            <ac:grpSpMk id="27" creationId="{BB7FB506-6387-F83B-CA1F-60B71C707043}"/>
+          </ac:grpSpMkLst>
+        </pc:grpChg>
+        <pc:grpChg chg="add mod">
+          <ac:chgData name="gene uba" userId="a982167ce8c62198" providerId="Windows Live" clId="Web-{163298D9-606F-6416-F458-88F6BF1E14F8}" dt="2026-05-31T15:44:41.846" v="342" actId="1076"/>
+          <ac:grpSpMkLst>
+            <pc:docMk/>
+            <pc:sldMk cId="4271728726" sldId="258"/>
+            <ac:grpSpMk id="42" creationId="{A6E0A54D-7090-23BC-B03F-71755E75F5BC}"/>
+          </ac:grpSpMkLst>
+        </pc:grpChg>
+      </pc:sldChg>
+      <pc:sldChg chg="addSp delSp modSp add replId">
+        <pc:chgData name="gene uba" userId="a982167ce8c62198" providerId="Windows Live" clId="Web-{163298D9-606F-6416-F458-88F6BF1E14F8}" dt="2026-06-01T05:46:53.735" v="455" actId="1076"/>
+        <pc:sldMkLst>
+          <pc:docMk/>
+          <pc:sldMk cId="1131077775" sldId="259"/>
+        </pc:sldMkLst>
+        <pc:spChg chg="mod">
+          <ac:chgData name="gene uba" userId="a982167ce8c62198" providerId="Windows Live" clId="Web-{163298D9-606F-6416-F458-88F6BF1E14F8}" dt="2026-06-01T05:46:09.344" v="451" actId="1076"/>
+          <ac:spMkLst>
+            <pc:docMk/>
+            <pc:sldMk cId="1131077775" sldId="259"/>
+            <ac:spMk id="13" creationId="{1EB470AF-7241-1A96-F82A-3B4301251FDE}"/>
+          </ac:spMkLst>
+        </pc:spChg>
+        <pc:spChg chg="mod">
+          <ac:chgData name="gene uba" userId="a982167ce8c62198" providerId="Windows Live" clId="Web-{163298D9-606F-6416-F458-88F6BF1E14F8}" dt="2026-06-01T05:39:02.593" v="419" actId="1076"/>
+          <ac:spMkLst>
+            <pc:docMk/>
+            <pc:sldMk cId="1131077775" sldId="259"/>
+            <ac:spMk id="24" creationId="{7DDFA975-CBDD-27DE-FE72-24085932D55B}"/>
+          </ac:spMkLst>
+        </pc:spChg>
+        <pc:spChg chg="mod">
+          <ac:chgData name="gene uba" userId="a982167ce8c62198" providerId="Windows Live" clId="Web-{163298D9-606F-6416-F458-88F6BF1E14F8}" dt="2026-06-01T05:45:56.172" v="447" actId="20577"/>
+          <ac:spMkLst>
+            <pc:docMk/>
+            <pc:sldMk cId="1131077775" sldId="259"/>
+            <ac:spMk id="25" creationId="{EC19A271-2CCC-24BD-FD86-1B81A049685A}"/>
+          </ac:spMkLst>
+        </pc:spChg>
+        <pc:spChg chg="mod">
+          <ac:chgData name="gene uba" userId="a982167ce8c62198" providerId="Windows Live" clId="Web-{163298D9-606F-6416-F458-88F6BF1E14F8}" dt="2026-06-01T05:42:19.250" v="430" actId="14100"/>
+          <ac:spMkLst>
+            <pc:docMk/>
+            <pc:sldMk cId="1131077775" sldId="259"/>
+            <ac:spMk id="30" creationId="{3DBBFDEA-3912-740A-1D91-FD35DA22E74B}"/>
+          </ac:spMkLst>
+        </pc:spChg>
+        <pc:spChg chg="mod">
+          <ac:chgData name="gene uba" userId="a982167ce8c62198" providerId="Windows Live" clId="Web-{163298D9-606F-6416-F458-88F6BF1E14F8}" dt="2026-06-01T05:46:17.954" v="453" actId="20577"/>
+          <ac:spMkLst>
+            <pc:docMk/>
+            <pc:sldMk cId="1131077775" sldId="259"/>
+            <ac:spMk id="31" creationId="{A302CC8E-25A8-EC68-8950-7F4C4076A53D}"/>
+          </ac:spMkLst>
+        </pc:spChg>
+        <pc:grpChg chg="add mod">
+          <ac:chgData name="gene uba" userId="a982167ce8c62198" providerId="Windows Live" clId="Web-{163298D9-606F-6416-F458-88F6BF1E14F8}" dt="2026-06-01T05:45:01.250" v="444" actId="1076"/>
+          <ac:grpSpMkLst>
+            <pc:docMk/>
+            <pc:sldMk cId="1131077775" sldId="259"/>
+            <ac:grpSpMk id="5" creationId="{8DA6E94A-3295-798A-E481-A6FF8413EAFA}"/>
+          </ac:grpSpMkLst>
+        </pc:grpChg>
+        <pc:grpChg chg="add mod">
+          <ac:chgData name="gene uba" userId="a982167ce8c62198" providerId="Windows Live" clId="Web-{163298D9-606F-6416-F458-88F6BF1E14F8}" dt="2026-06-01T05:46:49.641" v="454" actId="1076"/>
+          <ac:grpSpMkLst>
+            <pc:docMk/>
+            <pc:sldMk cId="1131077775" sldId="259"/>
+            <ac:grpSpMk id="7" creationId="{B6E3396B-1868-0A0B-DF42-2BDEC4DB2F5F}"/>
+          </ac:grpSpMkLst>
+        </pc:grpChg>
+        <pc:grpChg chg="mod topLvl">
+          <ac:chgData name="gene uba" userId="a982167ce8c62198" providerId="Windows Live" clId="Web-{163298D9-606F-6416-F458-88F6BF1E14F8}" dt="2026-06-01T05:42:54.265" v="434" actId="14100"/>
+          <ac:grpSpMkLst>
+            <pc:docMk/>
+            <pc:sldMk cId="1131077775" sldId="259"/>
+            <ac:grpSpMk id="10" creationId="{18E8F998-19E6-B433-1AB8-D622D1C90F6C}"/>
+          </ac:grpSpMkLst>
+        </pc:grpChg>
+        <pc:grpChg chg="mod topLvl">
+          <ac:chgData name="gene uba" userId="a982167ce8c62198" providerId="Windows Live" clId="Web-{163298D9-606F-6416-F458-88F6BF1E14F8}" dt="2026-06-01T05:46:53.735" v="455" actId="1076"/>
+          <ac:grpSpMkLst>
+            <pc:docMk/>
+            <pc:sldMk cId="1131077775" sldId="259"/>
+            <ac:grpSpMk id="16" creationId="{C8E8FFEF-0383-D2C5-9126-6091272BC1D6}"/>
+          </ac:grpSpMkLst>
+        </pc:grpChg>
+        <pc:grpChg chg="mod topLvl">
+          <ac:chgData name="gene uba" userId="a982167ce8c62198" providerId="Windows Live" clId="Web-{163298D9-606F-6416-F458-88F6BF1E14F8}" dt="2026-06-01T05:33:45.842" v="385" actId="688"/>
+          <ac:grpSpMkLst>
+            <pc:docMk/>
+            <pc:sldMk cId="1131077775" sldId="259"/>
+            <ac:grpSpMk id="28" creationId="{47F23B4B-7187-F260-7D5B-FB6FB253F15A}"/>
+          </ac:grpSpMkLst>
+        </pc:grpChg>
+        <pc:grpChg chg="mod topLvl">
+          <ac:chgData name="gene uba" userId="a982167ce8c62198" providerId="Windows Live" clId="Web-{163298D9-606F-6416-F458-88F6BF1E14F8}" dt="2026-06-01T05:44:43.985" v="442" actId="1076"/>
+          <ac:grpSpMkLst>
+            <pc:docMk/>
+            <pc:sldMk cId="1131077775" sldId="259"/>
+            <ac:grpSpMk id="32" creationId="{0D42AD94-7968-92C5-F06D-14B846F01273}"/>
+          </ac:grpSpMkLst>
+        </pc:grpChg>
+        <pc:grpChg chg="mod topLvl">
+          <ac:chgData name="gene uba" userId="a982167ce8c62198" providerId="Windows Live" clId="Web-{163298D9-606F-6416-F458-88F6BF1E14F8}" dt="2026-06-01T05:37:51.968" v="416" actId="1076"/>
+          <ac:grpSpMkLst>
+            <pc:docMk/>
+            <pc:sldMk cId="1131077775" sldId="259"/>
+            <ac:grpSpMk id="37" creationId="{20C9195B-CF39-6758-F409-D9ABCC840798}"/>
+          </ac:grpSpMkLst>
+        </pc:grpChg>
+        <pc:grpChg chg="add mod">
+          <ac:chgData name="gene uba" userId="a982167ce8c62198" providerId="Windows Live" clId="Web-{163298D9-606F-6416-F458-88F6BF1E14F8}" dt="2026-06-01T05:37:45.671" v="415" actId="1076"/>
+          <ac:grpSpMkLst>
+            <pc:docMk/>
+            <pc:sldMk cId="1131077775" sldId="259"/>
+            <ac:grpSpMk id="39" creationId="{C6A8697B-DEEE-6AD5-7283-B42A7118284E}"/>
+          </ac:grpSpMkLst>
+        </pc:grpChg>
+        <pc:grpChg chg="add mod">
+          <ac:chgData name="gene uba" userId="a982167ce8c62198" providerId="Windows Live" clId="Web-{163298D9-606F-6416-F458-88F6BF1E14F8}" dt="2026-06-01T05:37:57.327" v="418" actId="1076"/>
+          <ac:grpSpMkLst>
+            <pc:docMk/>
+            <pc:sldMk cId="1131077775" sldId="259"/>
+            <ac:grpSpMk id="44" creationId="{5BD0C2A4-6BED-6015-319F-D8D829E57F66}"/>
+          </ac:grpSpMkLst>
+        </pc:grpChg>
+        <pc:picChg chg="mod topLvl">
+          <ac:chgData name="gene uba" userId="a982167ce8c62198" providerId="Windows Live" clId="Web-{163298D9-606F-6416-F458-88F6BF1E14F8}" dt="2026-06-01T05:33:53.201" v="387" actId="1076"/>
+          <ac:picMkLst>
+            <pc:docMk/>
+            <pc:sldMk cId="1131077775" sldId="259"/>
+            <ac:picMk id="33" creationId="{1EF1254C-FCED-CC75-37CA-8D1DDE6EAD05}"/>
+          </ac:picMkLst>
+        </pc:picChg>
+      </pc:sldChg>
+      <pc:sldChg chg="addSp delSp modSp new">
+        <pc:chgData name="gene uba" userId="a982167ce8c62198" providerId="Windows Live" clId="Web-{163298D9-606F-6416-F458-88F6BF1E14F8}" dt="2026-06-03T03:44:54.447" v="576" actId="20577"/>
+        <pc:sldMkLst>
+          <pc:docMk/>
+          <pc:sldMk cId="3833315715" sldId="261"/>
+        </pc:sldMkLst>
+        <pc:spChg chg="add mod">
+          <ac:chgData name="gene uba" userId="a982167ce8c62198" providerId="Windows Live" clId="Web-{163298D9-606F-6416-F458-88F6BF1E14F8}" dt="2026-06-03T03:22:13.666" v="473"/>
+          <ac:spMkLst>
+            <pc:docMk/>
+            <pc:sldMk cId="3833315715" sldId="261"/>
+            <ac:spMk id="4" creationId="{3E3CD8B7-670D-E240-ECFA-D17E6D12E4CA}"/>
+          </ac:spMkLst>
+        </pc:spChg>
+        <pc:spChg chg="add mod">
+          <ac:chgData name="gene uba" userId="a982167ce8c62198" providerId="Windows Live" clId="Web-{163298D9-606F-6416-F458-88F6BF1E14F8}" dt="2026-06-03T03:29:24.244" v="493" actId="1076"/>
+          <ac:spMkLst>
+            <pc:docMk/>
+            <pc:sldMk cId="3833315715" sldId="261"/>
+            <ac:spMk id="6" creationId="{A8438A20-CEF6-B99A-69CC-4D1BADE6CAC9}"/>
+          </ac:spMkLst>
+        </pc:spChg>
+        <pc:spChg chg="add mod">
+          <ac:chgData name="gene uba" userId="a982167ce8c62198" providerId="Windows Live" clId="Web-{163298D9-606F-6416-F458-88F6BF1E14F8}" dt="2026-06-03T03:36:44.619" v="530" actId="14100"/>
+          <ac:spMkLst>
+            <pc:docMk/>
+            <pc:sldMk cId="3833315715" sldId="261"/>
+            <ac:spMk id="7" creationId="{5784DB67-EECB-735C-60F9-F839ABC1B907}"/>
+          </ac:spMkLst>
+        </pc:spChg>
+        <pc:spChg chg="add mod">
+          <ac:chgData name="gene uba" userId="a982167ce8c62198" providerId="Windows Live" clId="Web-{163298D9-606F-6416-F458-88F6BF1E14F8}" dt="2026-06-03T03:44:54.447" v="576" actId="20577"/>
+          <ac:spMkLst>
+            <pc:docMk/>
+            <pc:sldMk cId="3833315715" sldId="261"/>
+            <ac:spMk id="11" creationId="{926B520F-F7DF-E76D-EAC3-91185AC1A2FE}"/>
+          </ac:spMkLst>
+        </pc:spChg>
+        <pc:grpChg chg="add mod">
+          <ac:chgData name="gene uba" userId="a982167ce8c62198" providerId="Windows Live" clId="Web-{163298D9-606F-6416-F458-88F6BF1E14F8}" dt="2026-06-03T03:40:34.150" v="558" actId="1076"/>
+          <ac:grpSpMkLst>
+            <pc:docMk/>
+            <pc:sldMk cId="3833315715" sldId="261"/>
+            <ac:grpSpMk id="13" creationId="{FA38C0AC-A8F1-B9A0-90C7-29D13A23F99C}"/>
+          </ac:grpSpMkLst>
+        </pc:grpChg>
+        <pc:grpChg chg="add mod">
+          <ac:chgData name="gene uba" userId="a982167ce8c62198" providerId="Windows Live" clId="Web-{163298D9-606F-6416-F458-88F6BF1E14F8}" dt="2026-06-03T03:42:59.681" v="573" actId="1076"/>
+          <ac:grpSpMkLst>
+            <pc:docMk/>
+            <pc:sldMk cId="3833315715" sldId="261"/>
+            <ac:grpSpMk id="14" creationId="{59AE89E3-1407-392F-01B7-DDDD0FC409ED}"/>
+          </ac:grpSpMkLst>
+        </pc:grpChg>
+        <pc:picChg chg="add mod ord">
+          <ac:chgData name="gene uba" userId="a982167ce8c62198" providerId="Windows Live" clId="Web-{163298D9-606F-6416-F458-88F6BF1E14F8}" dt="2026-06-03T03:28:50.197" v="491"/>
+          <ac:picMkLst>
+            <pc:docMk/>
+            <pc:sldMk cId="3833315715" sldId="261"/>
+            <ac:picMk id="8" creationId="{214C6BEB-8D30-6DC7-A51C-2CA1A478FAB7}"/>
+          </ac:picMkLst>
+        </pc:picChg>
+        <pc:picChg chg="add mod ord">
+          <ac:chgData name="gene uba" userId="a982167ce8c62198" providerId="Windows Live" clId="Web-{163298D9-606F-6416-F458-88F6BF1E14F8}" dt="2026-06-03T03:39:25.588" v="552" actId="1076"/>
+          <ac:picMkLst>
+            <pc:docMk/>
+            <pc:sldMk cId="3833315715" sldId="261"/>
+            <ac:picMk id="9" creationId="{E58BF437-9A51-46A7-2880-9D1A44FA65D7}"/>
+          </ac:picMkLst>
+        </pc:picChg>
+        <pc:picChg chg="add mod">
+          <ac:chgData name="gene uba" userId="a982167ce8c62198" providerId="Windows Live" clId="Web-{163298D9-606F-6416-F458-88F6BF1E14F8}" dt="2026-06-03T03:40:09.947" v="556" actId="1076"/>
+          <ac:picMkLst>
+            <pc:docMk/>
+            <pc:sldMk cId="3833315715" sldId="261"/>
+            <ac:picMk id="10" creationId="{45A77CD0-A1CE-0466-DA7A-063145B2F410}"/>
+          </ac:picMkLst>
+        </pc:picChg>
+        <pc:picChg chg="add mod">
+          <ac:chgData name="gene uba" userId="a982167ce8c62198" providerId="Windows Live" clId="Web-{163298D9-606F-6416-F458-88F6BF1E14F8}" dt="2026-06-03T03:40:00.228" v="555" actId="688"/>
+          <ac:picMkLst>
+            <pc:docMk/>
+            <pc:sldMk cId="3833315715" sldId="261"/>
+            <ac:picMk id="12" creationId="{01151063-B692-8B32-CDF2-844551ED68E3}"/>
+          </ac:picMkLst>
+        </pc:picChg>
+        <pc:picChg chg="mod topLvl">
+          <ac:chgData name="gene uba" userId="a982167ce8c62198" providerId="Windows Live" clId="Web-{163298D9-606F-6416-F458-88F6BF1E14F8}" dt="2026-06-03T03:44:40.494" v="574" actId="1076"/>
+          <ac:picMkLst>
+            <pc:docMk/>
+            <pc:sldMk cId="3833315715" sldId="261"/>
+            <ac:picMk id="16" creationId="{B5D83002-6AD1-2A1B-FBCE-F0A6753794E1}"/>
+          </ac:picMkLst>
+        </pc:picChg>
+        <pc:picChg chg="mod topLvl">
+          <ac:chgData name="gene uba" userId="a982167ce8c62198" providerId="Windows Live" clId="Web-{163298D9-606F-6416-F458-88F6BF1E14F8}" dt="2026-06-03T03:44:40.494" v="575" actId="1076"/>
+          <ac:picMkLst>
+            <pc:docMk/>
+            <pc:sldMk cId="3833315715" sldId="261"/>
+            <ac:picMk id="17" creationId="{01B9C686-717C-B84D-446E-5970E6730BE7}"/>
+          </ac:picMkLst>
+        </pc:picChg>
+      </pc:sldChg>
+    </pc:docChg>
+  </pc:docChgLst>
+  <pc:docChgLst>
+    <pc:chgData name="gene uba" userId="a982167ce8c62198" providerId="Windows Live" clId="Web-{E38322EC-4B1C-1092-2443-98968540894A}"/>
+    <pc:docChg chg="modSld">
+      <pc:chgData name="gene uba" userId="a982167ce8c62198" providerId="Windows Live" clId="Web-{E38322EC-4B1C-1092-2443-98968540894A}" dt="2026-06-15T03:47:17.998" v="21" actId="1076"/>
+      <pc:docMkLst>
+        <pc:docMk/>
+      </pc:docMkLst>
+      <pc:sldChg chg="addSp delSp modSp">
+        <pc:chgData name="gene uba" userId="a982167ce8c62198" providerId="Windows Live" clId="Web-{E38322EC-4B1C-1092-2443-98968540894A}" dt="2026-06-15T03:47:17.998" v="21" actId="1076"/>
+        <pc:sldMkLst>
+          <pc:docMk/>
+          <pc:sldMk cId="3833315715" sldId="261"/>
+        </pc:sldMkLst>
+        <pc:spChg chg="mod">
+          <ac:chgData name="gene uba" userId="a982167ce8c62198" providerId="Windows Live" clId="Web-{E38322EC-4B1C-1092-2443-98968540894A}" dt="2026-06-15T03:43:34.842" v="7" actId="20577"/>
+          <ac:spMkLst>
+            <pc:docMk/>
+            <pc:sldMk cId="3833315715" sldId="261"/>
+            <ac:spMk id="4" creationId="{3E3CD8B7-670D-E240-ECFA-D17E6D12E4CA}"/>
+          </ac:spMkLst>
+        </pc:spChg>
+        <pc:spChg chg="add mod">
+          <ac:chgData name="gene uba" userId="a982167ce8c62198" providerId="Windows Live" clId="Web-{E38322EC-4B1C-1092-2443-98968540894A}" dt="2026-06-15T03:44:30.799" v="12" actId="14100"/>
+          <ac:spMkLst>
+            <pc:docMk/>
+            <pc:sldMk cId="3833315715" sldId="261"/>
+            <ac:spMk id="15" creationId="{887CE9B8-DB97-1E9B-DEA8-B573C13D72AB}"/>
+          </ac:spMkLst>
+        </pc:spChg>
+        <pc:picChg chg="add mod">
+          <ac:chgData name="gene uba" userId="a982167ce8c62198" providerId="Windows Live" clId="Web-{E38322EC-4B1C-1092-2443-98968540894A}" dt="2026-06-15T03:47:17.998" v="21" actId="1076"/>
+          <ac:picMkLst>
+            <pc:docMk/>
+            <pc:sldMk cId="3833315715" sldId="261"/>
+            <ac:picMk id="18" creationId="{F4A3C87E-E326-C247-B827-CA81BE0EE293}"/>
+          </ac:picMkLst>
+        </pc:picChg>
+        <pc:picChg chg="add del mod">
+          <ac:chgData name="gene uba" userId="a982167ce8c62198" providerId="Windows Live" clId="Web-{E38322EC-4B1C-1092-2443-98968540894A}" dt="2026-06-15T03:47:14.498" v="20"/>
+          <ac:picMkLst>
+            <pc:docMk/>
+            <pc:sldMk cId="3833315715" sldId="261"/>
+            <ac:picMk id="19" creationId="{AC1C3C9C-CB10-976B-72C9-9819B0ACC457}"/>
+          </ac:picMkLst>
+        </pc:picChg>
+        <pc:picChg chg="add mod">
+          <ac:chgData name="gene uba" userId="a982167ce8c62198" providerId="Windows Live" clId="Web-{E38322EC-4B1C-1092-2443-98968540894A}" dt="2026-06-15T03:47:09.295" v="18" actId="1076"/>
+          <ac:picMkLst>
+            <pc:docMk/>
+            <pc:sldMk cId="3833315715" sldId="261"/>
+            <ac:picMk id="20" creationId="{69F14013-A6CE-5899-71CF-96930C1860CB}"/>
+          </ac:picMkLst>
+        </pc:picChg>
+      </pc:sldChg>
+    </pc:docChg>
+  </pc:docChgLst>
+  <pc:docChgLst>
+    <pc:chgData name="gene uba" userId="a982167ce8c62198" providerId="Windows Live" clId="Web-{A5EE7216-F713-8040-B5C3-B7E41E548988}"/>
+    <pc:docChg chg="modSld">
+      <pc:chgData name="gene uba" userId="a982167ce8c62198" providerId="Windows Live" clId="Web-{A5EE7216-F713-8040-B5C3-B7E41E548988}" dt="2026-06-05T05:17:57.867" v="7" actId="1076"/>
+      <pc:docMkLst>
+        <pc:docMk/>
+      </pc:docMkLst>
+      <pc:sldChg chg="addSp modSp">
+        <pc:chgData name="gene uba" userId="a982167ce8c62198" providerId="Windows Live" clId="Web-{A5EE7216-F713-8040-B5C3-B7E41E548988}" dt="2026-06-05T05:17:57.867" v="7" actId="1076"/>
+        <pc:sldMkLst>
+          <pc:docMk/>
+          <pc:sldMk cId="3833315715" sldId="261"/>
+        </pc:sldMkLst>
+        <pc:picChg chg="add mod">
+          <ac:chgData name="gene uba" userId="a982167ce8c62198" providerId="Windows Live" clId="Web-{A5EE7216-F713-8040-B5C3-B7E41E548988}" dt="2026-06-05T05:17:23.616" v="1" actId="1076"/>
+          <ac:picMkLst>
+            <pc:docMk/>
+            <pc:sldMk cId="3833315715" sldId="261"/>
+            <ac:picMk id="3" creationId="{DF96F092-5E30-3257-7B52-1772595EDE59}"/>
+          </ac:picMkLst>
+        </pc:picChg>
+        <pc:picChg chg="add mod">
+          <ac:chgData name="gene uba" userId="a982167ce8c62198" providerId="Windows Live" clId="Web-{A5EE7216-F713-8040-B5C3-B7E41E548988}" dt="2026-06-05T05:17:57.867" v="7" actId="1076"/>
+          <ac:picMkLst>
+            <pc:docMk/>
+            <pc:sldMk cId="3833315715" sldId="261"/>
+            <ac:picMk id="5" creationId="{0C295006-4AAD-5B86-AD9C-BF8739A7DA02}"/>
+          </ac:picMkLst>
+        </pc:picChg>
+      </pc:sldChg>
+    </pc:docChg>
+  </pc:docChgLst>
+  <pc:docChgLst>
+    <pc:chgData name="gene uba" userId="a982167ce8c62198" providerId="Windows Live" clId="Web-{4A86A6A6-73D9-4E2A-4153-D2AC8748AE15}"/>
+    <pc:docChg chg="addSld modSld">
+      <pc:chgData name="gene uba" userId="a982167ce8c62198" providerId="Windows Live" clId="Web-{4A86A6A6-73D9-4E2A-4153-D2AC8748AE15}" dt="2026-06-01T17:33:01.310" v="103" actId="1076"/>
+      <pc:docMkLst>
+        <pc:docMk/>
+      </pc:docMkLst>
+      <pc:sldChg chg="addSp delSp modSp">
+        <pc:chgData name="gene uba" userId="a982167ce8c62198" providerId="Windows Live" clId="Web-{4A86A6A6-73D9-4E2A-4153-D2AC8748AE15}" dt="2026-06-01T17:27:13.948" v="62" actId="1076"/>
+        <pc:sldMkLst>
+          <pc:docMk/>
+          <pc:sldMk cId="1131077775" sldId="259"/>
+        </pc:sldMkLst>
+        <pc:spChg chg="mod topLvl">
+          <ac:chgData name="gene uba" userId="a982167ce8c62198" providerId="Windows Live" clId="Web-{4A86A6A6-73D9-4E2A-4153-D2AC8748AE15}" dt="2026-06-01T17:26:05.120" v="56" actId="14100"/>
+          <ac:spMkLst>
+            <pc:docMk/>
+            <pc:sldMk cId="1131077775" sldId="259"/>
+            <ac:spMk id="4" creationId="{80225327-ADC9-2C41-D236-5ABDE55BB034}"/>
+          </ac:spMkLst>
+        </pc:spChg>
+        <pc:spChg chg="mod topLvl">
+          <ac:chgData name="gene uba" userId="a982167ce8c62198" providerId="Windows Live" clId="Web-{4A86A6A6-73D9-4E2A-4153-D2AC8748AE15}" dt="2026-06-01T17:25:05.041" v="55"/>
+          <ac:spMkLst>
+            <pc:docMk/>
+            <pc:sldMk cId="1131077775" sldId="259"/>
+            <ac:spMk id="6" creationId="{138696EB-71D7-A673-EF0D-FB598979D11F}"/>
+          </ac:spMkLst>
+        </pc:spChg>
+        <pc:spChg chg="add mod">
+          <ac:chgData name="gene uba" userId="a982167ce8c62198" providerId="Windows Live" clId="Web-{4A86A6A6-73D9-4E2A-4153-D2AC8748AE15}" dt="2026-06-01T17:26:44.683" v="58" actId="1076"/>
+          <ac:spMkLst>
+            <pc:docMk/>
+            <pc:sldMk cId="1131077775" sldId="259"/>
+            <ac:spMk id="34" creationId="{7BA567F9-420F-B1D4-F833-DA9BD62C3FB1}"/>
+          </ac:spMkLst>
+        </pc:spChg>
+        <pc:spChg chg="add mod">
+          <ac:chgData name="gene uba" userId="a982167ce8c62198" providerId="Windows Live" clId="Web-{4A86A6A6-73D9-4E2A-4153-D2AC8748AE15}" dt="2026-06-01T17:26:58.808" v="60" actId="1076"/>
+          <ac:spMkLst>
+            <pc:docMk/>
+            <pc:sldMk cId="1131077775" sldId="259"/>
+            <ac:spMk id="49" creationId="{56893A03-487F-C827-1EBB-A2972F1E5404}"/>
+          </ac:spMkLst>
+        </pc:spChg>
+        <pc:grpChg chg="mod">
+          <ac:chgData name="gene uba" userId="a982167ce8c62198" providerId="Windows Live" clId="Web-{4A86A6A6-73D9-4E2A-4153-D2AC8748AE15}" dt="2026-06-01T17:27:06.964" v="61" actId="1076"/>
+          <ac:grpSpMkLst>
+            <pc:docMk/>
+            <pc:sldMk cId="1131077775" sldId="259"/>
+            <ac:grpSpMk id="5" creationId="{8DA6E94A-3295-798A-E481-A6FF8413EAFA}"/>
+          </ac:grpSpMkLst>
+        </pc:grpChg>
+        <pc:grpChg chg="mod">
+          <ac:chgData name="gene uba" userId="a982167ce8c62198" providerId="Windows Live" clId="Web-{4A86A6A6-73D9-4E2A-4153-D2AC8748AE15}" dt="2026-06-01T17:24:48.354" v="53" actId="1076"/>
+          <ac:grpSpMkLst>
+            <pc:docMk/>
+            <pc:sldMk cId="1131077775" sldId="259"/>
+            <ac:grpSpMk id="10" creationId="{18E8F998-19E6-B433-1AB8-D622D1C90F6C}"/>
+          </ac:grpSpMkLst>
+        </pc:grpChg>
+        <pc:grpChg chg="mod">
+          <ac:chgData name="gene uba" userId="a982167ce8c62198" providerId="Windows Live" clId="Web-{4A86A6A6-73D9-4E2A-4153-D2AC8748AE15}" dt="2026-06-01T15:41:35.959" v="6" actId="1076"/>
+          <ac:grpSpMkLst>
+            <pc:docMk/>
+            <pc:sldMk cId="1131077775" sldId="259"/>
+            <ac:grpSpMk id="16" creationId="{C8E8FFEF-0383-D2C5-9126-6091272BC1D6}"/>
+          </ac:grpSpMkLst>
+        </pc:grpChg>
+        <pc:grpChg chg="mod">
+          <ac:chgData name="gene uba" userId="a982167ce8c62198" providerId="Windows Live" clId="Web-{4A86A6A6-73D9-4E2A-4153-D2AC8748AE15}" dt="2026-06-01T17:27:13.948" v="62" actId="1076"/>
+          <ac:grpSpMkLst>
+            <pc:docMk/>
+            <pc:sldMk cId="1131077775" sldId="259"/>
+            <ac:grpSpMk id="32" creationId="{0D42AD94-7968-92C5-F06D-14B846F01273}"/>
+          </ac:grpSpMkLst>
+        </pc:grpChg>
+        <pc:picChg chg="topLvl">
+          <ac:chgData name="gene uba" userId="a982167ce8c62198" providerId="Windows Live" clId="Web-{4A86A6A6-73D9-4E2A-4153-D2AC8748AE15}" dt="2026-06-01T17:24:59.369" v="54"/>
+          <ac:picMkLst>
+            <pc:docMk/>
+            <pc:sldMk cId="1131077775" sldId="259"/>
+            <ac:picMk id="14" creationId="{B0714414-EEF2-C630-ABB6-A6117DEAE52D}"/>
+          </ac:picMkLst>
+        </pc:picChg>
+        <pc:cxnChg chg="add mod">
+          <ac:chgData name="gene uba" userId="a982167ce8c62198" providerId="Windows Live" clId="Web-{4A86A6A6-73D9-4E2A-4153-D2AC8748AE15}" dt="2026-06-01T16:26:30.135" v="45" actId="1076"/>
+          <ac:cxnSpMkLst>
+            <pc:docMk/>
+            <pc:sldMk cId="1131077775" sldId="259"/>
+            <ac:cxnSpMk id="2" creationId="{E235C4F8-9648-BB8F-2D1F-8FA89A70D144}"/>
+          </ac:cxnSpMkLst>
+        </pc:cxnChg>
+        <pc:cxnChg chg="add mod">
+          <ac:chgData name="gene uba" userId="a982167ce8c62198" providerId="Windows Live" clId="Web-{4A86A6A6-73D9-4E2A-4153-D2AC8748AE15}" dt="2026-06-01T16:09:43.203" v="34" actId="1076"/>
+          <ac:cxnSpMkLst>
+            <pc:docMk/>
+            <pc:sldMk cId="1131077775" sldId="259"/>
+            <ac:cxnSpMk id="3" creationId="{972A266F-C488-9BB0-993C-4264116EC151}"/>
+          </ac:cxnSpMkLst>
+        </pc:cxnChg>
+        <pc:cxnChg chg="add mod">
+          <ac:chgData name="gene uba" userId="a982167ce8c62198" providerId="Windows Live" clId="Web-{4A86A6A6-73D9-4E2A-4153-D2AC8748AE15}" dt="2026-06-01T15:44:36.756" v="26" actId="1076"/>
+          <ac:cxnSpMkLst>
+            <pc:docMk/>
+            <pc:sldMk cId="1131077775" sldId="259"/>
+            <ac:cxnSpMk id="27" creationId="{969C167B-FEFF-7C42-D2C4-4B6CB90E0A80}"/>
+          </ac:cxnSpMkLst>
+        </pc:cxnChg>
+        <pc:cxnChg chg="add mod">
+          <ac:chgData name="gene uba" userId="a982167ce8c62198" providerId="Windows Live" clId="Web-{4A86A6A6-73D9-4E2A-4153-D2AC8748AE15}" dt="2026-06-01T15:44:51.443" v="28" actId="1076"/>
+          <ac:cxnSpMkLst>
+            <pc:docMk/>
+            <pc:sldMk cId="1131077775" sldId="259"/>
+            <ac:cxnSpMk id="38" creationId="{9A27C2AB-2502-B466-CD90-CA551C4C76B0}"/>
+          </ac:cxnSpMkLst>
+        </pc:cxnChg>
+      </pc:sldChg>
+      <pc:sldChg chg="addSp delSp modSp new">
+        <pc:chgData name="gene uba" userId="a982167ce8c62198" providerId="Windows Live" clId="Web-{4A86A6A6-73D9-4E2A-4153-D2AC8748AE15}" dt="2026-06-01T17:33:01.310" v="103" actId="1076"/>
+        <pc:sldMkLst>
+          <pc:docMk/>
+          <pc:sldMk cId="2492009167" sldId="260"/>
+        </pc:sldMkLst>
+        <pc:spChg chg="add mod">
+          <ac:chgData name="gene uba" userId="a982167ce8c62198" providerId="Windows Live" clId="Web-{4A86A6A6-73D9-4E2A-4153-D2AC8748AE15}" dt="2026-06-01T17:32:54.654" v="102" actId="1076"/>
+          <ac:spMkLst>
+            <pc:docMk/>
+            <pc:sldMk cId="2492009167" sldId="260"/>
+            <ac:spMk id="5" creationId="{785C0D7F-3D22-9F37-9219-2914F6AFE7C2}"/>
+          </ac:spMkLst>
+        </pc:spChg>
+        <pc:spChg chg="add mod">
+          <ac:chgData name="gene uba" userId="a982167ce8c62198" providerId="Windows Live" clId="Web-{4A86A6A6-73D9-4E2A-4153-D2AC8748AE15}" dt="2026-06-01T17:33:01.310" v="103" actId="1076"/>
+          <ac:spMkLst>
+            <pc:docMk/>
+            <pc:sldMk cId="2492009167" sldId="260"/>
+            <ac:spMk id="7" creationId="{AEE8D26D-8B25-1147-0B55-704072A59355}"/>
+          </ac:spMkLst>
+        </pc:spChg>
+        <pc:spChg chg="add mod">
+          <ac:chgData name="gene uba" userId="a982167ce8c62198" providerId="Windows Live" clId="Web-{4A86A6A6-73D9-4E2A-4153-D2AC8748AE15}" dt="2026-06-01T17:28:15.339" v="71" actId="1076"/>
+          <ac:spMkLst>
+            <pc:docMk/>
+            <pc:sldMk cId="2492009167" sldId="260"/>
+            <ac:spMk id="9" creationId="{5C5B71C5-B077-037A-4F8E-43459DA11B9A}"/>
+          </ac:spMkLst>
+        </pc:spChg>
+        <pc:spChg chg="add mod">
+          <ac:chgData name="gene uba" userId="a982167ce8c62198" providerId="Windows Live" clId="Web-{4A86A6A6-73D9-4E2A-4153-D2AC8748AE15}" dt="2026-06-01T17:28:22.949" v="73" actId="1076"/>
+          <ac:spMkLst>
+            <pc:docMk/>
+            <pc:sldMk cId="2492009167" sldId="260"/>
+            <ac:spMk id="11" creationId="{7C0490ED-D8F7-3E87-C80C-1290FCE6FB22}"/>
+          </ac:spMkLst>
+        </pc:spChg>
+        <pc:spChg chg="add mod">
+          <ac:chgData name="gene uba" userId="a982167ce8c62198" providerId="Windows Live" clId="Web-{4A86A6A6-73D9-4E2A-4153-D2AC8748AE15}" dt="2026-06-01T17:28:38.808" v="76" actId="1076"/>
+          <ac:spMkLst>
+            <pc:docMk/>
+            <pc:sldMk cId="2492009167" sldId="260"/>
+            <ac:spMk id="13" creationId="{E5E617C3-BA1A-54B9-3008-7C63DEFDD533}"/>
+          </ac:spMkLst>
+        </pc:spChg>
+        <pc:spChg chg="add mod">
+          <ac:chgData name="gene uba" userId="a982167ce8c62198" providerId="Windows Live" clId="Web-{4A86A6A6-73D9-4E2A-4153-D2AC8748AE15}" dt="2026-06-01T17:28:50.324" v="79" actId="1076"/>
+          <ac:spMkLst>
+            <pc:docMk/>
+            <pc:sldMk cId="2492009167" sldId="260"/>
+            <ac:spMk id="15" creationId="{580597C0-5AF6-BF23-8CD8-CB2FFBDAE9B3}"/>
+          </ac:spMkLst>
+        </pc:spChg>
+        <pc:spChg chg="add mod">
+          <ac:chgData name="gene uba" userId="a982167ce8c62198" providerId="Windows Live" clId="Web-{4A86A6A6-73D9-4E2A-4153-D2AC8748AE15}" dt="2026-06-01T17:32:48.028" v="101" actId="1076"/>
+          <ac:spMkLst>
+            <pc:docMk/>
+            <pc:sldMk cId="2492009167" sldId="260"/>
+            <ac:spMk id="17" creationId="{070D4F6B-6FE4-F56E-46E2-D83E8CDCD6D4}"/>
+          </ac:spMkLst>
+        </pc:spChg>
+        <pc:spChg chg="add mod">
+          <ac:chgData name="gene uba" userId="a982167ce8c62198" providerId="Windows Live" clId="Web-{4A86A6A6-73D9-4E2A-4153-D2AC8748AE15}" dt="2026-06-01T17:29:08.074" v="83" actId="1076"/>
+          <ac:spMkLst>
+            <pc:docMk/>
+            <pc:sldMk cId="2492009167" sldId="260"/>
+            <ac:spMk id="19" creationId="{AC27933E-8461-1B1F-BE00-A18BAA569DEB}"/>
+          </ac:spMkLst>
+        </pc:spChg>
+        <pc:spChg chg="add mod">
+          <ac:chgData name="gene uba" userId="a982167ce8c62198" providerId="Windows Live" clId="Web-{4A86A6A6-73D9-4E2A-4153-D2AC8748AE15}" dt="2026-06-01T17:29:14.449" v="85" actId="1076"/>
+          <ac:spMkLst>
+            <pc:docMk/>
+            <pc:sldMk cId="2492009167" sldId="260"/>
+            <ac:spMk id="21" creationId="{718B0E42-7DAC-DF8E-D91A-D72D5DC8CEB8}"/>
+          </ac:spMkLst>
+        </pc:spChg>
+        <pc:spChg chg="add mod">
+          <ac:chgData name="gene uba" userId="a982167ce8c62198" providerId="Windows Live" clId="Web-{4A86A6A6-73D9-4E2A-4153-D2AC8748AE15}" dt="2026-06-01T17:29:19.730" v="87" actId="1076"/>
+          <ac:spMkLst>
+            <pc:docMk/>
+            <pc:sldMk cId="2492009167" sldId="260"/>
+            <ac:spMk id="23" creationId="{5031959F-5CA8-8623-FF22-0031C017DD3D}"/>
+          </ac:spMkLst>
+        </pc:spChg>
+        <pc:spChg chg="add mod">
+          <ac:chgData name="gene uba" userId="a982167ce8c62198" providerId="Windows Live" clId="Web-{4A86A6A6-73D9-4E2A-4153-D2AC8748AE15}" dt="2026-06-01T17:29:27.418" v="89" actId="1076"/>
+          <ac:spMkLst>
+            <pc:docMk/>
+            <pc:sldMk cId="2492009167" sldId="260"/>
+            <ac:spMk id="25" creationId="{D201A695-52ED-16CB-A993-52BB5CD5E73B}"/>
+          </ac:spMkLst>
+        </pc:spChg>
+        <pc:spChg chg="add mod">
+          <ac:chgData name="gene uba" userId="a982167ce8c62198" providerId="Windows Live" clId="Web-{4A86A6A6-73D9-4E2A-4153-D2AC8748AE15}" dt="2026-06-01T17:29:41.199" v="91" actId="1076"/>
+          <ac:spMkLst>
+            <pc:docMk/>
+            <pc:sldMk cId="2492009167" sldId="260"/>
+            <ac:spMk id="27" creationId="{072F9EBA-58DB-06A4-AC8D-D0762DBC964C}"/>
+          </ac:spMkLst>
+        </pc:spChg>
+        <pc:spChg chg="add mod">
+          <ac:chgData name="gene uba" userId="a982167ce8c62198" providerId="Windows Live" clId="Web-{4A86A6A6-73D9-4E2A-4153-D2AC8748AE15}" dt="2026-06-01T17:29:47.168" v="93" actId="1076"/>
+          <ac:spMkLst>
+            <pc:docMk/>
+            <pc:sldMk cId="2492009167" sldId="260"/>
+            <ac:spMk id="29" creationId="{714FD145-A8E5-7931-23BB-75C0AA240BE6}"/>
+          </ac:spMkLst>
+        </pc:spChg>
+        <pc:spChg chg="add mod">
+          <ac:chgData name="gene uba" userId="a982167ce8c62198" providerId="Windows Live" clId="Web-{4A86A6A6-73D9-4E2A-4153-D2AC8748AE15}" dt="2026-06-01T17:30:01.418" v="96" actId="1076"/>
+          <ac:spMkLst>
+            <pc:docMk/>
+            <pc:sldMk cId="2492009167" sldId="260"/>
+            <ac:spMk id="31" creationId="{CD734718-DF80-6CC0-645D-7D1380706632}"/>
+          </ac:spMkLst>
+        </pc:spChg>
+        <pc:spChg chg="add mod">
+          <ac:chgData name="gene uba" userId="a982167ce8c62198" providerId="Windows Live" clId="Web-{4A86A6A6-73D9-4E2A-4153-D2AC8748AE15}" dt="2026-06-01T17:31:44.606" v="98" actId="1076"/>
+          <ac:spMkLst>
+            <pc:docMk/>
+            <pc:sldMk cId="2492009167" sldId="260"/>
+            <ac:spMk id="33" creationId="{82FF784A-1EC5-3D7E-C0BB-BC77391AC403}"/>
+          </ac:spMkLst>
+        </pc:spChg>
+        <pc:spChg chg="add mod">
+          <ac:chgData name="gene uba" userId="a982167ce8c62198" providerId="Windows Live" clId="Web-{4A86A6A6-73D9-4E2A-4153-D2AC8748AE15}" dt="2026-06-01T17:32:34.982" v="100" actId="1076"/>
+          <ac:spMkLst>
+            <pc:docMk/>
+            <pc:sldMk cId="2492009167" sldId="260"/>
+            <ac:spMk id="35" creationId="{7FDAD090-C3D5-E45C-0896-63E2FA39633F}"/>
+          </ac:spMkLst>
+        </pc:spChg>
       </pc:sldChg>
     </pc:docChg>
   </pc:docChgLst>
@@ -482,7 +1233,7 @@
           <a:p>
             <a:fld id="{846CE7D5-CF57-46EF-B807-FDD0502418D4}" type="datetimeFigureOut">
               <a:rPr lang="en-US" smtClean="0"/>
-              <a:t>5/30/2026</a:t>
+              <a:t>6/14/2026</a:t>
             </a:fld>
             <a:endParaRPr lang="en-US"/>
           </a:p>
@@ -652,7 +1403,7 @@
           <a:p>
             <a:fld id="{846CE7D5-CF57-46EF-B807-FDD0502418D4}" type="datetimeFigureOut">
               <a:rPr lang="en-US" smtClean="0"/>
-              <a:t>5/30/2026</a:t>
+              <a:t>6/14/2026</a:t>
             </a:fld>
             <a:endParaRPr lang="en-US"/>
           </a:p>
@@ -832,7 +1583,7 @@
           <a:p>
             <a:fld id="{846CE7D5-CF57-46EF-B807-FDD0502418D4}" type="datetimeFigureOut">
               <a:rPr lang="en-US" smtClean="0"/>
-              <a:t>5/30/2026</a:t>
+              <a:t>6/14/2026</a:t>
             </a:fld>
             <a:endParaRPr lang="en-US"/>
           </a:p>
@@ -1002,7 +1753,7 @@
           <a:p>
             <a:fld id="{846CE7D5-CF57-46EF-B807-FDD0502418D4}" type="datetimeFigureOut">
               <a:rPr lang="en-US" smtClean="0"/>
-              <a:t>5/30/2026</a:t>
+              <a:t>6/14/2026</a:t>
             </a:fld>
             <a:endParaRPr lang="en-US"/>
           </a:p>
@@ -1248,7 +1999,7 @@
           <a:p>
             <a:fld id="{846CE7D5-CF57-46EF-B807-FDD0502418D4}" type="datetimeFigureOut">
               <a:rPr lang="en-US" smtClean="0"/>
-              <a:t>5/30/2026</a:t>
+              <a:t>6/14/2026</a:t>
             </a:fld>
             <a:endParaRPr lang="en-US"/>
           </a:p>
@@ -1480,7 +2231,7 @@
           <a:p>
             <a:fld id="{846CE7D5-CF57-46EF-B807-FDD0502418D4}" type="datetimeFigureOut">
               <a:rPr lang="en-US" smtClean="0"/>
-              <a:t>5/30/2026</a:t>
+              <a:t>6/14/2026</a:t>
             </a:fld>
             <a:endParaRPr lang="en-US"/>
           </a:p>
@@ -1847,7 +2598,7 @@
           <a:p>
             <a:fld id="{846CE7D5-CF57-46EF-B807-FDD0502418D4}" type="datetimeFigureOut">
               <a:rPr lang="en-US" smtClean="0"/>
-              <a:t>5/30/2026</a:t>
+              <a:t>6/14/2026</a:t>
             </a:fld>
             <a:endParaRPr lang="en-US"/>
           </a:p>
@@ -1965,7 +2716,7 @@
           <a:p>
             <a:fld id="{846CE7D5-CF57-46EF-B807-FDD0502418D4}" type="datetimeFigureOut">
               <a:rPr lang="en-US" smtClean="0"/>
-              <a:t>5/30/2026</a:t>
+              <a:t>6/14/2026</a:t>
             </a:fld>
             <a:endParaRPr lang="en-US"/>
           </a:p>
@@ -2060,7 +2811,7 @@
           <a:p>
             <a:fld id="{846CE7D5-CF57-46EF-B807-FDD0502418D4}" type="datetimeFigureOut">
               <a:rPr lang="en-US" smtClean="0"/>
-              <a:t>5/30/2026</a:t>
+              <a:t>6/14/2026</a:t>
             </a:fld>
             <a:endParaRPr lang="en-US"/>
           </a:p>
@@ -2337,7 +3088,7 @@
           <a:p>
             <a:fld id="{846CE7D5-CF57-46EF-B807-FDD0502418D4}" type="datetimeFigureOut">
               <a:rPr lang="en-US" smtClean="0"/>
-              <a:t>5/30/2026</a:t>
+              <a:t>6/14/2026</a:t>
             </a:fld>
             <a:endParaRPr lang="en-US"/>
           </a:p>
@@ -2594,7 +3345,7 @@
           <a:p>
             <a:fld id="{846CE7D5-CF57-46EF-B807-FDD0502418D4}" type="datetimeFigureOut">
               <a:rPr lang="en-US" smtClean="0"/>
-              <a:t>5/30/2026</a:t>
+              <a:t>6/14/2026</a:t>
             </a:fld>
             <a:endParaRPr lang="en-US"/>
           </a:p>
@@ -2807,7 +3558,7 @@
           <a:p>
             <a:fld id="{846CE7D5-CF57-46EF-B807-FDD0502418D4}" type="datetimeFigureOut">
               <a:rPr lang="en-US" smtClean="0"/>
-              <a:t>5/30/2026</a:t>
+              <a:t>6/14/2026</a:t>
             </a:fld>
             <a:endParaRPr lang="en-US"/>
           </a:p>
@@ -3285,10 +4036,10 @@
       </p:grpSpPr>
       <p:grpSp>
         <p:nvGrpSpPr>
-          <p:cNvPr id="10" name="Group 9">
+          <p:cNvPr id="38" name="Group 37">
             <a:extLst>
               <a:ext uri="{FF2B5EF4-FFF2-40B4-BE49-F238E27FC236}">
-                <a16:creationId xmlns:a16="http://schemas.microsoft.com/office/drawing/2014/main" id="{6D780A31-DC1D-0A71-5FA1-051C6E188AA8}"/>
+                <a16:creationId xmlns:a16="http://schemas.microsoft.com/office/drawing/2014/main" id="{DA760636-8FB3-A9FE-0A11-C5754EA504B8}"/>
               </a:ext>
             </a:extLst>
           </p:cNvPr>
@@ -3297,10 +4048,1544 @@
         </p:nvGrpSpPr>
         <p:grpSpPr>
           <a:xfrm>
-            <a:off x="4548002" y="2070617"/>
-            <a:ext cx="3094337" cy="2591241"/>
+            <a:off x="2009453" y="78781"/>
+            <a:ext cx="8225310" cy="6710184"/>
+            <a:chOff x="1800686" y="78781"/>
+            <a:chExt cx="8225310" cy="6710184"/>
+          </a:xfrm>
+        </p:grpSpPr>
+        <p:grpSp>
+          <p:nvGrpSpPr>
+            <p:cNvPr id="10" name="Group 9">
+              <a:extLst>
+                <a:ext uri="{FF2B5EF4-FFF2-40B4-BE49-F238E27FC236}">
+                  <a16:creationId xmlns:a16="http://schemas.microsoft.com/office/drawing/2014/main" id="{6D780A31-DC1D-0A71-5FA1-051C6E188AA8}"/>
+                </a:ext>
+              </a:extLst>
+            </p:cNvPr>
+            <p:cNvGrpSpPr/>
+            <p:nvPr/>
+          </p:nvGrpSpPr>
+          <p:grpSpPr>
+            <a:xfrm>
+              <a:off x="4370550" y="2790864"/>
+              <a:ext cx="3094337" cy="2591241"/>
+              <a:chOff x="2372789" y="2110700"/>
+              <a:chExt cx="3094337" cy="2591241"/>
+            </a:xfrm>
+          </p:grpSpPr>
+          <p:sp>
+            <p:nvSpPr>
+              <p:cNvPr id="11" name="Hexagon 10">
+                <a:extLst>
+                  <a:ext uri="{FF2B5EF4-FFF2-40B4-BE49-F238E27FC236}">
+                    <a16:creationId xmlns:a16="http://schemas.microsoft.com/office/drawing/2014/main" id="{7CBC08F4-7179-1522-0142-FC2B79FD0FAE}"/>
+                  </a:ext>
+                </a:extLst>
+              </p:cNvPr>
+              <p:cNvSpPr/>
+              <p:nvPr/>
+            </p:nvSpPr>
+            <p:spPr>
+              <a:xfrm>
+                <a:off x="2372789" y="2110700"/>
+                <a:ext cx="3094337" cy="2591241"/>
+              </a:xfrm>
+              <a:prstGeom prst="hexagon">
+                <a:avLst/>
+              </a:prstGeom>
+              <a:noFill/>
+            </p:spPr>
+            <p:style>
+              <a:lnRef idx="2">
+                <a:schemeClr val="accent1">
+                  <a:shade val="15000"/>
+                </a:schemeClr>
+              </a:lnRef>
+              <a:fillRef idx="1">
+                <a:schemeClr val="accent1"/>
+              </a:fillRef>
+              <a:effectRef idx="0">
+                <a:schemeClr val="accent1"/>
+              </a:effectRef>
+              <a:fontRef idx="minor">
+                <a:schemeClr val="lt1"/>
+              </a:fontRef>
+            </p:style>
+            <p:txBody>
+              <a:bodyPr rot="0" spcFirstLastPara="0" vertOverflow="overflow" horzOverflow="overflow" vert="horz" wrap="square" lIns="91440" tIns="45720" rIns="91440" bIns="45720" numCol="1" spcCol="0" rtlCol="0" fromWordArt="0" anchor="b" anchorCtr="0" forceAA="0" compatLnSpc="1">
+                <a:prstTxWarp prst="textNoShape">
+                  <a:avLst/>
+                </a:prstTxWarp>
+                <a:noAutofit/>
+              </a:bodyPr>
+              <a:lstStyle/>
+              <a:p>
+                <a:pPr algn="ctr"/>
+                <a:endParaRPr lang="en-US" u="sng" dirty="0"/>
+              </a:p>
+            </p:txBody>
+          </p:sp>
+          <p:pic>
+            <p:nvPicPr>
+              <p:cNvPr id="12" name="Picture 11" descr="A logo of a bee&#10;&#10;AI-generated content may be incorrect.">
+                <a:extLst>
+                  <a:ext uri="{FF2B5EF4-FFF2-40B4-BE49-F238E27FC236}">
+                    <a16:creationId xmlns:a16="http://schemas.microsoft.com/office/drawing/2014/main" id="{B1B8B15C-2EE8-06E1-0746-8E8EA326A4E7}"/>
+                  </a:ext>
+                </a:extLst>
+              </p:cNvPr>
+              <p:cNvPicPr>
+                <a:picLocks noChangeAspect="1"/>
+              </p:cNvPicPr>
+              <p:nvPr/>
+            </p:nvPicPr>
+            <p:blipFill>
+              <a:blip r:embed="rId2"/>
+              <a:stretch>
+                <a:fillRect/>
+              </a:stretch>
+            </p:blipFill>
+            <p:spPr>
+              <a:xfrm>
+                <a:off x="3232830" y="2190928"/>
+                <a:ext cx="1299481" cy="1596212"/>
+              </a:xfrm>
+              <a:prstGeom prst="rect">
+                <a:avLst/>
+              </a:prstGeom>
+            </p:spPr>
+          </p:pic>
+          <p:sp>
+            <p:nvSpPr>
+              <p:cNvPr id="13" name="TextBox 12">
+                <a:extLst>
+                  <a:ext uri="{FF2B5EF4-FFF2-40B4-BE49-F238E27FC236}">
+                    <a16:creationId xmlns:a16="http://schemas.microsoft.com/office/drawing/2014/main" id="{6CC3EDB6-0A31-5785-B75C-71C3535EBC73}"/>
+                  </a:ext>
+                </a:extLst>
+              </p:cNvPr>
+              <p:cNvSpPr txBox="1"/>
+              <p:nvPr/>
+            </p:nvSpPr>
+            <p:spPr>
+              <a:xfrm>
+                <a:off x="2512295" y="3683490"/>
+                <a:ext cx="2743199" cy="1015663"/>
+              </a:xfrm>
+              <a:prstGeom prst="rect">
+                <a:avLst/>
+              </a:prstGeom>
+              <a:noFill/>
+            </p:spPr>
+            <p:txBody>
+              <a:bodyPr rot="0" spcFirstLastPara="0" vertOverflow="overflow" horzOverflow="overflow" vert="horz" wrap="square" lIns="91440" tIns="45720" rIns="91440" bIns="45720" numCol="1" spcCol="0" rtlCol="0" fromWordArt="0" anchor="t" anchorCtr="0" forceAA="0" compatLnSpc="1">
+                <a:prstTxWarp prst="textNoShape">
+                  <a:avLst/>
+                </a:prstTxWarp>
+                <a:spAutoFit/>
+              </a:bodyPr>
+              <a:lstStyle/>
+              <a:p>
+                <a:pPr algn="ctr"/>
+                <a:r>
+                  <a:rPr lang="ja-JP" sz="1200" b="1" u="sng">
+                    <a:highlight>
+                      <a:srgbClr val="FFFFFF"/>
+                    </a:highlight>
+                    <a:latin typeface="Comic Sans MS"/>
+                    <a:ea typeface="ＭＳ Ｐゴシック"/>
+                  </a:rPr>
+                  <a:t>山葵</a:t>
+                </a:r>
+                <a:endParaRPr lang="en-US" sz="1200" u="sng">
+                  <a:highlight>
+                    <a:srgbClr val="FFFFFF"/>
+                  </a:highlight>
+                  <a:latin typeface="Comic Sans MS"/>
+                  <a:ea typeface="ＭＳ Ｐゴシック"/>
+                </a:endParaRPr>
+              </a:p>
+              <a:p>
+                <a:pPr algn="ctr"/>
+                <a:r>
+                  <a:rPr lang="ja-JP" sz="1200" b="1" u="sng">
+                    <a:highlight>
+                      <a:srgbClr val="FFFFFF"/>
+                    </a:highlight>
+                    <a:latin typeface="Comic Sans MS"/>
+                    <a:ea typeface="ＭＳ Ｐゴシック"/>
+                  </a:rPr>
+                  <a:t>わさび</a:t>
+                </a:r>
+                <a:endParaRPr lang="en-US" sz="1200" u="sng">
+                  <a:highlight>
+                    <a:srgbClr val="FFFFFF"/>
+                  </a:highlight>
+                  <a:latin typeface="Comic Sans MS"/>
+                  <a:ea typeface="ＭＳ Ｐゴシック"/>
+                </a:endParaRPr>
+              </a:p>
+              <a:p>
+                <a:pPr algn="ctr"/>
+                <a:r>
+                  <a:rPr lang="ja-JP" sz="1200" b="1" u="sng">
+                    <a:highlight>
+                      <a:srgbClr val="FFFFFF"/>
+                    </a:highlight>
+                    <a:latin typeface="Comic Sans MS"/>
+                    <a:ea typeface="ＭＳ Ｐゴシック"/>
+                  </a:rPr>
+                  <a:t>ワサビ</a:t>
+                </a:r>
+                <a:endParaRPr lang="en-US" sz="1200" u="sng">
+                  <a:highlight>
+                    <a:srgbClr val="FFFFFF"/>
+                  </a:highlight>
+                  <a:latin typeface="Comic Sans MS"/>
+                </a:endParaRPr>
+              </a:p>
+              <a:p>
+                <a:pPr algn="ctr"/>
+                <a:r>
+                  <a:rPr lang="en-US" sz="1200" b="1" u="sng" err="1">
+                    <a:highlight>
+                      <a:srgbClr val="FFFFFF"/>
+                    </a:highlight>
+                    <a:latin typeface="Comic Sans MS"/>
+                  </a:rPr>
+                  <a:t>Wa</a:t>
+                </a:r>
+                <a:r>
+                  <a:rPr lang="en-US" sz="1200" b="1" u="sng">
+                    <a:highlight>
+                      <a:srgbClr val="FFFFFF"/>
+                    </a:highlight>
+                    <a:latin typeface="Comic Sans MS"/>
+                  </a:rPr>
+                  <a:t>-</a:t>
+                </a:r>
+                <a:r>
+                  <a:rPr lang="en-US" sz="1200" b="1" u="sng" err="1">
+                    <a:highlight>
+                      <a:srgbClr val="FFFFFF"/>
+                    </a:highlight>
+                    <a:latin typeface="Comic Sans MS"/>
+                  </a:rPr>
+                  <a:t>sa</a:t>
+                </a:r>
+                <a:r>
+                  <a:rPr lang="en-US" sz="1200" b="1" u="sng">
+                    <a:highlight>
+                      <a:srgbClr val="FFFFFF"/>
+                    </a:highlight>
+                    <a:latin typeface="Comic Sans MS"/>
+                  </a:rPr>
+                  <a:t>-Bee</a:t>
+                </a:r>
+                <a:endParaRPr lang="en-US" sz="1200" u="sng">
+                  <a:highlight>
+                    <a:srgbClr val="FFFFFF"/>
+                  </a:highlight>
+                  <a:latin typeface="Comic Sans MS"/>
+                </a:endParaRPr>
+              </a:p>
+              <a:p>
+                <a:pPr algn="ctr"/>
+                <a:r>
+                  <a:rPr lang="en-US" sz="1200" b="1" u="sng">
+                    <a:highlight>
+                      <a:srgbClr val="FFFFFF"/>
+                    </a:highlight>
+                    <a:latin typeface="Comic Sans MS"/>
+                  </a:rPr>
+                  <a:t>Japanese  horseradish</a:t>
+                </a:r>
+                <a:endParaRPr lang="en-US" sz="1200" u="sng">
+                  <a:highlight>
+                    <a:srgbClr val="FFFFFF"/>
+                  </a:highlight>
+                  <a:latin typeface="Comic Sans MS"/>
+                </a:endParaRPr>
+              </a:p>
+            </p:txBody>
+          </p:sp>
+        </p:grpSp>
+        <p:grpSp>
+          <p:nvGrpSpPr>
+            <p:cNvPr id="15" name="Group 14">
+              <a:extLst>
+                <a:ext uri="{FF2B5EF4-FFF2-40B4-BE49-F238E27FC236}">
+                  <a16:creationId xmlns:a16="http://schemas.microsoft.com/office/drawing/2014/main" id="{C5444E16-4A35-7B46-7E77-F72DF2E25C7F}"/>
+                </a:ext>
+              </a:extLst>
+            </p:cNvPr>
+            <p:cNvGrpSpPr/>
+            <p:nvPr/>
+          </p:nvGrpSpPr>
+          <p:grpSpPr>
+            <a:xfrm>
+              <a:off x="1800859" y="1225018"/>
+              <a:ext cx="3094337" cy="2749800"/>
+              <a:chOff x="2372789" y="1952141"/>
+              <a:chExt cx="3094337" cy="2749800"/>
+            </a:xfrm>
+          </p:grpSpPr>
+          <p:grpSp>
+            <p:nvGrpSpPr>
+              <p:cNvPr id="9" name="Group 8">
+                <a:extLst>
+                  <a:ext uri="{FF2B5EF4-FFF2-40B4-BE49-F238E27FC236}">
+                    <a16:creationId xmlns:a16="http://schemas.microsoft.com/office/drawing/2014/main" id="{8961A5D5-C6AE-29DB-6917-0B430107DA93}"/>
+                  </a:ext>
+                </a:extLst>
+              </p:cNvPr>
+              <p:cNvGrpSpPr/>
+              <p:nvPr/>
+            </p:nvGrpSpPr>
+            <p:grpSpPr>
+              <a:xfrm>
+                <a:off x="2372789" y="2110700"/>
+                <a:ext cx="3094337" cy="2591241"/>
+                <a:chOff x="2372789" y="2110700"/>
+                <a:chExt cx="3094337" cy="2591241"/>
+              </a:xfrm>
+            </p:grpSpPr>
+            <p:sp>
+              <p:nvSpPr>
+                <p:cNvPr id="4" name="Hexagon 3">
+                  <a:extLst>
+                    <a:ext uri="{FF2B5EF4-FFF2-40B4-BE49-F238E27FC236}">
+                      <a16:creationId xmlns:a16="http://schemas.microsoft.com/office/drawing/2014/main" id="{33511B7C-CBB2-0245-F1DD-064464C7C00E}"/>
+                    </a:ext>
+                  </a:extLst>
+                </p:cNvPr>
+                <p:cNvSpPr/>
+                <p:nvPr/>
+              </p:nvSpPr>
+              <p:spPr>
+                <a:xfrm>
+                  <a:off x="2372789" y="2110700"/>
+                  <a:ext cx="3094337" cy="2591241"/>
+                </a:xfrm>
+                <a:prstGeom prst="hexagon">
+                  <a:avLst/>
+                </a:prstGeom>
+                <a:noFill/>
+              </p:spPr>
+              <p:style>
+                <a:lnRef idx="2">
+                  <a:schemeClr val="accent1">
+                    <a:shade val="15000"/>
+                  </a:schemeClr>
+                </a:lnRef>
+                <a:fillRef idx="1">
+                  <a:schemeClr val="accent1"/>
+                </a:fillRef>
+                <a:effectRef idx="0">
+                  <a:schemeClr val="accent1"/>
+                </a:effectRef>
+                <a:fontRef idx="minor">
+                  <a:schemeClr val="lt1"/>
+                </a:fontRef>
+              </p:style>
+              <p:txBody>
+                <a:bodyPr rot="0" spcFirstLastPara="0" vertOverflow="overflow" horzOverflow="overflow" vert="horz" wrap="square" lIns="91440" tIns="45720" rIns="91440" bIns="45720" numCol="1" spcCol="0" rtlCol="0" fromWordArt="0" anchor="b" anchorCtr="0" forceAA="0" compatLnSpc="1">
+                  <a:prstTxWarp prst="textNoShape">
+                    <a:avLst/>
+                  </a:prstTxWarp>
+                  <a:noAutofit/>
+                </a:bodyPr>
+                <a:lstStyle/>
+                <a:p>
+                  <a:pPr algn="ctr"/>
+                  <a:endParaRPr lang="en-US" u="sng" dirty="0"/>
+                </a:p>
+              </p:txBody>
+            </p:sp>
+            <p:sp>
+              <p:nvSpPr>
+                <p:cNvPr id="6" name="TextBox 5">
+                  <a:extLst>
+                    <a:ext uri="{FF2B5EF4-FFF2-40B4-BE49-F238E27FC236}">
+                      <a16:creationId xmlns:a16="http://schemas.microsoft.com/office/drawing/2014/main" id="{4A3D0A34-C71D-3A17-C7B9-5122209B2103}"/>
+                    </a:ext>
+                  </a:extLst>
+                </p:cNvPr>
+                <p:cNvSpPr txBox="1"/>
+                <p:nvPr/>
+              </p:nvSpPr>
+              <p:spPr>
+                <a:xfrm>
+                  <a:off x="2512295" y="3683490"/>
+                  <a:ext cx="2743199" cy="646331"/>
+                </a:xfrm>
+                <a:prstGeom prst="rect">
+                  <a:avLst/>
+                </a:prstGeom>
+                <a:noFill/>
+              </p:spPr>
+              <p:txBody>
+                <a:bodyPr rot="0" spcFirstLastPara="0" vertOverflow="overflow" horzOverflow="overflow" vert="horz" wrap="square" lIns="91440" tIns="45720" rIns="91440" bIns="45720" numCol="1" spcCol="0" rtlCol="0" fromWordArt="0" anchor="t" anchorCtr="0" forceAA="0" compatLnSpc="1">
+                  <a:prstTxWarp prst="textNoShape">
+                    <a:avLst/>
+                  </a:prstTxWarp>
+                  <a:spAutoFit/>
+                </a:bodyPr>
+                <a:lstStyle/>
+                <a:p>
+                  <a:pPr algn="ctr"/>
+                  <a:r>
+                    <a:rPr lang="ja-JP" sz="1200" b="1" u="sng">
+                      <a:highlight>
+                        <a:srgbClr val="FFFFFF"/>
+                      </a:highlight>
+                      <a:latin typeface="Comic Sans MS"/>
+                      <a:ea typeface="ＭＳ Ｐゴシック"/>
+                    </a:rPr>
+                    <a:t>び</a:t>
+                  </a:r>
+                  <a:endParaRPr lang="ja-JP" altLang="en-US" sz="1200" u="sng">
+                    <a:highlight>
+                      <a:srgbClr val="FFFFFF"/>
+                    </a:highlight>
+                    <a:latin typeface="Comic Sans MS"/>
+                    <a:ea typeface="ＭＳ Ｐゴシック"/>
+                  </a:endParaRPr>
+                </a:p>
+                <a:p>
+                  <a:pPr algn="ctr"/>
+                  <a:r>
+                    <a:rPr lang="ja-JP" sz="1200" b="1" u="sng">
+                      <a:solidFill>
+                        <a:srgbClr val="272320"/>
+                      </a:solidFill>
+                      <a:highlight>
+                        <a:srgbClr val="FFFFFF"/>
+                      </a:highlight>
+                      <a:latin typeface="Comic Sans MS"/>
+                      <a:ea typeface="ＭＳ Ｐゴシック"/>
+                    </a:rPr>
+                    <a:t>ビ</a:t>
+                  </a:r>
+                  <a:endParaRPr lang="ja-JP" altLang="en-US" sz="1200" u="sng">
+                    <a:solidFill>
+                      <a:srgbClr val="272320"/>
+                    </a:solidFill>
+                    <a:highlight>
+                      <a:srgbClr val="FFFFFF"/>
+                    </a:highlight>
+                    <a:latin typeface="Comic Sans MS"/>
+                  </a:endParaRPr>
+                </a:p>
+                <a:p>
+                  <a:pPr algn="ctr"/>
+                  <a:r>
+                    <a:rPr lang="en-US" sz="1200" b="1" u="sng">
+                      <a:solidFill>
+                        <a:srgbClr val="272320"/>
+                      </a:solidFill>
+                      <a:highlight>
+                        <a:srgbClr val="FFFFFF"/>
+                      </a:highlight>
+                      <a:latin typeface="Comic Sans MS"/>
+                    </a:rPr>
+                    <a:t>Bee</a:t>
+                  </a:r>
+                  <a:endParaRPr lang="en-US" u="sng"/>
+                </a:p>
+              </p:txBody>
+            </p:sp>
+          </p:grpSp>
+          <p:pic>
+            <p:nvPicPr>
+              <p:cNvPr id="14" name="Picture 13" descr="A logo of a bee&#10;&#10;AI-generated content may be incorrect.">
+                <a:extLst>
+                  <a:ext uri="{FF2B5EF4-FFF2-40B4-BE49-F238E27FC236}">
+                    <a16:creationId xmlns:a16="http://schemas.microsoft.com/office/drawing/2014/main" id="{8F478CC3-9FBF-8BE9-B028-D698591D5E08}"/>
+                  </a:ext>
+                </a:extLst>
+              </p:cNvPr>
+              <p:cNvPicPr>
+                <a:picLocks noChangeAspect="1"/>
+              </p:cNvPicPr>
+              <p:nvPr/>
+            </p:nvPicPr>
+            <p:blipFill>
+              <a:blip r:embed="rId3"/>
+              <a:stretch>
+                <a:fillRect/>
+              </a:stretch>
+            </p:blipFill>
+            <p:spPr>
+              <a:xfrm>
+                <a:off x="3050936" y="1952141"/>
+                <a:ext cx="1505213" cy="1765514"/>
+              </a:xfrm>
+              <a:prstGeom prst="rect">
+                <a:avLst/>
+              </a:prstGeom>
+            </p:spPr>
+          </p:pic>
+        </p:grpSp>
+        <p:grpSp>
+          <p:nvGrpSpPr>
+            <p:cNvPr id="16" name="Group 15">
+              <a:extLst>
+                <a:ext uri="{FF2B5EF4-FFF2-40B4-BE49-F238E27FC236}">
+                  <a16:creationId xmlns:a16="http://schemas.microsoft.com/office/drawing/2014/main" id="{93C6226F-BF10-B1B1-DC01-26EC750ED358}"/>
+                </a:ext>
+              </a:extLst>
+            </p:cNvPr>
+            <p:cNvGrpSpPr/>
+            <p:nvPr/>
+          </p:nvGrpSpPr>
+          <p:grpSpPr>
+            <a:xfrm>
+              <a:off x="1800686" y="4167244"/>
+              <a:ext cx="3094337" cy="2591241"/>
+              <a:chOff x="2372789" y="2110700"/>
+              <a:chExt cx="3094337" cy="2591241"/>
+            </a:xfrm>
+          </p:grpSpPr>
+          <p:grpSp>
+            <p:nvGrpSpPr>
+              <p:cNvPr id="17" name="Group 16">
+                <a:extLst>
+                  <a:ext uri="{FF2B5EF4-FFF2-40B4-BE49-F238E27FC236}">
+                    <a16:creationId xmlns:a16="http://schemas.microsoft.com/office/drawing/2014/main" id="{3BA60224-A684-D793-9084-46E12CCF7E55}"/>
+                  </a:ext>
+                </a:extLst>
+              </p:cNvPr>
+              <p:cNvGrpSpPr/>
+              <p:nvPr/>
+            </p:nvGrpSpPr>
+            <p:grpSpPr>
+              <a:xfrm>
+                <a:off x="2372789" y="2110700"/>
+                <a:ext cx="3094337" cy="2591241"/>
+                <a:chOff x="2372789" y="2110700"/>
+                <a:chExt cx="3094337" cy="2591241"/>
+              </a:xfrm>
+            </p:grpSpPr>
+            <p:sp>
+              <p:nvSpPr>
+                <p:cNvPr id="19" name="Hexagon 18">
+                  <a:extLst>
+                    <a:ext uri="{FF2B5EF4-FFF2-40B4-BE49-F238E27FC236}">
+                      <a16:creationId xmlns:a16="http://schemas.microsoft.com/office/drawing/2014/main" id="{0D73B61B-D633-B8E9-4300-4AC7F89F52A0}"/>
+                    </a:ext>
+                  </a:extLst>
+                </p:cNvPr>
+                <p:cNvSpPr/>
+                <p:nvPr/>
+              </p:nvSpPr>
+              <p:spPr>
+                <a:xfrm>
+                  <a:off x="2372789" y="2110700"/>
+                  <a:ext cx="3094337" cy="2591241"/>
+                </a:xfrm>
+                <a:prstGeom prst="hexagon">
+                  <a:avLst/>
+                </a:prstGeom>
+                <a:noFill/>
+              </p:spPr>
+              <p:style>
+                <a:lnRef idx="2">
+                  <a:schemeClr val="accent1">
+                    <a:shade val="15000"/>
+                  </a:schemeClr>
+                </a:lnRef>
+                <a:fillRef idx="1">
+                  <a:schemeClr val="accent1"/>
+                </a:fillRef>
+                <a:effectRef idx="0">
+                  <a:schemeClr val="accent1"/>
+                </a:effectRef>
+                <a:fontRef idx="minor">
+                  <a:schemeClr val="lt1"/>
+                </a:fontRef>
+              </p:style>
+              <p:txBody>
+                <a:bodyPr rot="0" spcFirstLastPara="0" vertOverflow="overflow" horzOverflow="overflow" vert="horz" wrap="square" lIns="91440" tIns="45720" rIns="91440" bIns="45720" numCol="1" spcCol="0" rtlCol="0" fromWordArt="0" anchor="b" anchorCtr="0" forceAA="0" compatLnSpc="1">
+                  <a:prstTxWarp prst="textNoShape">
+                    <a:avLst/>
+                  </a:prstTxWarp>
+                  <a:noAutofit/>
+                </a:bodyPr>
+                <a:lstStyle/>
+                <a:p>
+                  <a:pPr algn="ctr"/>
+                  <a:endParaRPr lang="en-US" u="sng" dirty="0"/>
+                </a:p>
+              </p:txBody>
+            </p:sp>
+            <p:sp>
+              <p:nvSpPr>
+                <p:cNvPr id="20" name="TextBox 19">
+                  <a:extLst>
+                    <a:ext uri="{FF2B5EF4-FFF2-40B4-BE49-F238E27FC236}">
+                      <a16:creationId xmlns:a16="http://schemas.microsoft.com/office/drawing/2014/main" id="{A9E59382-501D-3B9A-DBB8-E9FA920D27B6}"/>
+                    </a:ext>
+                  </a:extLst>
+                </p:cNvPr>
+                <p:cNvSpPr txBox="1"/>
+                <p:nvPr/>
+              </p:nvSpPr>
+              <p:spPr>
+                <a:xfrm>
+                  <a:off x="2542775" y="3409170"/>
+                  <a:ext cx="2743199" cy="830997"/>
+                </a:xfrm>
+                <a:prstGeom prst="rect">
+                  <a:avLst/>
+                </a:prstGeom>
+                <a:noFill/>
+              </p:spPr>
+              <p:txBody>
+                <a:bodyPr rot="0" spcFirstLastPara="0" vertOverflow="overflow" horzOverflow="overflow" vert="horz" wrap="square" lIns="91440" tIns="45720" rIns="91440" bIns="45720" numCol="1" spcCol="0" rtlCol="0" fromWordArt="0" anchor="t" anchorCtr="0" forceAA="0" compatLnSpc="1">
+                  <a:prstTxWarp prst="textNoShape">
+                    <a:avLst/>
+                  </a:prstTxWarp>
+                  <a:spAutoFit/>
+                </a:bodyPr>
+                <a:lstStyle/>
+                <a:p>
+                  <a:pPr algn="ctr"/>
+                  <a:r>
+                    <a:rPr lang="ja-JP" altLang="en-US" sz="1200" b="1" u="sng">
+                      <a:highlight>
+                        <a:srgbClr val="FFFFFF"/>
+                      </a:highlight>
+                      <a:latin typeface="Comic Sans MS"/>
+                      <a:ea typeface="ＭＳ Ｐゴシック"/>
+                    </a:rPr>
+                    <a:t>ち</a:t>
+                  </a:r>
+                  <a:r>
+                    <a:rPr lang="ja-JP" sz="1200" b="1" u="sng">
+                      <a:highlight>
+                        <a:srgbClr val="FFFFFF"/>
+                      </a:highlight>
+                      <a:latin typeface="Comic Sans MS"/>
+                      <a:ea typeface="ＭＳ Ｐゴシック"/>
+                    </a:rPr>
+                    <a:t>び</a:t>
+                  </a:r>
+                  <a:endParaRPr lang="ja-JP" sz="1200" u="sng">
+                    <a:highlight>
+                      <a:srgbClr val="FFFFFF"/>
+                    </a:highlight>
+                    <a:latin typeface="Comic Sans MS"/>
+                    <a:ea typeface="ＭＳ Ｐゴシック"/>
+                  </a:endParaRPr>
+                </a:p>
+                <a:p>
+                  <a:pPr algn="ctr"/>
+                  <a:r>
+                    <a:rPr lang="ja-JP" altLang="en-US" sz="1200" b="1" u="sng">
+                      <a:highlight>
+                        <a:srgbClr val="FFFFFF"/>
+                      </a:highlight>
+                      <a:latin typeface="Comic Sans MS"/>
+                      <a:ea typeface="ＭＳ Ｐゴシック"/>
+                    </a:rPr>
+                    <a:t>チ</a:t>
+                  </a:r>
+                  <a:r>
+                    <a:rPr lang="ja-JP" sz="1200" b="1" u="sng">
+                      <a:highlight>
+                        <a:srgbClr val="FFFFFF"/>
+                      </a:highlight>
+                      <a:latin typeface="Comic Sans MS"/>
+                      <a:ea typeface="ＭＳ Ｐゴシック"/>
+                    </a:rPr>
+                    <a:t>ビ</a:t>
+                  </a:r>
+                  <a:endParaRPr lang="ja-JP" sz="1200" u="sng">
+                    <a:highlight>
+                      <a:srgbClr val="FFFFFF"/>
+                    </a:highlight>
+                    <a:latin typeface="Comic Sans MS"/>
+                  </a:endParaRPr>
+                </a:p>
+                <a:p>
+                  <a:pPr algn="ctr"/>
+                  <a:r>
+                    <a:rPr lang="en-US" sz="1200" b="1" u="sng">
+                      <a:highlight>
+                        <a:srgbClr val="FFFFFF"/>
+                      </a:highlight>
+                      <a:latin typeface="Comic Sans MS"/>
+                    </a:rPr>
+                    <a:t>Chi-Bee</a:t>
+                  </a:r>
+                  <a:endParaRPr lang="ja-JP" altLang="en-US" sz="1200" u="sng">
+                    <a:highlight>
+                      <a:srgbClr val="FFFFFF"/>
+                    </a:highlight>
+                    <a:latin typeface="Comic Sans MS"/>
+                  </a:endParaRPr>
+                </a:p>
+                <a:p>
+                  <a:pPr algn="ctr"/>
+                  <a:r>
+                    <a:rPr lang="en-US" sz="1200" b="1" u="sng">
+                      <a:highlight>
+                        <a:srgbClr val="FFFFFF"/>
+                      </a:highlight>
+                      <a:latin typeface="Comic Sans MS"/>
+                    </a:rPr>
+                    <a:t>Small, tiny, little one</a:t>
+                  </a:r>
+                  <a:endParaRPr lang="en-US" altLang="ja-JP" u="sng"/>
+                </a:p>
+              </p:txBody>
+            </p:sp>
+          </p:grpSp>
+          <p:pic>
+            <p:nvPicPr>
+              <p:cNvPr id="18" name="Picture 17" descr="A logo of a bee&#10;&#10;AI-generated content may be incorrect.">
+                <a:extLst>
+                  <a:ext uri="{FF2B5EF4-FFF2-40B4-BE49-F238E27FC236}">
+                    <a16:creationId xmlns:a16="http://schemas.microsoft.com/office/drawing/2014/main" id="{904953DE-3FE2-08A3-09BD-84CAF261CBCE}"/>
+                  </a:ext>
+                </a:extLst>
+              </p:cNvPr>
+              <p:cNvPicPr>
+                <a:picLocks noChangeAspect="1"/>
+              </p:cNvPicPr>
+              <p:nvPr/>
+            </p:nvPicPr>
+            <p:blipFill>
+              <a:blip r:embed="rId3"/>
+              <a:stretch>
+                <a:fillRect/>
+              </a:stretch>
+            </p:blipFill>
+            <p:spPr>
+              <a:xfrm>
+                <a:off x="3416696" y="2399181"/>
+                <a:ext cx="783853" cy="932394"/>
+              </a:xfrm>
+              <a:prstGeom prst="rect">
+                <a:avLst/>
+              </a:prstGeom>
+            </p:spPr>
+          </p:pic>
+        </p:grpSp>
+        <p:grpSp>
+          <p:nvGrpSpPr>
+            <p:cNvPr id="32" name="Group 31">
+              <a:extLst>
+                <a:ext uri="{FF2B5EF4-FFF2-40B4-BE49-F238E27FC236}">
+                  <a16:creationId xmlns:a16="http://schemas.microsoft.com/office/drawing/2014/main" id="{A6C02E42-44BC-5624-2D20-726B41949E93}"/>
+                </a:ext>
+              </a:extLst>
+            </p:cNvPr>
+            <p:cNvGrpSpPr/>
+            <p:nvPr/>
+          </p:nvGrpSpPr>
+          <p:grpSpPr>
+            <a:xfrm>
+              <a:off x="6931486" y="4163669"/>
+              <a:ext cx="3094337" cy="2625296"/>
+              <a:chOff x="8286941" y="3585662"/>
+              <a:chExt cx="3094337" cy="2625296"/>
+            </a:xfrm>
+          </p:grpSpPr>
+          <p:grpSp>
+            <p:nvGrpSpPr>
+              <p:cNvPr id="22" name="Group 21">
+                <a:extLst>
+                  <a:ext uri="{FF2B5EF4-FFF2-40B4-BE49-F238E27FC236}">
+                    <a16:creationId xmlns:a16="http://schemas.microsoft.com/office/drawing/2014/main" id="{E780C39B-DDB4-1889-D70C-1C235DBEE107}"/>
+                  </a:ext>
+                </a:extLst>
+              </p:cNvPr>
+              <p:cNvGrpSpPr/>
+              <p:nvPr/>
+            </p:nvGrpSpPr>
+            <p:grpSpPr>
+              <a:xfrm>
+                <a:off x="8286941" y="3619717"/>
+                <a:ext cx="3094337" cy="2591241"/>
+                <a:chOff x="2372789" y="2110700"/>
+                <a:chExt cx="3094337" cy="2591241"/>
+              </a:xfrm>
+            </p:grpSpPr>
+            <p:sp>
+              <p:nvSpPr>
+                <p:cNvPr id="24" name="Hexagon 23">
+                  <a:extLst>
+                    <a:ext uri="{FF2B5EF4-FFF2-40B4-BE49-F238E27FC236}">
+                      <a16:creationId xmlns:a16="http://schemas.microsoft.com/office/drawing/2014/main" id="{CE1F926C-6210-40A9-3277-F03B9FA6AF40}"/>
+                    </a:ext>
+                  </a:extLst>
+                </p:cNvPr>
+                <p:cNvSpPr/>
+                <p:nvPr/>
+              </p:nvSpPr>
+              <p:spPr>
+                <a:xfrm>
+                  <a:off x="2372789" y="2110700"/>
+                  <a:ext cx="3094337" cy="2591241"/>
+                </a:xfrm>
+                <a:prstGeom prst="hexagon">
+                  <a:avLst/>
+                </a:prstGeom>
+                <a:noFill/>
+              </p:spPr>
+              <p:style>
+                <a:lnRef idx="2">
+                  <a:schemeClr val="accent1">
+                    <a:shade val="15000"/>
+                  </a:schemeClr>
+                </a:lnRef>
+                <a:fillRef idx="1">
+                  <a:schemeClr val="accent1"/>
+                </a:fillRef>
+                <a:effectRef idx="0">
+                  <a:schemeClr val="accent1"/>
+                </a:effectRef>
+                <a:fontRef idx="minor">
+                  <a:schemeClr val="lt1"/>
+                </a:fontRef>
+              </p:style>
+              <p:txBody>
+                <a:bodyPr rot="0" spcFirstLastPara="0" vertOverflow="overflow" horzOverflow="overflow" vert="horz" wrap="square" lIns="91440" tIns="45720" rIns="91440" bIns="45720" numCol="1" spcCol="0" rtlCol="0" fromWordArt="0" anchor="b" anchorCtr="0" forceAA="0" compatLnSpc="1">
+                  <a:prstTxWarp prst="textNoShape">
+                    <a:avLst/>
+                  </a:prstTxWarp>
+                  <a:noAutofit/>
+                </a:bodyPr>
+                <a:lstStyle/>
+                <a:p>
+                  <a:pPr algn="ctr"/>
+                  <a:endParaRPr lang="en-US" u="sng" dirty="0"/>
+                </a:p>
+              </p:txBody>
+            </p:sp>
+            <p:sp>
+              <p:nvSpPr>
+                <p:cNvPr id="25" name="TextBox 24">
+                  <a:extLst>
+                    <a:ext uri="{FF2B5EF4-FFF2-40B4-BE49-F238E27FC236}">
+                      <a16:creationId xmlns:a16="http://schemas.microsoft.com/office/drawing/2014/main" id="{D4E4F7A2-B34A-78C3-AA3C-245A9F1038D4}"/>
+                    </a:ext>
+                  </a:extLst>
+                </p:cNvPr>
+                <p:cNvSpPr txBox="1"/>
+                <p:nvPr/>
+              </p:nvSpPr>
+              <p:spPr>
+                <a:xfrm>
+                  <a:off x="2542775" y="3653010"/>
+                  <a:ext cx="2743199" cy="1015663"/>
+                </a:xfrm>
+                <a:prstGeom prst="rect">
+                  <a:avLst/>
+                </a:prstGeom>
+                <a:noFill/>
+              </p:spPr>
+              <p:txBody>
+                <a:bodyPr rot="0" spcFirstLastPara="0" vertOverflow="overflow" horzOverflow="overflow" vert="horz" wrap="square" lIns="91440" tIns="45720" rIns="91440" bIns="45720" numCol="1" spcCol="0" rtlCol="0" fromWordArt="0" anchor="t" anchorCtr="0" forceAA="0" compatLnSpc="1">
+                  <a:prstTxWarp prst="textNoShape">
+                    <a:avLst/>
+                  </a:prstTxWarp>
+                  <a:spAutoFit/>
+                </a:bodyPr>
+                <a:lstStyle/>
+                <a:p>
+                  <a:pPr algn="ctr"/>
+                  <a:r>
+                    <a:rPr lang="ja-JP" sz="1200" b="1" u="sng">
+                      <a:highlight>
+                        <a:srgbClr val="FFFFFF"/>
+                      </a:highlight>
+                      <a:latin typeface="Comic Sans MS"/>
+                      <a:ea typeface="ＭＳ Ｐゴシック"/>
+                    </a:rPr>
+                    <a:t>蛇</a:t>
+                  </a:r>
+                  <a:endParaRPr lang="ja-JP" altLang="en-US" sz="1200" u="sng">
+                    <a:highlight>
+                      <a:srgbClr val="FFFFFF"/>
+                    </a:highlight>
+                    <a:latin typeface="Comic Sans MS"/>
+                  </a:endParaRPr>
+                </a:p>
+                <a:p>
+                  <a:pPr algn="ctr"/>
+                  <a:r>
+                    <a:rPr lang="ja-JP" altLang="en-US" sz="1200" b="1" u="sng">
+                      <a:highlight>
+                        <a:srgbClr val="FFFFFF"/>
+                      </a:highlight>
+                      <a:latin typeface="Comic Sans MS"/>
+                    </a:rPr>
+                    <a:t>へ</a:t>
+                  </a:r>
+                  <a:r>
+                    <a:rPr lang="ja-JP" sz="1200" b="1" u="sng">
+                      <a:highlight>
+                        <a:srgbClr val="FFFFFF"/>
+                      </a:highlight>
+                      <a:latin typeface="Comic Sans MS"/>
+                      <a:ea typeface="ＭＳ Ｐゴシック"/>
+                    </a:rPr>
+                    <a:t>び</a:t>
+                  </a:r>
+                  <a:endParaRPr lang="ja-JP" sz="1200" u="sng">
+                    <a:highlight>
+                      <a:srgbClr val="FFFFFF"/>
+                    </a:highlight>
+                    <a:latin typeface="Comic Sans MS"/>
+                    <a:ea typeface="ＭＳ Ｐゴシック"/>
+                  </a:endParaRPr>
+                </a:p>
+                <a:p>
+                  <a:pPr algn="ctr"/>
+                  <a:r>
+                    <a:rPr lang="ja-JP" altLang="en-US" sz="1200" b="1" u="sng">
+                      <a:highlight>
+                        <a:srgbClr val="FFFFFF"/>
+                      </a:highlight>
+                      <a:latin typeface="Comic Sans MS"/>
+                    </a:rPr>
+                    <a:t>ヘ</a:t>
+                  </a:r>
+                  <a:r>
+                    <a:rPr lang="ja-JP" sz="1200" b="1" u="sng">
+                      <a:highlight>
+                        <a:srgbClr val="FFFFFF"/>
+                      </a:highlight>
+                      <a:latin typeface="Comic Sans MS"/>
+                      <a:ea typeface="ＭＳ Ｐゴシック"/>
+                    </a:rPr>
+                    <a:t>ビ</a:t>
+                  </a:r>
+                  <a:endParaRPr lang="ja-JP" sz="1200" u="sng">
+                    <a:highlight>
+                      <a:srgbClr val="FFFFFF"/>
+                    </a:highlight>
+                    <a:latin typeface="Comic Sans MS"/>
+                  </a:endParaRPr>
+                </a:p>
+                <a:p>
+                  <a:pPr algn="ctr"/>
+                  <a:r>
+                    <a:rPr lang="en-US" sz="1200" b="1" u="sng">
+                      <a:highlight>
+                        <a:srgbClr val="FFFFFF"/>
+                      </a:highlight>
+                      <a:latin typeface="Comic Sans MS"/>
+                    </a:rPr>
+                    <a:t>He-Bee</a:t>
+                  </a:r>
+                  <a:endParaRPr lang="ja-JP" altLang="en-US" sz="1200" u="sng">
+                    <a:highlight>
+                      <a:srgbClr val="FFFFFF"/>
+                    </a:highlight>
+                    <a:latin typeface="Comic Sans MS"/>
+                  </a:endParaRPr>
+                </a:p>
+                <a:p>
+                  <a:pPr algn="ctr"/>
+                  <a:r>
+                    <a:rPr lang="en-US" sz="1200" b="1" u="sng">
+                      <a:highlight>
+                        <a:srgbClr val="FFFFFF"/>
+                      </a:highlight>
+                      <a:latin typeface="Comic Sans MS"/>
+                    </a:rPr>
+                    <a:t>Snake</a:t>
+                  </a:r>
+                  <a:endParaRPr lang="ja-JP" u="sng"/>
+                </a:p>
+              </p:txBody>
+            </p:sp>
+          </p:grpSp>
+          <p:pic>
+            <p:nvPicPr>
+              <p:cNvPr id="26" name="Picture 25" descr="A yellow and black bee&#10;&#10;AI-generated content may be incorrect.">
+                <a:extLst>
+                  <a:ext uri="{FF2B5EF4-FFF2-40B4-BE49-F238E27FC236}">
+                    <a16:creationId xmlns:a16="http://schemas.microsoft.com/office/drawing/2014/main" id="{4867DBA5-6E57-3D74-991D-FF8632FD0A51}"/>
+                  </a:ext>
+                </a:extLst>
+              </p:cNvPr>
+              <p:cNvPicPr>
+                <a:picLocks noChangeAspect="1"/>
+              </p:cNvPicPr>
+              <p:nvPr/>
+            </p:nvPicPr>
+            <p:blipFill>
+              <a:blip r:embed="rId4"/>
+              <a:stretch>
+                <a:fillRect/>
+              </a:stretch>
+            </p:blipFill>
+            <p:spPr>
+              <a:xfrm>
+                <a:off x="9014438" y="3585662"/>
+                <a:ext cx="1455420" cy="1559559"/>
+              </a:xfrm>
+              <a:prstGeom prst="rect">
+                <a:avLst/>
+              </a:prstGeom>
+            </p:spPr>
+          </p:pic>
+        </p:grpSp>
+        <p:grpSp>
+          <p:nvGrpSpPr>
+            <p:cNvPr id="28" name="Group 27">
+              <a:extLst>
+                <a:ext uri="{FF2B5EF4-FFF2-40B4-BE49-F238E27FC236}">
+                  <a16:creationId xmlns:a16="http://schemas.microsoft.com/office/drawing/2014/main" id="{61C69789-5B64-23F3-6824-51FC07AC80F3}"/>
+                </a:ext>
+              </a:extLst>
+            </p:cNvPr>
+            <p:cNvGrpSpPr/>
+            <p:nvPr/>
+          </p:nvGrpSpPr>
+          <p:grpSpPr>
+            <a:xfrm>
+              <a:off x="6931659" y="1383577"/>
+              <a:ext cx="3094337" cy="2591241"/>
+              <a:chOff x="2372789" y="2110700"/>
+              <a:chExt cx="3094337" cy="2591241"/>
+            </a:xfrm>
+          </p:grpSpPr>
+          <p:sp>
+            <p:nvSpPr>
+              <p:cNvPr id="30" name="Hexagon 29">
+                <a:extLst>
+                  <a:ext uri="{FF2B5EF4-FFF2-40B4-BE49-F238E27FC236}">
+                    <a16:creationId xmlns:a16="http://schemas.microsoft.com/office/drawing/2014/main" id="{AAB28018-A81A-676A-8308-7116B98237FA}"/>
+                  </a:ext>
+                </a:extLst>
+              </p:cNvPr>
+              <p:cNvSpPr/>
+              <p:nvPr/>
+            </p:nvSpPr>
+            <p:spPr>
+              <a:xfrm>
+                <a:off x="2372789" y="2110700"/>
+                <a:ext cx="3094337" cy="2591241"/>
+              </a:xfrm>
+              <a:prstGeom prst="hexagon">
+                <a:avLst/>
+              </a:prstGeom>
+              <a:noFill/>
+            </p:spPr>
+            <p:style>
+              <a:lnRef idx="2">
+                <a:schemeClr val="accent1">
+                  <a:shade val="15000"/>
+                </a:schemeClr>
+              </a:lnRef>
+              <a:fillRef idx="1">
+                <a:schemeClr val="accent1"/>
+              </a:fillRef>
+              <a:effectRef idx="0">
+                <a:schemeClr val="accent1"/>
+              </a:effectRef>
+              <a:fontRef idx="minor">
+                <a:schemeClr val="lt1"/>
+              </a:fontRef>
+            </p:style>
+            <p:txBody>
+              <a:bodyPr rot="0" spcFirstLastPara="0" vertOverflow="overflow" horzOverflow="overflow" vert="horz" wrap="square" lIns="91440" tIns="45720" rIns="91440" bIns="45720" numCol="1" spcCol="0" rtlCol="0" fromWordArt="0" anchor="b" anchorCtr="0" forceAA="0" compatLnSpc="1">
+                <a:prstTxWarp prst="textNoShape">
+                  <a:avLst/>
+                </a:prstTxWarp>
+                <a:noAutofit/>
+              </a:bodyPr>
+              <a:lstStyle/>
+              <a:p>
+                <a:pPr algn="ctr"/>
+                <a:endParaRPr lang="en-US" u="sng" dirty="0"/>
+              </a:p>
+            </p:txBody>
+          </p:sp>
+          <p:sp>
+            <p:nvSpPr>
+              <p:cNvPr id="31" name="TextBox 30">
+                <a:extLst>
+                  <a:ext uri="{FF2B5EF4-FFF2-40B4-BE49-F238E27FC236}">
+                    <a16:creationId xmlns:a16="http://schemas.microsoft.com/office/drawing/2014/main" id="{9C7D0641-291E-034F-8E59-B046836E47E0}"/>
+                  </a:ext>
+                </a:extLst>
+              </p:cNvPr>
+              <p:cNvSpPr txBox="1"/>
+              <p:nvPr/>
+            </p:nvSpPr>
+            <p:spPr>
+              <a:xfrm>
+                <a:off x="2512295" y="3683490"/>
+                <a:ext cx="2743199" cy="1015663"/>
+              </a:xfrm>
+              <a:prstGeom prst="rect">
+                <a:avLst/>
+              </a:prstGeom>
+              <a:noFill/>
+            </p:spPr>
+            <p:txBody>
+              <a:bodyPr rot="0" spcFirstLastPara="0" vertOverflow="overflow" horzOverflow="overflow" vert="horz" wrap="square" lIns="91440" tIns="45720" rIns="91440" bIns="45720" numCol="1" spcCol="0" rtlCol="0" fromWordArt="0" anchor="t" anchorCtr="0" forceAA="0" compatLnSpc="1">
+                <a:prstTxWarp prst="textNoShape">
+                  <a:avLst/>
+                </a:prstTxWarp>
+                <a:spAutoFit/>
+              </a:bodyPr>
+              <a:lstStyle/>
+              <a:p>
+                <a:pPr algn="ctr"/>
+                <a:r>
+                  <a:rPr lang="ja-JP" altLang="en-US" sz="1200" b="1" u="sng">
+                    <a:highlight>
+                      <a:srgbClr val="FFFFFF"/>
+                    </a:highlight>
+                    <a:latin typeface="Comic Sans MS"/>
+                    <a:ea typeface="ＭＳ Ｐゴシック"/>
+                  </a:rPr>
+                  <a:t>海老</a:t>
+                </a:r>
+                <a:endParaRPr lang="ja-JP" altLang="en-US" sz="1200" u="sng">
+                  <a:highlight>
+                    <a:srgbClr val="FFFFFF"/>
+                  </a:highlight>
+                  <a:latin typeface="Comic Sans MS"/>
+                  <a:ea typeface="ＭＳ Ｐゴシック"/>
+                </a:endParaRPr>
+              </a:p>
+              <a:p>
+                <a:pPr algn="ctr"/>
+                <a:r>
+                  <a:rPr lang="ja-JP" altLang="en-US" sz="1200" b="1" u="sng">
+                    <a:highlight>
+                      <a:srgbClr val="FFFFFF"/>
+                    </a:highlight>
+                    <a:latin typeface="Comic Sans MS"/>
+                    <a:ea typeface="ＭＳ Ｐゴシック"/>
+                  </a:rPr>
+                  <a:t>え</a:t>
+                </a:r>
+                <a:r>
+                  <a:rPr lang="ja-JP" sz="1200" b="1" u="sng">
+                    <a:highlight>
+                      <a:srgbClr val="FFFFFF"/>
+                    </a:highlight>
+                    <a:latin typeface="Comic Sans MS"/>
+                    <a:ea typeface="ＭＳ Ｐゴシック"/>
+                  </a:rPr>
+                  <a:t>び</a:t>
+                </a:r>
+                <a:endParaRPr lang="ja-JP" sz="1200" u="sng">
+                  <a:highlight>
+                    <a:srgbClr val="FFFFFF"/>
+                  </a:highlight>
+                  <a:latin typeface="Comic Sans MS"/>
+                  <a:ea typeface="ＭＳ Ｐゴシック"/>
+                </a:endParaRPr>
+              </a:p>
+              <a:p>
+                <a:pPr algn="ctr"/>
+                <a:r>
+                  <a:rPr lang="ja-JP" altLang="en-US" sz="1200" b="1" u="sng">
+                    <a:solidFill>
+                      <a:srgbClr val="272320"/>
+                    </a:solidFill>
+                    <a:highlight>
+                      <a:srgbClr val="FFFFFF"/>
+                    </a:highlight>
+                    <a:latin typeface="Comic Sans MS"/>
+                    <a:ea typeface="ＭＳ Ｐゴシック"/>
+                  </a:rPr>
+                  <a:t>エ</a:t>
+                </a:r>
+                <a:r>
+                  <a:rPr lang="ja-JP" sz="1200" b="1" u="sng">
+                    <a:solidFill>
+                      <a:srgbClr val="272320"/>
+                    </a:solidFill>
+                    <a:highlight>
+                      <a:srgbClr val="FFFFFF"/>
+                    </a:highlight>
+                    <a:latin typeface="Comic Sans MS"/>
+                    <a:ea typeface="ＭＳ Ｐゴシック"/>
+                  </a:rPr>
+                  <a:t>ビ</a:t>
+                </a:r>
+                <a:endParaRPr lang="ja-JP" sz="1200" u="sng">
+                  <a:solidFill>
+                    <a:srgbClr val="272320"/>
+                  </a:solidFill>
+                  <a:highlight>
+                    <a:srgbClr val="FFFFFF"/>
+                  </a:highlight>
+                  <a:latin typeface="Comic Sans MS"/>
+                </a:endParaRPr>
+              </a:p>
+              <a:p>
+                <a:pPr algn="ctr"/>
+                <a:r>
+                  <a:rPr lang="en-US" sz="1200" b="1" u="sng">
+                    <a:solidFill>
+                      <a:srgbClr val="272320"/>
+                    </a:solidFill>
+                    <a:highlight>
+                      <a:srgbClr val="FFFFFF"/>
+                    </a:highlight>
+                    <a:latin typeface="Comic Sans MS"/>
+                  </a:rPr>
+                  <a:t>E-Bee</a:t>
+                </a:r>
+                <a:endParaRPr lang="ja-JP" altLang="en-US" sz="1200" u="sng">
+                  <a:solidFill>
+                    <a:srgbClr val="272320"/>
+                  </a:solidFill>
+                  <a:highlight>
+                    <a:srgbClr val="FFFFFF"/>
+                  </a:highlight>
+                  <a:latin typeface="Comic Sans MS"/>
+                </a:endParaRPr>
+              </a:p>
+              <a:p>
+                <a:pPr algn="ctr"/>
+                <a:r>
+                  <a:rPr lang="en-US" sz="1200" b="1" u="sng">
+                    <a:solidFill>
+                      <a:srgbClr val="272320"/>
+                    </a:solidFill>
+                    <a:highlight>
+                      <a:srgbClr val="FFFFFF"/>
+                    </a:highlight>
+                    <a:latin typeface="Comic Sans MS"/>
+                  </a:rPr>
+                  <a:t>Shrimp</a:t>
+                </a:r>
+                <a:endParaRPr lang="en-US" altLang="ja-JP" u="sng"/>
+              </a:p>
+            </p:txBody>
+          </p:sp>
+        </p:grpSp>
+        <p:pic>
+          <p:nvPicPr>
+            <p:cNvPr id="33" name="Picture 32" descr="A drawing of a bee&#10;&#10;AI-generated content may be incorrect.">
+              <a:extLst>
+                <a:ext uri="{FF2B5EF4-FFF2-40B4-BE49-F238E27FC236}">
+                  <a16:creationId xmlns:a16="http://schemas.microsoft.com/office/drawing/2014/main" id="{61CA380C-59D9-F211-52AF-5306FDFE6BB7}"/>
+                </a:ext>
+              </a:extLst>
+            </p:cNvPr>
+            <p:cNvPicPr>
+              <a:picLocks noChangeAspect="1"/>
+            </p:cNvPicPr>
+            <p:nvPr/>
+          </p:nvPicPr>
+          <p:blipFill>
+            <a:blip r:embed="rId5"/>
+            <a:stretch>
+              <a:fillRect/>
+            </a:stretch>
+          </p:blipFill>
+          <p:spPr>
+            <a:xfrm>
+              <a:off x="7641958" y="1390067"/>
+              <a:ext cx="1642044" cy="1520143"/>
+            </a:xfrm>
+            <a:prstGeom prst="rect">
+              <a:avLst/>
+            </a:prstGeom>
+          </p:spPr>
+        </p:pic>
+        <p:grpSp>
+          <p:nvGrpSpPr>
+            <p:cNvPr id="37" name="Group 36">
+              <a:extLst>
+                <a:ext uri="{FF2B5EF4-FFF2-40B4-BE49-F238E27FC236}">
+                  <a16:creationId xmlns:a16="http://schemas.microsoft.com/office/drawing/2014/main" id="{20600F79-6ABB-2D18-D7E9-ED7D27B1DA66}"/>
+                </a:ext>
+              </a:extLst>
+            </p:cNvPr>
+            <p:cNvGrpSpPr/>
+            <p:nvPr/>
+          </p:nvGrpSpPr>
+          <p:grpSpPr>
+            <a:xfrm>
+              <a:off x="4389570" y="78781"/>
+              <a:ext cx="3094337" cy="2591241"/>
+              <a:chOff x="4389570" y="78781"/>
+              <a:chExt cx="3094337" cy="2591241"/>
+            </a:xfrm>
+          </p:grpSpPr>
+          <p:grpSp>
+            <p:nvGrpSpPr>
+              <p:cNvPr id="27" name="Group 26">
+                <a:extLst>
+                  <a:ext uri="{FF2B5EF4-FFF2-40B4-BE49-F238E27FC236}">
+                    <a16:creationId xmlns:a16="http://schemas.microsoft.com/office/drawing/2014/main" id="{C341DCA5-1690-1127-2A19-D65EEE902D56}"/>
+                  </a:ext>
+                </a:extLst>
+              </p:cNvPr>
+              <p:cNvGrpSpPr/>
+              <p:nvPr/>
+            </p:nvGrpSpPr>
+            <p:grpSpPr>
+              <a:xfrm>
+                <a:off x="4389570" y="78781"/>
+                <a:ext cx="3094337" cy="2591241"/>
+                <a:chOff x="2372789" y="2110700"/>
+                <a:chExt cx="3094337" cy="2591241"/>
+              </a:xfrm>
+            </p:grpSpPr>
+            <p:sp>
+              <p:nvSpPr>
+                <p:cNvPr id="34" name="Hexagon 33">
+                  <a:extLst>
+                    <a:ext uri="{FF2B5EF4-FFF2-40B4-BE49-F238E27FC236}">
+                      <a16:creationId xmlns:a16="http://schemas.microsoft.com/office/drawing/2014/main" id="{EF879839-5A4E-4E72-8A07-B65DB5726E52}"/>
+                    </a:ext>
+                  </a:extLst>
+                </p:cNvPr>
+                <p:cNvSpPr/>
+                <p:nvPr/>
+              </p:nvSpPr>
+              <p:spPr>
+                <a:xfrm>
+                  <a:off x="2372789" y="2110700"/>
+                  <a:ext cx="3094337" cy="2591241"/>
+                </a:xfrm>
+                <a:prstGeom prst="hexagon">
+                  <a:avLst/>
+                </a:prstGeom>
+                <a:noFill/>
+              </p:spPr>
+              <p:style>
+                <a:lnRef idx="2">
+                  <a:schemeClr val="accent1">
+                    <a:shade val="15000"/>
+                  </a:schemeClr>
+                </a:lnRef>
+                <a:fillRef idx="1">
+                  <a:schemeClr val="accent1"/>
+                </a:fillRef>
+                <a:effectRef idx="0">
+                  <a:schemeClr val="accent1"/>
+                </a:effectRef>
+                <a:fontRef idx="minor">
+                  <a:schemeClr val="lt1"/>
+                </a:fontRef>
+              </p:style>
+              <p:txBody>
+                <a:bodyPr rot="0" spcFirstLastPara="0" vertOverflow="overflow" horzOverflow="overflow" vert="horz" wrap="square" lIns="91440" tIns="45720" rIns="91440" bIns="45720" numCol="1" spcCol="0" rtlCol="0" fromWordArt="0" anchor="b" anchorCtr="0" forceAA="0" compatLnSpc="1">
+                  <a:prstTxWarp prst="textNoShape">
+                    <a:avLst/>
+                  </a:prstTxWarp>
+                  <a:noAutofit/>
+                </a:bodyPr>
+                <a:lstStyle/>
+                <a:p>
+                  <a:pPr algn="ctr"/>
+                  <a:endParaRPr lang="en-US" u="sng" dirty="0"/>
+                </a:p>
+              </p:txBody>
+            </p:sp>
+            <p:sp>
+              <p:nvSpPr>
+                <p:cNvPr id="35" name="TextBox 34">
+                  <a:extLst>
+                    <a:ext uri="{FF2B5EF4-FFF2-40B4-BE49-F238E27FC236}">
+                      <a16:creationId xmlns:a16="http://schemas.microsoft.com/office/drawing/2014/main" id="{5C19EC53-2F84-FEF7-F0C0-39CFCDE391E7}"/>
+                    </a:ext>
+                  </a:extLst>
+                </p:cNvPr>
+                <p:cNvSpPr txBox="1"/>
+                <p:nvPr/>
+              </p:nvSpPr>
+              <p:spPr>
+                <a:xfrm>
+                  <a:off x="2543610" y="2545709"/>
+                  <a:ext cx="2743199" cy="1200329"/>
+                </a:xfrm>
+                <a:prstGeom prst="rect">
+                  <a:avLst/>
+                </a:prstGeom>
+                <a:noFill/>
+              </p:spPr>
+              <p:txBody>
+                <a:bodyPr rot="0" spcFirstLastPara="0" vertOverflow="overflow" horzOverflow="overflow" vert="horz" wrap="square" lIns="91440" tIns="45720" rIns="91440" bIns="45720" numCol="1" spcCol="0" rtlCol="0" fromWordArt="0" anchor="t" anchorCtr="0" forceAA="0" compatLnSpc="1">
+                  <a:prstTxWarp prst="textNoShape">
+                    <a:avLst/>
+                  </a:prstTxWarp>
+                  <a:spAutoFit/>
+                </a:bodyPr>
+                <a:lstStyle/>
+                <a:p>
+                  <a:pPr algn="ctr"/>
+                  <a:r>
+                    <a:rPr lang="en-US" altLang="ja-JP" sz="2400" b="1" u="sng">
+                      <a:highlight>
+                        <a:srgbClr val="FFFFFF"/>
+                      </a:highlight>
+                      <a:latin typeface="Comic Sans MS"/>
+                      <a:ea typeface="ＭＳ Ｐゴシック"/>
+                    </a:rPr>
+                    <a:t>Types Of Bees</a:t>
+                  </a:r>
+                  <a:endParaRPr lang="en-US" u="sng">
+                    <a:latin typeface="Aptos" panose="020B0004020202020204"/>
+                    <a:ea typeface="ＭＳ Ｐゴシック"/>
+                  </a:endParaRPr>
+                </a:p>
+                <a:p>
+                  <a:pPr algn="ctr"/>
+                  <a:r>
+                    <a:rPr lang="en-US" altLang="ja-JP" sz="1200" b="1" u="sng">
+                      <a:highlight>
+                        <a:srgbClr val="FFFFFF"/>
+                      </a:highlight>
+                      <a:latin typeface="Comic Sans MS"/>
+                      <a:ea typeface="ＭＳ Ｐゴシック"/>
+                    </a:rPr>
+                    <a:t>Japanese-American</a:t>
+                  </a:r>
+                  <a:endParaRPr lang="en-US" u="sng"/>
+                </a:p>
+                <a:p>
+                  <a:pPr algn="ctr"/>
+                  <a:r>
+                    <a:rPr lang="en-US" sz="1200" b="1" u="sng">
+                      <a:highlight>
+                        <a:srgbClr val="FFFFFF"/>
+                      </a:highlight>
+                      <a:latin typeface="Comic Sans MS"/>
+                      <a:ea typeface="ＭＳ Ｐゴシック"/>
+                    </a:rPr>
+                    <a:t>Pun Magnets</a:t>
+                  </a:r>
+                  <a:endParaRPr lang="en-US" u="sng"/>
+                </a:p>
+                <a:p>
+                  <a:pPr algn="ctr"/>
+                  <a:endParaRPr lang="en-US" altLang="ja-JP" sz="1200" b="1" u="sng" dirty="0">
+                    <a:highlight>
+                      <a:srgbClr val="FFFFFF"/>
+                    </a:highlight>
+                    <a:latin typeface="Comic Sans MS"/>
+                    <a:ea typeface="ＭＳ Ｐゴシック"/>
+                  </a:endParaRPr>
+                </a:p>
+                <a:p>
+                  <a:pPr algn="ctr"/>
+                  <a:r>
+                    <a:rPr lang="en-US" altLang="ja-JP" sz="1200" b="1" u="sng">
+                      <a:highlight>
+                        <a:srgbClr val="FFFFFF"/>
+                      </a:highlight>
+                      <a:latin typeface="Comic Sans MS"/>
+                      <a:ea typeface="ＭＳ Ｐゴシック"/>
+                    </a:rPr>
+                    <a:t>GaiGene.com</a:t>
+                  </a:r>
+                  <a:endParaRPr lang="en-US" altLang="ja-JP" sz="1200" b="1" u="sng" dirty="0">
+                    <a:highlight>
+                      <a:srgbClr val="FFFFFF"/>
+                    </a:highlight>
+                    <a:latin typeface="Comic Sans MS"/>
+                    <a:ea typeface="ＭＳ Ｐゴシック"/>
+                  </a:endParaRPr>
+                </a:p>
+              </p:txBody>
+            </p:sp>
+          </p:grpSp>
+          <p:pic>
+            <p:nvPicPr>
+              <p:cNvPr id="36" name="Picture 35" descr="A qr code with a logo&#10;&#10;AI-generated content may be incorrect.">
+                <a:extLst>
+                  <a:ext uri="{FF2B5EF4-FFF2-40B4-BE49-F238E27FC236}">
+                    <a16:creationId xmlns:a16="http://schemas.microsoft.com/office/drawing/2014/main" id="{DA9E1118-9430-677F-768E-472EFBFEA1D2}"/>
+                  </a:ext>
+                </a:extLst>
+              </p:cNvPr>
+              <p:cNvPicPr>
+                <a:picLocks noChangeAspect="1"/>
+              </p:cNvPicPr>
+              <p:nvPr/>
+            </p:nvPicPr>
+            <p:blipFill>
+              <a:blip r:embed="rId6"/>
+              <a:stretch>
+                <a:fillRect/>
+              </a:stretch>
+            </p:blipFill>
+            <p:spPr>
+              <a:xfrm>
+                <a:off x="5437536" y="1632754"/>
+                <a:ext cx="962025" cy="962025"/>
+              </a:xfrm>
+              <a:prstGeom prst="rect">
+                <a:avLst/>
+              </a:prstGeom>
+            </p:spPr>
+          </p:pic>
+        </p:grpSp>
+      </p:grpSp>
+    </p:spTree>
+    <p:extLst>
+      <p:ext uri="{BB962C8B-B14F-4D97-AF65-F5344CB8AC3E}">
+        <p14:creationId xmlns:p14="http://schemas.microsoft.com/office/powerpoint/2010/main" val="32981385"/>
+      </p:ext>
+    </p:extLst>
+  </p:cSld>
+  <p:clrMapOvr>
+    <a:masterClrMapping/>
+  </p:clrMapOvr>
+</p:sld>
+</file>
+
+<file path=ppt/slides/slide3.xml><?xml version="1.0" encoding="utf-8"?>
+<p:sld xmlns:a="http://schemas.openxmlformats.org/drawingml/2006/main" xmlns:r="http://schemas.openxmlformats.org/officeDocument/2006/relationships" xmlns:p="http://schemas.openxmlformats.org/presentationml/2006/main">
+  <p:cSld>
+    <p:spTree>
+      <p:nvGrpSpPr>
+        <p:cNvPr id="1" name="">
+          <a:extLst>
+            <a:ext uri="{FF2B5EF4-FFF2-40B4-BE49-F238E27FC236}">
+              <a16:creationId xmlns:a16="http://schemas.microsoft.com/office/drawing/2014/main" id="{AE98CF16-74BB-170D-2427-345BE75AF60C}"/>
+            </a:ext>
+          </a:extLst>
+        </p:cNvPr>
+        <p:cNvGrpSpPr/>
+        <p:nvPr/>
+      </p:nvGrpSpPr>
+      <p:grpSpPr>
+        <a:xfrm>
+          <a:off x="0" y="0"/>
+          <a:ext cx="0" cy="0"/>
+          <a:chOff x="0" y="0"/>
+          <a:chExt cx="0" cy="0"/>
+        </a:xfrm>
+      </p:grpSpPr>
+      <p:grpSp>
+        <p:nvGrpSpPr>
+          <p:cNvPr id="10" name="Group 9">
+            <a:extLst>
+              <a:ext uri="{FF2B5EF4-FFF2-40B4-BE49-F238E27FC236}">
+                <a16:creationId xmlns:a16="http://schemas.microsoft.com/office/drawing/2014/main" id="{18E8F998-19E6-B433-1AB8-D622D1C90F6C}"/>
+              </a:ext>
+            </a:extLst>
+          </p:cNvPr>
+          <p:cNvGrpSpPr/>
+          <p:nvPr/>
+        </p:nvGrpSpPr>
+        <p:grpSpPr>
+          <a:xfrm>
+            <a:off x="2512522" y="1914042"/>
+            <a:ext cx="2948201" cy="2598353"/>
             <a:chOff x="2372789" y="2110700"/>
-            <a:chExt cx="3094337" cy="2591241"/>
+            <a:chExt cx="3094337" cy="2598353"/>
           </a:xfrm>
         </p:grpSpPr>
         <p:sp>
@@ -3308,7 +5593,7 @@
             <p:cNvPr id="11" name="Hexagon 10">
               <a:extLst>
                 <a:ext uri="{FF2B5EF4-FFF2-40B4-BE49-F238E27FC236}">
-                  <a16:creationId xmlns:a16="http://schemas.microsoft.com/office/drawing/2014/main" id="{7CBC08F4-7179-1522-0142-FC2B79FD0FAE}"/>
+                  <a16:creationId xmlns:a16="http://schemas.microsoft.com/office/drawing/2014/main" id="{563C59C8-F02C-91B7-92A1-4FE45BD222B2}"/>
                 </a:ext>
               </a:extLst>
             </p:cNvPr>
@@ -3351,7 +5636,7 @@
             <a:lstStyle/>
             <a:p>
               <a:pPr algn="ctr"/>
-              <a:endParaRPr lang="en-US" dirty="0"/>
+              <a:endParaRPr lang="en-US" u="sng" dirty="0"/>
             </a:p>
           </p:txBody>
         </p:sp>
@@ -3360,7 +5645,7 @@
             <p:cNvPr id="12" name="Picture 11" descr="A logo of a bee&#10;&#10;AI-generated content may be incorrect.">
               <a:extLst>
                 <a:ext uri="{FF2B5EF4-FFF2-40B4-BE49-F238E27FC236}">
-                  <a16:creationId xmlns:a16="http://schemas.microsoft.com/office/drawing/2014/main" id="{B1B8B15C-2EE8-06E1-0746-8E8EA326A4E7}"/>
+                  <a16:creationId xmlns:a16="http://schemas.microsoft.com/office/drawing/2014/main" id="{8F46C711-4058-FE00-042E-1545BC05AF17}"/>
                 </a:ext>
               </a:extLst>
             </p:cNvPr>
@@ -3390,7 +5675,7 @@
             <p:cNvPr id="13" name="TextBox 12">
               <a:extLst>
                 <a:ext uri="{FF2B5EF4-FFF2-40B4-BE49-F238E27FC236}">
-                  <a16:creationId xmlns:a16="http://schemas.microsoft.com/office/drawing/2014/main" id="{6CC3EDB6-0A31-5785-B75C-71C3535EBC73}"/>
+                  <a16:creationId xmlns:a16="http://schemas.microsoft.com/office/drawing/2014/main" id="{1EB470AF-7241-1A96-F82A-3B4301251FDE}"/>
                 </a:ext>
               </a:extLst>
             </p:cNvPr>
@@ -3399,8 +5684,8 @@
           </p:nvSpPr>
           <p:spPr>
             <a:xfrm>
-              <a:off x="2512295" y="3683490"/>
-              <a:ext cx="2743199" cy="1015663"/>
+              <a:off x="2545163" y="3662613"/>
+              <a:ext cx="2743199" cy="1046440"/>
             </a:xfrm>
             <a:prstGeom prst="rect">
               <a:avLst/>
@@ -3418,7 +5703,7 @@
             <a:p>
               <a:pPr algn="ctr"/>
               <a:r>
-                <a:rPr lang="ja-JP" sz="1200" b="1">
+                <a:rPr lang="ja-JP" sz="1400" b="1" u="sng">
                   <a:highlight>
                     <a:srgbClr val="FFFFFF"/>
                   </a:highlight>
@@ -3427,7 +5712,7 @@
                 </a:rPr>
                 <a:t>山葵</a:t>
               </a:r>
-              <a:endParaRPr lang="en-US" sz="1200">
+              <a:endParaRPr lang="en-US" sz="1400" u="sng">
                 <a:highlight>
                   <a:srgbClr val="FFFFFF"/>
                 </a:highlight>
@@ -3438,7 +5723,7 @@
             <a:p>
               <a:pPr algn="ctr"/>
               <a:r>
-                <a:rPr lang="ja-JP" sz="1200" b="1">
+                <a:rPr lang="ja-JP" sz="1200" b="1" u="sng">
                   <a:highlight>
                     <a:srgbClr val="FFFFFF"/>
                   </a:highlight>
@@ -3447,7 +5732,7 @@
                 </a:rPr>
                 <a:t>わさび</a:t>
               </a:r>
-              <a:endParaRPr lang="en-US" sz="1200">
+              <a:endParaRPr lang="en-US" sz="1200" u="sng">
                 <a:highlight>
                   <a:srgbClr val="FFFFFF"/>
                 </a:highlight>
@@ -3458,7 +5743,7 @@
             <a:p>
               <a:pPr algn="ctr"/>
               <a:r>
-                <a:rPr lang="ja-JP" sz="1200" b="1">
+                <a:rPr lang="ja-JP" sz="1200" b="1" u="sng">
                   <a:highlight>
                     <a:srgbClr val="FFFFFF"/>
                   </a:highlight>
@@ -3467,7 +5752,7 @@
                 </a:rPr>
                 <a:t>ワサビ</a:t>
               </a:r>
-              <a:endParaRPr lang="en-US" sz="1200">
+              <a:endParaRPr lang="en-US" sz="1200" u="sng">
                 <a:highlight>
                   <a:srgbClr val="FFFFFF"/>
                 </a:highlight>
@@ -3477,7 +5762,7 @@
             <a:p>
               <a:pPr algn="ctr"/>
               <a:r>
-                <a:rPr lang="en-US" sz="1200" b="1" err="1">
+                <a:rPr lang="en-US" sz="1200" b="1" u="sng" dirty="0" err="1">
                   <a:highlight>
                     <a:srgbClr val="FFFFFF"/>
                   </a:highlight>
@@ -3486,7 +5771,7 @@
                 <a:t>Wa</a:t>
               </a:r>
               <a:r>
-                <a:rPr lang="en-US" sz="1200" b="1">
+                <a:rPr lang="en-US" sz="1200" b="1" u="sng" dirty="0">
                   <a:highlight>
                     <a:srgbClr val="FFFFFF"/>
                   </a:highlight>
@@ -3495,7 +5780,7 @@
                 <a:t>-</a:t>
               </a:r>
               <a:r>
-                <a:rPr lang="en-US" sz="1200" b="1" err="1">
+                <a:rPr lang="en-US" sz="1200" b="1" u="sng" dirty="0" err="1">
                   <a:highlight>
                     <a:srgbClr val="FFFFFF"/>
                   </a:highlight>
@@ -3504,7 +5789,7 @@
                 <a:t>sa</a:t>
               </a:r>
               <a:r>
-                <a:rPr lang="en-US" sz="1200" b="1">
+                <a:rPr lang="en-US" sz="1200" b="1" u="sng" dirty="0">
                   <a:highlight>
                     <a:srgbClr val="FFFFFF"/>
                   </a:highlight>
@@ -3512,7 +5797,7 @@
                 </a:rPr>
                 <a:t>-Bee</a:t>
               </a:r>
-              <a:endParaRPr lang="en-US" sz="1200">
+              <a:endParaRPr lang="en-US" sz="1200" u="sng" dirty="0">
                 <a:highlight>
                   <a:srgbClr val="FFFFFF"/>
                 </a:highlight>
@@ -3522,7 +5807,7 @@
             <a:p>
               <a:pPr algn="ctr"/>
               <a:r>
-                <a:rPr lang="en-US" sz="1200" b="1">
+                <a:rPr lang="en-US" sz="1200" b="1" u="sng">
                   <a:highlight>
                     <a:srgbClr val="FFFFFF"/>
                   </a:highlight>
@@ -3530,7 +5815,7 @@
                 </a:rPr>
                 <a:t>Japanese  horseradish</a:t>
               </a:r>
-              <a:endParaRPr lang="en-US" sz="1200">
+              <a:endParaRPr lang="en-US" sz="1200" u="sng">
                 <a:highlight>
                   <a:srgbClr val="FFFFFF"/>
                 </a:highlight>
@@ -3540,12 +5825,189 @@
           </p:txBody>
         </p:sp>
       </p:grpSp>
+      <p:sp>
+        <p:nvSpPr>
+          <p:cNvPr id="4" name="Hexagon 3">
+            <a:extLst>
+              <a:ext uri="{FF2B5EF4-FFF2-40B4-BE49-F238E27FC236}">
+                <a16:creationId xmlns:a16="http://schemas.microsoft.com/office/drawing/2014/main" id="{80225327-ADC9-2C41-D236-5ABDE55BB034}"/>
+              </a:ext>
+            </a:extLst>
+          </p:cNvPr>
+          <p:cNvSpPr/>
+          <p:nvPr/>
+        </p:nvSpPr>
+        <p:spPr>
+          <a:xfrm>
+            <a:off x="182911" y="165726"/>
+            <a:ext cx="1904368" cy="1742298"/>
+          </a:xfrm>
+          <a:prstGeom prst="hexagon">
+            <a:avLst/>
+          </a:prstGeom>
+          <a:noFill/>
+        </p:spPr>
+        <p:style>
+          <a:lnRef idx="2">
+            <a:schemeClr val="accent1">
+              <a:shade val="15000"/>
+            </a:schemeClr>
+          </a:lnRef>
+          <a:fillRef idx="1">
+            <a:schemeClr val="accent1"/>
+          </a:fillRef>
+          <a:effectRef idx="0">
+            <a:schemeClr val="accent1"/>
+          </a:effectRef>
+          <a:fontRef idx="minor">
+            <a:schemeClr val="lt1"/>
+          </a:fontRef>
+        </p:style>
+        <p:txBody>
+          <a:bodyPr rot="0" spcFirstLastPara="0" vertOverflow="overflow" horzOverflow="overflow" vert="horz" wrap="square" lIns="91440" tIns="45720" rIns="91440" bIns="45720" numCol="1" spcCol="0" rtlCol="0" fromWordArt="0" anchor="b" anchorCtr="0" forceAA="0" compatLnSpc="1">
+            <a:prstTxWarp prst="textNoShape">
+              <a:avLst/>
+            </a:prstTxWarp>
+            <a:noAutofit/>
+          </a:bodyPr>
+          <a:lstStyle/>
+          <a:p>
+            <a:pPr algn="ctr"/>
+            <a:endParaRPr lang="en-US" u="sng" dirty="0"/>
+          </a:p>
+        </p:txBody>
+      </p:sp>
+      <p:sp>
+        <p:nvSpPr>
+          <p:cNvPr id="6" name="TextBox 5">
+            <a:extLst>
+              <a:ext uri="{FF2B5EF4-FFF2-40B4-BE49-F238E27FC236}">
+                <a16:creationId xmlns:a16="http://schemas.microsoft.com/office/drawing/2014/main" id="{138696EB-71D7-A673-EF0D-FB598979D11F}"/>
+              </a:ext>
+            </a:extLst>
+          </p:cNvPr>
+          <p:cNvSpPr txBox="1"/>
+          <p:nvPr/>
+        </p:nvSpPr>
+        <p:spPr>
+          <a:xfrm>
+            <a:off x="214609" y="1202725"/>
+            <a:ext cx="1854834" cy="646331"/>
+          </a:xfrm>
+          <a:prstGeom prst="rect">
+            <a:avLst/>
+          </a:prstGeom>
+          <a:noFill/>
+        </p:spPr>
+        <p:txBody>
+          <a:bodyPr rot="0" spcFirstLastPara="0" vertOverflow="overflow" horzOverflow="overflow" vert="horz" wrap="square" lIns="91440" tIns="45720" rIns="91440" bIns="45720" numCol="1" spcCol="0" rtlCol="0" fromWordArt="0" anchor="t" anchorCtr="0" forceAA="0" compatLnSpc="1">
+            <a:prstTxWarp prst="textNoShape">
+              <a:avLst/>
+            </a:prstTxWarp>
+            <a:spAutoFit/>
+          </a:bodyPr>
+          <a:lstStyle/>
+          <a:p>
+            <a:pPr algn="ctr"/>
+            <a:r>
+              <a:rPr lang="ja-JP" sz="1200" b="1" u="sng">
+                <a:highlight>
+                  <a:srgbClr val="FFFFFF"/>
+                </a:highlight>
+                <a:latin typeface="Comic Sans MS"/>
+                <a:ea typeface="ＭＳ Ｐゴシック"/>
+              </a:rPr>
+              <a:t>び</a:t>
+            </a:r>
+            <a:endParaRPr lang="ja-JP" altLang="en-US" sz="1200" u="sng">
+              <a:highlight>
+                <a:srgbClr val="FFFFFF"/>
+              </a:highlight>
+              <a:latin typeface="Comic Sans MS"/>
+              <a:ea typeface="ＭＳ Ｐゴシック"/>
+            </a:endParaRPr>
+          </a:p>
+          <a:p>
+            <a:pPr algn="ctr"/>
+            <a:r>
+              <a:rPr lang="ja-JP" sz="1200" b="1" u="sng">
+                <a:solidFill>
+                  <a:srgbClr val="272320"/>
+                </a:solidFill>
+                <a:highlight>
+                  <a:srgbClr val="FFFFFF"/>
+                </a:highlight>
+                <a:latin typeface="Comic Sans MS"/>
+                <a:ea typeface="ＭＳ Ｐゴシック"/>
+              </a:rPr>
+              <a:t>ビ</a:t>
+            </a:r>
+            <a:endParaRPr lang="ja-JP" altLang="en-US" sz="1200" u="sng">
+              <a:solidFill>
+                <a:srgbClr val="272320"/>
+              </a:solidFill>
+              <a:highlight>
+                <a:srgbClr val="FFFFFF"/>
+              </a:highlight>
+              <a:latin typeface="Comic Sans MS"/>
+            </a:endParaRPr>
+          </a:p>
+          <a:p>
+            <a:pPr algn="ctr"/>
+            <a:r>
+              <a:rPr lang="en-US" sz="1200" b="1" u="sng">
+                <a:solidFill>
+                  <a:srgbClr val="272320"/>
+                </a:solidFill>
+                <a:highlight>
+                  <a:srgbClr val="FFFFFF"/>
+                </a:highlight>
+                <a:latin typeface="Comic Sans MS"/>
+              </a:rPr>
+              <a:t>Bee</a:t>
+            </a:r>
+            <a:endParaRPr lang="en-US" sz="1200" u="sng">
+              <a:latin typeface="Comic Sans MS"/>
+            </a:endParaRPr>
+          </a:p>
+        </p:txBody>
+      </p:sp>
+      <p:pic>
+        <p:nvPicPr>
+          <p:cNvPr id="14" name="Picture 13" descr="A logo of a bee&#10;&#10;AI-generated content may be incorrect.">
+            <a:extLst>
+              <a:ext uri="{FF2B5EF4-FFF2-40B4-BE49-F238E27FC236}">
+                <a16:creationId xmlns:a16="http://schemas.microsoft.com/office/drawing/2014/main" id="{B0714414-EEF2-C630-ABB6-A6117DEAE52D}"/>
+              </a:ext>
+            </a:extLst>
+          </p:cNvPr>
+          <p:cNvPicPr>
+            <a:picLocks noChangeAspect="1"/>
+          </p:cNvPicPr>
+          <p:nvPr/>
+        </p:nvPicPr>
+        <p:blipFill>
+          <a:blip r:embed="rId3"/>
+          <a:stretch>
+            <a:fillRect/>
+          </a:stretch>
+        </p:blipFill>
+        <p:spPr>
+          <a:xfrm>
+            <a:off x="578815" y="3730"/>
+            <a:ext cx="1017760" cy="1222655"/>
+          </a:xfrm>
+          <a:prstGeom prst="rect">
+            <a:avLst/>
+          </a:prstGeom>
+        </p:spPr>
+      </p:pic>
       <p:grpSp>
         <p:nvGrpSpPr>
-          <p:cNvPr id="15" name="Group 14">
+          <p:cNvPr id="16" name="Group 15">
             <a:extLst>
               <a:ext uri="{FF2B5EF4-FFF2-40B4-BE49-F238E27FC236}">
-                <a16:creationId xmlns:a16="http://schemas.microsoft.com/office/drawing/2014/main" id="{C5444E16-4A35-7B46-7E77-F72DF2E25C7F}"/>
+                <a16:creationId xmlns:a16="http://schemas.microsoft.com/office/drawing/2014/main" id="{C8E8FFEF-0383-D2C5-9126-6091272BC1D6}"/>
               </a:ext>
             </a:extLst>
           </p:cNvPr>
@@ -3554,18 +6016,18 @@
         </p:nvGrpSpPr>
         <p:grpSpPr>
           <a:xfrm>
-            <a:off x="1957434" y="504771"/>
-            <a:ext cx="3094337" cy="2749800"/>
-            <a:chOff x="2372789" y="1952141"/>
-            <a:chExt cx="3094337" cy="2749800"/>
+            <a:off x="-5151" y="2778942"/>
+            <a:ext cx="3094337" cy="2591241"/>
+            <a:chOff x="2372789" y="2110700"/>
+            <a:chExt cx="3094337" cy="2591241"/>
           </a:xfrm>
         </p:grpSpPr>
         <p:grpSp>
           <p:nvGrpSpPr>
-            <p:cNvPr id="9" name="Group 8">
+            <p:cNvPr id="17" name="Group 16">
               <a:extLst>
                 <a:ext uri="{FF2B5EF4-FFF2-40B4-BE49-F238E27FC236}">
-                  <a16:creationId xmlns:a16="http://schemas.microsoft.com/office/drawing/2014/main" id="{8961A5D5-C6AE-29DB-6917-0B430107DA93}"/>
+                  <a16:creationId xmlns:a16="http://schemas.microsoft.com/office/drawing/2014/main" id="{FD6F892B-6288-5834-FA27-D0314881E9EF}"/>
                 </a:ext>
               </a:extLst>
             </p:cNvPr>
@@ -3582,10 +6044,3058 @@
           </p:grpSpPr>
           <p:sp>
             <p:nvSpPr>
-              <p:cNvPr id="4" name="Hexagon 3">
+              <p:cNvPr id="19" name="Hexagon 18">
                 <a:extLst>
                   <a:ext uri="{FF2B5EF4-FFF2-40B4-BE49-F238E27FC236}">
-                    <a16:creationId xmlns:a16="http://schemas.microsoft.com/office/drawing/2014/main" id="{33511B7C-CBB2-0245-F1DD-064464C7C00E}"/>
+                    <a16:creationId xmlns:a16="http://schemas.microsoft.com/office/drawing/2014/main" id="{9ACA411F-5FAA-1A00-56C2-004E14DF12A0}"/>
+                  </a:ext>
+                </a:extLst>
+              </p:cNvPr>
+              <p:cNvSpPr/>
+              <p:nvPr/>
+            </p:nvSpPr>
+            <p:spPr>
+              <a:xfrm>
+                <a:off x="2372789" y="2110700"/>
+                <a:ext cx="3094337" cy="2591241"/>
+              </a:xfrm>
+              <a:prstGeom prst="hexagon">
+                <a:avLst/>
+              </a:prstGeom>
+              <a:noFill/>
+            </p:spPr>
+            <p:style>
+              <a:lnRef idx="2">
+                <a:schemeClr val="accent1">
+                  <a:shade val="15000"/>
+                </a:schemeClr>
+              </a:lnRef>
+              <a:fillRef idx="1">
+                <a:schemeClr val="accent1"/>
+              </a:fillRef>
+              <a:effectRef idx="0">
+                <a:schemeClr val="accent1"/>
+              </a:effectRef>
+              <a:fontRef idx="minor">
+                <a:schemeClr val="lt1"/>
+              </a:fontRef>
+            </p:style>
+            <p:txBody>
+              <a:bodyPr rot="0" spcFirstLastPara="0" vertOverflow="overflow" horzOverflow="overflow" vert="horz" wrap="square" lIns="91440" tIns="45720" rIns="91440" bIns="45720" numCol="1" spcCol="0" rtlCol="0" fromWordArt="0" anchor="b" anchorCtr="0" forceAA="0" compatLnSpc="1">
+                <a:prstTxWarp prst="textNoShape">
+                  <a:avLst/>
+                </a:prstTxWarp>
+                <a:noAutofit/>
+              </a:bodyPr>
+              <a:lstStyle/>
+              <a:p>
+                <a:pPr algn="ctr"/>
+                <a:endParaRPr lang="en-US" u="sng" dirty="0"/>
+              </a:p>
+            </p:txBody>
+          </p:sp>
+          <p:sp>
+            <p:nvSpPr>
+              <p:cNvPr id="20" name="TextBox 19">
+                <a:extLst>
+                  <a:ext uri="{FF2B5EF4-FFF2-40B4-BE49-F238E27FC236}">
+                    <a16:creationId xmlns:a16="http://schemas.microsoft.com/office/drawing/2014/main" id="{EFEC5268-0732-7AF3-47FA-9D31E4306101}"/>
+                  </a:ext>
+                </a:extLst>
+              </p:cNvPr>
+              <p:cNvSpPr txBox="1"/>
+              <p:nvPr/>
+            </p:nvSpPr>
+            <p:spPr>
+              <a:xfrm>
+                <a:off x="2542775" y="3409170"/>
+                <a:ext cx="2743199" cy="830997"/>
+              </a:xfrm>
+              <a:prstGeom prst="rect">
+                <a:avLst/>
+              </a:prstGeom>
+              <a:noFill/>
+            </p:spPr>
+            <p:txBody>
+              <a:bodyPr rot="0" spcFirstLastPara="0" vertOverflow="overflow" horzOverflow="overflow" vert="horz" wrap="square" lIns="91440" tIns="45720" rIns="91440" bIns="45720" numCol="1" spcCol="0" rtlCol="0" fromWordArt="0" anchor="t" anchorCtr="0" forceAA="0" compatLnSpc="1">
+                <a:prstTxWarp prst="textNoShape">
+                  <a:avLst/>
+                </a:prstTxWarp>
+                <a:spAutoFit/>
+              </a:bodyPr>
+              <a:lstStyle/>
+              <a:p>
+                <a:pPr algn="ctr"/>
+                <a:r>
+                  <a:rPr lang="ja-JP" altLang="en-US" sz="1200" b="1" u="sng">
+                    <a:highlight>
+                      <a:srgbClr val="FFFFFF"/>
+                    </a:highlight>
+                    <a:latin typeface="Comic Sans MS"/>
+                    <a:ea typeface="ＭＳ Ｐゴシック"/>
+                  </a:rPr>
+                  <a:t>ち</a:t>
+                </a:r>
+                <a:r>
+                  <a:rPr lang="ja-JP" sz="1200" b="1" u="sng">
+                    <a:highlight>
+                      <a:srgbClr val="FFFFFF"/>
+                    </a:highlight>
+                    <a:latin typeface="Comic Sans MS"/>
+                    <a:ea typeface="ＭＳ Ｐゴシック"/>
+                  </a:rPr>
+                  <a:t>び</a:t>
+                </a:r>
+                <a:endParaRPr lang="ja-JP" sz="1200" u="sng">
+                  <a:highlight>
+                    <a:srgbClr val="FFFFFF"/>
+                  </a:highlight>
+                  <a:latin typeface="Comic Sans MS"/>
+                  <a:ea typeface="ＭＳ Ｐゴシック"/>
+                </a:endParaRPr>
+              </a:p>
+              <a:p>
+                <a:pPr algn="ctr"/>
+                <a:r>
+                  <a:rPr lang="ja-JP" altLang="en-US" sz="1200" b="1" u="sng">
+                    <a:highlight>
+                      <a:srgbClr val="FFFFFF"/>
+                    </a:highlight>
+                    <a:latin typeface="Comic Sans MS"/>
+                    <a:ea typeface="ＭＳ Ｐゴシック"/>
+                  </a:rPr>
+                  <a:t>チ</a:t>
+                </a:r>
+                <a:r>
+                  <a:rPr lang="ja-JP" sz="1200" b="1" u="sng">
+                    <a:highlight>
+                      <a:srgbClr val="FFFFFF"/>
+                    </a:highlight>
+                    <a:latin typeface="Comic Sans MS"/>
+                    <a:ea typeface="ＭＳ Ｐゴシック"/>
+                  </a:rPr>
+                  <a:t>ビ</a:t>
+                </a:r>
+                <a:endParaRPr lang="ja-JP" sz="1200" u="sng">
+                  <a:highlight>
+                    <a:srgbClr val="FFFFFF"/>
+                  </a:highlight>
+                  <a:latin typeface="Comic Sans MS"/>
+                </a:endParaRPr>
+              </a:p>
+              <a:p>
+                <a:pPr algn="ctr"/>
+                <a:r>
+                  <a:rPr lang="en-US" sz="1200" b="1" u="sng">
+                    <a:highlight>
+                      <a:srgbClr val="FFFFFF"/>
+                    </a:highlight>
+                    <a:latin typeface="Comic Sans MS"/>
+                  </a:rPr>
+                  <a:t>Chi-Bee</a:t>
+                </a:r>
+                <a:endParaRPr lang="ja-JP" altLang="en-US" sz="1200" u="sng">
+                  <a:highlight>
+                    <a:srgbClr val="FFFFFF"/>
+                  </a:highlight>
+                  <a:latin typeface="Comic Sans MS"/>
+                </a:endParaRPr>
+              </a:p>
+              <a:p>
+                <a:pPr algn="ctr"/>
+                <a:r>
+                  <a:rPr lang="en-US" sz="1200" b="1" u="sng">
+                    <a:highlight>
+                      <a:srgbClr val="FFFFFF"/>
+                    </a:highlight>
+                    <a:latin typeface="Comic Sans MS"/>
+                  </a:rPr>
+                  <a:t>Small, tiny, little one</a:t>
+                </a:r>
+                <a:endParaRPr lang="en-US" altLang="ja-JP" u="sng"/>
+              </a:p>
+            </p:txBody>
+          </p:sp>
+        </p:grpSp>
+        <p:pic>
+          <p:nvPicPr>
+            <p:cNvPr id="18" name="Picture 17" descr="A logo of a bee&#10;&#10;AI-generated content may be incorrect.">
+              <a:extLst>
+                <a:ext uri="{FF2B5EF4-FFF2-40B4-BE49-F238E27FC236}">
+                  <a16:creationId xmlns:a16="http://schemas.microsoft.com/office/drawing/2014/main" id="{92FA8A81-3BA7-9510-5A7C-B7E209866F60}"/>
+                </a:ext>
+              </a:extLst>
+            </p:cNvPr>
+            <p:cNvPicPr>
+              <a:picLocks noChangeAspect="1"/>
+            </p:cNvPicPr>
+            <p:nvPr/>
+          </p:nvPicPr>
+          <p:blipFill>
+            <a:blip r:embed="rId3"/>
+            <a:stretch>
+              <a:fillRect/>
+            </a:stretch>
+          </p:blipFill>
+          <p:spPr>
+            <a:xfrm>
+              <a:off x="3416696" y="2399181"/>
+              <a:ext cx="783853" cy="932394"/>
+            </a:xfrm>
+            <a:prstGeom prst="rect">
+              <a:avLst/>
+            </a:prstGeom>
+          </p:spPr>
+        </p:pic>
+      </p:grpSp>
+      <p:grpSp>
+        <p:nvGrpSpPr>
+          <p:cNvPr id="32" name="Group 31">
+            <a:extLst>
+              <a:ext uri="{FF2B5EF4-FFF2-40B4-BE49-F238E27FC236}">
+                <a16:creationId xmlns:a16="http://schemas.microsoft.com/office/drawing/2014/main" id="{0D42AD94-7968-92C5-F06D-14B846F01273}"/>
+              </a:ext>
+            </a:extLst>
+          </p:cNvPr>
+          <p:cNvGrpSpPr/>
+          <p:nvPr/>
+        </p:nvGrpSpPr>
+        <p:grpSpPr>
+          <a:xfrm>
+            <a:off x="6513950" y="4236737"/>
+            <a:ext cx="2958639" cy="2616537"/>
+            <a:chOff x="8328694" y="3585662"/>
+            <a:chExt cx="3094337" cy="2626982"/>
+          </a:xfrm>
+        </p:grpSpPr>
+        <p:grpSp>
+          <p:nvGrpSpPr>
+            <p:cNvPr id="22" name="Group 21">
+              <a:extLst>
+                <a:ext uri="{FF2B5EF4-FFF2-40B4-BE49-F238E27FC236}">
+                  <a16:creationId xmlns:a16="http://schemas.microsoft.com/office/drawing/2014/main" id="{851BB1D0-4305-E538-7C95-6C6456931C7B}"/>
+                </a:ext>
+              </a:extLst>
+            </p:cNvPr>
+            <p:cNvGrpSpPr/>
+            <p:nvPr/>
+          </p:nvGrpSpPr>
+          <p:grpSpPr>
+            <a:xfrm>
+              <a:off x="8328694" y="3619717"/>
+              <a:ext cx="3094337" cy="2592927"/>
+              <a:chOff x="2414542" y="2110700"/>
+              <a:chExt cx="3094337" cy="2592927"/>
+            </a:xfrm>
+          </p:grpSpPr>
+          <p:sp>
+            <p:nvSpPr>
+              <p:cNvPr id="24" name="Hexagon 23">
+                <a:extLst>
+                  <a:ext uri="{FF2B5EF4-FFF2-40B4-BE49-F238E27FC236}">
+                    <a16:creationId xmlns:a16="http://schemas.microsoft.com/office/drawing/2014/main" id="{7DDFA975-CBDD-27DE-FE72-24085932D55B}"/>
+                  </a:ext>
+                </a:extLst>
+              </p:cNvPr>
+              <p:cNvSpPr/>
+              <p:nvPr/>
+            </p:nvSpPr>
+            <p:spPr>
+              <a:xfrm>
+                <a:off x="2414542" y="2110700"/>
+                <a:ext cx="3094337" cy="2591241"/>
+              </a:xfrm>
+              <a:prstGeom prst="hexagon">
+                <a:avLst/>
+              </a:prstGeom>
+              <a:noFill/>
+            </p:spPr>
+            <p:style>
+              <a:lnRef idx="2">
+                <a:schemeClr val="accent1">
+                  <a:shade val="15000"/>
+                </a:schemeClr>
+              </a:lnRef>
+              <a:fillRef idx="1">
+                <a:schemeClr val="accent1"/>
+              </a:fillRef>
+              <a:effectRef idx="0">
+                <a:schemeClr val="accent1"/>
+              </a:effectRef>
+              <a:fontRef idx="minor">
+                <a:schemeClr val="lt1"/>
+              </a:fontRef>
+            </p:style>
+            <p:txBody>
+              <a:bodyPr rot="0" spcFirstLastPara="0" vertOverflow="overflow" horzOverflow="overflow" vert="horz" wrap="square" lIns="91440" tIns="45720" rIns="91440" bIns="45720" numCol="1" spcCol="0" rtlCol="0" fromWordArt="0" anchor="b" anchorCtr="0" forceAA="0" compatLnSpc="1">
+                <a:prstTxWarp prst="textNoShape">
+                  <a:avLst/>
+                </a:prstTxWarp>
+                <a:noAutofit/>
+              </a:bodyPr>
+              <a:lstStyle/>
+              <a:p>
+                <a:pPr algn="ctr"/>
+                <a:endParaRPr lang="en-US" u="sng" dirty="0"/>
+              </a:p>
+            </p:txBody>
+          </p:sp>
+          <p:sp>
+            <p:nvSpPr>
+              <p:cNvPr id="25" name="TextBox 24">
+                <a:extLst>
+                  <a:ext uri="{FF2B5EF4-FFF2-40B4-BE49-F238E27FC236}">
+                    <a16:creationId xmlns:a16="http://schemas.microsoft.com/office/drawing/2014/main" id="{EC19A271-2CCC-24BD-FD86-1B81A049685A}"/>
+                  </a:ext>
+                </a:extLst>
+              </p:cNvPr>
+              <p:cNvSpPr txBox="1"/>
+              <p:nvPr/>
+            </p:nvSpPr>
+            <p:spPr>
+              <a:xfrm>
+                <a:off x="2542776" y="3653010"/>
+                <a:ext cx="2743199" cy="1050617"/>
+              </a:xfrm>
+              <a:prstGeom prst="rect">
+                <a:avLst/>
+              </a:prstGeom>
+              <a:noFill/>
+            </p:spPr>
+            <p:txBody>
+              <a:bodyPr rot="0" spcFirstLastPara="0" vertOverflow="overflow" horzOverflow="overflow" vert="horz" wrap="square" lIns="91440" tIns="45720" rIns="91440" bIns="45720" numCol="1" spcCol="0" rtlCol="0" fromWordArt="0" anchor="t" anchorCtr="0" forceAA="0" compatLnSpc="1">
+                <a:prstTxWarp prst="textNoShape">
+                  <a:avLst/>
+                </a:prstTxWarp>
+                <a:spAutoFit/>
+              </a:bodyPr>
+              <a:lstStyle/>
+              <a:p>
+                <a:pPr algn="ctr"/>
+                <a:r>
+                  <a:rPr lang="ja-JP" sz="1400" b="1" u="sng">
+                    <a:highlight>
+                      <a:srgbClr val="FFFFFF"/>
+                    </a:highlight>
+                    <a:latin typeface="Comic Sans MS"/>
+                    <a:ea typeface="ＭＳ Ｐゴシック"/>
+                  </a:rPr>
+                  <a:t>蛇</a:t>
+                </a:r>
+                <a:endParaRPr lang="ja-JP" altLang="en-US" sz="1400" u="sng">
+                  <a:highlight>
+                    <a:srgbClr val="FFFFFF"/>
+                  </a:highlight>
+                  <a:latin typeface="Comic Sans MS"/>
+                  <a:ea typeface="ＭＳ Ｐゴシック"/>
+                </a:endParaRPr>
+              </a:p>
+              <a:p>
+                <a:pPr algn="ctr"/>
+                <a:r>
+                  <a:rPr lang="ja-JP" altLang="en-US" sz="1200" b="1" u="sng">
+                    <a:highlight>
+                      <a:srgbClr val="FFFFFF"/>
+                    </a:highlight>
+                    <a:latin typeface="Comic Sans MS"/>
+                  </a:rPr>
+                  <a:t>へ</a:t>
+                </a:r>
+                <a:r>
+                  <a:rPr lang="ja-JP" sz="1200" b="1" u="sng">
+                    <a:highlight>
+                      <a:srgbClr val="FFFFFF"/>
+                    </a:highlight>
+                    <a:latin typeface="Comic Sans MS"/>
+                    <a:ea typeface="ＭＳ Ｐゴシック"/>
+                  </a:rPr>
+                  <a:t>び</a:t>
+                </a:r>
+                <a:endParaRPr lang="ja-JP" sz="1200" u="sng">
+                  <a:highlight>
+                    <a:srgbClr val="FFFFFF"/>
+                  </a:highlight>
+                  <a:latin typeface="Comic Sans MS"/>
+                  <a:ea typeface="ＭＳ Ｐゴシック"/>
+                </a:endParaRPr>
+              </a:p>
+              <a:p>
+                <a:pPr algn="ctr"/>
+                <a:r>
+                  <a:rPr lang="ja-JP" altLang="en-US" sz="1200" b="1" u="sng">
+                    <a:highlight>
+                      <a:srgbClr val="FFFFFF"/>
+                    </a:highlight>
+                    <a:latin typeface="Comic Sans MS"/>
+                  </a:rPr>
+                  <a:t>ヘ</a:t>
+                </a:r>
+                <a:r>
+                  <a:rPr lang="ja-JP" sz="1200" b="1" u="sng">
+                    <a:highlight>
+                      <a:srgbClr val="FFFFFF"/>
+                    </a:highlight>
+                    <a:latin typeface="Comic Sans MS"/>
+                    <a:ea typeface="ＭＳ Ｐゴシック"/>
+                  </a:rPr>
+                  <a:t>ビ</a:t>
+                </a:r>
+                <a:endParaRPr lang="ja-JP" sz="1200" u="sng">
+                  <a:highlight>
+                    <a:srgbClr val="FFFFFF"/>
+                  </a:highlight>
+                  <a:latin typeface="Comic Sans MS"/>
+                </a:endParaRPr>
+              </a:p>
+              <a:p>
+                <a:pPr algn="ctr"/>
+                <a:r>
+                  <a:rPr lang="en-US" sz="1200" b="1" u="sng">
+                    <a:highlight>
+                      <a:srgbClr val="FFFFFF"/>
+                    </a:highlight>
+                    <a:latin typeface="Comic Sans MS"/>
+                  </a:rPr>
+                  <a:t>He-Bee</a:t>
+                </a:r>
+                <a:endParaRPr lang="ja-JP" altLang="en-US" sz="1200" u="sng">
+                  <a:highlight>
+                    <a:srgbClr val="FFFFFF"/>
+                  </a:highlight>
+                  <a:latin typeface="Comic Sans MS"/>
+                </a:endParaRPr>
+              </a:p>
+              <a:p>
+                <a:pPr algn="ctr"/>
+                <a:r>
+                  <a:rPr lang="en-US" sz="1200" b="1" u="sng">
+                    <a:highlight>
+                      <a:srgbClr val="FFFFFF"/>
+                    </a:highlight>
+                    <a:latin typeface="Comic Sans MS"/>
+                  </a:rPr>
+                  <a:t>Snake</a:t>
+                </a:r>
+                <a:endParaRPr lang="ja-JP" u="sng"/>
+              </a:p>
+            </p:txBody>
+          </p:sp>
+        </p:grpSp>
+        <p:pic>
+          <p:nvPicPr>
+            <p:cNvPr id="26" name="Picture 25" descr="A yellow and black bee&#10;&#10;AI-generated content may be incorrect.">
+              <a:extLst>
+                <a:ext uri="{FF2B5EF4-FFF2-40B4-BE49-F238E27FC236}">
+                  <a16:creationId xmlns:a16="http://schemas.microsoft.com/office/drawing/2014/main" id="{47C21186-02C1-BE66-787F-D1C8B014A6EB}"/>
+                </a:ext>
+              </a:extLst>
+            </p:cNvPr>
+            <p:cNvPicPr>
+              <a:picLocks noChangeAspect="1"/>
+            </p:cNvPicPr>
+            <p:nvPr/>
+          </p:nvPicPr>
+          <p:blipFill>
+            <a:blip r:embed="rId4"/>
+            <a:stretch>
+              <a:fillRect/>
+            </a:stretch>
+          </p:blipFill>
+          <p:spPr>
+            <a:xfrm>
+              <a:off x="9014438" y="3585662"/>
+              <a:ext cx="1455420" cy="1559559"/>
+            </a:xfrm>
+            <a:prstGeom prst="rect">
+              <a:avLst/>
+            </a:prstGeom>
+          </p:spPr>
+        </p:pic>
+      </p:grpSp>
+      <p:grpSp>
+        <p:nvGrpSpPr>
+          <p:cNvPr id="5" name="Group 4">
+            <a:extLst>
+              <a:ext uri="{FF2B5EF4-FFF2-40B4-BE49-F238E27FC236}">
+                <a16:creationId xmlns:a16="http://schemas.microsoft.com/office/drawing/2014/main" id="{8DA6E94A-3295-798A-E481-A6FF8413EAFA}"/>
+              </a:ext>
+            </a:extLst>
+          </p:cNvPr>
+          <p:cNvGrpSpPr/>
+          <p:nvPr/>
+        </p:nvGrpSpPr>
+        <p:grpSpPr>
+          <a:xfrm>
+            <a:off x="9395110" y="4239738"/>
+            <a:ext cx="2969077" cy="2623178"/>
+            <a:chOff x="4551713" y="836834"/>
+            <a:chExt cx="2969077" cy="2623178"/>
+          </a:xfrm>
+        </p:grpSpPr>
+        <p:grpSp>
+          <p:nvGrpSpPr>
+            <p:cNvPr id="28" name="Group 27">
+              <a:extLst>
+                <a:ext uri="{FF2B5EF4-FFF2-40B4-BE49-F238E27FC236}">
+                  <a16:creationId xmlns:a16="http://schemas.microsoft.com/office/drawing/2014/main" id="{47F23B4B-7187-F260-7D5B-FB6FB253F15A}"/>
+                </a:ext>
+              </a:extLst>
+            </p:cNvPr>
+            <p:cNvGrpSpPr/>
+            <p:nvPr/>
+          </p:nvGrpSpPr>
+          <p:grpSpPr>
+            <a:xfrm>
+              <a:off x="4551713" y="840782"/>
+              <a:ext cx="2969077" cy="2619230"/>
+              <a:chOff x="2372789" y="2110700"/>
+              <a:chExt cx="2969077" cy="2619230"/>
+            </a:xfrm>
+          </p:grpSpPr>
+          <p:sp>
+            <p:nvSpPr>
+              <p:cNvPr id="30" name="Hexagon 29">
+                <a:extLst>
+                  <a:ext uri="{FF2B5EF4-FFF2-40B4-BE49-F238E27FC236}">
+                    <a16:creationId xmlns:a16="http://schemas.microsoft.com/office/drawing/2014/main" id="{3DBBFDEA-3912-740A-1D91-FD35DA22E74B}"/>
+                  </a:ext>
+                </a:extLst>
+              </p:cNvPr>
+              <p:cNvSpPr/>
+              <p:nvPr/>
+            </p:nvSpPr>
+            <p:spPr>
+              <a:xfrm>
+                <a:off x="2372789" y="2110700"/>
+                <a:ext cx="2969077" cy="2591241"/>
+              </a:xfrm>
+              <a:prstGeom prst="hexagon">
+                <a:avLst/>
+              </a:prstGeom>
+              <a:noFill/>
+            </p:spPr>
+            <p:style>
+              <a:lnRef idx="2">
+                <a:schemeClr val="accent1">
+                  <a:shade val="15000"/>
+                </a:schemeClr>
+              </a:lnRef>
+              <a:fillRef idx="1">
+                <a:schemeClr val="accent1"/>
+              </a:fillRef>
+              <a:effectRef idx="0">
+                <a:schemeClr val="accent1"/>
+              </a:effectRef>
+              <a:fontRef idx="minor">
+                <a:schemeClr val="lt1"/>
+              </a:fontRef>
+            </p:style>
+            <p:txBody>
+              <a:bodyPr rot="0" spcFirstLastPara="0" vertOverflow="overflow" horzOverflow="overflow" vert="horz" wrap="square" lIns="91440" tIns="45720" rIns="91440" bIns="45720" numCol="1" spcCol="0" rtlCol="0" fromWordArt="0" anchor="b" anchorCtr="0" forceAA="0" compatLnSpc="1">
+                <a:prstTxWarp prst="textNoShape">
+                  <a:avLst/>
+                </a:prstTxWarp>
+                <a:noAutofit/>
+              </a:bodyPr>
+              <a:lstStyle/>
+              <a:p>
+                <a:pPr algn="ctr"/>
+                <a:endParaRPr lang="en-US" u="sng" dirty="0"/>
+              </a:p>
+            </p:txBody>
+          </p:sp>
+          <p:sp>
+            <p:nvSpPr>
+              <p:cNvPr id="31" name="TextBox 30">
+                <a:extLst>
+                  <a:ext uri="{FF2B5EF4-FFF2-40B4-BE49-F238E27FC236}">
+                    <a16:creationId xmlns:a16="http://schemas.microsoft.com/office/drawing/2014/main" id="{A302CC8E-25A8-EC68-8950-7F4C4076A53D}"/>
+                  </a:ext>
+                </a:extLst>
+              </p:cNvPr>
+              <p:cNvSpPr txBox="1"/>
+              <p:nvPr/>
+            </p:nvSpPr>
+            <p:spPr>
+              <a:xfrm>
+                <a:off x="2512295" y="3683490"/>
+                <a:ext cx="2743199" cy="1046440"/>
+              </a:xfrm>
+              <a:prstGeom prst="rect">
+                <a:avLst/>
+              </a:prstGeom>
+              <a:noFill/>
+            </p:spPr>
+            <p:txBody>
+              <a:bodyPr rot="0" spcFirstLastPara="0" vertOverflow="overflow" horzOverflow="overflow" vert="horz" wrap="square" lIns="91440" tIns="45720" rIns="91440" bIns="45720" numCol="1" spcCol="0" rtlCol="0" fromWordArt="0" anchor="t" anchorCtr="0" forceAA="0" compatLnSpc="1">
+                <a:prstTxWarp prst="textNoShape">
+                  <a:avLst/>
+                </a:prstTxWarp>
+                <a:spAutoFit/>
+              </a:bodyPr>
+              <a:lstStyle/>
+              <a:p>
+                <a:pPr algn="ctr"/>
+                <a:r>
+                  <a:rPr lang="ja-JP" altLang="en-US" sz="1400" b="1" u="sng">
+                    <a:highlight>
+                      <a:srgbClr val="FFFFFF"/>
+                    </a:highlight>
+                    <a:latin typeface="Comic Sans MS"/>
+                    <a:ea typeface="ＭＳ Ｐゴシック"/>
+                  </a:rPr>
+                  <a:t>海老</a:t>
+                </a:r>
+                <a:endParaRPr lang="ja-JP" altLang="en-US" sz="1400" u="sng">
+                  <a:highlight>
+                    <a:srgbClr val="FFFFFF"/>
+                  </a:highlight>
+                  <a:latin typeface="Comic Sans MS"/>
+                  <a:ea typeface="ＭＳ Ｐゴシック"/>
+                </a:endParaRPr>
+              </a:p>
+              <a:p>
+                <a:pPr algn="ctr"/>
+                <a:r>
+                  <a:rPr lang="ja-JP" altLang="en-US" sz="1200" b="1" u="sng">
+                    <a:highlight>
+                      <a:srgbClr val="FFFFFF"/>
+                    </a:highlight>
+                    <a:latin typeface="Comic Sans MS"/>
+                    <a:ea typeface="ＭＳ Ｐゴシック"/>
+                  </a:rPr>
+                  <a:t>え</a:t>
+                </a:r>
+                <a:r>
+                  <a:rPr lang="ja-JP" sz="1200" b="1" u="sng">
+                    <a:highlight>
+                      <a:srgbClr val="FFFFFF"/>
+                    </a:highlight>
+                    <a:latin typeface="Comic Sans MS"/>
+                    <a:ea typeface="ＭＳ Ｐゴシック"/>
+                  </a:rPr>
+                  <a:t>び</a:t>
+                </a:r>
+                <a:endParaRPr lang="ja-JP" sz="1200" u="sng">
+                  <a:highlight>
+                    <a:srgbClr val="FFFFFF"/>
+                  </a:highlight>
+                  <a:latin typeface="Comic Sans MS"/>
+                  <a:ea typeface="ＭＳ Ｐゴシック"/>
+                </a:endParaRPr>
+              </a:p>
+              <a:p>
+                <a:pPr algn="ctr"/>
+                <a:r>
+                  <a:rPr lang="ja-JP" altLang="en-US" sz="1200" b="1" u="sng">
+                    <a:solidFill>
+                      <a:srgbClr val="272320"/>
+                    </a:solidFill>
+                    <a:highlight>
+                      <a:srgbClr val="FFFFFF"/>
+                    </a:highlight>
+                    <a:latin typeface="Comic Sans MS"/>
+                    <a:ea typeface="ＭＳ Ｐゴシック"/>
+                  </a:rPr>
+                  <a:t>エ</a:t>
+                </a:r>
+                <a:r>
+                  <a:rPr lang="ja-JP" sz="1200" b="1" u="sng">
+                    <a:solidFill>
+                      <a:srgbClr val="272320"/>
+                    </a:solidFill>
+                    <a:highlight>
+                      <a:srgbClr val="FFFFFF"/>
+                    </a:highlight>
+                    <a:latin typeface="Comic Sans MS"/>
+                    <a:ea typeface="ＭＳ Ｐゴシック"/>
+                  </a:rPr>
+                  <a:t>ビ</a:t>
+                </a:r>
+                <a:endParaRPr lang="ja-JP" sz="1200" u="sng">
+                  <a:solidFill>
+                    <a:srgbClr val="272320"/>
+                  </a:solidFill>
+                  <a:highlight>
+                    <a:srgbClr val="FFFFFF"/>
+                  </a:highlight>
+                  <a:latin typeface="Comic Sans MS"/>
+                </a:endParaRPr>
+              </a:p>
+              <a:p>
+                <a:pPr algn="ctr"/>
+                <a:r>
+                  <a:rPr lang="en-US" sz="1200" b="1" u="sng">
+                    <a:solidFill>
+                      <a:srgbClr val="272320"/>
+                    </a:solidFill>
+                    <a:highlight>
+                      <a:srgbClr val="FFFFFF"/>
+                    </a:highlight>
+                    <a:latin typeface="Comic Sans MS"/>
+                  </a:rPr>
+                  <a:t>E-Bee</a:t>
+                </a:r>
+                <a:endParaRPr lang="ja-JP" altLang="en-US" sz="1200" u="sng">
+                  <a:solidFill>
+                    <a:srgbClr val="272320"/>
+                  </a:solidFill>
+                  <a:highlight>
+                    <a:srgbClr val="FFFFFF"/>
+                  </a:highlight>
+                  <a:latin typeface="Comic Sans MS"/>
+                </a:endParaRPr>
+              </a:p>
+              <a:p>
+                <a:pPr algn="ctr"/>
+                <a:r>
+                  <a:rPr lang="en-US" sz="1200" b="1" u="sng">
+                    <a:solidFill>
+                      <a:srgbClr val="272320"/>
+                    </a:solidFill>
+                    <a:highlight>
+                      <a:srgbClr val="FFFFFF"/>
+                    </a:highlight>
+                    <a:latin typeface="Comic Sans MS"/>
+                  </a:rPr>
+                  <a:t>Shrimp</a:t>
+                </a:r>
+                <a:endParaRPr lang="en-US" altLang="ja-JP" u="sng"/>
+              </a:p>
+            </p:txBody>
+          </p:sp>
+        </p:grpSp>
+        <p:pic>
+          <p:nvPicPr>
+            <p:cNvPr id="33" name="Picture 32" descr="A drawing of a bee&#10;&#10;AI-generated content may be incorrect.">
+              <a:extLst>
+                <a:ext uri="{FF2B5EF4-FFF2-40B4-BE49-F238E27FC236}">
+                  <a16:creationId xmlns:a16="http://schemas.microsoft.com/office/drawing/2014/main" id="{1EF1254C-FCED-CC75-37CA-8D1DDE6EAD05}"/>
+                </a:ext>
+              </a:extLst>
+            </p:cNvPr>
+            <p:cNvPicPr>
+              <a:picLocks noChangeAspect="1"/>
+            </p:cNvPicPr>
+            <p:nvPr/>
+          </p:nvPicPr>
+          <p:blipFill>
+            <a:blip r:embed="rId5"/>
+            <a:stretch>
+              <a:fillRect/>
+            </a:stretch>
+          </p:blipFill>
+          <p:spPr>
+            <a:xfrm>
+              <a:off x="5397711" y="836834"/>
+              <a:ext cx="1642044" cy="1520143"/>
+            </a:xfrm>
+            <a:prstGeom prst="rect">
+              <a:avLst/>
+            </a:prstGeom>
+          </p:spPr>
+        </p:pic>
+      </p:grpSp>
+      <p:grpSp>
+        <p:nvGrpSpPr>
+          <p:cNvPr id="37" name="Group 36">
+            <a:extLst>
+              <a:ext uri="{FF2B5EF4-FFF2-40B4-BE49-F238E27FC236}">
+                <a16:creationId xmlns:a16="http://schemas.microsoft.com/office/drawing/2014/main" id="{20C9195B-CF39-6758-F409-D9ABCC840798}"/>
+              </a:ext>
+            </a:extLst>
+          </p:cNvPr>
+          <p:cNvGrpSpPr/>
+          <p:nvPr/>
+        </p:nvGrpSpPr>
+        <p:grpSpPr>
+          <a:xfrm>
+            <a:off x="1679404" y="5367625"/>
+            <a:ext cx="2743199" cy="2080989"/>
+            <a:chOff x="4560391" y="513790"/>
+            <a:chExt cx="2743199" cy="2080989"/>
+          </a:xfrm>
+        </p:grpSpPr>
+        <p:sp>
+          <p:nvSpPr>
+            <p:cNvPr id="35" name="TextBox 34">
+              <a:extLst>
+                <a:ext uri="{FF2B5EF4-FFF2-40B4-BE49-F238E27FC236}">
+                  <a16:creationId xmlns:a16="http://schemas.microsoft.com/office/drawing/2014/main" id="{6BD1D8F5-33B7-8C4E-376B-A88D51AC4CA6}"/>
+                </a:ext>
+              </a:extLst>
+            </p:cNvPr>
+            <p:cNvSpPr txBox="1"/>
+            <p:nvPr/>
+          </p:nvSpPr>
+          <p:spPr>
+            <a:xfrm>
+              <a:off x="4560391" y="513790"/>
+              <a:ext cx="2743199" cy="1200329"/>
+            </a:xfrm>
+            <a:prstGeom prst="rect">
+              <a:avLst/>
+            </a:prstGeom>
+            <a:noFill/>
+          </p:spPr>
+          <p:txBody>
+            <a:bodyPr rot="0" spcFirstLastPara="0" vertOverflow="overflow" horzOverflow="overflow" vert="horz" wrap="square" lIns="91440" tIns="45720" rIns="91440" bIns="45720" numCol="1" spcCol="0" rtlCol="0" fromWordArt="0" anchor="t" anchorCtr="0" forceAA="0" compatLnSpc="1">
+              <a:prstTxWarp prst="textNoShape">
+                <a:avLst/>
+              </a:prstTxWarp>
+              <a:spAutoFit/>
+            </a:bodyPr>
+            <a:lstStyle/>
+            <a:p>
+              <a:pPr algn="ctr"/>
+              <a:r>
+                <a:rPr lang="en-US" altLang="ja-JP" sz="2400" b="1" u="sng">
+                  <a:highlight>
+                    <a:srgbClr val="FFFFFF"/>
+                  </a:highlight>
+                  <a:latin typeface="Comic Sans MS"/>
+                  <a:ea typeface="ＭＳ Ｐゴシック"/>
+                </a:rPr>
+                <a:t>Types Of Bees</a:t>
+              </a:r>
+              <a:endParaRPr lang="en-US" u="sng">
+                <a:latin typeface="Aptos" panose="020B0004020202020204"/>
+                <a:ea typeface="ＭＳ Ｐゴシック"/>
+              </a:endParaRPr>
+            </a:p>
+            <a:p>
+              <a:pPr algn="ctr"/>
+              <a:r>
+                <a:rPr lang="en-US" altLang="ja-JP" sz="1200" b="1" u="sng">
+                  <a:highlight>
+                    <a:srgbClr val="FFFFFF"/>
+                  </a:highlight>
+                  <a:latin typeface="Comic Sans MS"/>
+                  <a:ea typeface="ＭＳ Ｐゴシック"/>
+                </a:rPr>
+                <a:t>Japanese-American</a:t>
+              </a:r>
+              <a:endParaRPr lang="en-US" u="sng"/>
+            </a:p>
+            <a:p>
+              <a:pPr algn="ctr"/>
+              <a:r>
+                <a:rPr lang="en-US" sz="1200" b="1" u="sng">
+                  <a:highlight>
+                    <a:srgbClr val="FFFFFF"/>
+                  </a:highlight>
+                  <a:latin typeface="Comic Sans MS"/>
+                  <a:ea typeface="ＭＳ Ｐゴシック"/>
+                </a:rPr>
+                <a:t>Pun Magnets</a:t>
+              </a:r>
+              <a:endParaRPr lang="en-US" u="sng"/>
+            </a:p>
+            <a:p>
+              <a:pPr algn="ctr"/>
+              <a:endParaRPr lang="en-US" altLang="ja-JP" sz="1200" b="1" u="sng" dirty="0">
+                <a:highlight>
+                  <a:srgbClr val="FFFFFF"/>
+                </a:highlight>
+                <a:latin typeface="Comic Sans MS"/>
+                <a:ea typeface="ＭＳ Ｐゴシック"/>
+              </a:endParaRPr>
+            </a:p>
+            <a:p>
+              <a:pPr algn="ctr"/>
+              <a:r>
+                <a:rPr lang="en-US" altLang="ja-JP" sz="1200" b="1" u="sng">
+                  <a:highlight>
+                    <a:srgbClr val="FFFFFF"/>
+                  </a:highlight>
+                  <a:latin typeface="Comic Sans MS"/>
+                  <a:ea typeface="ＭＳ Ｐゴシック"/>
+                </a:rPr>
+                <a:t>GaiGene.com</a:t>
+              </a:r>
+              <a:endParaRPr lang="en-US" altLang="ja-JP" sz="1200" b="1" u="sng" dirty="0">
+                <a:highlight>
+                  <a:srgbClr val="FFFFFF"/>
+                </a:highlight>
+                <a:latin typeface="Comic Sans MS"/>
+                <a:ea typeface="ＭＳ Ｐゴシック"/>
+              </a:endParaRPr>
+            </a:p>
+          </p:txBody>
+        </p:sp>
+        <p:pic>
+          <p:nvPicPr>
+            <p:cNvPr id="36" name="Picture 35" descr="A qr code with a logo&#10;&#10;AI-generated content may be incorrect.">
+              <a:extLst>
+                <a:ext uri="{FF2B5EF4-FFF2-40B4-BE49-F238E27FC236}">
+                  <a16:creationId xmlns:a16="http://schemas.microsoft.com/office/drawing/2014/main" id="{B3A07075-E4FD-7ECE-A14A-F7B6A81F8E70}"/>
+                </a:ext>
+              </a:extLst>
+            </p:cNvPr>
+            <p:cNvPicPr>
+              <a:picLocks noChangeAspect="1"/>
+            </p:cNvPicPr>
+            <p:nvPr/>
+          </p:nvPicPr>
+          <p:blipFill>
+            <a:blip r:embed="rId6"/>
+            <a:stretch>
+              <a:fillRect/>
+            </a:stretch>
+          </p:blipFill>
+          <p:spPr>
+            <a:xfrm>
+              <a:off x="5437536" y="1632754"/>
+              <a:ext cx="962025" cy="962025"/>
+            </a:xfrm>
+            <a:prstGeom prst="rect">
+              <a:avLst/>
+            </a:prstGeom>
+          </p:spPr>
+        </p:pic>
+      </p:grpSp>
+      <p:grpSp>
+        <p:nvGrpSpPr>
+          <p:cNvPr id="7" name="Group 6">
+            <a:extLst>
+              <a:ext uri="{FF2B5EF4-FFF2-40B4-BE49-F238E27FC236}">
+                <a16:creationId xmlns:a16="http://schemas.microsoft.com/office/drawing/2014/main" id="{B6E3396B-1868-0A0B-DF42-2BDEC4DB2F5F}"/>
+              </a:ext>
+            </a:extLst>
+          </p:cNvPr>
+          <p:cNvGrpSpPr/>
+          <p:nvPr/>
+        </p:nvGrpSpPr>
+        <p:grpSpPr>
+          <a:xfrm>
+            <a:off x="3429069" y="3060778"/>
+            <a:ext cx="3094337" cy="2591241"/>
+            <a:chOff x="2372789" y="2110700"/>
+            <a:chExt cx="3094337" cy="2591241"/>
+          </a:xfrm>
+        </p:grpSpPr>
+        <p:grpSp>
+          <p:nvGrpSpPr>
+            <p:cNvPr id="8" name="Group 7">
+              <a:extLst>
+                <a:ext uri="{FF2B5EF4-FFF2-40B4-BE49-F238E27FC236}">
+                  <a16:creationId xmlns:a16="http://schemas.microsoft.com/office/drawing/2014/main" id="{AF47B05F-C29C-2BB4-346F-75D79B706191}"/>
+                </a:ext>
+              </a:extLst>
+            </p:cNvPr>
+            <p:cNvGrpSpPr/>
+            <p:nvPr/>
+          </p:nvGrpSpPr>
+          <p:grpSpPr>
+            <a:xfrm>
+              <a:off x="2372789" y="2110700"/>
+              <a:ext cx="3094337" cy="2591241"/>
+              <a:chOff x="2372789" y="2110700"/>
+              <a:chExt cx="3094337" cy="2591241"/>
+            </a:xfrm>
+          </p:grpSpPr>
+          <p:sp>
+            <p:nvSpPr>
+              <p:cNvPr id="23" name="Hexagon 22">
+                <a:extLst>
+                  <a:ext uri="{FF2B5EF4-FFF2-40B4-BE49-F238E27FC236}">
+                    <a16:creationId xmlns:a16="http://schemas.microsoft.com/office/drawing/2014/main" id="{9C0FF22E-759C-7CC7-B687-55A5CEA2159D}"/>
+                  </a:ext>
+                </a:extLst>
+              </p:cNvPr>
+              <p:cNvSpPr/>
+              <p:nvPr/>
+            </p:nvSpPr>
+            <p:spPr>
+              <a:xfrm>
+                <a:off x="2372789" y="2110700"/>
+                <a:ext cx="3094337" cy="2591241"/>
+              </a:xfrm>
+              <a:prstGeom prst="hexagon">
+                <a:avLst/>
+              </a:prstGeom>
+              <a:noFill/>
+            </p:spPr>
+            <p:style>
+              <a:lnRef idx="2">
+                <a:schemeClr val="accent1">
+                  <a:shade val="15000"/>
+                </a:schemeClr>
+              </a:lnRef>
+              <a:fillRef idx="1">
+                <a:schemeClr val="accent1"/>
+              </a:fillRef>
+              <a:effectRef idx="0">
+                <a:schemeClr val="accent1"/>
+              </a:effectRef>
+              <a:fontRef idx="minor">
+                <a:schemeClr val="lt1"/>
+              </a:fontRef>
+            </p:style>
+            <p:txBody>
+              <a:bodyPr rot="0" spcFirstLastPara="0" vertOverflow="overflow" horzOverflow="overflow" vert="horz" wrap="square" lIns="91440" tIns="45720" rIns="91440" bIns="45720" numCol="1" spcCol="0" rtlCol="0" fromWordArt="0" anchor="b" anchorCtr="0" forceAA="0" compatLnSpc="1">
+                <a:prstTxWarp prst="textNoShape">
+                  <a:avLst/>
+                </a:prstTxWarp>
+                <a:noAutofit/>
+              </a:bodyPr>
+              <a:lstStyle/>
+              <a:p>
+                <a:pPr algn="ctr"/>
+                <a:endParaRPr lang="en-US" u="sng" dirty="0"/>
+              </a:p>
+            </p:txBody>
+          </p:sp>
+          <p:sp>
+            <p:nvSpPr>
+              <p:cNvPr id="29" name="TextBox 28">
+                <a:extLst>
+                  <a:ext uri="{FF2B5EF4-FFF2-40B4-BE49-F238E27FC236}">
+                    <a16:creationId xmlns:a16="http://schemas.microsoft.com/office/drawing/2014/main" id="{5C92DBC9-E566-A246-5CA1-9DC13FBEAAE2}"/>
+                  </a:ext>
+                </a:extLst>
+              </p:cNvPr>
+              <p:cNvSpPr txBox="1"/>
+              <p:nvPr/>
+            </p:nvSpPr>
+            <p:spPr>
+              <a:xfrm>
+                <a:off x="2542775" y="3409170"/>
+                <a:ext cx="2743199" cy="830997"/>
+              </a:xfrm>
+              <a:prstGeom prst="rect">
+                <a:avLst/>
+              </a:prstGeom>
+              <a:noFill/>
+            </p:spPr>
+            <p:txBody>
+              <a:bodyPr rot="0" spcFirstLastPara="0" vertOverflow="overflow" horzOverflow="overflow" vert="horz" wrap="square" lIns="91440" tIns="45720" rIns="91440" bIns="45720" numCol="1" spcCol="0" rtlCol="0" fromWordArt="0" anchor="t" anchorCtr="0" forceAA="0" compatLnSpc="1">
+                <a:prstTxWarp prst="textNoShape">
+                  <a:avLst/>
+                </a:prstTxWarp>
+                <a:spAutoFit/>
+              </a:bodyPr>
+              <a:lstStyle/>
+              <a:p>
+                <a:pPr algn="ctr"/>
+                <a:r>
+                  <a:rPr lang="ja-JP" altLang="en-US" sz="1200" b="1" u="sng">
+                    <a:highlight>
+                      <a:srgbClr val="FFFFFF"/>
+                    </a:highlight>
+                    <a:latin typeface="Comic Sans MS"/>
+                    <a:ea typeface="ＭＳ Ｐゴシック"/>
+                  </a:rPr>
+                  <a:t>ち</a:t>
+                </a:r>
+                <a:r>
+                  <a:rPr lang="ja-JP" sz="1200" b="1" u="sng">
+                    <a:highlight>
+                      <a:srgbClr val="FFFFFF"/>
+                    </a:highlight>
+                    <a:latin typeface="Comic Sans MS"/>
+                    <a:ea typeface="ＭＳ Ｐゴシック"/>
+                  </a:rPr>
+                  <a:t>び</a:t>
+                </a:r>
+                <a:endParaRPr lang="ja-JP" sz="1200" u="sng">
+                  <a:highlight>
+                    <a:srgbClr val="FFFFFF"/>
+                  </a:highlight>
+                  <a:latin typeface="Comic Sans MS"/>
+                  <a:ea typeface="ＭＳ Ｐゴシック"/>
+                </a:endParaRPr>
+              </a:p>
+              <a:p>
+                <a:pPr algn="ctr"/>
+                <a:r>
+                  <a:rPr lang="ja-JP" altLang="en-US" sz="1200" b="1" u="sng">
+                    <a:highlight>
+                      <a:srgbClr val="FFFFFF"/>
+                    </a:highlight>
+                    <a:latin typeface="Comic Sans MS"/>
+                    <a:ea typeface="ＭＳ Ｐゴシック"/>
+                  </a:rPr>
+                  <a:t>チ</a:t>
+                </a:r>
+                <a:r>
+                  <a:rPr lang="ja-JP" sz="1200" b="1" u="sng">
+                    <a:highlight>
+                      <a:srgbClr val="FFFFFF"/>
+                    </a:highlight>
+                    <a:latin typeface="Comic Sans MS"/>
+                    <a:ea typeface="ＭＳ Ｐゴシック"/>
+                  </a:rPr>
+                  <a:t>ビ</a:t>
+                </a:r>
+                <a:endParaRPr lang="ja-JP" sz="1200" u="sng">
+                  <a:highlight>
+                    <a:srgbClr val="FFFFFF"/>
+                  </a:highlight>
+                  <a:latin typeface="Comic Sans MS"/>
+                </a:endParaRPr>
+              </a:p>
+              <a:p>
+                <a:pPr algn="ctr"/>
+                <a:r>
+                  <a:rPr lang="en-US" sz="1200" b="1" u="sng">
+                    <a:highlight>
+                      <a:srgbClr val="FFFFFF"/>
+                    </a:highlight>
+                    <a:latin typeface="Comic Sans MS"/>
+                  </a:rPr>
+                  <a:t>Chi-Bee</a:t>
+                </a:r>
+                <a:endParaRPr lang="ja-JP" altLang="en-US" sz="1200" u="sng">
+                  <a:highlight>
+                    <a:srgbClr val="FFFFFF"/>
+                  </a:highlight>
+                  <a:latin typeface="Comic Sans MS"/>
+                </a:endParaRPr>
+              </a:p>
+              <a:p>
+                <a:pPr algn="ctr"/>
+                <a:r>
+                  <a:rPr lang="en-US" sz="1200" b="1" u="sng">
+                    <a:highlight>
+                      <a:srgbClr val="FFFFFF"/>
+                    </a:highlight>
+                    <a:latin typeface="Comic Sans MS"/>
+                  </a:rPr>
+                  <a:t>Small, tiny, little one</a:t>
+                </a:r>
+                <a:endParaRPr lang="en-US" altLang="ja-JP" u="sng"/>
+              </a:p>
+            </p:txBody>
+          </p:sp>
+        </p:grpSp>
+        <p:pic>
+          <p:nvPicPr>
+            <p:cNvPr id="21" name="Picture 20" descr="A logo of a bee&#10;&#10;AI-generated content may be incorrect.">
+              <a:extLst>
+                <a:ext uri="{FF2B5EF4-FFF2-40B4-BE49-F238E27FC236}">
+                  <a16:creationId xmlns:a16="http://schemas.microsoft.com/office/drawing/2014/main" id="{6535D22D-09B8-112A-D1BF-0F5238C76FD1}"/>
+                </a:ext>
+              </a:extLst>
+            </p:cNvPr>
+            <p:cNvPicPr>
+              <a:picLocks noChangeAspect="1"/>
+            </p:cNvPicPr>
+            <p:nvPr/>
+          </p:nvPicPr>
+          <p:blipFill>
+            <a:blip r:embed="rId3"/>
+            <a:stretch>
+              <a:fillRect/>
+            </a:stretch>
+          </p:blipFill>
+          <p:spPr>
+            <a:xfrm>
+              <a:off x="3416696" y="2399181"/>
+              <a:ext cx="783853" cy="932394"/>
+            </a:xfrm>
+            <a:prstGeom prst="rect">
+              <a:avLst/>
+            </a:prstGeom>
+          </p:spPr>
+        </p:pic>
+      </p:grpSp>
+      <p:grpSp>
+        <p:nvGrpSpPr>
+          <p:cNvPr id="39" name="Group 38">
+            <a:extLst>
+              <a:ext uri="{FF2B5EF4-FFF2-40B4-BE49-F238E27FC236}">
+                <a16:creationId xmlns:a16="http://schemas.microsoft.com/office/drawing/2014/main" id="{C6A8697B-DEEE-6AD5-7283-B42A7118284E}"/>
+              </a:ext>
+            </a:extLst>
+          </p:cNvPr>
+          <p:cNvGrpSpPr/>
+          <p:nvPr/>
+        </p:nvGrpSpPr>
+        <p:grpSpPr>
+          <a:xfrm>
+            <a:off x="6184794" y="2622367"/>
+            <a:ext cx="3094337" cy="2591241"/>
+            <a:chOff x="2372789" y="2110700"/>
+            <a:chExt cx="3094337" cy="2591241"/>
+          </a:xfrm>
+        </p:grpSpPr>
+        <p:grpSp>
+          <p:nvGrpSpPr>
+            <p:cNvPr id="40" name="Group 39">
+              <a:extLst>
+                <a:ext uri="{FF2B5EF4-FFF2-40B4-BE49-F238E27FC236}">
+                  <a16:creationId xmlns:a16="http://schemas.microsoft.com/office/drawing/2014/main" id="{433EC9EA-8FA0-B774-A400-14EB90ED4B5F}"/>
+                </a:ext>
+              </a:extLst>
+            </p:cNvPr>
+            <p:cNvGrpSpPr/>
+            <p:nvPr/>
+          </p:nvGrpSpPr>
+          <p:grpSpPr>
+            <a:xfrm>
+              <a:off x="2372789" y="2110700"/>
+              <a:ext cx="3094337" cy="2591241"/>
+              <a:chOff x="2372789" y="2110700"/>
+              <a:chExt cx="3094337" cy="2591241"/>
+            </a:xfrm>
+          </p:grpSpPr>
+          <p:sp>
+            <p:nvSpPr>
+              <p:cNvPr id="42" name="Hexagon 41">
+                <a:extLst>
+                  <a:ext uri="{FF2B5EF4-FFF2-40B4-BE49-F238E27FC236}">
+                    <a16:creationId xmlns:a16="http://schemas.microsoft.com/office/drawing/2014/main" id="{386A2972-EC2F-871A-D008-5BA0CDF395AA}"/>
+                  </a:ext>
+                </a:extLst>
+              </p:cNvPr>
+              <p:cNvSpPr/>
+              <p:nvPr/>
+            </p:nvSpPr>
+            <p:spPr>
+              <a:xfrm>
+                <a:off x="2372789" y="2110700"/>
+                <a:ext cx="3094337" cy="2591241"/>
+              </a:xfrm>
+              <a:prstGeom prst="hexagon">
+                <a:avLst/>
+              </a:prstGeom>
+              <a:noFill/>
+            </p:spPr>
+            <p:style>
+              <a:lnRef idx="2">
+                <a:schemeClr val="accent1">
+                  <a:shade val="15000"/>
+                </a:schemeClr>
+              </a:lnRef>
+              <a:fillRef idx="1">
+                <a:schemeClr val="accent1"/>
+              </a:fillRef>
+              <a:effectRef idx="0">
+                <a:schemeClr val="accent1"/>
+              </a:effectRef>
+              <a:fontRef idx="minor">
+                <a:schemeClr val="lt1"/>
+              </a:fontRef>
+            </p:style>
+            <p:txBody>
+              <a:bodyPr rot="0" spcFirstLastPara="0" vertOverflow="overflow" horzOverflow="overflow" vert="horz" wrap="square" lIns="91440" tIns="45720" rIns="91440" bIns="45720" numCol="1" spcCol="0" rtlCol="0" fromWordArt="0" anchor="b" anchorCtr="0" forceAA="0" compatLnSpc="1">
+                <a:prstTxWarp prst="textNoShape">
+                  <a:avLst/>
+                </a:prstTxWarp>
+                <a:noAutofit/>
+              </a:bodyPr>
+              <a:lstStyle/>
+              <a:p>
+                <a:pPr algn="ctr"/>
+                <a:endParaRPr lang="en-US" u="sng" dirty="0"/>
+              </a:p>
+            </p:txBody>
+          </p:sp>
+          <p:sp>
+            <p:nvSpPr>
+              <p:cNvPr id="43" name="TextBox 42">
+                <a:extLst>
+                  <a:ext uri="{FF2B5EF4-FFF2-40B4-BE49-F238E27FC236}">
+                    <a16:creationId xmlns:a16="http://schemas.microsoft.com/office/drawing/2014/main" id="{6D5B3CE7-0F18-FB1D-2501-BA6DEA9EB4FD}"/>
+                  </a:ext>
+                </a:extLst>
+              </p:cNvPr>
+              <p:cNvSpPr txBox="1"/>
+              <p:nvPr/>
+            </p:nvSpPr>
+            <p:spPr>
+              <a:xfrm>
+                <a:off x="2542775" y="3409170"/>
+                <a:ext cx="2743199" cy="830997"/>
+              </a:xfrm>
+              <a:prstGeom prst="rect">
+                <a:avLst/>
+              </a:prstGeom>
+              <a:noFill/>
+            </p:spPr>
+            <p:txBody>
+              <a:bodyPr rot="0" spcFirstLastPara="0" vertOverflow="overflow" horzOverflow="overflow" vert="horz" wrap="square" lIns="91440" tIns="45720" rIns="91440" bIns="45720" numCol="1" spcCol="0" rtlCol="0" fromWordArt="0" anchor="t" anchorCtr="0" forceAA="0" compatLnSpc="1">
+                <a:prstTxWarp prst="textNoShape">
+                  <a:avLst/>
+                </a:prstTxWarp>
+                <a:spAutoFit/>
+              </a:bodyPr>
+              <a:lstStyle/>
+              <a:p>
+                <a:pPr algn="ctr"/>
+                <a:r>
+                  <a:rPr lang="ja-JP" altLang="en-US" sz="1200" b="1" u="sng">
+                    <a:highlight>
+                      <a:srgbClr val="FFFFFF"/>
+                    </a:highlight>
+                    <a:latin typeface="Comic Sans MS"/>
+                    <a:ea typeface="ＭＳ Ｐゴシック"/>
+                  </a:rPr>
+                  <a:t>ち</a:t>
+                </a:r>
+                <a:r>
+                  <a:rPr lang="ja-JP" sz="1200" b="1" u="sng">
+                    <a:highlight>
+                      <a:srgbClr val="FFFFFF"/>
+                    </a:highlight>
+                    <a:latin typeface="Comic Sans MS"/>
+                    <a:ea typeface="ＭＳ Ｐゴシック"/>
+                  </a:rPr>
+                  <a:t>び</a:t>
+                </a:r>
+                <a:endParaRPr lang="ja-JP" sz="1200" u="sng">
+                  <a:highlight>
+                    <a:srgbClr val="FFFFFF"/>
+                  </a:highlight>
+                  <a:latin typeface="Comic Sans MS"/>
+                  <a:ea typeface="ＭＳ Ｐゴシック"/>
+                </a:endParaRPr>
+              </a:p>
+              <a:p>
+                <a:pPr algn="ctr"/>
+                <a:r>
+                  <a:rPr lang="ja-JP" altLang="en-US" sz="1200" b="1" u="sng">
+                    <a:highlight>
+                      <a:srgbClr val="FFFFFF"/>
+                    </a:highlight>
+                    <a:latin typeface="Comic Sans MS"/>
+                    <a:ea typeface="ＭＳ Ｐゴシック"/>
+                  </a:rPr>
+                  <a:t>チ</a:t>
+                </a:r>
+                <a:r>
+                  <a:rPr lang="ja-JP" sz="1200" b="1" u="sng">
+                    <a:highlight>
+                      <a:srgbClr val="FFFFFF"/>
+                    </a:highlight>
+                    <a:latin typeface="Comic Sans MS"/>
+                    <a:ea typeface="ＭＳ Ｐゴシック"/>
+                  </a:rPr>
+                  <a:t>ビ</a:t>
+                </a:r>
+                <a:endParaRPr lang="ja-JP" sz="1200" u="sng">
+                  <a:highlight>
+                    <a:srgbClr val="FFFFFF"/>
+                  </a:highlight>
+                  <a:latin typeface="Comic Sans MS"/>
+                </a:endParaRPr>
+              </a:p>
+              <a:p>
+                <a:pPr algn="ctr"/>
+                <a:r>
+                  <a:rPr lang="en-US" sz="1200" b="1" u="sng">
+                    <a:highlight>
+                      <a:srgbClr val="FFFFFF"/>
+                    </a:highlight>
+                    <a:latin typeface="Comic Sans MS"/>
+                  </a:rPr>
+                  <a:t>Chi-Bee</a:t>
+                </a:r>
+                <a:endParaRPr lang="ja-JP" altLang="en-US" sz="1200" u="sng">
+                  <a:highlight>
+                    <a:srgbClr val="FFFFFF"/>
+                  </a:highlight>
+                  <a:latin typeface="Comic Sans MS"/>
+                </a:endParaRPr>
+              </a:p>
+              <a:p>
+                <a:pPr algn="ctr"/>
+                <a:r>
+                  <a:rPr lang="en-US" sz="1200" b="1" u="sng">
+                    <a:highlight>
+                      <a:srgbClr val="FFFFFF"/>
+                    </a:highlight>
+                    <a:latin typeface="Comic Sans MS"/>
+                  </a:rPr>
+                  <a:t>Small, tiny, little one</a:t>
+                </a:r>
+                <a:endParaRPr lang="en-US" altLang="ja-JP" u="sng"/>
+              </a:p>
+            </p:txBody>
+          </p:sp>
+        </p:grpSp>
+        <p:pic>
+          <p:nvPicPr>
+            <p:cNvPr id="41" name="Picture 40" descr="A logo of a bee&#10;&#10;AI-generated content may be incorrect.">
+              <a:extLst>
+                <a:ext uri="{FF2B5EF4-FFF2-40B4-BE49-F238E27FC236}">
+                  <a16:creationId xmlns:a16="http://schemas.microsoft.com/office/drawing/2014/main" id="{A52F07C0-B88D-4AC7-1EDF-A4F7D9861D29}"/>
+                </a:ext>
+              </a:extLst>
+            </p:cNvPr>
+            <p:cNvPicPr>
+              <a:picLocks noChangeAspect="1"/>
+            </p:cNvPicPr>
+            <p:nvPr/>
+          </p:nvPicPr>
+          <p:blipFill>
+            <a:blip r:embed="rId3"/>
+            <a:stretch>
+              <a:fillRect/>
+            </a:stretch>
+          </p:blipFill>
+          <p:spPr>
+            <a:xfrm>
+              <a:off x="3416696" y="2399181"/>
+              <a:ext cx="783853" cy="932394"/>
+            </a:xfrm>
+            <a:prstGeom prst="rect">
+              <a:avLst/>
+            </a:prstGeom>
+          </p:spPr>
+        </p:pic>
+      </p:grpSp>
+      <p:grpSp>
+        <p:nvGrpSpPr>
+          <p:cNvPr id="44" name="Group 43">
+            <a:extLst>
+              <a:ext uri="{FF2B5EF4-FFF2-40B4-BE49-F238E27FC236}">
+                <a16:creationId xmlns:a16="http://schemas.microsoft.com/office/drawing/2014/main" id="{5BD0C2A4-6BED-6015-319F-D8D829E57F66}"/>
+              </a:ext>
+            </a:extLst>
+          </p:cNvPr>
+          <p:cNvGrpSpPr/>
+          <p:nvPr/>
+        </p:nvGrpSpPr>
+        <p:grpSpPr>
+          <a:xfrm>
+            <a:off x="9274547" y="2622367"/>
+            <a:ext cx="3094337" cy="2591241"/>
+            <a:chOff x="2372789" y="2110700"/>
+            <a:chExt cx="3094337" cy="2591241"/>
+          </a:xfrm>
+        </p:grpSpPr>
+        <p:grpSp>
+          <p:nvGrpSpPr>
+            <p:cNvPr id="45" name="Group 44">
+              <a:extLst>
+                <a:ext uri="{FF2B5EF4-FFF2-40B4-BE49-F238E27FC236}">
+                  <a16:creationId xmlns:a16="http://schemas.microsoft.com/office/drawing/2014/main" id="{01A54F69-ABCF-162C-3251-EBA2B257B909}"/>
+                </a:ext>
+              </a:extLst>
+            </p:cNvPr>
+            <p:cNvGrpSpPr/>
+            <p:nvPr/>
+          </p:nvGrpSpPr>
+          <p:grpSpPr>
+            <a:xfrm>
+              <a:off x="2372789" y="2110700"/>
+              <a:ext cx="3094337" cy="2591241"/>
+              <a:chOff x="2372789" y="2110700"/>
+              <a:chExt cx="3094337" cy="2591241"/>
+            </a:xfrm>
+          </p:grpSpPr>
+          <p:sp>
+            <p:nvSpPr>
+              <p:cNvPr id="47" name="Hexagon 46">
+                <a:extLst>
+                  <a:ext uri="{FF2B5EF4-FFF2-40B4-BE49-F238E27FC236}">
+                    <a16:creationId xmlns:a16="http://schemas.microsoft.com/office/drawing/2014/main" id="{4BAADA8C-91FF-CBBB-6CD1-88B639D23FB9}"/>
+                  </a:ext>
+                </a:extLst>
+              </p:cNvPr>
+              <p:cNvSpPr/>
+              <p:nvPr/>
+            </p:nvSpPr>
+            <p:spPr>
+              <a:xfrm>
+                <a:off x="2372789" y="2110700"/>
+                <a:ext cx="3094337" cy="2591241"/>
+              </a:xfrm>
+              <a:prstGeom prst="hexagon">
+                <a:avLst/>
+              </a:prstGeom>
+              <a:noFill/>
+            </p:spPr>
+            <p:style>
+              <a:lnRef idx="2">
+                <a:schemeClr val="accent1">
+                  <a:shade val="15000"/>
+                </a:schemeClr>
+              </a:lnRef>
+              <a:fillRef idx="1">
+                <a:schemeClr val="accent1"/>
+              </a:fillRef>
+              <a:effectRef idx="0">
+                <a:schemeClr val="accent1"/>
+              </a:effectRef>
+              <a:fontRef idx="minor">
+                <a:schemeClr val="lt1"/>
+              </a:fontRef>
+            </p:style>
+            <p:txBody>
+              <a:bodyPr rot="0" spcFirstLastPara="0" vertOverflow="overflow" horzOverflow="overflow" vert="horz" wrap="square" lIns="91440" tIns="45720" rIns="91440" bIns="45720" numCol="1" spcCol="0" rtlCol="0" fromWordArt="0" anchor="b" anchorCtr="0" forceAA="0" compatLnSpc="1">
+                <a:prstTxWarp prst="textNoShape">
+                  <a:avLst/>
+                </a:prstTxWarp>
+                <a:noAutofit/>
+              </a:bodyPr>
+              <a:lstStyle/>
+              <a:p>
+                <a:pPr algn="ctr"/>
+                <a:endParaRPr lang="en-US" u="sng" dirty="0"/>
+              </a:p>
+            </p:txBody>
+          </p:sp>
+          <p:sp>
+            <p:nvSpPr>
+              <p:cNvPr id="48" name="TextBox 47">
+                <a:extLst>
+                  <a:ext uri="{FF2B5EF4-FFF2-40B4-BE49-F238E27FC236}">
+                    <a16:creationId xmlns:a16="http://schemas.microsoft.com/office/drawing/2014/main" id="{C30842D3-54AD-5C33-F2A3-9FABC486D0A3}"/>
+                  </a:ext>
+                </a:extLst>
+              </p:cNvPr>
+              <p:cNvSpPr txBox="1"/>
+              <p:nvPr/>
+            </p:nvSpPr>
+            <p:spPr>
+              <a:xfrm>
+                <a:off x="2542775" y="3409170"/>
+                <a:ext cx="2743199" cy="830997"/>
+              </a:xfrm>
+              <a:prstGeom prst="rect">
+                <a:avLst/>
+              </a:prstGeom>
+              <a:noFill/>
+            </p:spPr>
+            <p:txBody>
+              <a:bodyPr rot="0" spcFirstLastPara="0" vertOverflow="overflow" horzOverflow="overflow" vert="horz" wrap="square" lIns="91440" tIns="45720" rIns="91440" bIns="45720" numCol="1" spcCol="0" rtlCol="0" fromWordArt="0" anchor="t" anchorCtr="0" forceAA="0" compatLnSpc="1">
+                <a:prstTxWarp prst="textNoShape">
+                  <a:avLst/>
+                </a:prstTxWarp>
+                <a:spAutoFit/>
+              </a:bodyPr>
+              <a:lstStyle/>
+              <a:p>
+                <a:pPr algn="ctr"/>
+                <a:r>
+                  <a:rPr lang="ja-JP" altLang="en-US" sz="1200" b="1" u="sng">
+                    <a:highlight>
+                      <a:srgbClr val="FFFFFF"/>
+                    </a:highlight>
+                    <a:latin typeface="Comic Sans MS"/>
+                    <a:ea typeface="ＭＳ Ｐゴシック"/>
+                  </a:rPr>
+                  <a:t>ち</a:t>
+                </a:r>
+                <a:r>
+                  <a:rPr lang="ja-JP" sz="1200" b="1" u="sng">
+                    <a:highlight>
+                      <a:srgbClr val="FFFFFF"/>
+                    </a:highlight>
+                    <a:latin typeface="Comic Sans MS"/>
+                    <a:ea typeface="ＭＳ Ｐゴシック"/>
+                  </a:rPr>
+                  <a:t>び</a:t>
+                </a:r>
+                <a:endParaRPr lang="ja-JP" sz="1200" u="sng">
+                  <a:highlight>
+                    <a:srgbClr val="FFFFFF"/>
+                  </a:highlight>
+                  <a:latin typeface="Comic Sans MS"/>
+                  <a:ea typeface="ＭＳ Ｐゴシック"/>
+                </a:endParaRPr>
+              </a:p>
+              <a:p>
+                <a:pPr algn="ctr"/>
+                <a:r>
+                  <a:rPr lang="ja-JP" altLang="en-US" sz="1200" b="1" u="sng">
+                    <a:highlight>
+                      <a:srgbClr val="FFFFFF"/>
+                    </a:highlight>
+                    <a:latin typeface="Comic Sans MS"/>
+                    <a:ea typeface="ＭＳ Ｐゴシック"/>
+                  </a:rPr>
+                  <a:t>チ</a:t>
+                </a:r>
+                <a:r>
+                  <a:rPr lang="ja-JP" sz="1200" b="1" u="sng">
+                    <a:highlight>
+                      <a:srgbClr val="FFFFFF"/>
+                    </a:highlight>
+                    <a:latin typeface="Comic Sans MS"/>
+                    <a:ea typeface="ＭＳ Ｐゴシック"/>
+                  </a:rPr>
+                  <a:t>ビ</a:t>
+                </a:r>
+                <a:endParaRPr lang="ja-JP" sz="1200" u="sng">
+                  <a:highlight>
+                    <a:srgbClr val="FFFFFF"/>
+                  </a:highlight>
+                  <a:latin typeface="Comic Sans MS"/>
+                </a:endParaRPr>
+              </a:p>
+              <a:p>
+                <a:pPr algn="ctr"/>
+                <a:r>
+                  <a:rPr lang="en-US" sz="1200" b="1" u="sng">
+                    <a:highlight>
+                      <a:srgbClr val="FFFFFF"/>
+                    </a:highlight>
+                    <a:latin typeface="Comic Sans MS"/>
+                  </a:rPr>
+                  <a:t>Chi-Bee</a:t>
+                </a:r>
+                <a:endParaRPr lang="ja-JP" altLang="en-US" sz="1200" u="sng">
+                  <a:highlight>
+                    <a:srgbClr val="FFFFFF"/>
+                  </a:highlight>
+                  <a:latin typeface="Comic Sans MS"/>
+                </a:endParaRPr>
+              </a:p>
+              <a:p>
+                <a:pPr algn="ctr"/>
+                <a:r>
+                  <a:rPr lang="en-US" sz="1200" b="1" u="sng">
+                    <a:highlight>
+                      <a:srgbClr val="FFFFFF"/>
+                    </a:highlight>
+                    <a:latin typeface="Comic Sans MS"/>
+                  </a:rPr>
+                  <a:t>Small, tiny, little one</a:t>
+                </a:r>
+                <a:endParaRPr lang="en-US" altLang="ja-JP" u="sng"/>
+              </a:p>
+            </p:txBody>
+          </p:sp>
+        </p:grpSp>
+        <p:pic>
+          <p:nvPicPr>
+            <p:cNvPr id="46" name="Picture 45" descr="A logo of a bee&#10;&#10;AI-generated content may be incorrect.">
+              <a:extLst>
+                <a:ext uri="{FF2B5EF4-FFF2-40B4-BE49-F238E27FC236}">
+                  <a16:creationId xmlns:a16="http://schemas.microsoft.com/office/drawing/2014/main" id="{B74312DB-5C10-55E0-6CCD-999123284436}"/>
+                </a:ext>
+              </a:extLst>
+            </p:cNvPr>
+            <p:cNvPicPr>
+              <a:picLocks noChangeAspect="1"/>
+            </p:cNvPicPr>
+            <p:nvPr/>
+          </p:nvPicPr>
+          <p:blipFill>
+            <a:blip r:embed="rId3"/>
+            <a:stretch>
+              <a:fillRect/>
+            </a:stretch>
+          </p:blipFill>
+          <p:spPr>
+            <a:xfrm>
+              <a:off x="3416696" y="2399181"/>
+              <a:ext cx="783853" cy="932394"/>
+            </a:xfrm>
+            <a:prstGeom prst="rect">
+              <a:avLst/>
+            </a:prstGeom>
+          </p:spPr>
+        </p:pic>
+      </p:grpSp>
+      <p:cxnSp>
+        <p:nvCxnSpPr>
+          <p:cNvPr id="2" name="Straight Arrow Connector 1">
+            <a:extLst>
+              <a:ext uri="{FF2B5EF4-FFF2-40B4-BE49-F238E27FC236}">
+                <a16:creationId xmlns:a16="http://schemas.microsoft.com/office/drawing/2014/main" id="{E235C4F8-9648-BB8F-2D1F-8FA89A70D144}"/>
+              </a:ext>
+            </a:extLst>
+          </p:cNvPr>
+          <p:cNvCxnSpPr/>
+          <p:nvPr/>
+        </p:nvCxnSpPr>
+        <p:spPr>
+          <a:xfrm flipV="1">
+            <a:off x="3074722" y="-507095"/>
+            <a:ext cx="15240" cy="685800"/>
+          </a:xfrm>
+          <a:prstGeom prst="straightConnector1">
+            <a:avLst/>
+          </a:prstGeom>
+        </p:spPr>
+        <p:style>
+          <a:lnRef idx="2">
+            <a:schemeClr val="accent1"/>
+          </a:lnRef>
+          <a:fillRef idx="0">
+            <a:schemeClr val="accent1"/>
+          </a:fillRef>
+          <a:effectRef idx="1">
+            <a:schemeClr val="accent1"/>
+          </a:effectRef>
+          <a:fontRef idx="minor">
+            <a:schemeClr val="tx1"/>
+          </a:fontRef>
+        </p:style>
+      </p:cxnSp>
+      <p:cxnSp>
+        <p:nvCxnSpPr>
+          <p:cNvPr id="3" name="Straight Arrow Connector 2">
+            <a:extLst>
+              <a:ext uri="{FF2B5EF4-FFF2-40B4-BE49-F238E27FC236}">
+                <a16:creationId xmlns:a16="http://schemas.microsoft.com/office/drawing/2014/main" id="{972A266F-C488-9BB0-993C-4264116EC151}"/>
+              </a:ext>
+            </a:extLst>
+          </p:cNvPr>
+          <p:cNvCxnSpPr>
+            <a:cxnSpLocks/>
+          </p:cNvCxnSpPr>
+          <p:nvPr/>
+        </p:nvCxnSpPr>
+        <p:spPr>
+          <a:xfrm flipV="1">
+            <a:off x="799160" y="-507095"/>
+            <a:ext cx="15240" cy="685800"/>
+          </a:xfrm>
+          <a:prstGeom prst="straightConnector1">
+            <a:avLst/>
+          </a:prstGeom>
+        </p:spPr>
+        <p:style>
+          <a:lnRef idx="2">
+            <a:schemeClr val="accent1"/>
+          </a:lnRef>
+          <a:fillRef idx="0">
+            <a:schemeClr val="accent1"/>
+          </a:fillRef>
+          <a:effectRef idx="1">
+            <a:schemeClr val="accent1"/>
+          </a:effectRef>
+          <a:fontRef idx="minor">
+            <a:schemeClr val="tx1"/>
+          </a:fontRef>
+        </p:style>
+      </p:cxnSp>
+      <p:cxnSp>
+        <p:nvCxnSpPr>
+          <p:cNvPr id="27" name="Straight Arrow Connector 26">
+            <a:extLst>
+              <a:ext uri="{FF2B5EF4-FFF2-40B4-BE49-F238E27FC236}">
+                <a16:creationId xmlns:a16="http://schemas.microsoft.com/office/drawing/2014/main" id="{969C167B-FEFF-7C42-D2C4-4B6CB90E0A80}"/>
+              </a:ext>
+            </a:extLst>
+          </p:cNvPr>
+          <p:cNvCxnSpPr/>
+          <p:nvPr/>
+        </p:nvCxnSpPr>
+        <p:spPr>
+          <a:xfrm flipH="1" flipV="1">
+            <a:off x="-791018" y="720247"/>
+            <a:ext cx="1022123" cy="5636"/>
+          </a:xfrm>
+          <a:prstGeom prst="straightConnector1">
+            <a:avLst/>
+          </a:prstGeom>
+        </p:spPr>
+        <p:style>
+          <a:lnRef idx="2">
+            <a:schemeClr val="accent1"/>
+          </a:lnRef>
+          <a:fillRef idx="0">
+            <a:schemeClr val="accent1"/>
+          </a:fillRef>
+          <a:effectRef idx="1">
+            <a:schemeClr val="accent1"/>
+          </a:effectRef>
+          <a:fontRef idx="minor">
+            <a:schemeClr val="tx1"/>
+          </a:fontRef>
+        </p:style>
+      </p:cxnSp>
+      <p:cxnSp>
+        <p:nvCxnSpPr>
+          <p:cNvPr id="38" name="Straight Arrow Connector 37">
+            <a:extLst>
+              <a:ext uri="{FF2B5EF4-FFF2-40B4-BE49-F238E27FC236}">
+                <a16:creationId xmlns:a16="http://schemas.microsoft.com/office/drawing/2014/main" id="{9A27C2AB-2502-B466-CD90-CA551C4C76B0}"/>
+              </a:ext>
+            </a:extLst>
+          </p:cNvPr>
+          <p:cNvCxnSpPr>
+            <a:cxnSpLocks/>
+          </p:cNvCxnSpPr>
+          <p:nvPr/>
+        </p:nvCxnSpPr>
+        <p:spPr>
+          <a:xfrm flipH="1" flipV="1">
+            <a:off x="-791018" y="3423780"/>
+            <a:ext cx="1022123" cy="5636"/>
+          </a:xfrm>
+          <a:prstGeom prst="straightConnector1">
+            <a:avLst/>
+          </a:prstGeom>
+        </p:spPr>
+        <p:style>
+          <a:lnRef idx="2">
+            <a:schemeClr val="accent1"/>
+          </a:lnRef>
+          <a:fillRef idx="0">
+            <a:schemeClr val="accent1"/>
+          </a:fillRef>
+          <a:effectRef idx="1">
+            <a:schemeClr val="accent1"/>
+          </a:effectRef>
+          <a:fontRef idx="minor">
+            <a:schemeClr val="tx1"/>
+          </a:fontRef>
+        </p:style>
+      </p:cxnSp>
+      <p:sp>
+        <p:nvSpPr>
+          <p:cNvPr id="34" name="Hexagon 33">
+            <a:extLst>
+              <a:ext uri="{FF2B5EF4-FFF2-40B4-BE49-F238E27FC236}">
+                <a16:creationId xmlns:a16="http://schemas.microsoft.com/office/drawing/2014/main" id="{7BA567F9-420F-B1D4-F833-DA9BD62C3FB1}"/>
+              </a:ext>
+            </a:extLst>
+          </p:cNvPr>
+          <p:cNvSpPr/>
+          <p:nvPr/>
+        </p:nvSpPr>
+        <p:spPr>
+          <a:xfrm>
+            <a:off x="2134883" y="165726"/>
+            <a:ext cx="1904368" cy="1742298"/>
+          </a:xfrm>
+          <a:prstGeom prst="hexagon">
+            <a:avLst/>
+          </a:prstGeom>
+          <a:noFill/>
+        </p:spPr>
+        <p:style>
+          <a:lnRef idx="2">
+            <a:schemeClr val="accent1">
+              <a:shade val="15000"/>
+            </a:schemeClr>
+          </a:lnRef>
+          <a:fillRef idx="1">
+            <a:schemeClr val="accent1"/>
+          </a:fillRef>
+          <a:effectRef idx="0">
+            <a:schemeClr val="accent1"/>
+          </a:effectRef>
+          <a:fontRef idx="minor">
+            <a:schemeClr val="lt1"/>
+          </a:fontRef>
+        </p:style>
+        <p:txBody>
+          <a:bodyPr rot="0" spcFirstLastPara="0" vertOverflow="overflow" horzOverflow="overflow" vert="horz" wrap="square" lIns="91440" tIns="45720" rIns="91440" bIns="45720" numCol="1" spcCol="0" rtlCol="0" fromWordArt="0" anchor="b" anchorCtr="0" forceAA="0" compatLnSpc="1">
+            <a:prstTxWarp prst="textNoShape">
+              <a:avLst/>
+            </a:prstTxWarp>
+            <a:noAutofit/>
+          </a:bodyPr>
+          <a:lstStyle/>
+          <a:p>
+            <a:pPr algn="ctr"/>
+            <a:endParaRPr lang="en-US" u="sng" dirty="0"/>
+          </a:p>
+        </p:txBody>
+      </p:sp>
+      <p:sp>
+        <p:nvSpPr>
+          <p:cNvPr id="49" name="Hexagon 48">
+            <a:extLst>
+              <a:ext uri="{FF2B5EF4-FFF2-40B4-BE49-F238E27FC236}">
+                <a16:creationId xmlns:a16="http://schemas.microsoft.com/office/drawing/2014/main" id="{56893A03-487F-C827-1EBB-A2972F1E5404}"/>
+              </a:ext>
+            </a:extLst>
+          </p:cNvPr>
+          <p:cNvSpPr/>
+          <p:nvPr/>
+        </p:nvSpPr>
+        <p:spPr>
+          <a:xfrm>
+            <a:off x="4159924" y="165725"/>
+            <a:ext cx="1904368" cy="1742298"/>
+          </a:xfrm>
+          <a:prstGeom prst="hexagon">
+            <a:avLst/>
+          </a:prstGeom>
+          <a:noFill/>
+        </p:spPr>
+        <p:style>
+          <a:lnRef idx="2">
+            <a:schemeClr val="accent1">
+              <a:shade val="15000"/>
+            </a:schemeClr>
+          </a:lnRef>
+          <a:fillRef idx="1">
+            <a:schemeClr val="accent1"/>
+          </a:fillRef>
+          <a:effectRef idx="0">
+            <a:schemeClr val="accent1"/>
+          </a:effectRef>
+          <a:fontRef idx="minor">
+            <a:schemeClr val="lt1"/>
+          </a:fontRef>
+        </p:style>
+        <p:txBody>
+          <a:bodyPr rot="0" spcFirstLastPara="0" vertOverflow="overflow" horzOverflow="overflow" vert="horz" wrap="square" lIns="91440" tIns="45720" rIns="91440" bIns="45720" numCol="1" spcCol="0" rtlCol="0" fromWordArt="0" anchor="b" anchorCtr="0" forceAA="0" compatLnSpc="1">
+            <a:prstTxWarp prst="textNoShape">
+              <a:avLst/>
+            </a:prstTxWarp>
+            <a:noAutofit/>
+          </a:bodyPr>
+          <a:lstStyle/>
+          <a:p>
+            <a:pPr algn="ctr"/>
+            <a:endParaRPr lang="en-US" u="sng" dirty="0"/>
+          </a:p>
+        </p:txBody>
+      </p:sp>
+    </p:spTree>
+    <p:extLst>
+      <p:ext uri="{BB962C8B-B14F-4D97-AF65-F5344CB8AC3E}">
+        <p14:creationId xmlns:p14="http://schemas.microsoft.com/office/powerpoint/2010/main" val="1131077775"/>
+      </p:ext>
+    </p:extLst>
+  </p:cSld>
+  <p:clrMapOvr>
+    <a:masterClrMapping/>
+  </p:clrMapOvr>
+</p:sld>
+</file>
+
+<file path=ppt/slides/slide4.xml><?xml version="1.0" encoding="utf-8"?>
+<p:sld xmlns:a="http://schemas.openxmlformats.org/drawingml/2006/main" xmlns:r="http://schemas.openxmlformats.org/officeDocument/2006/relationships" xmlns:p="http://schemas.openxmlformats.org/presentationml/2006/main">
+  <p:cSld>
+    <p:spTree>
+      <p:nvGrpSpPr>
+        <p:cNvPr id="1" name=""/>
+        <p:cNvGrpSpPr/>
+        <p:nvPr/>
+      </p:nvGrpSpPr>
+      <p:grpSpPr>
+        <a:xfrm>
+          <a:off x="0" y="0"/>
+          <a:ext cx="0" cy="0"/>
+          <a:chOff x="0" y="0"/>
+          <a:chExt cx="0" cy="0"/>
+        </a:xfrm>
+      </p:grpSpPr>
+      <p:sp>
+        <p:nvSpPr>
+          <p:cNvPr id="5" name="Hexagon 4">
+            <a:extLst>
+              <a:ext uri="{FF2B5EF4-FFF2-40B4-BE49-F238E27FC236}">
+                <a16:creationId xmlns:a16="http://schemas.microsoft.com/office/drawing/2014/main" id="{785C0D7F-3D22-9F37-9219-2914F6AFE7C2}"/>
+              </a:ext>
+            </a:extLst>
+          </p:cNvPr>
+          <p:cNvSpPr/>
+          <p:nvPr/>
+        </p:nvSpPr>
+        <p:spPr>
+          <a:xfrm>
+            <a:off x="5141129" y="1627095"/>
+            <a:ext cx="1904368" cy="1742298"/>
+          </a:xfrm>
+          <a:prstGeom prst="hexagon">
+            <a:avLst/>
+          </a:prstGeom>
+          <a:noFill/>
+        </p:spPr>
+        <p:style>
+          <a:lnRef idx="2">
+            <a:schemeClr val="accent1">
+              <a:shade val="15000"/>
+            </a:schemeClr>
+          </a:lnRef>
+          <a:fillRef idx="1">
+            <a:schemeClr val="accent1"/>
+          </a:fillRef>
+          <a:effectRef idx="0">
+            <a:schemeClr val="accent1"/>
+          </a:effectRef>
+          <a:fontRef idx="minor">
+            <a:schemeClr val="lt1"/>
+          </a:fontRef>
+        </p:style>
+        <p:txBody>
+          <a:bodyPr rot="0" spcFirstLastPara="0" vertOverflow="overflow" horzOverflow="overflow" vert="horz" wrap="square" lIns="91440" tIns="45720" rIns="91440" bIns="45720" numCol="1" spcCol="0" rtlCol="0" fromWordArt="0" anchor="b" anchorCtr="0" forceAA="0" compatLnSpc="1">
+            <a:prstTxWarp prst="textNoShape">
+              <a:avLst/>
+            </a:prstTxWarp>
+            <a:noAutofit/>
+          </a:bodyPr>
+          <a:lstStyle/>
+          <a:p>
+            <a:pPr algn="ctr"/>
+            <a:endParaRPr lang="en-US" u="sng" dirty="0"/>
+          </a:p>
+        </p:txBody>
+      </p:sp>
+      <p:sp>
+        <p:nvSpPr>
+          <p:cNvPr id="7" name="Hexagon 6">
+            <a:extLst>
+              <a:ext uri="{FF2B5EF4-FFF2-40B4-BE49-F238E27FC236}">
+                <a16:creationId xmlns:a16="http://schemas.microsoft.com/office/drawing/2014/main" id="{AEE8D26D-8B25-1147-0B55-704072A59355}"/>
+              </a:ext>
+            </a:extLst>
+          </p:cNvPr>
+          <p:cNvSpPr/>
+          <p:nvPr/>
+        </p:nvSpPr>
+        <p:spPr>
+          <a:xfrm>
+            <a:off x="5141129" y="-116111"/>
+            <a:ext cx="1904368" cy="1742298"/>
+          </a:xfrm>
+          <a:prstGeom prst="hexagon">
+            <a:avLst/>
+          </a:prstGeom>
+          <a:noFill/>
+        </p:spPr>
+        <p:style>
+          <a:lnRef idx="2">
+            <a:schemeClr val="accent1">
+              <a:shade val="15000"/>
+            </a:schemeClr>
+          </a:lnRef>
+          <a:fillRef idx="1">
+            <a:schemeClr val="accent1"/>
+          </a:fillRef>
+          <a:effectRef idx="0">
+            <a:schemeClr val="accent1"/>
+          </a:effectRef>
+          <a:fontRef idx="minor">
+            <a:schemeClr val="lt1"/>
+          </a:fontRef>
+        </p:style>
+        <p:txBody>
+          <a:bodyPr rot="0" spcFirstLastPara="0" vertOverflow="overflow" horzOverflow="overflow" vert="horz" wrap="square" lIns="91440" tIns="45720" rIns="91440" bIns="45720" numCol="1" spcCol="0" rtlCol="0" fromWordArt="0" anchor="b" anchorCtr="0" forceAA="0" compatLnSpc="1">
+            <a:prstTxWarp prst="textNoShape">
+              <a:avLst/>
+            </a:prstTxWarp>
+            <a:noAutofit/>
+          </a:bodyPr>
+          <a:lstStyle/>
+          <a:p>
+            <a:pPr algn="ctr"/>
+            <a:endParaRPr lang="en-US" u="sng" dirty="0"/>
+          </a:p>
+        </p:txBody>
+      </p:sp>
+      <p:sp>
+        <p:nvSpPr>
+          <p:cNvPr id="9" name="Hexagon 8">
+            <a:extLst>
+              <a:ext uri="{FF2B5EF4-FFF2-40B4-BE49-F238E27FC236}">
+                <a16:creationId xmlns:a16="http://schemas.microsoft.com/office/drawing/2014/main" id="{5C5B71C5-B077-037A-4F8E-43459DA11B9A}"/>
+              </a:ext>
+            </a:extLst>
+          </p:cNvPr>
+          <p:cNvSpPr/>
+          <p:nvPr/>
+        </p:nvSpPr>
+        <p:spPr>
+          <a:xfrm>
+            <a:off x="7040910" y="698081"/>
+            <a:ext cx="1904368" cy="1742298"/>
+          </a:xfrm>
+          <a:prstGeom prst="hexagon">
+            <a:avLst/>
+          </a:prstGeom>
+          <a:noFill/>
+        </p:spPr>
+        <p:style>
+          <a:lnRef idx="2">
+            <a:schemeClr val="accent1">
+              <a:shade val="15000"/>
+            </a:schemeClr>
+          </a:lnRef>
+          <a:fillRef idx="1">
+            <a:schemeClr val="accent1"/>
+          </a:fillRef>
+          <a:effectRef idx="0">
+            <a:schemeClr val="accent1"/>
+          </a:effectRef>
+          <a:fontRef idx="minor">
+            <a:schemeClr val="lt1"/>
+          </a:fontRef>
+        </p:style>
+        <p:txBody>
+          <a:bodyPr rot="0" spcFirstLastPara="0" vertOverflow="overflow" horzOverflow="overflow" vert="horz" wrap="square" lIns="91440" tIns="45720" rIns="91440" bIns="45720" numCol="1" spcCol="0" rtlCol="0" fromWordArt="0" anchor="b" anchorCtr="0" forceAA="0" compatLnSpc="1">
+            <a:prstTxWarp prst="textNoShape">
+              <a:avLst/>
+            </a:prstTxWarp>
+            <a:noAutofit/>
+          </a:bodyPr>
+          <a:lstStyle/>
+          <a:p>
+            <a:pPr algn="ctr"/>
+            <a:endParaRPr lang="en-US" u="sng" dirty="0"/>
+          </a:p>
+        </p:txBody>
+      </p:sp>
+      <p:sp>
+        <p:nvSpPr>
+          <p:cNvPr id="11" name="Hexagon 10">
+            <a:extLst>
+              <a:ext uri="{FF2B5EF4-FFF2-40B4-BE49-F238E27FC236}">
+                <a16:creationId xmlns:a16="http://schemas.microsoft.com/office/drawing/2014/main" id="{7C0490ED-D8F7-3E87-C80C-1290FCE6FB22}"/>
+              </a:ext>
+            </a:extLst>
+          </p:cNvPr>
+          <p:cNvSpPr/>
+          <p:nvPr/>
+        </p:nvSpPr>
+        <p:spPr>
+          <a:xfrm>
+            <a:off x="3241349" y="698081"/>
+            <a:ext cx="1904368" cy="1742298"/>
+          </a:xfrm>
+          <a:prstGeom prst="hexagon">
+            <a:avLst/>
+          </a:prstGeom>
+          <a:noFill/>
+        </p:spPr>
+        <p:style>
+          <a:lnRef idx="2">
+            <a:schemeClr val="accent1">
+              <a:shade val="15000"/>
+            </a:schemeClr>
+          </a:lnRef>
+          <a:fillRef idx="1">
+            <a:schemeClr val="accent1"/>
+          </a:fillRef>
+          <a:effectRef idx="0">
+            <a:schemeClr val="accent1"/>
+          </a:effectRef>
+          <a:fontRef idx="minor">
+            <a:schemeClr val="lt1"/>
+          </a:fontRef>
+        </p:style>
+        <p:txBody>
+          <a:bodyPr rot="0" spcFirstLastPara="0" vertOverflow="overflow" horzOverflow="overflow" vert="horz" wrap="square" lIns="91440" tIns="45720" rIns="91440" bIns="45720" numCol="1" spcCol="0" rtlCol="0" fromWordArt="0" anchor="b" anchorCtr="0" forceAA="0" compatLnSpc="1">
+            <a:prstTxWarp prst="textNoShape">
+              <a:avLst/>
+            </a:prstTxWarp>
+            <a:noAutofit/>
+          </a:bodyPr>
+          <a:lstStyle/>
+          <a:p>
+            <a:pPr algn="ctr"/>
+            <a:endParaRPr lang="en-US" u="sng" dirty="0"/>
+          </a:p>
+        </p:txBody>
+      </p:sp>
+      <p:sp>
+        <p:nvSpPr>
+          <p:cNvPr id="13" name="Hexagon 12">
+            <a:extLst>
+              <a:ext uri="{FF2B5EF4-FFF2-40B4-BE49-F238E27FC236}">
+                <a16:creationId xmlns:a16="http://schemas.microsoft.com/office/drawing/2014/main" id="{E5E617C3-BA1A-54B9-3008-7C63DEFDD533}"/>
+              </a:ext>
+            </a:extLst>
+          </p:cNvPr>
+          <p:cNvSpPr/>
+          <p:nvPr/>
+        </p:nvSpPr>
+        <p:spPr>
+          <a:xfrm>
+            <a:off x="3241349" y="2556109"/>
+            <a:ext cx="1904368" cy="1742298"/>
+          </a:xfrm>
+          <a:prstGeom prst="hexagon">
+            <a:avLst/>
+          </a:prstGeom>
+          <a:noFill/>
+        </p:spPr>
+        <p:style>
+          <a:lnRef idx="2">
+            <a:schemeClr val="accent1">
+              <a:shade val="15000"/>
+            </a:schemeClr>
+          </a:lnRef>
+          <a:fillRef idx="1">
+            <a:schemeClr val="accent1"/>
+          </a:fillRef>
+          <a:effectRef idx="0">
+            <a:schemeClr val="accent1"/>
+          </a:effectRef>
+          <a:fontRef idx="minor">
+            <a:schemeClr val="lt1"/>
+          </a:fontRef>
+        </p:style>
+        <p:txBody>
+          <a:bodyPr rot="0" spcFirstLastPara="0" vertOverflow="overflow" horzOverflow="overflow" vert="horz" wrap="square" lIns="91440" tIns="45720" rIns="91440" bIns="45720" numCol="1" spcCol="0" rtlCol="0" fromWordArt="0" anchor="b" anchorCtr="0" forceAA="0" compatLnSpc="1">
+            <a:prstTxWarp prst="textNoShape">
+              <a:avLst/>
+            </a:prstTxWarp>
+            <a:noAutofit/>
+          </a:bodyPr>
+          <a:lstStyle/>
+          <a:p>
+            <a:pPr algn="ctr"/>
+            <a:endParaRPr lang="en-US" u="sng" dirty="0"/>
+          </a:p>
+        </p:txBody>
+      </p:sp>
+      <p:sp>
+        <p:nvSpPr>
+          <p:cNvPr id="15" name="Hexagon 14">
+            <a:extLst>
+              <a:ext uri="{FF2B5EF4-FFF2-40B4-BE49-F238E27FC236}">
+                <a16:creationId xmlns:a16="http://schemas.microsoft.com/office/drawing/2014/main" id="{580597C0-5AF6-BF23-8CD8-CB2FFBDAE9B3}"/>
+              </a:ext>
+            </a:extLst>
+          </p:cNvPr>
+          <p:cNvSpPr/>
+          <p:nvPr/>
+        </p:nvSpPr>
+        <p:spPr>
+          <a:xfrm>
+            <a:off x="7040910" y="2556109"/>
+            <a:ext cx="1904368" cy="1742298"/>
+          </a:xfrm>
+          <a:prstGeom prst="hexagon">
+            <a:avLst/>
+          </a:prstGeom>
+          <a:noFill/>
+        </p:spPr>
+        <p:style>
+          <a:lnRef idx="2">
+            <a:schemeClr val="accent1">
+              <a:shade val="15000"/>
+            </a:schemeClr>
+          </a:lnRef>
+          <a:fillRef idx="1">
+            <a:schemeClr val="accent1"/>
+          </a:fillRef>
+          <a:effectRef idx="0">
+            <a:schemeClr val="accent1"/>
+          </a:effectRef>
+          <a:fontRef idx="minor">
+            <a:schemeClr val="lt1"/>
+          </a:fontRef>
+        </p:style>
+        <p:txBody>
+          <a:bodyPr rot="0" spcFirstLastPara="0" vertOverflow="overflow" horzOverflow="overflow" vert="horz" wrap="square" lIns="91440" tIns="45720" rIns="91440" bIns="45720" numCol="1" spcCol="0" rtlCol="0" fromWordArt="0" anchor="b" anchorCtr="0" forceAA="0" compatLnSpc="1">
+            <a:prstTxWarp prst="textNoShape">
+              <a:avLst/>
+            </a:prstTxWarp>
+            <a:noAutofit/>
+          </a:bodyPr>
+          <a:lstStyle/>
+          <a:p>
+            <a:pPr algn="ctr"/>
+            <a:endParaRPr lang="en-US" u="sng" dirty="0"/>
+          </a:p>
+        </p:txBody>
+      </p:sp>
+      <p:sp>
+        <p:nvSpPr>
+          <p:cNvPr id="17" name="Hexagon 16">
+            <a:extLst>
+              <a:ext uri="{FF2B5EF4-FFF2-40B4-BE49-F238E27FC236}">
+                <a16:creationId xmlns:a16="http://schemas.microsoft.com/office/drawing/2014/main" id="{070D4F6B-6FE4-F56E-46E2-D83E8CDCD6D4}"/>
+              </a:ext>
+            </a:extLst>
+          </p:cNvPr>
+          <p:cNvSpPr/>
+          <p:nvPr/>
+        </p:nvSpPr>
+        <p:spPr>
+          <a:xfrm>
+            <a:off x="5141129" y="3370301"/>
+            <a:ext cx="1904368" cy="1742298"/>
+          </a:xfrm>
+          <a:prstGeom prst="hexagon">
+            <a:avLst/>
+          </a:prstGeom>
+          <a:noFill/>
+        </p:spPr>
+        <p:style>
+          <a:lnRef idx="2">
+            <a:schemeClr val="accent1">
+              <a:shade val="15000"/>
+            </a:schemeClr>
+          </a:lnRef>
+          <a:fillRef idx="1">
+            <a:schemeClr val="accent1"/>
+          </a:fillRef>
+          <a:effectRef idx="0">
+            <a:schemeClr val="accent1"/>
+          </a:effectRef>
+          <a:fontRef idx="minor">
+            <a:schemeClr val="lt1"/>
+          </a:fontRef>
+        </p:style>
+        <p:txBody>
+          <a:bodyPr rot="0" spcFirstLastPara="0" vertOverflow="overflow" horzOverflow="overflow" vert="horz" wrap="square" lIns="91440" tIns="45720" rIns="91440" bIns="45720" numCol="1" spcCol="0" rtlCol="0" fromWordArt="0" anchor="b" anchorCtr="0" forceAA="0" compatLnSpc="1">
+            <a:prstTxWarp prst="textNoShape">
+              <a:avLst/>
+            </a:prstTxWarp>
+            <a:noAutofit/>
+          </a:bodyPr>
+          <a:lstStyle/>
+          <a:p>
+            <a:pPr algn="ctr"/>
+            <a:endParaRPr lang="en-US" u="sng" dirty="0"/>
+          </a:p>
+        </p:txBody>
+      </p:sp>
+      <p:sp>
+        <p:nvSpPr>
+          <p:cNvPr id="19" name="Hexagon 18">
+            <a:extLst>
+              <a:ext uri="{FF2B5EF4-FFF2-40B4-BE49-F238E27FC236}">
+                <a16:creationId xmlns:a16="http://schemas.microsoft.com/office/drawing/2014/main" id="{AC27933E-8461-1B1F-BE00-A18BAA569DEB}"/>
+              </a:ext>
+            </a:extLst>
+          </p:cNvPr>
+          <p:cNvSpPr/>
+          <p:nvPr/>
+        </p:nvSpPr>
+        <p:spPr>
+          <a:xfrm>
+            <a:off x="7040910" y="4403698"/>
+            <a:ext cx="1904368" cy="1742298"/>
+          </a:xfrm>
+          <a:prstGeom prst="hexagon">
+            <a:avLst/>
+          </a:prstGeom>
+          <a:noFill/>
+        </p:spPr>
+        <p:style>
+          <a:lnRef idx="2">
+            <a:schemeClr val="accent1">
+              <a:shade val="15000"/>
+            </a:schemeClr>
+          </a:lnRef>
+          <a:fillRef idx="1">
+            <a:schemeClr val="accent1"/>
+          </a:fillRef>
+          <a:effectRef idx="0">
+            <a:schemeClr val="accent1"/>
+          </a:effectRef>
+          <a:fontRef idx="minor">
+            <a:schemeClr val="lt1"/>
+          </a:fontRef>
+        </p:style>
+        <p:txBody>
+          <a:bodyPr rot="0" spcFirstLastPara="0" vertOverflow="overflow" horzOverflow="overflow" vert="horz" wrap="square" lIns="91440" tIns="45720" rIns="91440" bIns="45720" numCol="1" spcCol="0" rtlCol="0" fromWordArt="0" anchor="b" anchorCtr="0" forceAA="0" compatLnSpc="1">
+            <a:prstTxWarp prst="textNoShape">
+              <a:avLst/>
+            </a:prstTxWarp>
+            <a:noAutofit/>
+          </a:bodyPr>
+          <a:lstStyle/>
+          <a:p>
+            <a:pPr algn="ctr"/>
+            <a:endParaRPr lang="en-US" u="sng" dirty="0"/>
+          </a:p>
+        </p:txBody>
+      </p:sp>
+      <p:sp>
+        <p:nvSpPr>
+          <p:cNvPr id="21" name="Hexagon 20">
+            <a:extLst>
+              <a:ext uri="{FF2B5EF4-FFF2-40B4-BE49-F238E27FC236}">
+                <a16:creationId xmlns:a16="http://schemas.microsoft.com/office/drawing/2014/main" id="{718B0E42-7DAC-DF8E-D91A-D72D5DC8CEB8}"/>
+              </a:ext>
+            </a:extLst>
+          </p:cNvPr>
+          <p:cNvSpPr/>
+          <p:nvPr/>
+        </p:nvSpPr>
+        <p:spPr>
+          <a:xfrm>
+            <a:off x="3241349" y="4403698"/>
+            <a:ext cx="1904368" cy="1742298"/>
+          </a:xfrm>
+          <a:prstGeom prst="hexagon">
+            <a:avLst/>
+          </a:prstGeom>
+          <a:noFill/>
+        </p:spPr>
+        <p:style>
+          <a:lnRef idx="2">
+            <a:schemeClr val="accent1">
+              <a:shade val="15000"/>
+            </a:schemeClr>
+          </a:lnRef>
+          <a:fillRef idx="1">
+            <a:schemeClr val="accent1"/>
+          </a:fillRef>
+          <a:effectRef idx="0">
+            <a:schemeClr val="accent1"/>
+          </a:effectRef>
+          <a:fontRef idx="minor">
+            <a:schemeClr val="lt1"/>
+          </a:fontRef>
+        </p:style>
+        <p:txBody>
+          <a:bodyPr rot="0" spcFirstLastPara="0" vertOverflow="overflow" horzOverflow="overflow" vert="horz" wrap="square" lIns="91440" tIns="45720" rIns="91440" bIns="45720" numCol="1" spcCol="0" rtlCol="0" fromWordArt="0" anchor="b" anchorCtr="0" forceAA="0" compatLnSpc="1">
+            <a:prstTxWarp prst="textNoShape">
+              <a:avLst/>
+            </a:prstTxWarp>
+            <a:noAutofit/>
+          </a:bodyPr>
+          <a:lstStyle/>
+          <a:p>
+            <a:pPr algn="ctr"/>
+            <a:endParaRPr lang="en-US" u="sng" dirty="0"/>
+          </a:p>
+        </p:txBody>
+      </p:sp>
+      <p:sp>
+        <p:nvSpPr>
+          <p:cNvPr id="23" name="Hexagon 22">
+            <a:extLst>
+              <a:ext uri="{FF2B5EF4-FFF2-40B4-BE49-F238E27FC236}">
+                <a16:creationId xmlns:a16="http://schemas.microsoft.com/office/drawing/2014/main" id="{5031959F-5CA8-8623-FF22-0031C017DD3D}"/>
+              </a:ext>
+            </a:extLst>
+          </p:cNvPr>
+          <p:cNvSpPr/>
+          <p:nvPr/>
+        </p:nvSpPr>
+        <p:spPr>
+          <a:xfrm>
+            <a:off x="1341568" y="698081"/>
+            <a:ext cx="1904368" cy="1742298"/>
+          </a:xfrm>
+          <a:prstGeom prst="hexagon">
+            <a:avLst/>
+          </a:prstGeom>
+          <a:noFill/>
+        </p:spPr>
+        <p:style>
+          <a:lnRef idx="2">
+            <a:schemeClr val="accent1">
+              <a:shade val="15000"/>
+            </a:schemeClr>
+          </a:lnRef>
+          <a:fillRef idx="1">
+            <a:schemeClr val="accent1"/>
+          </a:fillRef>
+          <a:effectRef idx="0">
+            <a:schemeClr val="accent1"/>
+          </a:effectRef>
+          <a:fontRef idx="minor">
+            <a:schemeClr val="lt1"/>
+          </a:fontRef>
+        </p:style>
+        <p:txBody>
+          <a:bodyPr rot="0" spcFirstLastPara="0" vertOverflow="overflow" horzOverflow="overflow" vert="horz" wrap="square" lIns="91440" tIns="45720" rIns="91440" bIns="45720" numCol="1" spcCol="0" rtlCol="0" fromWordArt="0" anchor="b" anchorCtr="0" forceAA="0" compatLnSpc="1">
+            <a:prstTxWarp prst="textNoShape">
+              <a:avLst/>
+            </a:prstTxWarp>
+            <a:noAutofit/>
+          </a:bodyPr>
+          <a:lstStyle/>
+          <a:p>
+            <a:pPr algn="ctr"/>
+            <a:endParaRPr lang="en-US" u="sng" dirty="0"/>
+          </a:p>
+        </p:txBody>
+      </p:sp>
+      <p:sp>
+        <p:nvSpPr>
+          <p:cNvPr id="25" name="Hexagon 24">
+            <a:extLst>
+              <a:ext uri="{FF2B5EF4-FFF2-40B4-BE49-F238E27FC236}">
+                <a16:creationId xmlns:a16="http://schemas.microsoft.com/office/drawing/2014/main" id="{D201A695-52ED-16CB-A993-52BB5CD5E73B}"/>
+              </a:ext>
+            </a:extLst>
+          </p:cNvPr>
+          <p:cNvSpPr/>
+          <p:nvPr/>
+        </p:nvSpPr>
+        <p:spPr>
+          <a:xfrm>
+            <a:off x="8940691" y="698081"/>
+            <a:ext cx="1904368" cy="1742298"/>
+          </a:xfrm>
+          <a:prstGeom prst="hexagon">
+            <a:avLst/>
+          </a:prstGeom>
+          <a:noFill/>
+        </p:spPr>
+        <p:style>
+          <a:lnRef idx="2">
+            <a:schemeClr val="accent1">
+              <a:shade val="15000"/>
+            </a:schemeClr>
+          </a:lnRef>
+          <a:fillRef idx="1">
+            <a:schemeClr val="accent1"/>
+          </a:fillRef>
+          <a:effectRef idx="0">
+            <a:schemeClr val="accent1"/>
+          </a:effectRef>
+          <a:fontRef idx="minor">
+            <a:schemeClr val="lt1"/>
+          </a:fontRef>
+        </p:style>
+        <p:txBody>
+          <a:bodyPr rot="0" spcFirstLastPara="0" vertOverflow="overflow" horzOverflow="overflow" vert="horz" wrap="square" lIns="91440" tIns="45720" rIns="91440" bIns="45720" numCol="1" spcCol="0" rtlCol="0" fromWordArt="0" anchor="b" anchorCtr="0" forceAA="0" compatLnSpc="1">
+            <a:prstTxWarp prst="textNoShape">
+              <a:avLst/>
+            </a:prstTxWarp>
+            <a:noAutofit/>
+          </a:bodyPr>
+          <a:lstStyle/>
+          <a:p>
+            <a:pPr algn="ctr"/>
+            <a:endParaRPr lang="en-US" u="sng" dirty="0"/>
+          </a:p>
+        </p:txBody>
+      </p:sp>
+      <p:sp>
+        <p:nvSpPr>
+          <p:cNvPr id="27" name="Hexagon 26">
+            <a:extLst>
+              <a:ext uri="{FF2B5EF4-FFF2-40B4-BE49-F238E27FC236}">
+                <a16:creationId xmlns:a16="http://schemas.microsoft.com/office/drawing/2014/main" id="{072F9EBA-58DB-06A4-AC8D-D0762DBC964C}"/>
+              </a:ext>
+            </a:extLst>
+          </p:cNvPr>
+          <p:cNvSpPr/>
+          <p:nvPr/>
+        </p:nvSpPr>
+        <p:spPr>
+          <a:xfrm>
+            <a:off x="1341568" y="2556109"/>
+            <a:ext cx="1904368" cy="1742298"/>
+          </a:xfrm>
+          <a:prstGeom prst="hexagon">
+            <a:avLst/>
+          </a:prstGeom>
+          <a:noFill/>
+        </p:spPr>
+        <p:style>
+          <a:lnRef idx="2">
+            <a:schemeClr val="accent1">
+              <a:shade val="15000"/>
+            </a:schemeClr>
+          </a:lnRef>
+          <a:fillRef idx="1">
+            <a:schemeClr val="accent1"/>
+          </a:fillRef>
+          <a:effectRef idx="0">
+            <a:schemeClr val="accent1"/>
+          </a:effectRef>
+          <a:fontRef idx="minor">
+            <a:schemeClr val="lt1"/>
+          </a:fontRef>
+        </p:style>
+        <p:txBody>
+          <a:bodyPr rot="0" spcFirstLastPara="0" vertOverflow="overflow" horzOverflow="overflow" vert="horz" wrap="square" lIns="91440" tIns="45720" rIns="91440" bIns="45720" numCol="1" spcCol="0" rtlCol="0" fromWordArt="0" anchor="b" anchorCtr="0" forceAA="0" compatLnSpc="1">
+            <a:prstTxWarp prst="textNoShape">
+              <a:avLst/>
+            </a:prstTxWarp>
+            <a:noAutofit/>
+          </a:bodyPr>
+          <a:lstStyle/>
+          <a:p>
+            <a:pPr algn="ctr"/>
+            <a:endParaRPr lang="en-US" u="sng" dirty="0"/>
+          </a:p>
+        </p:txBody>
+      </p:sp>
+      <p:sp>
+        <p:nvSpPr>
+          <p:cNvPr id="29" name="Hexagon 28">
+            <a:extLst>
+              <a:ext uri="{FF2B5EF4-FFF2-40B4-BE49-F238E27FC236}">
+                <a16:creationId xmlns:a16="http://schemas.microsoft.com/office/drawing/2014/main" id="{714FD145-A8E5-7931-23BB-75C0AA240BE6}"/>
+              </a:ext>
+            </a:extLst>
+          </p:cNvPr>
+          <p:cNvSpPr/>
+          <p:nvPr/>
+        </p:nvSpPr>
+        <p:spPr>
+          <a:xfrm>
+            <a:off x="8940691" y="2556109"/>
+            <a:ext cx="1904368" cy="1742298"/>
+          </a:xfrm>
+          <a:prstGeom prst="hexagon">
+            <a:avLst/>
+          </a:prstGeom>
+          <a:noFill/>
+        </p:spPr>
+        <p:style>
+          <a:lnRef idx="2">
+            <a:schemeClr val="accent1">
+              <a:shade val="15000"/>
+            </a:schemeClr>
+          </a:lnRef>
+          <a:fillRef idx="1">
+            <a:schemeClr val="accent1"/>
+          </a:fillRef>
+          <a:effectRef idx="0">
+            <a:schemeClr val="accent1"/>
+          </a:effectRef>
+          <a:fontRef idx="minor">
+            <a:schemeClr val="lt1"/>
+          </a:fontRef>
+        </p:style>
+        <p:txBody>
+          <a:bodyPr rot="0" spcFirstLastPara="0" vertOverflow="overflow" horzOverflow="overflow" vert="horz" wrap="square" lIns="91440" tIns="45720" rIns="91440" bIns="45720" numCol="1" spcCol="0" rtlCol="0" fromWordArt="0" anchor="b" anchorCtr="0" forceAA="0" compatLnSpc="1">
+            <a:prstTxWarp prst="textNoShape">
+              <a:avLst/>
+            </a:prstTxWarp>
+            <a:noAutofit/>
+          </a:bodyPr>
+          <a:lstStyle/>
+          <a:p>
+            <a:pPr algn="ctr"/>
+            <a:endParaRPr lang="en-US" u="sng" dirty="0"/>
+          </a:p>
+        </p:txBody>
+      </p:sp>
+      <p:sp>
+        <p:nvSpPr>
+          <p:cNvPr id="31" name="Hexagon 30">
+            <a:extLst>
+              <a:ext uri="{FF2B5EF4-FFF2-40B4-BE49-F238E27FC236}">
+                <a16:creationId xmlns:a16="http://schemas.microsoft.com/office/drawing/2014/main" id="{CD734718-DF80-6CC0-645D-7D1380706632}"/>
+              </a:ext>
+            </a:extLst>
+          </p:cNvPr>
+          <p:cNvSpPr/>
+          <p:nvPr/>
+        </p:nvSpPr>
+        <p:spPr>
+          <a:xfrm>
+            <a:off x="1341568" y="4403697"/>
+            <a:ext cx="1904368" cy="1742298"/>
+          </a:xfrm>
+          <a:prstGeom prst="hexagon">
+            <a:avLst/>
+          </a:prstGeom>
+          <a:noFill/>
+        </p:spPr>
+        <p:style>
+          <a:lnRef idx="2">
+            <a:schemeClr val="accent1">
+              <a:shade val="15000"/>
+            </a:schemeClr>
+          </a:lnRef>
+          <a:fillRef idx="1">
+            <a:schemeClr val="accent1"/>
+          </a:fillRef>
+          <a:effectRef idx="0">
+            <a:schemeClr val="accent1"/>
+          </a:effectRef>
+          <a:fontRef idx="minor">
+            <a:schemeClr val="lt1"/>
+          </a:fontRef>
+        </p:style>
+        <p:txBody>
+          <a:bodyPr rot="0" spcFirstLastPara="0" vertOverflow="overflow" horzOverflow="overflow" vert="horz" wrap="square" lIns="91440" tIns="45720" rIns="91440" bIns="45720" numCol="1" spcCol="0" rtlCol="0" fromWordArt="0" anchor="b" anchorCtr="0" forceAA="0" compatLnSpc="1">
+            <a:prstTxWarp prst="textNoShape">
+              <a:avLst/>
+            </a:prstTxWarp>
+            <a:noAutofit/>
+          </a:bodyPr>
+          <a:lstStyle/>
+          <a:p>
+            <a:pPr algn="ctr"/>
+            <a:endParaRPr lang="en-US" u="sng" dirty="0"/>
+          </a:p>
+        </p:txBody>
+      </p:sp>
+      <p:sp>
+        <p:nvSpPr>
+          <p:cNvPr id="33" name="Hexagon 32">
+            <a:extLst>
+              <a:ext uri="{FF2B5EF4-FFF2-40B4-BE49-F238E27FC236}">
+                <a16:creationId xmlns:a16="http://schemas.microsoft.com/office/drawing/2014/main" id="{82FF784A-1EC5-3D7E-C0BB-BC77391AC403}"/>
+              </a:ext>
+            </a:extLst>
+          </p:cNvPr>
+          <p:cNvSpPr/>
+          <p:nvPr/>
+        </p:nvSpPr>
+        <p:spPr>
+          <a:xfrm>
+            <a:off x="8940691" y="4403698"/>
+            <a:ext cx="1904368" cy="1742298"/>
+          </a:xfrm>
+          <a:prstGeom prst="hexagon">
+            <a:avLst/>
+          </a:prstGeom>
+          <a:noFill/>
+        </p:spPr>
+        <p:style>
+          <a:lnRef idx="2">
+            <a:schemeClr val="accent1">
+              <a:shade val="15000"/>
+            </a:schemeClr>
+          </a:lnRef>
+          <a:fillRef idx="1">
+            <a:schemeClr val="accent1"/>
+          </a:fillRef>
+          <a:effectRef idx="0">
+            <a:schemeClr val="accent1"/>
+          </a:effectRef>
+          <a:fontRef idx="minor">
+            <a:schemeClr val="lt1"/>
+          </a:fontRef>
+        </p:style>
+        <p:txBody>
+          <a:bodyPr rot="0" spcFirstLastPara="0" vertOverflow="overflow" horzOverflow="overflow" vert="horz" wrap="square" lIns="91440" tIns="45720" rIns="91440" bIns="45720" numCol="1" spcCol="0" rtlCol="0" fromWordArt="0" anchor="b" anchorCtr="0" forceAA="0" compatLnSpc="1">
+            <a:prstTxWarp prst="textNoShape">
+              <a:avLst/>
+            </a:prstTxWarp>
+            <a:noAutofit/>
+          </a:bodyPr>
+          <a:lstStyle/>
+          <a:p>
+            <a:pPr algn="ctr"/>
+            <a:endParaRPr lang="en-US" u="sng" dirty="0"/>
+          </a:p>
+        </p:txBody>
+      </p:sp>
+      <p:sp>
+        <p:nvSpPr>
+          <p:cNvPr id="35" name="Hexagon 34">
+            <a:extLst>
+              <a:ext uri="{FF2B5EF4-FFF2-40B4-BE49-F238E27FC236}">
+                <a16:creationId xmlns:a16="http://schemas.microsoft.com/office/drawing/2014/main" id="{7FDAD090-C3D5-E45C-0896-63E2FA39633F}"/>
+              </a:ext>
+            </a:extLst>
+          </p:cNvPr>
+          <p:cNvSpPr/>
+          <p:nvPr/>
+        </p:nvSpPr>
+        <p:spPr>
+          <a:xfrm>
+            <a:off x="5141129" y="5113506"/>
+            <a:ext cx="1904368" cy="1742298"/>
+          </a:xfrm>
+          <a:prstGeom prst="hexagon">
+            <a:avLst/>
+          </a:prstGeom>
+          <a:noFill/>
+        </p:spPr>
+        <p:style>
+          <a:lnRef idx="2">
+            <a:schemeClr val="accent1">
+              <a:shade val="15000"/>
+            </a:schemeClr>
+          </a:lnRef>
+          <a:fillRef idx="1">
+            <a:schemeClr val="accent1"/>
+          </a:fillRef>
+          <a:effectRef idx="0">
+            <a:schemeClr val="accent1"/>
+          </a:effectRef>
+          <a:fontRef idx="minor">
+            <a:schemeClr val="lt1"/>
+          </a:fontRef>
+        </p:style>
+        <p:txBody>
+          <a:bodyPr rot="0" spcFirstLastPara="0" vertOverflow="overflow" horzOverflow="overflow" vert="horz" wrap="square" lIns="91440" tIns="45720" rIns="91440" bIns="45720" numCol="1" spcCol="0" rtlCol="0" fromWordArt="0" anchor="b" anchorCtr="0" forceAA="0" compatLnSpc="1">
+            <a:prstTxWarp prst="textNoShape">
+              <a:avLst/>
+            </a:prstTxWarp>
+            <a:noAutofit/>
+          </a:bodyPr>
+          <a:lstStyle/>
+          <a:p>
+            <a:pPr algn="ctr"/>
+            <a:endParaRPr lang="en-US" u="sng" dirty="0"/>
+          </a:p>
+        </p:txBody>
+      </p:sp>
+    </p:spTree>
+    <p:extLst>
+      <p:ext uri="{BB962C8B-B14F-4D97-AF65-F5344CB8AC3E}">
+        <p14:creationId xmlns:p14="http://schemas.microsoft.com/office/powerpoint/2010/main" val="2492009167"/>
+      </p:ext>
+    </p:extLst>
+  </p:cSld>
+  <p:clrMapOvr>
+    <a:masterClrMapping/>
+  </p:clrMapOvr>
+</p:sld>
+</file>
+
+<file path=ppt/slides/slide5.xml><?xml version="1.0" encoding="utf-8"?>
+<p:sld xmlns:a="http://schemas.openxmlformats.org/drawingml/2006/main" xmlns:r="http://schemas.openxmlformats.org/officeDocument/2006/relationships" xmlns:p="http://schemas.openxmlformats.org/presentationml/2006/main">
+  <p:cSld>
+    <p:spTree>
+      <p:nvGrpSpPr>
+        <p:cNvPr id="1" name="">
+          <a:extLst>
+            <a:ext uri="{FF2B5EF4-FFF2-40B4-BE49-F238E27FC236}">
+              <a16:creationId xmlns:a16="http://schemas.microsoft.com/office/drawing/2014/main" id="{FBD9E681-030F-E5E4-325E-4C520F838564}"/>
+            </a:ext>
+          </a:extLst>
+        </p:cNvPr>
+        <p:cNvGrpSpPr/>
+        <p:nvPr/>
+      </p:nvGrpSpPr>
+      <p:grpSpPr>
+        <a:xfrm>
+          <a:off x="0" y="0"/>
+          <a:ext cx="0" cy="0"/>
+          <a:chOff x="0" y="0"/>
+          <a:chExt cx="0" cy="0"/>
+        </a:xfrm>
+      </p:grpSpPr>
+      <p:grpSp>
+        <p:nvGrpSpPr>
+          <p:cNvPr id="42" name="Group 41">
+            <a:extLst>
+              <a:ext uri="{FF2B5EF4-FFF2-40B4-BE49-F238E27FC236}">
+                <a16:creationId xmlns:a16="http://schemas.microsoft.com/office/drawing/2014/main" id="{A6E0A54D-7090-23BC-B03F-71755E75F5BC}"/>
+              </a:ext>
+            </a:extLst>
+          </p:cNvPr>
+          <p:cNvGrpSpPr/>
+          <p:nvPr/>
+        </p:nvGrpSpPr>
+        <p:grpSpPr>
+          <a:xfrm>
+            <a:off x="1983566" y="78781"/>
+            <a:ext cx="8225310" cy="6710184"/>
+            <a:chOff x="1800686" y="78781"/>
+            <a:chExt cx="8225310" cy="6710184"/>
+          </a:xfrm>
+        </p:grpSpPr>
+        <p:sp>
+          <p:nvSpPr>
+            <p:cNvPr id="11" name="Hexagon 10">
+              <a:extLst>
+                <a:ext uri="{FF2B5EF4-FFF2-40B4-BE49-F238E27FC236}">
+                  <a16:creationId xmlns:a16="http://schemas.microsoft.com/office/drawing/2014/main" id="{63F76FF4-52BE-3A27-54A8-5AD544B6379B}"/>
+                </a:ext>
+              </a:extLst>
+            </p:cNvPr>
+            <p:cNvSpPr/>
+            <p:nvPr/>
+          </p:nvSpPr>
+          <p:spPr>
+            <a:xfrm>
+              <a:off x="4370550" y="2790864"/>
+              <a:ext cx="3094337" cy="2591241"/>
+            </a:xfrm>
+            <a:prstGeom prst="hexagon">
+              <a:avLst/>
+            </a:prstGeom>
+            <a:noFill/>
+          </p:spPr>
+          <p:style>
+            <a:lnRef idx="2">
+              <a:schemeClr val="accent1">
+                <a:shade val="15000"/>
+              </a:schemeClr>
+            </a:lnRef>
+            <a:fillRef idx="1">
+              <a:schemeClr val="accent1"/>
+            </a:fillRef>
+            <a:effectRef idx="0">
+              <a:schemeClr val="accent1"/>
+            </a:effectRef>
+            <a:fontRef idx="minor">
+              <a:schemeClr val="lt1"/>
+            </a:fontRef>
+          </p:style>
+          <p:txBody>
+            <a:bodyPr rot="0" spcFirstLastPara="0" vertOverflow="overflow" horzOverflow="overflow" vert="horz" wrap="square" lIns="91440" tIns="45720" rIns="91440" bIns="45720" numCol="1" spcCol="0" rtlCol="0" fromWordArt="0" anchor="b" anchorCtr="0" forceAA="0" compatLnSpc="1">
+              <a:prstTxWarp prst="textNoShape">
+                <a:avLst/>
+              </a:prstTxWarp>
+              <a:noAutofit/>
+            </a:bodyPr>
+            <a:lstStyle/>
+            <a:p>
+              <a:pPr algn="ctr"/>
+              <a:endParaRPr lang="en-US" dirty="0"/>
+            </a:p>
+          </p:txBody>
+        </p:sp>
+        <p:sp>
+          <p:nvSpPr>
+            <p:cNvPr id="4" name="Hexagon 3">
+              <a:extLst>
+                <a:ext uri="{FF2B5EF4-FFF2-40B4-BE49-F238E27FC236}">
+                  <a16:creationId xmlns:a16="http://schemas.microsoft.com/office/drawing/2014/main" id="{DCADFE39-734B-8C58-5CB7-2E18A5A57E28}"/>
+                </a:ext>
+              </a:extLst>
+            </p:cNvPr>
+            <p:cNvSpPr/>
+            <p:nvPr/>
+          </p:nvSpPr>
+          <p:spPr>
+            <a:xfrm>
+              <a:off x="1800859" y="1383577"/>
+              <a:ext cx="3094337" cy="2591241"/>
+            </a:xfrm>
+            <a:prstGeom prst="hexagon">
+              <a:avLst/>
+            </a:prstGeom>
+            <a:noFill/>
+          </p:spPr>
+          <p:style>
+            <a:lnRef idx="2">
+              <a:schemeClr val="accent1">
+                <a:shade val="15000"/>
+              </a:schemeClr>
+            </a:lnRef>
+            <a:fillRef idx="1">
+              <a:schemeClr val="accent1"/>
+            </a:fillRef>
+            <a:effectRef idx="0">
+              <a:schemeClr val="accent1"/>
+            </a:effectRef>
+            <a:fontRef idx="minor">
+              <a:schemeClr val="lt1"/>
+            </a:fontRef>
+          </p:style>
+          <p:txBody>
+            <a:bodyPr rot="0" spcFirstLastPara="0" vertOverflow="overflow" horzOverflow="overflow" vert="horz" wrap="square" lIns="91440" tIns="45720" rIns="91440" bIns="45720" numCol="1" spcCol="0" rtlCol="0" fromWordArt="0" anchor="b" anchorCtr="0" forceAA="0" compatLnSpc="1">
+              <a:prstTxWarp prst="textNoShape">
+                <a:avLst/>
+              </a:prstTxWarp>
+              <a:noAutofit/>
+            </a:bodyPr>
+            <a:lstStyle/>
+            <a:p>
+              <a:pPr algn="ctr"/>
+              <a:endParaRPr lang="en-US" dirty="0"/>
+            </a:p>
+          </p:txBody>
+        </p:sp>
+        <p:sp>
+          <p:nvSpPr>
+            <p:cNvPr id="19" name="Hexagon 18">
+              <a:extLst>
+                <a:ext uri="{FF2B5EF4-FFF2-40B4-BE49-F238E27FC236}">
+                  <a16:creationId xmlns:a16="http://schemas.microsoft.com/office/drawing/2014/main" id="{562B2C87-BC7E-564C-6829-B4ABAE0ABB99}"/>
+                </a:ext>
+              </a:extLst>
+            </p:cNvPr>
+            <p:cNvSpPr/>
+            <p:nvPr/>
+          </p:nvSpPr>
+          <p:spPr>
+            <a:xfrm>
+              <a:off x="1800686" y="4167244"/>
+              <a:ext cx="3094337" cy="2591241"/>
+            </a:xfrm>
+            <a:prstGeom prst="hexagon">
+              <a:avLst/>
+            </a:prstGeom>
+            <a:noFill/>
+          </p:spPr>
+          <p:style>
+            <a:lnRef idx="2">
+              <a:schemeClr val="accent1">
+                <a:shade val="15000"/>
+              </a:schemeClr>
+            </a:lnRef>
+            <a:fillRef idx="1">
+              <a:schemeClr val="accent1"/>
+            </a:fillRef>
+            <a:effectRef idx="0">
+              <a:schemeClr val="accent1"/>
+            </a:effectRef>
+            <a:fontRef idx="minor">
+              <a:schemeClr val="lt1"/>
+            </a:fontRef>
+          </p:style>
+          <p:txBody>
+            <a:bodyPr rot="0" spcFirstLastPara="0" vertOverflow="overflow" horzOverflow="overflow" vert="horz" wrap="square" lIns="91440" tIns="45720" rIns="91440" bIns="45720" numCol="1" spcCol="0" rtlCol="0" fromWordArt="0" anchor="b" anchorCtr="0" forceAA="0" compatLnSpc="1">
+              <a:prstTxWarp prst="textNoShape">
+                <a:avLst/>
+              </a:prstTxWarp>
+              <a:noAutofit/>
+            </a:bodyPr>
+            <a:lstStyle/>
+            <a:p>
+              <a:pPr algn="ctr"/>
+              <a:endParaRPr lang="en-US" dirty="0"/>
+            </a:p>
+          </p:txBody>
+        </p:sp>
+        <p:sp>
+          <p:nvSpPr>
+            <p:cNvPr id="24" name="Hexagon 23">
+              <a:extLst>
+                <a:ext uri="{FF2B5EF4-FFF2-40B4-BE49-F238E27FC236}">
+                  <a16:creationId xmlns:a16="http://schemas.microsoft.com/office/drawing/2014/main" id="{11CB6AD5-D022-6093-A338-009B1036FFBF}"/>
+                </a:ext>
+              </a:extLst>
+            </p:cNvPr>
+            <p:cNvSpPr/>
+            <p:nvPr/>
+          </p:nvSpPr>
+          <p:spPr>
+            <a:xfrm>
+              <a:off x="6931486" y="4197724"/>
+              <a:ext cx="3094337" cy="2591241"/>
+            </a:xfrm>
+            <a:prstGeom prst="hexagon">
+              <a:avLst/>
+            </a:prstGeom>
+            <a:noFill/>
+          </p:spPr>
+          <p:style>
+            <a:lnRef idx="2">
+              <a:schemeClr val="accent1">
+                <a:shade val="15000"/>
+              </a:schemeClr>
+            </a:lnRef>
+            <a:fillRef idx="1">
+              <a:schemeClr val="accent1"/>
+            </a:fillRef>
+            <a:effectRef idx="0">
+              <a:schemeClr val="accent1"/>
+            </a:effectRef>
+            <a:fontRef idx="minor">
+              <a:schemeClr val="lt1"/>
+            </a:fontRef>
+          </p:style>
+          <p:txBody>
+            <a:bodyPr rot="0" spcFirstLastPara="0" vertOverflow="overflow" horzOverflow="overflow" vert="horz" wrap="square" lIns="91440" tIns="45720" rIns="91440" bIns="45720" numCol="1" spcCol="0" rtlCol="0" fromWordArt="0" anchor="b" anchorCtr="0" forceAA="0" compatLnSpc="1">
+              <a:prstTxWarp prst="textNoShape">
+                <a:avLst/>
+              </a:prstTxWarp>
+              <a:noAutofit/>
+            </a:bodyPr>
+            <a:lstStyle/>
+            <a:p>
+              <a:pPr algn="ctr"/>
+              <a:endParaRPr lang="en-US" dirty="0"/>
+            </a:p>
+          </p:txBody>
+        </p:sp>
+        <p:grpSp>
+          <p:nvGrpSpPr>
+            <p:cNvPr id="28" name="Group 27">
+              <a:extLst>
+                <a:ext uri="{FF2B5EF4-FFF2-40B4-BE49-F238E27FC236}">
+                  <a16:creationId xmlns:a16="http://schemas.microsoft.com/office/drawing/2014/main" id="{CD1C0214-78A7-B508-8797-8CAE893CDF10}"/>
+                </a:ext>
+              </a:extLst>
+            </p:cNvPr>
+            <p:cNvGrpSpPr/>
+            <p:nvPr/>
+          </p:nvGrpSpPr>
+          <p:grpSpPr>
+            <a:xfrm>
+              <a:off x="6931659" y="1383577"/>
+              <a:ext cx="3094337" cy="2591241"/>
+              <a:chOff x="2372789" y="2110700"/>
+              <a:chExt cx="3094337" cy="2591241"/>
+            </a:xfrm>
+          </p:grpSpPr>
+          <p:sp>
+            <p:nvSpPr>
+              <p:cNvPr id="30" name="Hexagon 29">
+                <a:extLst>
+                  <a:ext uri="{FF2B5EF4-FFF2-40B4-BE49-F238E27FC236}">
+                    <a16:creationId xmlns:a16="http://schemas.microsoft.com/office/drawing/2014/main" id="{E011C66E-585C-EA29-33F0-A9315D6923DB}"/>
                   </a:ext>
                 </a:extLst>
               </p:cNvPr>
@@ -3634,10 +9144,10 @@
           </p:sp>
           <p:sp>
             <p:nvSpPr>
-              <p:cNvPr id="6" name="TextBox 5">
+              <p:cNvPr id="31" name="TextBox 30">
                 <a:extLst>
                   <a:ext uri="{FF2B5EF4-FFF2-40B4-BE49-F238E27FC236}">
-                    <a16:creationId xmlns:a16="http://schemas.microsoft.com/office/drawing/2014/main" id="{4A3D0A34-C71D-3A17-C7B9-5122209B2103}"/>
+                    <a16:creationId xmlns:a16="http://schemas.microsoft.com/office/drawing/2014/main" id="{21E0F330-2447-ECEF-9C0E-5279EFFF6250}"/>
                   </a:ext>
                 </a:extLst>
               </p:cNvPr>
@@ -3647,7 +9157,7 @@
             <p:spPr>
               <a:xfrm>
                 <a:off x="2512295" y="3683490"/>
-                <a:ext cx="2743199" cy="646331"/>
+                <a:ext cx="2743199" cy="276999"/>
               </a:xfrm>
               <a:prstGeom prst="rect">
                 <a:avLst/>
@@ -3664,17 +9174,7 @@
               <a:lstStyle/>
               <a:p>
                 <a:pPr algn="ctr"/>
-                <a:r>
-                  <a:rPr lang="ja-JP" sz="1200" b="1">
-                    <a:highlight>
-                      <a:srgbClr val="FFFFFF"/>
-                    </a:highlight>
-                    <a:latin typeface="Comic Sans MS"/>
-                    <a:ea typeface="ＭＳ Ｐゴシック"/>
-                  </a:rPr>
-                  <a:t>び</a:t>
-                </a:r>
-                <a:endParaRPr lang="ja-JP" altLang="en-US" sz="1200">
+                <a:endParaRPr lang="ja-JP" altLang="en-US" sz="1200" b="1" dirty="0">
                   <a:highlight>
                     <a:srgbClr val="FFFFFF"/>
                   </a:highlight>
@@ -3682,107 +9182,15 @@
                   <a:ea typeface="ＭＳ Ｐゴシック"/>
                 </a:endParaRPr>
               </a:p>
-              <a:p>
-                <a:pPr algn="ctr"/>
-                <a:r>
-                  <a:rPr lang="ja-JP" sz="1200" b="1">
-                    <a:solidFill>
-                      <a:srgbClr val="272320"/>
-                    </a:solidFill>
-                    <a:highlight>
-                      <a:srgbClr val="FFFFFF"/>
-                    </a:highlight>
-                    <a:latin typeface="Comic Sans MS"/>
-                    <a:ea typeface="ＭＳ Ｐゴシック"/>
-                  </a:rPr>
-                  <a:t>ビ</a:t>
-                </a:r>
-                <a:endParaRPr lang="ja-JP" altLang="en-US" sz="1200">
-                  <a:solidFill>
-                    <a:srgbClr val="272320"/>
-                  </a:solidFill>
-                  <a:highlight>
-                    <a:srgbClr val="FFFFFF"/>
-                  </a:highlight>
-                  <a:latin typeface="Comic Sans MS"/>
-                </a:endParaRPr>
-              </a:p>
-              <a:p>
-                <a:pPr algn="ctr"/>
-                <a:r>
-                  <a:rPr lang="en-US" sz="1200" b="1">
-                    <a:solidFill>
-                      <a:srgbClr val="272320"/>
-                    </a:solidFill>
-                    <a:highlight>
-                      <a:srgbClr val="FFFFFF"/>
-                    </a:highlight>
-                    <a:latin typeface="Comic Sans MS"/>
-                  </a:rPr>
-                  <a:t>Bee</a:t>
-                </a:r>
-                <a:endParaRPr lang="en-US"/>
-              </a:p>
             </p:txBody>
           </p:sp>
         </p:grpSp>
-        <p:pic>
-          <p:nvPicPr>
-            <p:cNvPr id="14" name="Picture 13" descr="A logo of a bee&#10;&#10;AI-generated content may be incorrect.">
+        <p:grpSp>
+          <p:nvGrpSpPr>
+            <p:cNvPr id="27" name="Group 26">
               <a:extLst>
                 <a:ext uri="{FF2B5EF4-FFF2-40B4-BE49-F238E27FC236}">
-                  <a16:creationId xmlns:a16="http://schemas.microsoft.com/office/drawing/2014/main" id="{8F478CC3-9FBF-8BE9-B028-D698591D5E08}"/>
-                </a:ext>
-              </a:extLst>
-            </p:cNvPr>
-            <p:cNvPicPr>
-              <a:picLocks noChangeAspect="1"/>
-            </p:cNvPicPr>
-            <p:nvPr/>
-          </p:nvPicPr>
-          <p:blipFill>
-            <a:blip r:embed="rId3"/>
-            <a:stretch>
-              <a:fillRect/>
-            </a:stretch>
-          </p:blipFill>
-          <p:spPr>
-            <a:xfrm>
-              <a:off x="3050936" y="1952141"/>
-              <a:ext cx="1505213" cy="1765514"/>
-            </a:xfrm>
-            <a:prstGeom prst="rect">
-              <a:avLst/>
-            </a:prstGeom>
-          </p:spPr>
-        </p:pic>
-      </p:grpSp>
-      <p:grpSp>
-        <p:nvGrpSpPr>
-          <p:cNvPr id="16" name="Group 15">
-            <a:extLst>
-              <a:ext uri="{FF2B5EF4-FFF2-40B4-BE49-F238E27FC236}">
-                <a16:creationId xmlns:a16="http://schemas.microsoft.com/office/drawing/2014/main" id="{93C6226F-BF10-B1B1-DC01-26EC750ED358}"/>
-              </a:ext>
-            </a:extLst>
-          </p:cNvPr>
-          <p:cNvGrpSpPr/>
-          <p:nvPr/>
-        </p:nvGrpSpPr>
-        <p:grpSpPr>
-          <a:xfrm>
-            <a:off x="1957261" y="3446997"/>
-            <a:ext cx="3094337" cy="2591241"/>
-            <a:chOff x="2372789" y="2110700"/>
-            <a:chExt cx="3094337" cy="2591241"/>
-          </a:xfrm>
-        </p:grpSpPr>
-        <p:grpSp>
-          <p:nvGrpSpPr>
-            <p:cNvPr id="17" name="Group 16">
-              <a:extLst>
-                <a:ext uri="{FF2B5EF4-FFF2-40B4-BE49-F238E27FC236}">
-                  <a16:creationId xmlns:a16="http://schemas.microsoft.com/office/drawing/2014/main" id="{3BA60224-A684-D793-9084-46E12CCF7E55}"/>
+                  <a16:creationId xmlns:a16="http://schemas.microsoft.com/office/drawing/2014/main" id="{BB7FB506-6387-F83B-CA1F-60B71C707043}"/>
                 </a:ext>
               </a:extLst>
             </p:cNvPr>
@@ -3791,7 +9199,7 @@
           </p:nvGrpSpPr>
           <p:grpSpPr>
             <a:xfrm>
-              <a:off x="2372789" y="2110700"/>
+              <a:off x="4389570" y="78781"/>
               <a:ext cx="3094337" cy="2591241"/>
               <a:chOff x="2372789" y="2110700"/>
               <a:chExt cx="3094337" cy="2591241"/>
@@ -3799,10 +9207,10 @@
           </p:grpSpPr>
           <p:sp>
             <p:nvSpPr>
-              <p:cNvPr id="19" name="Hexagon 18">
+              <p:cNvPr id="34" name="Hexagon 33">
                 <a:extLst>
                   <a:ext uri="{FF2B5EF4-FFF2-40B4-BE49-F238E27FC236}">
-                    <a16:creationId xmlns:a16="http://schemas.microsoft.com/office/drawing/2014/main" id="{0D73B61B-D633-B8E9-4300-4AC7F89F52A0}"/>
+                    <a16:creationId xmlns:a16="http://schemas.microsoft.com/office/drawing/2014/main" id="{3237F3D8-A9ED-191E-E4FC-3280B56ADA85}"/>
                   </a:ext>
                 </a:extLst>
               </p:cNvPr>
@@ -3851,10 +9259,10 @@
           </p:sp>
           <p:sp>
             <p:nvSpPr>
-              <p:cNvPr id="20" name="TextBox 19">
+              <p:cNvPr id="35" name="TextBox 34">
                 <a:extLst>
                   <a:ext uri="{FF2B5EF4-FFF2-40B4-BE49-F238E27FC236}">
-                    <a16:creationId xmlns:a16="http://schemas.microsoft.com/office/drawing/2014/main" id="{A9E59382-501D-3B9A-DBB8-E9FA920D27B6}"/>
+                    <a16:creationId xmlns:a16="http://schemas.microsoft.com/office/drawing/2014/main" id="{C173C089-0C12-27A6-1915-769E5809A552}"/>
                   </a:ext>
                 </a:extLst>
               </p:cNvPr>
@@ -3863,8 +9271,8 @@
             </p:nvSpPr>
             <p:spPr>
               <a:xfrm>
-                <a:off x="2542775" y="3409170"/>
-                <a:ext cx="2743199" cy="830997"/>
+                <a:off x="2584250" y="2332349"/>
+                <a:ext cx="2692399" cy="1569660"/>
               </a:xfrm>
               <a:prstGeom prst="rect">
                 <a:avLst/>
@@ -3882,26 +9290,61 @@
               <a:p>
                 <a:pPr algn="ctr"/>
                 <a:r>
-                  <a:rPr lang="ja-JP" altLang="en-US" sz="1200" b="1">
+                  <a:rPr lang="en-US" altLang="ja-JP" sz="2400" b="1">
                     <a:highlight>
                       <a:srgbClr val="FFFFFF"/>
                     </a:highlight>
                     <a:latin typeface="Comic Sans MS"/>
                     <a:ea typeface="ＭＳ Ｐゴシック"/>
                   </a:rPr>
-                  <a:t>ち</a:t>
+                  <a:t>Thank you</a:t>
                 </a:r>
+                <a:endParaRPr lang="en-US"/>
+              </a:p>
+              <a:p>
+                <a:pPr algn="ctr"/>
                 <a:r>
-                  <a:rPr lang="ja-JP" sz="1200" b="1">
+                  <a:rPr lang="en-US" altLang="ja-JP" sz="2400" b="1">
                     <a:highlight>
                       <a:srgbClr val="FFFFFF"/>
                     </a:highlight>
                     <a:latin typeface="Comic Sans MS"/>
                     <a:ea typeface="ＭＳ Ｐゴシック"/>
                   </a:rPr>
-                  <a:t>び</a:t>
+                  <a:t>for </a:t>
                 </a:r>
-                <a:endParaRPr lang="ja-JP" sz="1200">
+                <a:r>
+                  <a:rPr lang="en-US" altLang="ja-JP" sz="2400" b="1" dirty="0">
+                    <a:highlight>
+                      <a:srgbClr val="FFFFFF"/>
+                    </a:highlight>
+                    <a:latin typeface="Comic Sans MS"/>
+                    <a:ea typeface="ＭＳ Ｐゴシック"/>
+                  </a:rPr>
+                  <a:t>supporting </a:t>
+                </a:r>
+                <a:endParaRPr lang="en-US">
+                  <a:latin typeface="Aptos" panose="020B0004020202020204"/>
+                  <a:ea typeface="ＭＳ Ｐゴシック"/>
+                </a:endParaRPr>
+              </a:p>
+              <a:p>
+                <a:pPr algn="ctr"/>
+                <a:r>
+                  <a:rPr lang="en-US" altLang="ja-JP" sz="2400" b="1">
+                    <a:highlight>
+                      <a:srgbClr val="FFFFFF"/>
+                    </a:highlight>
+                    <a:latin typeface="Comic Sans MS"/>
+                    <a:ea typeface="ＭＳ Ｐゴシック"/>
+                  </a:rPr>
+                  <a:t>my business!</a:t>
+                </a:r>
+                <a:endParaRPr lang="en-US"/>
+              </a:p>
+              <a:p>
+                <a:pPr algn="ctr"/>
+                <a:endParaRPr lang="en-US" altLang="ja-JP" sz="2400" b="1" dirty="0">
                   <a:highlight>
                     <a:srgbClr val="FFFFFF"/>
                   </a:highlight>
@@ -3909,389 +9352,15 @@
                   <a:ea typeface="ＭＳ Ｐゴシック"/>
                 </a:endParaRPr>
               </a:p>
-              <a:p>
-                <a:pPr algn="ctr"/>
-                <a:r>
-                  <a:rPr lang="ja-JP" altLang="en-US" sz="1200" b="1">
-                    <a:highlight>
-                      <a:srgbClr val="FFFFFF"/>
-                    </a:highlight>
-                    <a:latin typeface="Comic Sans MS"/>
-                    <a:ea typeface="ＭＳ Ｐゴシック"/>
-                  </a:rPr>
-                  <a:t>チ</a:t>
-                </a:r>
-                <a:r>
-                  <a:rPr lang="ja-JP" sz="1200" b="1">
-                    <a:highlight>
-                      <a:srgbClr val="FFFFFF"/>
-                    </a:highlight>
-                    <a:latin typeface="Comic Sans MS"/>
-                    <a:ea typeface="ＭＳ Ｐゴシック"/>
-                  </a:rPr>
-                  <a:t>ビ</a:t>
-                </a:r>
-                <a:endParaRPr lang="ja-JP" sz="1200">
-                  <a:highlight>
-                    <a:srgbClr val="FFFFFF"/>
-                  </a:highlight>
-                  <a:latin typeface="Comic Sans MS"/>
-                </a:endParaRPr>
-              </a:p>
-              <a:p>
-                <a:pPr algn="ctr"/>
-                <a:r>
-                  <a:rPr lang="en-US" sz="1200" b="1">
-                    <a:highlight>
-                      <a:srgbClr val="FFFFFF"/>
-                    </a:highlight>
-                    <a:latin typeface="Comic Sans MS"/>
-                  </a:rPr>
-                  <a:t>Chi-Bee</a:t>
-                </a:r>
-                <a:endParaRPr lang="ja-JP" altLang="en-US" sz="1200">
-                  <a:highlight>
-                    <a:srgbClr val="FFFFFF"/>
-                  </a:highlight>
-                  <a:latin typeface="Comic Sans MS"/>
-                </a:endParaRPr>
-              </a:p>
-              <a:p>
-                <a:pPr algn="ctr"/>
-                <a:r>
-                  <a:rPr lang="en-US" sz="1200" b="1">
-                    <a:highlight>
-                      <a:srgbClr val="FFFFFF"/>
-                    </a:highlight>
-                    <a:latin typeface="Comic Sans MS"/>
-                  </a:rPr>
-                  <a:t>Small, tiny, little one</a:t>
-                </a:r>
-                <a:endParaRPr lang="en-US" altLang="ja-JP"/>
-              </a:p>
             </p:txBody>
           </p:sp>
         </p:grpSp>
-        <p:pic>
-          <p:nvPicPr>
-            <p:cNvPr id="18" name="Picture 17" descr="A logo of a bee&#10;&#10;AI-generated content may be incorrect.">
+        <p:sp>
+          <p:nvSpPr>
+            <p:cNvPr id="2" name="Heart 1">
               <a:extLst>
                 <a:ext uri="{FF2B5EF4-FFF2-40B4-BE49-F238E27FC236}">
-                  <a16:creationId xmlns:a16="http://schemas.microsoft.com/office/drawing/2014/main" id="{904953DE-3FE2-08A3-09BD-84CAF261CBCE}"/>
-                </a:ext>
-              </a:extLst>
-            </p:cNvPr>
-            <p:cNvPicPr>
-              <a:picLocks noChangeAspect="1"/>
-            </p:cNvPicPr>
-            <p:nvPr/>
-          </p:nvPicPr>
-          <p:blipFill>
-            <a:blip r:embed="rId3"/>
-            <a:stretch>
-              <a:fillRect/>
-            </a:stretch>
-          </p:blipFill>
-          <p:spPr>
-            <a:xfrm>
-              <a:off x="3416696" y="2399181"/>
-              <a:ext cx="783853" cy="932394"/>
-            </a:xfrm>
-            <a:prstGeom prst="rect">
-              <a:avLst/>
-            </a:prstGeom>
-          </p:spPr>
-        </p:pic>
-      </p:grpSp>
-      <p:grpSp>
-        <p:nvGrpSpPr>
-          <p:cNvPr id="32" name="Group 31">
-            <a:extLst>
-              <a:ext uri="{FF2B5EF4-FFF2-40B4-BE49-F238E27FC236}">
-                <a16:creationId xmlns:a16="http://schemas.microsoft.com/office/drawing/2014/main" id="{A6C02E42-44BC-5624-2D20-726B41949E93}"/>
-              </a:ext>
-            </a:extLst>
-          </p:cNvPr>
-          <p:cNvGrpSpPr/>
-          <p:nvPr/>
-        </p:nvGrpSpPr>
-        <p:grpSpPr>
-          <a:xfrm>
-            <a:off x="7088061" y="3443422"/>
-            <a:ext cx="3094337" cy="2625296"/>
-            <a:chOff x="8286941" y="3585662"/>
-            <a:chExt cx="3094337" cy="2625296"/>
-          </a:xfrm>
-        </p:grpSpPr>
-        <p:grpSp>
-          <p:nvGrpSpPr>
-            <p:cNvPr id="22" name="Group 21">
-              <a:extLst>
-                <a:ext uri="{FF2B5EF4-FFF2-40B4-BE49-F238E27FC236}">
-                  <a16:creationId xmlns:a16="http://schemas.microsoft.com/office/drawing/2014/main" id="{E780C39B-DDB4-1889-D70C-1C235DBEE107}"/>
-                </a:ext>
-              </a:extLst>
-            </p:cNvPr>
-            <p:cNvGrpSpPr/>
-            <p:nvPr/>
-          </p:nvGrpSpPr>
-          <p:grpSpPr>
-            <a:xfrm>
-              <a:off x="8286941" y="3619717"/>
-              <a:ext cx="3094337" cy="2591241"/>
-              <a:chOff x="2372789" y="2110700"/>
-              <a:chExt cx="3094337" cy="2591241"/>
-            </a:xfrm>
-          </p:grpSpPr>
-          <p:sp>
-            <p:nvSpPr>
-              <p:cNvPr id="24" name="Hexagon 23">
-                <a:extLst>
-                  <a:ext uri="{FF2B5EF4-FFF2-40B4-BE49-F238E27FC236}">
-                    <a16:creationId xmlns:a16="http://schemas.microsoft.com/office/drawing/2014/main" id="{CE1F926C-6210-40A9-3277-F03B9FA6AF40}"/>
-                  </a:ext>
-                </a:extLst>
-              </p:cNvPr>
-              <p:cNvSpPr/>
-              <p:nvPr/>
-            </p:nvSpPr>
-            <p:spPr>
-              <a:xfrm>
-                <a:off x="2372789" y="2110700"/>
-                <a:ext cx="3094337" cy="2591241"/>
-              </a:xfrm>
-              <a:prstGeom prst="hexagon">
-                <a:avLst/>
-              </a:prstGeom>
-              <a:noFill/>
-            </p:spPr>
-            <p:style>
-              <a:lnRef idx="2">
-                <a:schemeClr val="accent1">
-                  <a:shade val="15000"/>
-                </a:schemeClr>
-              </a:lnRef>
-              <a:fillRef idx="1">
-                <a:schemeClr val="accent1"/>
-              </a:fillRef>
-              <a:effectRef idx="0">
-                <a:schemeClr val="accent1"/>
-              </a:effectRef>
-              <a:fontRef idx="minor">
-                <a:schemeClr val="lt1"/>
-              </a:fontRef>
-            </p:style>
-            <p:txBody>
-              <a:bodyPr rot="0" spcFirstLastPara="0" vertOverflow="overflow" horzOverflow="overflow" vert="horz" wrap="square" lIns="91440" tIns="45720" rIns="91440" bIns="45720" numCol="1" spcCol="0" rtlCol="0" fromWordArt="0" anchor="b" anchorCtr="0" forceAA="0" compatLnSpc="1">
-                <a:prstTxWarp prst="textNoShape">
-                  <a:avLst/>
-                </a:prstTxWarp>
-                <a:noAutofit/>
-              </a:bodyPr>
-              <a:lstStyle/>
-              <a:p>
-                <a:pPr algn="ctr"/>
-                <a:endParaRPr lang="en-US" dirty="0"/>
-              </a:p>
-            </p:txBody>
-          </p:sp>
-          <p:sp>
-            <p:nvSpPr>
-              <p:cNvPr id="25" name="TextBox 24">
-                <a:extLst>
-                  <a:ext uri="{FF2B5EF4-FFF2-40B4-BE49-F238E27FC236}">
-                    <a16:creationId xmlns:a16="http://schemas.microsoft.com/office/drawing/2014/main" id="{D4E4F7A2-B34A-78C3-AA3C-245A9F1038D4}"/>
-                  </a:ext>
-                </a:extLst>
-              </p:cNvPr>
-              <p:cNvSpPr txBox="1"/>
-              <p:nvPr/>
-            </p:nvSpPr>
-            <p:spPr>
-              <a:xfrm>
-                <a:off x="2542775" y="3653010"/>
-                <a:ext cx="2743199" cy="1015663"/>
-              </a:xfrm>
-              <a:prstGeom prst="rect">
-                <a:avLst/>
-              </a:prstGeom>
-              <a:noFill/>
-            </p:spPr>
-            <p:txBody>
-              <a:bodyPr rot="0" spcFirstLastPara="0" vertOverflow="overflow" horzOverflow="overflow" vert="horz" wrap="square" lIns="91440" tIns="45720" rIns="91440" bIns="45720" numCol="1" spcCol="0" rtlCol="0" fromWordArt="0" anchor="t" anchorCtr="0" forceAA="0" compatLnSpc="1">
-                <a:prstTxWarp prst="textNoShape">
-                  <a:avLst/>
-                </a:prstTxWarp>
-                <a:spAutoFit/>
-              </a:bodyPr>
-              <a:lstStyle/>
-              <a:p>
-                <a:pPr algn="ctr"/>
-                <a:r>
-                  <a:rPr lang="ja-JP" sz="1200" b="1">
-                    <a:highlight>
-                      <a:srgbClr val="FFFFFF"/>
-                    </a:highlight>
-                    <a:latin typeface="Comic Sans MS"/>
-                    <a:ea typeface="ＭＳ Ｐゴシック"/>
-                  </a:rPr>
-                  <a:t>蛇</a:t>
-                </a:r>
-                <a:endParaRPr lang="ja-JP" altLang="en-US" sz="1200">
-                  <a:highlight>
-                    <a:srgbClr val="FFFFFF"/>
-                  </a:highlight>
-                  <a:latin typeface="Comic Sans MS"/>
-                </a:endParaRPr>
-              </a:p>
-              <a:p>
-                <a:pPr algn="ctr"/>
-                <a:r>
-                  <a:rPr lang="ja-JP" altLang="en-US" sz="1200" b="1">
-                    <a:highlight>
-                      <a:srgbClr val="FFFFFF"/>
-                    </a:highlight>
-                    <a:latin typeface="Comic Sans MS"/>
-                  </a:rPr>
-                  <a:t>へ</a:t>
-                </a:r>
-                <a:r>
-                  <a:rPr lang="ja-JP" sz="1200" b="1">
-                    <a:highlight>
-                      <a:srgbClr val="FFFFFF"/>
-                    </a:highlight>
-                    <a:latin typeface="Comic Sans MS"/>
-                    <a:ea typeface="ＭＳ Ｐゴシック"/>
-                  </a:rPr>
-                  <a:t>び</a:t>
-                </a:r>
-                <a:endParaRPr lang="ja-JP" sz="1200">
-                  <a:highlight>
-                    <a:srgbClr val="FFFFFF"/>
-                  </a:highlight>
-                  <a:latin typeface="Comic Sans MS"/>
-                  <a:ea typeface="ＭＳ Ｐゴシック"/>
-                </a:endParaRPr>
-              </a:p>
-              <a:p>
-                <a:pPr algn="ctr"/>
-                <a:r>
-                  <a:rPr lang="ja-JP" altLang="en-US" sz="1200" b="1">
-                    <a:highlight>
-                      <a:srgbClr val="FFFFFF"/>
-                    </a:highlight>
-                    <a:latin typeface="Comic Sans MS"/>
-                  </a:rPr>
-                  <a:t>ヘ</a:t>
-                </a:r>
-                <a:r>
-                  <a:rPr lang="ja-JP" sz="1200" b="1">
-                    <a:highlight>
-                      <a:srgbClr val="FFFFFF"/>
-                    </a:highlight>
-                    <a:latin typeface="Comic Sans MS"/>
-                    <a:ea typeface="ＭＳ Ｐゴシック"/>
-                  </a:rPr>
-                  <a:t>ビ</a:t>
-                </a:r>
-                <a:endParaRPr lang="ja-JP" sz="1200">
-                  <a:highlight>
-                    <a:srgbClr val="FFFFFF"/>
-                  </a:highlight>
-                  <a:latin typeface="Comic Sans MS"/>
-                </a:endParaRPr>
-              </a:p>
-              <a:p>
-                <a:pPr algn="ctr"/>
-                <a:r>
-                  <a:rPr lang="en-US" sz="1200" b="1">
-                    <a:highlight>
-                      <a:srgbClr val="FFFFFF"/>
-                    </a:highlight>
-                    <a:latin typeface="Comic Sans MS"/>
-                  </a:rPr>
-                  <a:t>He-Bee</a:t>
-                </a:r>
-                <a:endParaRPr lang="ja-JP" altLang="en-US" sz="1200">
-                  <a:highlight>
-                    <a:srgbClr val="FFFFFF"/>
-                  </a:highlight>
-                  <a:latin typeface="Comic Sans MS"/>
-                </a:endParaRPr>
-              </a:p>
-              <a:p>
-                <a:pPr algn="ctr"/>
-                <a:r>
-                  <a:rPr lang="en-US" sz="1200" b="1">
-                    <a:highlight>
-                      <a:srgbClr val="FFFFFF"/>
-                    </a:highlight>
-                    <a:latin typeface="Comic Sans MS"/>
-                  </a:rPr>
-                  <a:t>Snake</a:t>
-                </a:r>
-                <a:endParaRPr lang="ja-JP"/>
-              </a:p>
-            </p:txBody>
-          </p:sp>
-        </p:grpSp>
-        <p:pic>
-          <p:nvPicPr>
-            <p:cNvPr id="26" name="Picture 25" descr="A yellow and black bee&#10;&#10;AI-generated content may be incorrect.">
-              <a:extLst>
-                <a:ext uri="{FF2B5EF4-FFF2-40B4-BE49-F238E27FC236}">
-                  <a16:creationId xmlns:a16="http://schemas.microsoft.com/office/drawing/2014/main" id="{4867DBA5-6E57-3D74-991D-FF8632FD0A51}"/>
-                </a:ext>
-              </a:extLst>
-            </p:cNvPr>
-            <p:cNvPicPr>
-              <a:picLocks noChangeAspect="1"/>
-            </p:cNvPicPr>
-            <p:nvPr/>
-          </p:nvPicPr>
-          <p:blipFill>
-            <a:blip r:embed="rId4"/>
-            <a:stretch>
-              <a:fillRect/>
-            </a:stretch>
-          </p:blipFill>
-          <p:spPr>
-            <a:xfrm>
-              <a:off x="9014438" y="3585662"/>
-              <a:ext cx="1455420" cy="1559559"/>
-            </a:xfrm>
-            <a:prstGeom prst="rect">
-              <a:avLst/>
-            </a:prstGeom>
-          </p:spPr>
-        </p:pic>
-      </p:grpSp>
-      <p:grpSp>
-        <p:nvGrpSpPr>
-          <p:cNvPr id="28" name="Group 27">
-            <a:extLst>
-              <a:ext uri="{FF2B5EF4-FFF2-40B4-BE49-F238E27FC236}">
-                <a16:creationId xmlns:a16="http://schemas.microsoft.com/office/drawing/2014/main" id="{61C69789-5B64-23F3-6824-51FC07AC80F3}"/>
-              </a:ext>
-            </a:extLst>
-          </p:cNvPr>
-          <p:cNvGrpSpPr/>
-          <p:nvPr/>
-        </p:nvGrpSpPr>
-        <p:grpSpPr>
-          <a:xfrm>
-            <a:off x="7088234" y="663330"/>
-            <a:ext cx="3094337" cy="2591241"/>
-            <a:chOff x="2372789" y="2110700"/>
-            <a:chExt cx="3094337" cy="2591241"/>
-          </a:xfrm>
-        </p:grpSpPr>
-        <p:sp>
-          <p:nvSpPr>
-            <p:cNvPr id="30" name="Hexagon 29">
-              <a:extLst>
-                <a:ext uri="{FF2B5EF4-FFF2-40B4-BE49-F238E27FC236}">
-                  <a16:creationId xmlns:a16="http://schemas.microsoft.com/office/drawing/2014/main" id="{AAB28018-A81A-676A-8308-7116B98237FA}"/>
+                  <a16:creationId xmlns:a16="http://schemas.microsoft.com/office/drawing/2014/main" id="{D8878446-1348-44C9-C0E8-630ABC7A2B03}"/>
                 </a:ext>
               </a:extLst>
             </p:cNvPr>
@@ -4300,13 +9369,15 @@
           </p:nvSpPr>
           <p:spPr>
             <a:xfrm>
-              <a:off x="2372789" y="2110700"/>
-              <a:ext cx="3094337" cy="2591241"/>
+              <a:off x="5481320" y="1549400"/>
+              <a:ext cx="914400" cy="914400"/>
             </a:xfrm>
-            <a:prstGeom prst="hexagon">
+            <a:prstGeom prst="heart">
               <a:avLst/>
             </a:prstGeom>
-            <a:noFill/>
+            <a:solidFill>
+              <a:srgbClr val="FFFF00"/>
+            </a:solidFill>
           </p:spPr>
           <p:style>
             <a:lnRef idx="2">
@@ -4325,25 +9396,20 @@
             </a:fontRef>
           </p:style>
           <p:txBody>
-            <a:bodyPr rot="0" spcFirstLastPara="0" vertOverflow="overflow" horzOverflow="overflow" vert="horz" wrap="square" lIns="91440" tIns="45720" rIns="91440" bIns="45720" numCol="1" spcCol="0" rtlCol="0" fromWordArt="0" anchor="b" anchorCtr="0" forceAA="0" compatLnSpc="1">
-              <a:prstTxWarp prst="textNoShape">
-                <a:avLst/>
-              </a:prstTxWarp>
-              <a:noAutofit/>
-            </a:bodyPr>
+            <a:bodyPr rtlCol="0" anchor="ctr"/>
             <a:lstStyle/>
             <a:p>
               <a:pPr algn="ctr"/>
-              <a:endParaRPr lang="en-US" dirty="0"/>
+              <a:endParaRPr lang="en-US"/>
             </a:p>
           </p:txBody>
         </p:sp>
         <p:sp>
           <p:nvSpPr>
-            <p:cNvPr id="31" name="TextBox 30">
+            <p:cNvPr id="3" name="TextBox 2">
               <a:extLst>
                 <a:ext uri="{FF2B5EF4-FFF2-40B4-BE49-F238E27FC236}">
-                  <a16:creationId xmlns:a16="http://schemas.microsoft.com/office/drawing/2014/main" id="{9C7D0641-291E-034F-8E59-B046836E47E0}"/>
+                  <a16:creationId xmlns:a16="http://schemas.microsoft.com/office/drawing/2014/main" id="{2DF525E4-7924-3292-3833-8BC7E75927B2}"/>
                 </a:ext>
               </a:extLst>
             </p:cNvPr>
@@ -4352,8 +9418,8 @@
           </p:nvSpPr>
           <p:spPr>
             <a:xfrm>
-              <a:off x="2512295" y="3683490"/>
-              <a:ext cx="2743199" cy="1015663"/>
+              <a:off x="2184400" y="1569720"/>
+              <a:ext cx="2387600" cy="1877139"/>
             </a:xfrm>
             <a:prstGeom prst="rect">
               <a:avLst/>
@@ -4369,142 +9435,1474 @@
             </a:bodyPr>
             <a:lstStyle/>
             <a:p>
-              <a:pPr algn="ctr"/>
+              <a:pPr algn="ctr" rtl="0"/>
               <a:r>
-                <a:rPr lang="ja-JP" altLang="en-US" sz="1200" b="1">
-                  <a:highlight>
-                    <a:srgbClr val="FFFFFF"/>
-                  </a:highlight>
-                  <a:latin typeface="Comic Sans MS"/>
-                  <a:ea typeface="ＭＳ Ｐゴシック"/>
-                </a:rPr>
-                <a:t>海老</a:t>
-              </a:r>
-              <a:endParaRPr lang="ja-JP" altLang="en-US" sz="1200">
-                <a:highlight>
-                  <a:srgbClr val="FFFFFF"/>
-                </a:highlight>
-                <a:latin typeface="Comic Sans MS"/>
-                <a:ea typeface="ＭＳ Ｐゴシック"/>
-              </a:endParaRPr>
-            </a:p>
-            <a:p>
-              <a:pPr algn="ctr"/>
-              <a:r>
-                <a:rPr lang="ja-JP" altLang="en-US" sz="1200" b="1">
-                  <a:highlight>
-                    <a:srgbClr val="FFFFFF"/>
-                  </a:highlight>
-                  <a:latin typeface="Comic Sans MS"/>
-                  <a:ea typeface="ＭＳ Ｐゴシック"/>
-                </a:rPr>
-                <a:t>え</a:t>
-              </a:r>
-              <a:r>
-                <a:rPr lang="ja-JP" sz="1200" b="1">
-                  <a:highlight>
-                    <a:srgbClr val="FFFFFF"/>
-                  </a:highlight>
-                  <a:latin typeface="Comic Sans MS"/>
-                  <a:ea typeface="ＭＳ Ｐゴシック"/>
-                </a:rPr>
-                <a:t>び</a:t>
-              </a:r>
-              <a:endParaRPr lang="ja-JP" sz="1200">
-                <a:highlight>
-                  <a:srgbClr val="FFFFFF"/>
-                </a:highlight>
-                <a:latin typeface="Comic Sans MS"/>
-                <a:ea typeface="ＭＳ Ｐゴシック"/>
-              </a:endParaRPr>
-            </a:p>
-            <a:p>
-              <a:pPr algn="ctr"/>
-              <a:r>
-                <a:rPr lang="ja-JP" altLang="en-US" sz="1200" b="1">
+                <a:rPr lang="en-US" sz="2400" b="1" i="0" u="none" strike="noStrike" baseline="0">
                   <a:solidFill>
-                    <a:srgbClr val="272320"/>
+                    <a:srgbClr val="000000"/>
                   </a:solidFill>
                   <a:highlight>
                     <a:srgbClr val="FFFFFF"/>
                   </a:highlight>
                   <a:latin typeface="Comic Sans MS"/>
-                  <a:ea typeface="ＭＳ Ｐゴシック"/>
+                  <a:ea typeface="Segoe UI"/>
+                  <a:cs typeface="Segoe UI"/>
                 </a:rPr>
-                <a:t>エ</a:t>
+                <a:t>Thank you</a:t>
               </a:r>
               <a:r>
-                <a:rPr lang="ja-JP" sz="1200" b="1">
+                <a:rPr lang="en-US" sz="2400" b="0" i="0">
                   <a:solidFill>
-                    <a:srgbClr val="272320"/>
+                    <a:srgbClr val="000000"/>
+                  </a:solidFill>
+                  <a:latin typeface="Comic Sans MS"/>
+                  <a:ea typeface="Segoe UI"/>
+                  <a:cs typeface="Segoe UI"/>
+                </a:rPr>
+                <a:t>​</a:t>
+              </a:r>
+            </a:p>
+            <a:p>
+              <a:pPr algn="ctr"/>
+              <a:r>
+                <a:rPr lang="en-US" sz="2400" b="1" i="0" u="none" strike="noStrike" baseline="0">
+                  <a:solidFill>
+                    <a:srgbClr val="000000"/>
                   </a:solidFill>
                   <a:highlight>
                     <a:srgbClr val="FFFFFF"/>
                   </a:highlight>
                   <a:latin typeface="Comic Sans MS"/>
-                  <a:ea typeface="ＭＳ Ｐゴシック"/>
+                  <a:ea typeface="Segoe UI"/>
+                  <a:cs typeface="Segoe UI"/>
                 </a:rPr>
-                <a:t>ビ</a:t>
+                <a:t>for </a:t>
               </a:r>
-              <a:endParaRPr lang="ja-JP" sz="1200">
-                <a:solidFill>
-                  <a:srgbClr val="272320"/>
-                </a:solidFill>
-                <a:highlight>
-                  <a:srgbClr val="FFFFFF"/>
-                </a:highlight>
-                <a:latin typeface="Comic Sans MS"/>
-              </a:endParaRPr>
-            </a:p>
-            <a:p>
-              <a:pPr algn="ctr"/>
               <a:r>
-                <a:rPr lang="en-US" sz="1200" b="1">
+                <a:rPr lang="en-US" sz="2400" b="1">
                   <a:solidFill>
-                    <a:srgbClr val="272320"/>
+                    <a:srgbClr val="000000"/>
                   </a:solidFill>
                   <a:highlight>
                     <a:srgbClr val="FFFFFF"/>
                   </a:highlight>
                   <a:latin typeface="Comic Sans MS"/>
+                  <a:ea typeface="Segoe UI"/>
+                  <a:cs typeface="Segoe UI"/>
                 </a:rPr>
-                <a:t>E-Bee</a:t>
+                <a:t>supporting</a:t>
               </a:r>
-              <a:endParaRPr lang="ja-JP" altLang="en-US" sz="1200">
-                <a:solidFill>
-                  <a:srgbClr val="272320"/>
-                </a:solidFill>
-                <a:highlight>
-                  <a:srgbClr val="FFFFFF"/>
-                </a:highlight>
-                <a:latin typeface="Comic Sans MS"/>
-              </a:endParaRPr>
             </a:p>
             <a:p>
               <a:pPr algn="ctr"/>
               <a:r>
-                <a:rPr lang="en-US" sz="1200" b="1">
+                <a:rPr lang="en-US" sz="2400" b="1">
                   <a:solidFill>
-                    <a:srgbClr val="272320"/>
+                    <a:srgbClr val="000000"/>
                   </a:solidFill>
                   <a:highlight>
                     <a:srgbClr val="FFFFFF"/>
                   </a:highlight>
                   <a:latin typeface="Comic Sans MS"/>
+                  <a:ea typeface="Segoe UI"/>
+                  <a:cs typeface="Segoe UI"/>
                 </a:rPr>
-                <a:t>Shrimp</a:t>
+                <a:t>my</a:t>
               </a:r>
-              <a:endParaRPr lang="en-US" altLang="ja-JP"/>
+              <a:r>
+                <a:rPr lang="en-US" sz="2400" b="1" i="0" u="none" strike="noStrike" baseline="0">
+                  <a:solidFill>
+                    <a:srgbClr val="000000"/>
+                  </a:solidFill>
+                  <a:highlight>
+                    <a:srgbClr val="FFFFFF"/>
+                  </a:highlight>
+                  <a:latin typeface="Comic Sans MS"/>
+                  <a:ea typeface="Segoe UI"/>
+                  <a:cs typeface="Segoe UI"/>
+                </a:rPr>
+                <a:t> business!</a:t>
+              </a:r>
+              <a:r>
+                <a:rPr lang="en-US" sz="2400" b="0" i="0">
+                  <a:solidFill>
+                    <a:srgbClr val="000000"/>
+                  </a:solidFill>
+                  <a:latin typeface="Comic Sans MS"/>
+                  <a:ea typeface="Segoe UI"/>
+                  <a:cs typeface="Segoe UI"/>
+                </a:rPr>
+                <a:t>​</a:t>
+              </a:r>
+              <a:endParaRPr lang="en-US"/>
+            </a:p>
+            <a:p>
+              <a:pPr algn="ctr" rtl="0"/>
+              <a:r>
+                <a:rPr lang="en-US" sz="2400" b="0" i="0">
+                  <a:solidFill>
+                    <a:srgbClr val="000000"/>
+                  </a:solidFill>
+                  <a:latin typeface="Comic Sans MS"/>
+                  <a:ea typeface="Segoe UI"/>
+                  <a:cs typeface="Segoe UI"/>
+                </a:rPr>
+                <a:t>​</a:t>
+              </a:r>
+            </a:p>
+            <a:p>
+              <a:pPr algn="ctr"/>
+              <a:endParaRPr lang="en-US"/>
+            </a:p>
+          </p:txBody>
+        </p:sp>
+        <p:sp>
+          <p:nvSpPr>
+            <p:cNvPr id="5" name="TextBox 4">
+              <a:extLst>
+                <a:ext uri="{FF2B5EF4-FFF2-40B4-BE49-F238E27FC236}">
+                  <a16:creationId xmlns:a16="http://schemas.microsoft.com/office/drawing/2014/main" id="{1D44C4E4-139D-800D-C6B6-FB9C29EC6E43}"/>
+                </a:ext>
+              </a:extLst>
+            </p:cNvPr>
+            <p:cNvSpPr txBox="1"/>
+            <p:nvPr/>
+          </p:nvSpPr>
+          <p:spPr>
+            <a:xfrm>
+              <a:off x="7264400" y="1579880"/>
+              <a:ext cx="2428240" cy="1846659"/>
+            </a:xfrm>
+            <a:prstGeom prst="rect">
+              <a:avLst/>
+            </a:prstGeom>
+            <a:noFill/>
+          </p:spPr>
+          <p:txBody>
+            <a:bodyPr rot="0" spcFirstLastPara="0" vertOverflow="overflow" horzOverflow="overflow" vert="horz" wrap="square" lIns="91440" tIns="45720" rIns="91440" bIns="45720" numCol="1" spcCol="0" rtlCol="0" fromWordArt="0" anchor="t" anchorCtr="0" forceAA="0" compatLnSpc="1">
+              <a:prstTxWarp prst="textNoShape">
+                <a:avLst/>
+              </a:prstTxWarp>
+              <a:spAutoFit/>
+            </a:bodyPr>
+            <a:lstStyle/>
+            <a:p>
+              <a:pPr algn="ctr" rtl="0"/>
+              <a:r>
+                <a:rPr lang="en-US" sz="2400" b="1" i="0" u="none" strike="noStrike" baseline="0">
+                  <a:solidFill>
+                    <a:srgbClr val="000000"/>
+                  </a:solidFill>
+                  <a:highlight>
+                    <a:srgbClr val="FFFFFF"/>
+                  </a:highlight>
+                  <a:latin typeface="Comic Sans MS"/>
+                  <a:ea typeface="Segoe UI"/>
+                  <a:cs typeface="Segoe UI"/>
+                </a:rPr>
+                <a:t>Thank you</a:t>
+              </a:r>
+              <a:r>
+                <a:rPr lang="en-US" sz="2400" b="0" i="0">
+                  <a:solidFill>
+                    <a:srgbClr val="000000"/>
+                  </a:solidFill>
+                  <a:latin typeface="Comic Sans MS"/>
+                  <a:ea typeface="Segoe UI"/>
+                  <a:cs typeface="Segoe UI"/>
+                </a:rPr>
+                <a:t>​</a:t>
+              </a:r>
+            </a:p>
+            <a:p>
+              <a:pPr algn="ctr"/>
+              <a:r>
+                <a:rPr lang="en-US" sz="2400" b="1" i="0" u="none" strike="noStrike" baseline="0">
+                  <a:solidFill>
+                    <a:srgbClr val="000000"/>
+                  </a:solidFill>
+                  <a:highlight>
+                    <a:srgbClr val="FFFFFF"/>
+                  </a:highlight>
+                  <a:latin typeface="Comic Sans MS"/>
+                  <a:ea typeface="Segoe UI"/>
+                  <a:cs typeface="Segoe UI"/>
+                </a:rPr>
+                <a:t>for </a:t>
+              </a:r>
+              <a:r>
+                <a:rPr lang="en-US" sz="2400" b="1">
+                  <a:solidFill>
+                    <a:srgbClr val="000000"/>
+                  </a:solidFill>
+                  <a:highlight>
+                    <a:srgbClr val="FFFFFF"/>
+                  </a:highlight>
+                  <a:latin typeface="Comic Sans MS"/>
+                  <a:ea typeface="Segoe UI"/>
+                  <a:cs typeface="Segoe UI"/>
+                </a:rPr>
+                <a:t>supporting</a:t>
+              </a:r>
+            </a:p>
+            <a:p>
+              <a:pPr algn="ctr"/>
+              <a:r>
+                <a:rPr lang="en-US" sz="2400" b="1">
+                  <a:solidFill>
+                    <a:srgbClr val="000000"/>
+                  </a:solidFill>
+                  <a:highlight>
+                    <a:srgbClr val="FFFFFF"/>
+                  </a:highlight>
+                  <a:latin typeface="Comic Sans MS"/>
+                  <a:ea typeface="Segoe UI"/>
+                  <a:cs typeface="Segoe UI"/>
+                </a:rPr>
+                <a:t>my</a:t>
+              </a:r>
+              <a:r>
+                <a:rPr lang="en-US" sz="2400" b="1" i="0" u="none" strike="noStrike" baseline="0">
+                  <a:solidFill>
+                    <a:srgbClr val="000000"/>
+                  </a:solidFill>
+                  <a:highlight>
+                    <a:srgbClr val="FFFFFF"/>
+                  </a:highlight>
+                  <a:latin typeface="Comic Sans MS"/>
+                  <a:ea typeface="Segoe UI"/>
+                  <a:cs typeface="Segoe UI"/>
+                </a:rPr>
+                <a:t> business!</a:t>
+              </a:r>
+              <a:r>
+                <a:rPr lang="en-US" sz="2400" b="0" i="0">
+                  <a:solidFill>
+                    <a:srgbClr val="000000"/>
+                  </a:solidFill>
+                  <a:latin typeface="Comic Sans MS"/>
+                  <a:ea typeface="Segoe UI"/>
+                  <a:cs typeface="Segoe UI"/>
+                </a:rPr>
+                <a:t>​</a:t>
+              </a:r>
+              <a:endParaRPr lang="en-US"/>
+            </a:p>
+            <a:p>
+              <a:pPr algn="ctr" rtl="0"/>
+              <a:r>
+                <a:rPr lang="en-US" sz="2400" b="0" i="0">
+                  <a:solidFill>
+                    <a:srgbClr val="000000"/>
+                  </a:solidFill>
+                  <a:latin typeface="Comic Sans MS"/>
+                  <a:ea typeface="Segoe UI"/>
+                  <a:cs typeface="Segoe UI"/>
+                </a:rPr>
+                <a:t>​</a:t>
+              </a:r>
+            </a:p>
+            <a:p>
+              <a:pPr algn="ctr"/>
+              <a:endParaRPr lang="en-US"/>
+            </a:p>
+          </p:txBody>
+        </p:sp>
+        <p:sp>
+          <p:nvSpPr>
+            <p:cNvPr id="7" name="TextBox 6">
+              <a:extLst>
+                <a:ext uri="{FF2B5EF4-FFF2-40B4-BE49-F238E27FC236}">
+                  <a16:creationId xmlns:a16="http://schemas.microsoft.com/office/drawing/2014/main" id="{6FFCE798-A5E5-1350-6487-32B95E7437B7}"/>
+                </a:ext>
+              </a:extLst>
+            </p:cNvPr>
+            <p:cNvSpPr txBox="1"/>
+            <p:nvPr/>
+          </p:nvSpPr>
+          <p:spPr>
+            <a:xfrm>
+              <a:off x="4724400" y="3053080"/>
+              <a:ext cx="2428240" cy="1846659"/>
+            </a:xfrm>
+            <a:prstGeom prst="rect">
+              <a:avLst/>
+            </a:prstGeom>
+            <a:noFill/>
+          </p:spPr>
+          <p:txBody>
+            <a:bodyPr rot="0" spcFirstLastPara="0" vertOverflow="overflow" horzOverflow="overflow" vert="horz" wrap="square" lIns="91440" tIns="45720" rIns="91440" bIns="45720" numCol="1" spcCol="0" rtlCol="0" fromWordArt="0" anchor="t" anchorCtr="0" forceAA="0" compatLnSpc="1">
+              <a:prstTxWarp prst="textNoShape">
+                <a:avLst/>
+              </a:prstTxWarp>
+              <a:spAutoFit/>
+            </a:bodyPr>
+            <a:lstStyle/>
+            <a:p>
+              <a:pPr algn="ctr" rtl="0"/>
+              <a:r>
+                <a:rPr lang="en-US" sz="2400" b="1" i="0" u="none" strike="noStrike" baseline="0">
+                  <a:solidFill>
+                    <a:srgbClr val="000000"/>
+                  </a:solidFill>
+                  <a:highlight>
+                    <a:srgbClr val="FFFFFF"/>
+                  </a:highlight>
+                  <a:latin typeface="Comic Sans MS"/>
+                  <a:ea typeface="Segoe UI"/>
+                  <a:cs typeface="Segoe UI"/>
+                </a:rPr>
+                <a:t>Thank you</a:t>
+              </a:r>
+              <a:r>
+                <a:rPr lang="en-US" sz="2400" b="0" i="0">
+                  <a:solidFill>
+                    <a:srgbClr val="000000"/>
+                  </a:solidFill>
+                  <a:latin typeface="Comic Sans MS"/>
+                  <a:ea typeface="Segoe UI"/>
+                  <a:cs typeface="Segoe UI"/>
+                </a:rPr>
+                <a:t>​</a:t>
+              </a:r>
+            </a:p>
+            <a:p>
+              <a:pPr algn="ctr"/>
+              <a:r>
+                <a:rPr lang="en-US" sz="2400" b="1" i="0" u="none" strike="noStrike" baseline="0">
+                  <a:solidFill>
+                    <a:srgbClr val="000000"/>
+                  </a:solidFill>
+                  <a:highlight>
+                    <a:srgbClr val="FFFFFF"/>
+                  </a:highlight>
+                  <a:latin typeface="Comic Sans MS"/>
+                  <a:ea typeface="Segoe UI"/>
+                  <a:cs typeface="Segoe UI"/>
+                </a:rPr>
+                <a:t>for </a:t>
+              </a:r>
+              <a:r>
+                <a:rPr lang="en-US" sz="2400" b="1">
+                  <a:solidFill>
+                    <a:srgbClr val="000000"/>
+                  </a:solidFill>
+                  <a:highlight>
+                    <a:srgbClr val="FFFFFF"/>
+                  </a:highlight>
+                  <a:latin typeface="Comic Sans MS"/>
+                  <a:ea typeface="Segoe UI"/>
+                  <a:cs typeface="Segoe UI"/>
+                </a:rPr>
+                <a:t>supporting</a:t>
+              </a:r>
+            </a:p>
+            <a:p>
+              <a:pPr algn="ctr"/>
+              <a:r>
+                <a:rPr lang="en-US" sz="2400" b="1">
+                  <a:solidFill>
+                    <a:srgbClr val="000000"/>
+                  </a:solidFill>
+                  <a:highlight>
+                    <a:srgbClr val="FFFFFF"/>
+                  </a:highlight>
+                  <a:latin typeface="Comic Sans MS"/>
+                  <a:ea typeface="Segoe UI"/>
+                  <a:cs typeface="Segoe UI"/>
+                </a:rPr>
+                <a:t>my</a:t>
+              </a:r>
+              <a:r>
+                <a:rPr lang="en-US" sz="2400" b="1" i="0" u="none" strike="noStrike" baseline="0">
+                  <a:solidFill>
+                    <a:srgbClr val="000000"/>
+                  </a:solidFill>
+                  <a:highlight>
+                    <a:srgbClr val="FFFFFF"/>
+                  </a:highlight>
+                  <a:latin typeface="Comic Sans MS"/>
+                  <a:ea typeface="Segoe UI"/>
+                  <a:cs typeface="Segoe UI"/>
+                </a:rPr>
+                <a:t> business!</a:t>
+              </a:r>
+              <a:r>
+                <a:rPr lang="en-US" sz="2400" b="0" i="0">
+                  <a:solidFill>
+                    <a:srgbClr val="000000"/>
+                  </a:solidFill>
+                  <a:latin typeface="Comic Sans MS"/>
+                  <a:ea typeface="Segoe UI"/>
+                  <a:cs typeface="Segoe UI"/>
+                </a:rPr>
+                <a:t>​</a:t>
+              </a:r>
+              <a:endParaRPr lang="en-US"/>
+            </a:p>
+            <a:p>
+              <a:pPr algn="ctr" rtl="0"/>
+              <a:r>
+                <a:rPr lang="en-US" sz="2400" b="0" i="0">
+                  <a:solidFill>
+                    <a:srgbClr val="000000"/>
+                  </a:solidFill>
+                  <a:latin typeface="Comic Sans MS"/>
+                  <a:ea typeface="Segoe UI"/>
+                  <a:cs typeface="Segoe UI"/>
+                </a:rPr>
+                <a:t>​</a:t>
+              </a:r>
+            </a:p>
+            <a:p>
+              <a:pPr algn="ctr"/>
+              <a:endParaRPr lang="en-US"/>
+            </a:p>
+          </p:txBody>
+        </p:sp>
+        <p:sp>
+          <p:nvSpPr>
+            <p:cNvPr id="8" name="TextBox 7">
+              <a:extLst>
+                <a:ext uri="{FF2B5EF4-FFF2-40B4-BE49-F238E27FC236}">
+                  <a16:creationId xmlns:a16="http://schemas.microsoft.com/office/drawing/2014/main" id="{39B678F8-5C56-3ED0-8CE2-643972C5A679}"/>
+                </a:ext>
+              </a:extLst>
+            </p:cNvPr>
+            <p:cNvSpPr txBox="1"/>
+            <p:nvPr/>
+          </p:nvSpPr>
+          <p:spPr>
+            <a:xfrm>
+              <a:off x="7264400" y="4465320"/>
+              <a:ext cx="2428240" cy="1846659"/>
+            </a:xfrm>
+            <a:prstGeom prst="rect">
+              <a:avLst/>
+            </a:prstGeom>
+            <a:noFill/>
+          </p:spPr>
+          <p:txBody>
+            <a:bodyPr rot="0" spcFirstLastPara="0" vertOverflow="overflow" horzOverflow="overflow" vert="horz" wrap="square" lIns="91440" tIns="45720" rIns="91440" bIns="45720" numCol="1" spcCol="0" rtlCol="0" fromWordArt="0" anchor="t" anchorCtr="0" forceAA="0" compatLnSpc="1">
+              <a:prstTxWarp prst="textNoShape">
+                <a:avLst/>
+              </a:prstTxWarp>
+              <a:spAutoFit/>
+            </a:bodyPr>
+            <a:lstStyle/>
+            <a:p>
+              <a:pPr algn="ctr" rtl="0"/>
+              <a:r>
+                <a:rPr lang="en-US" sz="2400" b="1" i="0" u="none" strike="noStrike" baseline="0">
+                  <a:solidFill>
+                    <a:srgbClr val="000000"/>
+                  </a:solidFill>
+                  <a:highlight>
+                    <a:srgbClr val="FFFFFF"/>
+                  </a:highlight>
+                  <a:latin typeface="Comic Sans MS"/>
+                  <a:ea typeface="Segoe UI"/>
+                  <a:cs typeface="Segoe UI"/>
+                </a:rPr>
+                <a:t>Thank you</a:t>
+              </a:r>
+              <a:r>
+                <a:rPr lang="en-US" sz="2400" b="0" i="0">
+                  <a:solidFill>
+                    <a:srgbClr val="000000"/>
+                  </a:solidFill>
+                  <a:latin typeface="Comic Sans MS"/>
+                  <a:ea typeface="Segoe UI"/>
+                  <a:cs typeface="Segoe UI"/>
+                </a:rPr>
+                <a:t>​</a:t>
+              </a:r>
+            </a:p>
+            <a:p>
+              <a:pPr algn="ctr"/>
+              <a:r>
+                <a:rPr lang="en-US" sz="2400" b="1" i="0" u="none" strike="noStrike" baseline="0">
+                  <a:solidFill>
+                    <a:srgbClr val="000000"/>
+                  </a:solidFill>
+                  <a:highlight>
+                    <a:srgbClr val="FFFFFF"/>
+                  </a:highlight>
+                  <a:latin typeface="Comic Sans MS"/>
+                  <a:ea typeface="Segoe UI"/>
+                  <a:cs typeface="Segoe UI"/>
+                </a:rPr>
+                <a:t>for </a:t>
+              </a:r>
+              <a:r>
+                <a:rPr lang="en-US" sz="2400" b="1">
+                  <a:solidFill>
+                    <a:srgbClr val="000000"/>
+                  </a:solidFill>
+                  <a:highlight>
+                    <a:srgbClr val="FFFFFF"/>
+                  </a:highlight>
+                  <a:latin typeface="Comic Sans MS"/>
+                  <a:ea typeface="Segoe UI"/>
+                  <a:cs typeface="Segoe UI"/>
+                </a:rPr>
+                <a:t>supporting</a:t>
+              </a:r>
+            </a:p>
+            <a:p>
+              <a:pPr algn="ctr"/>
+              <a:r>
+                <a:rPr lang="en-US" sz="2400" b="1">
+                  <a:solidFill>
+                    <a:srgbClr val="000000"/>
+                  </a:solidFill>
+                  <a:highlight>
+                    <a:srgbClr val="FFFFFF"/>
+                  </a:highlight>
+                  <a:latin typeface="Comic Sans MS"/>
+                  <a:ea typeface="Segoe UI"/>
+                  <a:cs typeface="Segoe UI"/>
+                </a:rPr>
+                <a:t>my</a:t>
+              </a:r>
+              <a:r>
+                <a:rPr lang="en-US" sz="2400" b="1" i="0" u="none" strike="noStrike" baseline="0">
+                  <a:solidFill>
+                    <a:srgbClr val="000000"/>
+                  </a:solidFill>
+                  <a:highlight>
+                    <a:srgbClr val="FFFFFF"/>
+                  </a:highlight>
+                  <a:latin typeface="Comic Sans MS"/>
+                  <a:ea typeface="Segoe UI"/>
+                  <a:cs typeface="Segoe UI"/>
+                </a:rPr>
+                <a:t> business!</a:t>
+              </a:r>
+              <a:r>
+                <a:rPr lang="en-US" sz="2400" b="0" i="0">
+                  <a:solidFill>
+                    <a:srgbClr val="000000"/>
+                  </a:solidFill>
+                  <a:latin typeface="Comic Sans MS"/>
+                  <a:ea typeface="Segoe UI"/>
+                  <a:cs typeface="Segoe UI"/>
+                </a:rPr>
+                <a:t>​</a:t>
+              </a:r>
+              <a:endParaRPr lang="en-US"/>
+            </a:p>
+            <a:p>
+              <a:pPr algn="ctr" rtl="0"/>
+              <a:r>
+                <a:rPr lang="en-US" sz="2400" b="0" i="0">
+                  <a:solidFill>
+                    <a:srgbClr val="000000"/>
+                  </a:solidFill>
+                  <a:latin typeface="Comic Sans MS"/>
+                  <a:ea typeface="Segoe UI"/>
+                  <a:cs typeface="Segoe UI"/>
+                </a:rPr>
+                <a:t>​</a:t>
+              </a:r>
+            </a:p>
+            <a:p>
+              <a:pPr algn="ctr"/>
+              <a:endParaRPr lang="en-US"/>
+            </a:p>
+          </p:txBody>
+        </p:sp>
+        <p:sp>
+          <p:nvSpPr>
+            <p:cNvPr id="21" name="TextBox 20">
+              <a:extLst>
+                <a:ext uri="{FF2B5EF4-FFF2-40B4-BE49-F238E27FC236}">
+                  <a16:creationId xmlns:a16="http://schemas.microsoft.com/office/drawing/2014/main" id="{8429163A-A025-A018-CB48-434A1876C999}"/>
+                </a:ext>
+              </a:extLst>
+            </p:cNvPr>
+            <p:cNvSpPr txBox="1"/>
+            <p:nvPr/>
+          </p:nvSpPr>
+          <p:spPr>
+            <a:xfrm>
+              <a:off x="2143760" y="4465320"/>
+              <a:ext cx="2428240" cy="1846659"/>
+            </a:xfrm>
+            <a:prstGeom prst="rect">
+              <a:avLst/>
+            </a:prstGeom>
+            <a:noFill/>
+          </p:spPr>
+          <p:txBody>
+            <a:bodyPr rot="0" spcFirstLastPara="0" vertOverflow="overflow" horzOverflow="overflow" vert="horz" wrap="square" lIns="91440" tIns="45720" rIns="91440" bIns="45720" numCol="1" spcCol="0" rtlCol="0" fromWordArt="0" anchor="t" anchorCtr="0" forceAA="0" compatLnSpc="1">
+              <a:prstTxWarp prst="textNoShape">
+                <a:avLst/>
+              </a:prstTxWarp>
+              <a:spAutoFit/>
+            </a:bodyPr>
+            <a:lstStyle/>
+            <a:p>
+              <a:pPr algn="ctr" rtl="0"/>
+              <a:r>
+                <a:rPr lang="en-US" sz="2400" b="1" i="0" u="none" strike="noStrike" baseline="0">
+                  <a:solidFill>
+                    <a:srgbClr val="000000"/>
+                  </a:solidFill>
+                  <a:highlight>
+                    <a:srgbClr val="FFFFFF"/>
+                  </a:highlight>
+                  <a:latin typeface="Comic Sans MS"/>
+                  <a:ea typeface="Segoe UI"/>
+                  <a:cs typeface="Segoe UI"/>
+                </a:rPr>
+                <a:t>Thank you</a:t>
+              </a:r>
+              <a:r>
+                <a:rPr lang="en-US" sz="2400" b="0" i="0">
+                  <a:solidFill>
+                    <a:srgbClr val="000000"/>
+                  </a:solidFill>
+                  <a:latin typeface="Comic Sans MS"/>
+                  <a:ea typeface="Segoe UI"/>
+                  <a:cs typeface="Segoe UI"/>
+                </a:rPr>
+                <a:t>​</a:t>
+              </a:r>
+            </a:p>
+            <a:p>
+              <a:pPr algn="ctr"/>
+              <a:r>
+                <a:rPr lang="en-US" sz="2400" b="1" i="0" u="none" strike="noStrike" baseline="0">
+                  <a:solidFill>
+                    <a:srgbClr val="000000"/>
+                  </a:solidFill>
+                  <a:highlight>
+                    <a:srgbClr val="FFFFFF"/>
+                  </a:highlight>
+                  <a:latin typeface="Comic Sans MS"/>
+                  <a:ea typeface="Segoe UI"/>
+                  <a:cs typeface="Segoe UI"/>
+                </a:rPr>
+                <a:t>for </a:t>
+              </a:r>
+              <a:r>
+                <a:rPr lang="en-US" sz="2400" b="1">
+                  <a:solidFill>
+                    <a:srgbClr val="000000"/>
+                  </a:solidFill>
+                  <a:highlight>
+                    <a:srgbClr val="FFFFFF"/>
+                  </a:highlight>
+                  <a:latin typeface="Comic Sans MS"/>
+                  <a:ea typeface="Segoe UI"/>
+                  <a:cs typeface="Segoe UI"/>
+                </a:rPr>
+                <a:t>supporting</a:t>
+              </a:r>
+            </a:p>
+            <a:p>
+              <a:pPr algn="ctr"/>
+              <a:r>
+                <a:rPr lang="en-US" sz="2400" b="1">
+                  <a:solidFill>
+                    <a:srgbClr val="000000"/>
+                  </a:solidFill>
+                  <a:highlight>
+                    <a:srgbClr val="FFFFFF"/>
+                  </a:highlight>
+                  <a:latin typeface="Comic Sans MS"/>
+                  <a:ea typeface="Segoe UI"/>
+                  <a:cs typeface="Segoe UI"/>
+                </a:rPr>
+                <a:t>my</a:t>
+              </a:r>
+              <a:r>
+                <a:rPr lang="en-US" sz="2400" b="1" i="0" u="none" strike="noStrike" baseline="0">
+                  <a:solidFill>
+                    <a:srgbClr val="000000"/>
+                  </a:solidFill>
+                  <a:highlight>
+                    <a:srgbClr val="FFFFFF"/>
+                  </a:highlight>
+                  <a:latin typeface="Comic Sans MS"/>
+                  <a:ea typeface="Segoe UI"/>
+                  <a:cs typeface="Segoe UI"/>
+                </a:rPr>
+                <a:t> business!</a:t>
+              </a:r>
+              <a:r>
+                <a:rPr lang="en-US" sz="2400" b="0" i="0">
+                  <a:solidFill>
+                    <a:srgbClr val="000000"/>
+                  </a:solidFill>
+                  <a:latin typeface="Comic Sans MS"/>
+                  <a:ea typeface="Segoe UI"/>
+                  <a:cs typeface="Segoe UI"/>
+                </a:rPr>
+                <a:t>​</a:t>
+              </a:r>
+              <a:endParaRPr lang="en-US"/>
+            </a:p>
+            <a:p>
+              <a:pPr algn="ctr" rtl="0"/>
+              <a:r>
+                <a:rPr lang="en-US" sz="2400" b="0" i="0">
+                  <a:solidFill>
+                    <a:srgbClr val="000000"/>
+                  </a:solidFill>
+                  <a:latin typeface="Comic Sans MS"/>
+                  <a:ea typeface="Segoe UI"/>
+                  <a:cs typeface="Segoe UI"/>
+                </a:rPr>
+                <a:t>​</a:t>
+              </a:r>
+            </a:p>
+            <a:p>
+              <a:pPr algn="ctr"/>
+              <a:endParaRPr lang="en-US"/>
+            </a:p>
+          </p:txBody>
+        </p:sp>
+        <p:sp>
+          <p:nvSpPr>
+            <p:cNvPr id="23" name="Heart 22">
+              <a:extLst>
+                <a:ext uri="{FF2B5EF4-FFF2-40B4-BE49-F238E27FC236}">
+                  <a16:creationId xmlns:a16="http://schemas.microsoft.com/office/drawing/2014/main" id="{846FEA41-CB17-1B81-5561-FBE60012B509}"/>
+                </a:ext>
+              </a:extLst>
+            </p:cNvPr>
+            <p:cNvSpPr/>
+            <p:nvPr/>
+          </p:nvSpPr>
+          <p:spPr>
+            <a:xfrm>
+              <a:off x="2890520" y="2961640"/>
+              <a:ext cx="914400" cy="914400"/>
+            </a:xfrm>
+            <a:prstGeom prst="heart">
+              <a:avLst/>
+            </a:prstGeom>
+            <a:solidFill>
+              <a:srgbClr val="FFFF00"/>
+            </a:solidFill>
+          </p:spPr>
+          <p:style>
+            <a:lnRef idx="2">
+              <a:schemeClr val="accent1">
+                <a:shade val="15000"/>
+              </a:schemeClr>
+            </a:lnRef>
+            <a:fillRef idx="1">
+              <a:schemeClr val="accent1"/>
+            </a:fillRef>
+            <a:effectRef idx="0">
+              <a:schemeClr val="accent1"/>
+            </a:effectRef>
+            <a:fontRef idx="minor">
+              <a:schemeClr val="lt1"/>
+            </a:fontRef>
+          </p:style>
+          <p:txBody>
+            <a:bodyPr rtlCol="0" anchor="ctr"/>
+            <a:lstStyle/>
+            <a:p>
+              <a:pPr algn="ctr"/>
+              <a:endParaRPr lang="en-US"/>
+            </a:p>
+          </p:txBody>
+        </p:sp>
+        <p:sp>
+          <p:nvSpPr>
+            <p:cNvPr id="29" name="Heart 28">
+              <a:extLst>
+                <a:ext uri="{FF2B5EF4-FFF2-40B4-BE49-F238E27FC236}">
+                  <a16:creationId xmlns:a16="http://schemas.microsoft.com/office/drawing/2014/main" id="{A801D334-2456-AA17-371B-01CBBD0CC624}"/>
+                </a:ext>
+              </a:extLst>
+            </p:cNvPr>
+            <p:cNvSpPr/>
+            <p:nvPr/>
+          </p:nvSpPr>
+          <p:spPr>
+            <a:xfrm>
+              <a:off x="8021320" y="2778760"/>
+              <a:ext cx="914400" cy="914400"/>
+            </a:xfrm>
+            <a:prstGeom prst="heart">
+              <a:avLst/>
+            </a:prstGeom>
+            <a:solidFill>
+              <a:srgbClr val="FFFF00"/>
+            </a:solidFill>
+          </p:spPr>
+          <p:style>
+            <a:lnRef idx="2">
+              <a:schemeClr val="accent1">
+                <a:shade val="15000"/>
+              </a:schemeClr>
+            </a:lnRef>
+            <a:fillRef idx="1">
+              <a:schemeClr val="accent1"/>
+            </a:fillRef>
+            <a:effectRef idx="0">
+              <a:schemeClr val="accent1"/>
+            </a:effectRef>
+            <a:fontRef idx="minor">
+              <a:schemeClr val="lt1"/>
+            </a:fontRef>
+          </p:style>
+          <p:txBody>
+            <a:bodyPr rtlCol="0" anchor="ctr"/>
+            <a:lstStyle/>
+            <a:p>
+              <a:pPr algn="ctr"/>
+              <a:endParaRPr lang="en-US"/>
+            </a:p>
+          </p:txBody>
+        </p:sp>
+        <p:sp>
+          <p:nvSpPr>
+            <p:cNvPr id="38" name="Heart 37">
+              <a:extLst>
+                <a:ext uri="{FF2B5EF4-FFF2-40B4-BE49-F238E27FC236}">
+                  <a16:creationId xmlns:a16="http://schemas.microsoft.com/office/drawing/2014/main" id="{478A56C0-B4CD-BD61-1490-12318C2107E9}"/>
+                </a:ext>
+              </a:extLst>
+            </p:cNvPr>
+            <p:cNvSpPr/>
+            <p:nvPr/>
+          </p:nvSpPr>
+          <p:spPr>
+            <a:xfrm>
+              <a:off x="5461000" y="4292600"/>
+              <a:ext cx="914400" cy="914400"/>
+            </a:xfrm>
+            <a:prstGeom prst="heart">
+              <a:avLst/>
+            </a:prstGeom>
+            <a:solidFill>
+              <a:srgbClr val="FFFF00"/>
+            </a:solidFill>
+          </p:spPr>
+          <p:style>
+            <a:lnRef idx="2">
+              <a:schemeClr val="accent1">
+                <a:shade val="15000"/>
+              </a:schemeClr>
+            </a:lnRef>
+            <a:fillRef idx="1">
+              <a:schemeClr val="accent1"/>
+            </a:fillRef>
+            <a:effectRef idx="0">
+              <a:schemeClr val="accent1"/>
+            </a:effectRef>
+            <a:fontRef idx="minor">
+              <a:schemeClr val="lt1"/>
+            </a:fontRef>
+          </p:style>
+          <p:txBody>
+            <a:bodyPr rtlCol="0" anchor="ctr"/>
+            <a:lstStyle/>
+            <a:p>
+              <a:pPr algn="ctr"/>
+              <a:endParaRPr lang="en-US"/>
+            </a:p>
+          </p:txBody>
+        </p:sp>
+        <p:sp>
+          <p:nvSpPr>
+            <p:cNvPr id="39" name="Heart 38">
+              <a:extLst>
+                <a:ext uri="{FF2B5EF4-FFF2-40B4-BE49-F238E27FC236}">
+                  <a16:creationId xmlns:a16="http://schemas.microsoft.com/office/drawing/2014/main" id="{176EABB4-A9A1-8807-D446-7803E7C7282E}"/>
+                </a:ext>
+              </a:extLst>
+            </p:cNvPr>
+            <p:cNvSpPr/>
+            <p:nvPr/>
+          </p:nvSpPr>
+          <p:spPr>
+            <a:xfrm>
+              <a:off x="8021320" y="5674360"/>
+              <a:ext cx="914400" cy="914400"/>
+            </a:xfrm>
+            <a:prstGeom prst="heart">
+              <a:avLst/>
+            </a:prstGeom>
+            <a:solidFill>
+              <a:srgbClr val="FFFF00"/>
+            </a:solidFill>
+          </p:spPr>
+          <p:style>
+            <a:lnRef idx="2">
+              <a:schemeClr val="accent1">
+                <a:shade val="15000"/>
+              </a:schemeClr>
+            </a:lnRef>
+            <a:fillRef idx="1">
+              <a:schemeClr val="accent1"/>
+            </a:fillRef>
+            <a:effectRef idx="0">
+              <a:schemeClr val="accent1"/>
+            </a:effectRef>
+            <a:fontRef idx="minor">
+              <a:schemeClr val="lt1"/>
+            </a:fontRef>
+          </p:style>
+          <p:txBody>
+            <a:bodyPr rtlCol="0" anchor="ctr"/>
+            <a:lstStyle/>
+            <a:p>
+              <a:pPr algn="ctr"/>
+              <a:endParaRPr lang="en-US"/>
+            </a:p>
+          </p:txBody>
+        </p:sp>
+        <p:sp>
+          <p:nvSpPr>
+            <p:cNvPr id="40" name="Heart 39">
+              <a:extLst>
+                <a:ext uri="{FF2B5EF4-FFF2-40B4-BE49-F238E27FC236}">
+                  <a16:creationId xmlns:a16="http://schemas.microsoft.com/office/drawing/2014/main" id="{51C2A670-39EB-7399-17D3-CDE2EA1E44E0}"/>
+                </a:ext>
+              </a:extLst>
+            </p:cNvPr>
+            <p:cNvSpPr/>
+            <p:nvPr/>
+          </p:nvSpPr>
+          <p:spPr>
+            <a:xfrm>
+              <a:off x="2890520" y="5674360"/>
+              <a:ext cx="914400" cy="914400"/>
+            </a:xfrm>
+            <a:prstGeom prst="heart">
+              <a:avLst/>
+            </a:prstGeom>
+            <a:solidFill>
+              <a:srgbClr val="FFFF00"/>
+            </a:solidFill>
+          </p:spPr>
+          <p:style>
+            <a:lnRef idx="2">
+              <a:schemeClr val="accent1">
+                <a:shade val="15000"/>
+              </a:schemeClr>
+            </a:lnRef>
+            <a:fillRef idx="1">
+              <a:schemeClr val="accent1"/>
+            </a:fillRef>
+            <a:effectRef idx="0">
+              <a:schemeClr val="accent1"/>
+            </a:effectRef>
+            <a:fontRef idx="minor">
+              <a:schemeClr val="lt1"/>
+            </a:fontRef>
+          </p:style>
+          <p:txBody>
+            <a:bodyPr rtlCol="0" anchor="ctr"/>
+            <a:lstStyle/>
+            <a:p>
+              <a:pPr algn="ctr"/>
+              <a:endParaRPr lang="en-US"/>
             </a:p>
           </p:txBody>
         </p:sp>
       </p:grpSp>
+    </p:spTree>
+    <p:extLst>
+      <p:ext uri="{BB962C8B-B14F-4D97-AF65-F5344CB8AC3E}">
+        <p14:creationId xmlns:p14="http://schemas.microsoft.com/office/powerpoint/2010/main" val="4271728726"/>
+      </p:ext>
+    </p:extLst>
+  </p:cSld>
+  <p:clrMapOvr>
+    <a:masterClrMapping/>
+  </p:clrMapOvr>
+</p:sld>
+</file>
+
+<file path=ppt/slides/slide6.xml><?xml version="1.0" encoding="utf-8"?>
+<p:sld xmlns:a="http://schemas.openxmlformats.org/drawingml/2006/main" xmlns:r="http://schemas.openxmlformats.org/officeDocument/2006/relationships" xmlns:p="http://schemas.openxmlformats.org/presentationml/2006/main">
+  <p:cSld>
+    <p:spTree>
+      <p:nvGrpSpPr>
+        <p:cNvPr id="1" name=""/>
+        <p:cNvGrpSpPr/>
+        <p:nvPr/>
+      </p:nvGrpSpPr>
+      <p:grpSpPr>
+        <a:xfrm>
+          <a:off x="0" y="0"/>
+          <a:ext cx="0" cy="0"/>
+          <a:chOff x="0" y="0"/>
+          <a:chExt cx="0" cy="0"/>
+        </a:xfrm>
+      </p:grpSpPr>
       <p:pic>
         <p:nvPicPr>
-          <p:cNvPr id="33" name="Picture 32" descr="A drawing of a bee&#10;&#10;AI-generated content may be incorrect.">
+          <p:cNvPr id="8" name="Picture 7">
             <a:extLst>
               <a:ext uri="{FF2B5EF4-FFF2-40B4-BE49-F238E27FC236}">
-                <a16:creationId xmlns:a16="http://schemas.microsoft.com/office/drawing/2014/main" id="{61CA380C-59D9-F211-52AF-5306FDFE6BB7}"/>
+                <a16:creationId xmlns:a16="http://schemas.microsoft.com/office/drawing/2014/main" id="{214C6BEB-8D30-6DC7-A51C-2CA1A478FAB7}"/>
+              </a:ext>
+            </a:extLst>
+          </p:cNvPr>
+          <p:cNvPicPr>
+            <a:picLocks noChangeAspect="1"/>
+          </p:cNvPicPr>
+          <p:nvPr/>
+        </p:nvPicPr>
+        <p:blipFill>
+          <a:blip r:embed="rId2"/>
+          <a:stretch>
+            <a:fillRect/>
+          </a:stretch>
+        </p:blipFill>
+        <p:spPr>
+          <a:xfrm flipH="1">
+            <a:off x="2018347" y="3143567"/>
+            <a:ext cx="352425" cy="428625"/>
+          </a:xfrm>
+          <a:prstGeom prst="rect">
+            <a:avLst/>
+          </a:prstGeom>
+        </p:spPr>
+      </p:pic>
+      <p:sp>
+        <p:nvSpPr>
+          <p:cNvPr id="2" name="Title 1">
+            <a:extLst>
+              <a:ext uri="{FF2B5EF4-FFF2-40B4-BE49-F238E27FC236}">
+                <a16:creationId xmlns:a16="http://schemas.microsoft.com/office/drawing/2014/main" id="{56DA6878-83E9-0C16-1AA3-2E22946D3881}"/>
+              </a:ext>
+            </a:extLst>
+          </p:cNvPr>
+          <p:cNvSpPr>
+            <a:spLocks noGrp="1"/>
+          </p:cNvSpPr>
+          <p:nvPr>
+            <p:ph type="title"/>
+          </p:nvPr>
+        </p:nvSpPr>
+        <p:spPr/>
+        <p:txBody>
+          <a:bodyPr/>
+          <a:lstStyle/>
+          <a:p>
+            <a:endParaRPr lang="en-US"/>
+          </a:p>
+        </p:txBody>
+      </p:sp>
+      <p:sp>
+        <p:nvSpPr>
+          <p:cNvPr id="4" name="TextBox 3">
+            <a:extLst>
+              <a:ext uri="{FF2B5EF4-FFF2-40B4-BE49-F238E27FC236}">
+                <a16:creationId xmlns:a16="http://schemas.microsoft.com/office/drawing/2014/main" id="{3E3CD8B7-670D-E240-ECFA-D17E6D12E4CA}"/>
+              </a:ext>
+            </a:extLst>
+          </p:cNvPr>
+          <p:cNvSpPr txBox="1"/>
+          <p:nvPr/>
+        </p:nvSpPr>
+        <p:spPr>
+          <a:xfrm flipH="1">
+            <a:off x="960328" y="2103329"/>
+            <a:ext cx="511480" cy="1477328"/>
+          </a:xfrm>
+          <a:prstGeom prst="rect">
+            <a:avLst/>
+          </a:prstGeom>
+          <a:noFill/>
+        </p:spPr>
+        <p:txBody>
+          <a:bodyPr rot="0" spcFirstLastPara="0" vertOverflow="overflow" horzOverflow="overflow" vert="horz" wrap="square" lIns="91440" tIns="45720" rIns="91440" bIns="45720" numCol="1" spcCol="0" rtlCol="0" fromWordArt="0" anchor="t" anchorCtr="0" forceAA="0" compatLnSpc="1">
+            <a:prstTxWarp prst="textNoShape">
+              <a:avLst/>
+            </a:prstTxWarp>
+            <a:spAutoFit/>
+          </a:bodyPr>
+          <a:lstStyle/>
+          <a:p>
+            <a:pPr algn="ctr" rtl="0"/>
+            <a:r>
+              <a:rPr lang="en-US" sz="2400" b="1" i="0">
+                <a:solidFill>
+                  <a:srgbClr val="000000"/>
+                </a:solidFill>
+              </a:rPr>
+              <a:t>G</a:t>
+            </a:r>
+          </a:p>
+          <a:p>
+            <a:pPr algn="ctr"/>
+            <a:endParaRPr lang="en-US" sz="2400" b="1" dirty="0"/>
+          </a:p>
+          <a:p>
+            <a:pPr algn="ctr"/>
+            <a:endParaRPr lang="en-US" sz="2400" b="1" dirty="0"/>
+          </a:p>
+          <a:p>
+            <a:pPr algn="ctr"/>
+            <a:endParaRPr lang="en-US"/>
+          </a:p>
+        </p:txBody>
+      </p:sp>
+      <p:sp>
+        <p:nvSpPr>
+          <p:cNvPr id="6" name="TextBox 5">
+            <a:extLst>
+              <a:ext uri="{FF2B5EF4-FFF2-40B4-BE49-F238E27FC236}">
+                <a16:creationId xmlns:a16="http://schemas.microsoft.com/office/drawing/2014/main" id="{A8438A20-CEF6-B99A-69CC-4D1BADE6CAC9}"/>
+              </a:ext>
+            </a:extLst>
+          </p:cNvPr>
+          <p:cNvSpPr txBox="1"/>
+          <p:nvPr/>
+        </p:nvSpPr>
+        <p:spPr>
+          <a:xfrm>
+            <a:off x="2270760" y="3032760"/>
+            <a:ext cx="538480" cy="646331"/>
+          </a:xfrm>
+          <a:prstGeom prst="rect">
+            <a:avLst/>
+          </a:prstGeom>
+          <a:noFill/>
+        </p:spPr>
+        <p:txBody>
+          <a:bodyPr rot="0" spcFirstLastPara="0" vertOverflow="overflow" horzOverflow="overflow" vert="horz" wrap="square" lIns="91440" tIns="45720" rIns="91440" bIns="45720" numCol="1" spcCol="0" rtlCol="0" fromWordArt="0" anchor="t" anchorCtr="0" forceAA="0" compatLnSpc="1">
+            <a:prstTxWarp prst="textNoShape">
+              <a:avLst/>
+            </a:prstTxWarp>
+            <a:spAutoFit/>
+          </a:bodyPr>
+          <a:lstStyle/>
+          <a:p>
+            <a:pPr algn="l"/>
+            <a:r>
+              <a:rPr lang="en-US" sz="3600">
+                <a:latin typeface="Comic Sans MS"/>
+              </a:rPr>
+              <a:t>G</a:t>
+            </a:r>
+          </a:p>
+        </p:txBody>
+      </p:sp>
+      <p:sp>
+        <p:nvSpPr>
+          <p:cNvPr id="7" name="TextBox 6">
+            <a:extLst>
+              <a:ext uri="{FF2B5EF4-FFF2-40B4-BE49-F238E27FC236}">
+                <a16:creationId xmlns:a16="http://schemas.microsoft.com/office/drawing/2014/main" id="{5784DB67-EECB-735C-60F9-F839ABC1B907}"/>
+              </a:ext>
+            </a:extLst>
+          </p:cNvPr>
+          <p:cNvSpPr txBox="1">
+            <a:spLocks noChangeAspect="1"/>
+          </p:cNvSpPr>
+          <p:nvPr/>
+        </p:nvSpPr>
+        <p:spPr>
+          <a:xfrm flipH="1">
+            <a:off x="2656875" y="2103156"/>
+            <a:ext cx="1070280" cy="1046440"/>
+          </a:xfrm>
+          <a:prstGeom prst="rect">
+            <a:avLst/>
+          </a:prstGeom>
+          <a:noFill/>
+          <a:effectLst>
+            <a:reflection stA="40000" endPos="54000" dist="50800" dir="5400000" sy="-100000" algn="bl" rotWithShape="0"/>
+          </a:effectLst>
+        </p:spPr>
+        <p:txBody>
+          <a:bodyPr rot="0" spcFirstLastPara="0" vertOverflow="overflow" horzOverflow="overflow" vert="horz" wrap="square" lIns="91440" tIns="45720" rIns="91440" bIns="45720" numCol="1" spcCol="0" rtlCol="0" fromWordArt="0" anchor="t" anchorCtr="0" forceAA="0" compatLnSpc="1">
+            <a:prstTxWarp prst="textNoShape">
+              <a:avLst/>
+            </a:prstTxWarp>
+            <a:spAutoFit/>
+          </a:bodyPr>
+          <a:lstStyle/>
+          <a:p>
+            <a:pPr algn="ctr" rtl="0"/>
+            <a:r>
+              <a:rPr lang="en-US" sz="4400" b="1">
+                <a:solidFill>
+                  <a:srgbClr val="000000"/>
+                </a:solidFill>
+              </a:rPr>
+              <a:t>Gai</a:t>
+            </a:r>
+            <a:endParaRPr lang="en-US" sz="4400" b="1" i="0">
+              <a:solidFill>
+                <a:srgbClr val="000000"/>
+              </a:solidFill>
+            </a:endParaRPr>
+          </a:p>
+          <a:p>
+            <a:pPr algn="ctr"/>
+            <a:endParaRPr lang="en-US"/>
+          </a:p>
+        </p:txBody>
+      </p:sp>
+      <p:grpSp>
+        <p:nvGrpSpPr>
+          <p:cNvPr id="13" name="Group 12">
+            <a:extLst>
+              <a:ext uri="{FF2B5EF4-FFF2-40B4-BE49-F238E27FC236}">
+                <a16:creationId xmlns:a16="http://schemas.microsoft.com/office/drawing/2014/main" id="{FA38C0AC-A8F1-B9A0-90C7-29D13A23F99C}"/>
+              </a:ext>
+            </a:extLst>
+          </p:cNvPr>
+          <p:cNvGrpSpPr/>
+          <p:nvPr/>
+        </p:nvGrpSpPr>
+        <p:grpSpPr>
+          <a:xfrm>
+            <a:off x="4107815" y="2103155"/>
+            <a:ext cx="1580219" cy="1046440"/>
+            <a:chOff x="6109335" y="3037875"/>
+            <a:chExt cx="1580219" cy="1046440"/>
+          </a:xfrm>
+        </p:grpSpPr>
+        <p:pic>
+          <p:nvPicPr>
+            <p:cNvPr id="9" name="Picture 8">
+              <a:extLst>
+                <a:ext uri="{FF2B5EF4-FFF2-40B4-BE49-F238E27FC236}">
+                  <a16:creationId xmlns:a16="http://schemas.microsoft.com/office/drawing/2014/main" id="{E58BF437-9A51-46A7-2880-9D1A44FA65D7}"/>
+                </a:ext>
+              </a:extLst>
+            </p:cNvPr>
+            <p:cNvPicPr>
+              <a:picLocks noChangeAspect="1"/>
+            </p:cNvPicPr>
+            <p:nvPr/>
+          </p:nvPicPr>
+          <p:blipFill>
+            <a:blip r:embed="rId3"/>
+            <a:stretch>
+              <a:fillRect/>
+            </a:stretch>
+          </p:blipFill>
+          <p:spPr>
+            <a:xfrm flipH="1">
+              <a:off x="6109335" y="3225482"/>
+              <a:ext cx="400050" cy="447675"/>
+            </a:xfrm>
+            <a:prstGeom prst="rect">
+              <a:avLst/>
+            </a:prstGeom>
+          </p:spPr>
+        </p:pic>
+        <p:sp>
+          <p:nvSpPr>
+            <p:cNvPr id="11" name="TextBox 10">
+              <a:extLst>
+                <a:ext uri="{FF2B5EF4-FFF2-40B4-BE49-F238E27FC236}">
+                  <a16:creationId xmlns:a16="http://schemas.microsoft.com/office/drawing/2014/main" id="{926B520F-F7DF-E76D-EAC3-91185AC1A2FE}"/>
+                </a:ext>
+              </a:extLst>
+            </p:cNvPr>
+            <p:cNvSpPr txBox="1">
+              <a:spLocks noChangeAspect="1"/>
+            </p:cNvSpPr>
+            <p:nvPr/>
+          </p:nvSpPr>
+          <p:spPr>
+            <a:xfrm flipH="1">
+              <a:off x="6283994" y="3037875"/>
+              <a:ext cx="1405560" cy="1046440"/>
+            </a:xfrm>
+            <a:prstGeom prst="rect">
+              <a:avLst/>
+            </a:prstGeom>
+            <a:noFill/>
+            <a:effectLst>
+              <a:reflection stA="40000" endPos="54000" dist="50800" dir="5400000" sy="-100000" algn="bl" rotWithShape="0"/>
+            </a:effectLst>
+          </p:spPr>
+          <p:txBody>
+            <a:bodyPr rot="0" spcFirstLastPara="0" vertOverflow="overflow" horzOverflow="overflow" vert="horz" wrap="square" lIns="91440" tIns="45720" rIns="91440" bIns="45720" numCol="1" spcCol="0" rtlCol="0" fromWordArt="0" anchor="t" anchorCtr="0" forceAA="0" compatLnSpc="1">
+              <a:prstTxWarp prst="textNoShape">
+                <a:avLst/>
+              </a:prstTxWarp>
+              <a:spAutoFit/>
+            </a:bodyPr>
+            <a:lstStyle/>
+            <a:p>
+              <a:pPr algn="ctr" rtl="0"/>
+              <a:r>
+                <a:rPr lang="en-US" sz="4400" b="1" dirty="0">
+                  <a:solidFill>
+                    <a:srgbClr val="000000"/>
+                  </a:solidFill>
+                </a:rPr>
+                <a:t>ene</a:t>
+              </a:r>
+              <a:endParaRPr lang="en-US" sz="4400" b="1" i="0" dirty="0">
+                <a:solidFill>
+                  <a:srgbClr val="000000"/>
+                </a:solidFill>
+              </a:endParaRPr>
+            </a:p>
+            <a:p>
+              <a:pPr algn="ctr"/>
+              <a:endParaRPr lang="en-US"/>
+            </a:p>
+          </p:txBody>
+        </p:sp>
+      </p:grpSp>
+      <p:grpSp>
+        <p:nvGrpSpPr>
+          <p:cNvPr id="14" name="Group 13">
+            <a:extLst>
+              <a:ext uri="{FF2B5EF4-FFF2-40B4-BE49-F238E27FC236}">
+                <a16:creationId xmlns:a16="http://schemas.microsoft.com/office/drawing/2014/main" id="{59AE89E3-1407-392F-01B7-DDDD0FC409ED}"/>
+              </a:ext>
+            </a:extLst>
+          </p:cNvPr>
+          <p:cNvGrpSpPr/>
+          <p:nvPr/>
+        </p:nvGrpSpPr>
+        <p:grpSpPr>
+          <a:xfrm>
+            <a:off x="3488054" y="3581081"/>
+            <a:ext cx="816611" cy="447675"/>
+            <a:chOff x="3904614" y="3225481"/>
+            <a:chExt cx="816611" cy="447675"/>
+          </a:xfrm>
+        </p:grpSpPr>
+        <p:pic>
+          <p:nvPicPr>
+            <p:cNvPr id="10" name="Picture 9">
+              <a:extLst>
+                <a:ext uri="{FF2B5EF4-FFF2-40B4-BE49-F238E27FC236}">
+                  <a16:creationId xmlns:a16="http://schemas.microsoft.com/office/drawing/2014/main" id="{45A77CD0-A1CE-0466-DA7A-063145B2F410}"/>
+                </a:ext>
+              </a:extLst>
+            </p:cNvPr>
+            <p:cNvPicPr>
+              <a:picLocks noChangeAspect="1"/>
+            </p:cNvPicPr>
+            <p:nvPr/>
+          </p:nvPicPr>
+          <p:blipFill>
+            <a:blip r:embed="rId4"/>
+            <a:stretch>
+              <a:fillRect/>
+            </a:stretch>
+          </p:blipFill>
+          <p:spPr>
+            <a:xfrm rot="1200000">
+              <a:off x="3904614" y="3225481"/>
+              <a:ext cx="400050" cy="447675"/>
+            </a:xfrm>
+            <a:prstGeom prst="rect">
+              <a:avLst/>
+            </a:prstGeom>
+          </p:spPr>
+        </p:pic>
+        <p:pic>
+          <p:nvPicPr>
+            <p:cNvPr id="12" name="Picture 11">
+              <a:extLst>
+                <a:ext uri="{FF2B5EF4-FFF2-40B4-BE49-F238E27FC236}">
+                  <a16:creationId xmlns:a16="http://schemas.microsoft.com/office/drawing/2014/main" id="{01151063-B692-8B32-CDF2-844551ED68E3}"/>
+                </a:ext>
+              </a:extLst>
+            </p:cNvPr>
+            <p:cNvPicPr>
+              <a:picLocks noChangeAspect="1"/>
+            </p:cNvPicPr>
+            <p:nvPr/>
+          </p:nvPicPr>
+          <p:blipFill>
+            <a:blip r:embed="rId3"/>
+            <a:stretch>
+              <a:fillRect/>
+            </a:stretch>
+          </p:blipFill>
+          <p:spPr>
+            <a:xfrm rot="-1200000" flipH="1">
+              <a:off x="4321175" y="3225481"/>
+              <a:ext cx="400050" cy="447675"/>
+            </a:xfrm>
+            <a:prstGeom prst="rect">
+              <a:avLst/>
+            </a:prstGeom>
+          </p:spPr>
+        </p:pic>
+      </p:grpSp>
+      <p:pic>
+        <p:nvPicPr>
+          <p:cNvPr id="16" name="Picture 15">
+            <a:extLst>
+              <a:ext uri="{FF2B5EF4-FFF2-40B4-BE49-F238E27FC236}">
+                <a16:creationId xmlns:a16="http://schemas.microsoft.com/office/drawing/2014/main" id="{B5D83002-6AD1-2A1B-FBCE-F0A6753794E1}"/>
+              </a:ext>
+            </a:extLst>
+          </p:cNvPr>
+          <p:cNvPicPr>
+            <a:picLocks noChangeAspect="1"/>
+          </p:cNvPicPr>
+          <p:nvPr/>
+        </p:nvPicPr>
+        <p:blipFill>
+          <a:blip r:embed="rId4"/>
+          <a:stretch>
+            <a:fillRect/>
+          </a:stretch>
+        </p:blipFill>
+        <p:spPr>
+          <a:xfrm>
+            <a:off x="2847973" y="4840920"/>
+            <a:ext cx="400050" cy="447675"/>
+          </a:xfrm>
+          <a:prstGeom prst="rect">
+            <a:avLst/>
+          </a:prstGeom>
+        </p:spPr>
+      </p:pic>
+      <p:pic>
+        <p:nvPicPr>
+          <p:cNvPr id="17" name="Picture 16">
+            <a:extLst>
+              <a:ext uri="{FF2B5EF4-FFF2-40B4-BE49-F238E27FC236}">
+                <a16:creationId xmlns:a16="http://schemas.microsoft.com/office/drawing/2014/main" id="{01B9C686-717C-B84D-446E-5970E6730BE7}"/>
+              </a:ext>
+            </a:extLst>
+          </p:cNvPr>
+          <p:cNvPicPr>
+            <a:picLocks noChangeAspect="1"/>
+          </p:cNvPicPr>
+          <p:nvPr/>
+        </p:nvPicPr>
+        <p:blipFill>
+          <a:blip r:embed="rId3"/>
+          <a:stretch>
+            <a:fillRect/>
+          </a:stretch>
+        </p:blipFill>
+        <p:spPr>
+          <a:xfrm flipH="1">
+            <a:off x="4189094" y="4840920"/>
+            <a:ext cx="400050" cy="447675"/>
+          </a:xfrm>
+          <a:prstGeom prst="rect">
+            <a:avLst/>
+          </a:prstGeom>
+        </p:spPr>
+      </p:pic>
+      <p:pic>
+        <p:nvPicPr>
+          <p:cNvPr id="3" name="Picture 2" descr="A yellow and black bee&#10;&#10;AI-generated content may be incorrect.">
+            <a:extLst>
+              <a:ext uri="{FF2B5EF4-FFF2-40B4-BE49-F238E27FC236}">
+                <a16:creationId xmlns:a16="http://schemas.microsoft.com/office/drawing/2014/main" id="{DF96F092-5E30-3257-7B52-1772595EDE59}"/>
               </a:ext>
             </a:extLst>
           </p:cNvPr>
@@ -4521,8 +10919,154 @@
         </p:blipFill>
         <p:spPr>
           <a:xfrm>
-            <a:off x="7798533" y="669820"/>
-            <a:ext cx="1642044" cy="1520143"/>
+            <a:off x="6100762" y="1825995"/>
+            <a:ext cx="3038475" cy="3686175"/>
+          </a:xfrm>
+          <a:prstGeom prst="rect">
+            <a:avLst/>
+          </a:prstGeom>
+        </p:spPr>
+      </p:pic>
+      <p:pic>
+        <p:nvPicPr>
+          <p:cNvPr id="5" name="Picture 4" descr="A yellow and black bee&#10;&#10;AI-generated content may be incorrect.">
+            <a:extLst>
+              <a:ext uri="{FF2B5EF4-FFF2-40B4-BE49-F238E27FC236}">
+                <a16:creationId xmlns:a16="http://schemas.microsoft.com/office/drawing/2014/main" id="{0C295006-4AAD-5B86-AD9C-BF8739A7DA02}"/>
+              </a:ext>
+            </a:extLst>
+          </p:cNvPr>
+          <p:cNvPicPr>
+            <a:picLocks noChangeAspect="1"/>
+          </p:cNvPicPr>
+          <p:nvPr/>
+        </p:nvPicPr>
+        <p:blipFill>
+          <a:blip r:embed="rId5"/>
+          <a:stretch>
+            <a:fillRect/>
+          </a:stretch>
+        </p:blipFill>
+        <p:spPr>
+          <a:xfrm>
+            <a:off x="9722870" y="3976296"/>
+            <a:ext cx="1316147" cy="1535874"/>
+          </a:xfrm>
+          <a:prstGeom prst="rect">
+            <a:avLst/>
+          </a:prstGeom>
+        </p:spPr>
+      </p:pic>
+      <p:sp>
+        <p:nvSpPr>
+          <p:cNvPr id="15" name="TextBox 14">
+            <a:extLst>
+              <a:ext uri="{FF2B5EF4-FFF2-40B4-BE49-F238E27FC236}">
+                <a16:creationId xmlns:a16="http://schemas.microsoft.com/office/drawing/2014/main" id="{887CE9B8-DB97-1E9B-DEA8-B573C13D72AB}"/>
+              </a:ext>
+            </a:extLst>
+          </p:cNvPr>
+          <p:cNvSpPr txBox="1"/>
+          <p:nvPr/>
+        </p:nvSpPr>
+        <p:spPr>
+          <a:xfrm>
+            <a:off x="640080" y="5531285"/>
+            <a:ext cx="5489532" cy="1200329"/>
+          </a:xfrm>
+          <a:prstGeom prst="rect">
+            <a:avLst/>
+          </a:prstGeom>
+          <a:noFill/>
+        </p:spPr>
+        <p:txBody>
+          <a:bodyPr rot="0" spcFirstLastPara="0" vertOverflow="overflow" horzOverflow="overflow" vert="horz" wrap="square" lIns="91440" tIns="45720" rIns="91440" bIns="45720" numCol="1" spcCol="0" rtlCol="0" fromWordArt="0" anchor="t" anchorCtr="0" forceAA="0" compatLnSpc="1">
+            <a:prstTxWarp prst="textNoShape">
+              <a:avLst/>
+            </a:prstTxWarp>
+            <a:spAutoFit/>
+          </a:bodyPr>
+          <a:lstStyle/>
+          <a:p>
+            <a:r>
+              <a:rPr lang="en-US" b="1">
+                <a:ea typeface="+mn-lt"/>
+                <a:cs typeface="+mn-lt"/>
+              </a:rPr>
+              <a:t>⚠ WARNING – MAGNET HAZARD</a:t>
+            </a:r>
+            <a:endParaRPr lang="en-US"/>
+          </a:p>
+          <a:p>
+            <a:r>
+              <a:rPr lang="en-US" dirty="0">
+                <a:ea typeface="+mn-lt"/>
+                <a:cs typeface="+mn-lt"/>
+              </a:rPr>
+              <a:t>Contains small magnets. Keep away from children and pets.</a:t>
+            </a:r>
+            <a:endParaRPr lang="en-US" dirty="0"/>
+          </a:p>
+          <a:p>
+            <a:pPr algn="l"/>
+            <a:endParaRPr lang="en-US" dirty="0"/>
+          </a:p>
+        </p:txBody>
+      </p:sp>
+      <p:pic>
+        <p:nvPicPr>
+          <p:cNvPr id="18" name="Picture 17" descr="A close up of a sign&#10;&#10;AI-generated content may be incorrect.">
+            <a:extLst>
+              <a:ext uri="{FF2B5EF4-FFF2-40B4-BE49-F238E27FC236}">
+                <a16:creationId xmlns:a16="http://schemas.microsoft.com/office/drawing/2014/main" id="{F4A3C87E-E326-C247-B827-CA81BE0EE293}"/>
+              </a:ext>
+            </a:extLst>
+          </p:cNvPr>
+          <p:cNvPicPr>
+            <a:picLocks noChangeAspect="1"/>
+          </p:cNvPicPr>
+          <p:nvPr/>
+        </p:nvPicPr>
+        <p:blipFill>
+          <a:blip r:embed="rId6"/>
+          <a:stretch>
+            <a:fillRect/>
+          </a:stretch>
+        </p:blipFill>
+        <p:spPr>
+          <a:xfrm>
+            <a:off x="469595" y="4026465"/>
+            <a:ext cx="4133850" cy="704850"/>
+          </a:xfrm>
+          <a:prstGeom prst="rect">
+            <a:avLst/>
+          </a:prstGeom>
+        </p:spPr>
+      </p:pic>
+      <p:pic>
+        <p:nvPicPr>
+          <p:cNvPr id="20" name="Picture 19">
+            <a:extLst>
+              <a:ext uri="{FF2B5EF4-FFF2-40B4-BE49-F238E27FC236}">
+                <a16:creationId xmlns:a16="http://schemas.microsoft.com/office/drawing/2014/main" id="{69F14013-A6CE-5899-71CF-96930C1860CB}"/>
+              </a:ext>
+            </a:extLst>
+          </p:cNvPr>
+          <p:cNvPicPr>
+            <a:picLocks noChangeAspect="1"/>
+          </p:cNvPicPr>
+          <p:nvPr/>
+        </p:nvPicPr>
+        <p:blipFill>
+          <a:blip r:embed="rId7"/>
+          <a:stretch>
+            <a:fillRect/>
+          </a:stretch>
+        </p:blipFill>
+        <p:spPr>
+          <a:xfrm>
+            <a:off x="669295" y="1824559"/>
+            <a:ext cx="3400425" cy="390525"/>
           </a:xfrm>
           <a:prstGeom prst="rect">
             <a:avLst/>
@@ -4532,7 +11076,7 @@
     </p:spTree>
     <p:extLst>
       <p:ext uri="{BB962C8B-B14F-4D97-AF65-F5344CB8AC3E}">
-        <p14:creationId xmlns:p14="http://schemas.microsoft.com/office/powerpoint/2010/main" val="32981385"/>
+        <p14:creationId xmlns:p14="http://schemas.microsoft.com/office/powerpoint/2010/main" val="3833315715"/>
       </p:ext>
     </p:extLst>
   </p:cSld>
